--- a/Curso Gas B/13 - UNE 60670 - Ventilacion y evacuacion de humos/13 - UNE 60670 - Ventilacion y evacuacion de humos - Vídeo 3.pptx
+++ b/Curso Gas B/13 - UNE 60670 - Ventilacion y evacuacion de humos/13 - UNE 60670 - Ventilacion y evacuacion de humos - Vídeo 3.pptx
@@ -24,6 +24,7 @@
     <p:sldId id="272" r:id="rId24"/>
     <p:sldId id="273" r:id="rId25"/>
     <p:sldId id="274" r:id="rId26"/>
+    <p:sldId id="275" r:id="rId27"/>
   </p:sldIdLst>
   <p:sldSz cx="12191695" cy="6858000" type="screen4x3"/>
   <p:notesSz cx="6858000" cy="9144000"/>
@@ -595,12 +596,12 @@
           <a:lstStyle/>
           <a:p>
             <a:r>
-              <a:t>N1: Si a un aparato de tiro natural le pongo un extractor, ¿es un simple accesorio?</a:t>
-            </a:r>
-          </a:p>
-          <a:p>
-            <a:r>
-              <a:t>N2: No, y este punto sorprende a mucha gente. Cuando a un aparato de tipo B o C de tiro natural le añades un dispositivo que empuja los humos y lo pasas a tiro forzado, la norma dice que eso equivale a cambiar el tipo de aparato. O sea, no es colgar un accesorio: tienes que cumplir todas las condiciones de instalación de su nueva configuración, la de tiro forzado. A cambio, como ahora los humos van empujados y no dependen de la altura, te perdonan la puntuación de la tabla y los veinte centímetros de tramo vertical antes del codo: esa función la hace el propio dispositivo. Se puede instalar después, si detectas que un conducto evacúa mal. Pero recuerda la idea de fondo: poner un extractor es, a ojos de la norma, instalar otro aparato.</a:t>
+              <a:t>N1: ¿Y a qué distancia tiene que quedar la boca del tubo de las cosas de alrededor?</a:t>
+            </a:r>
+          </a:p>
+          <a:p>
+            <a:r>
+              <a:t>N2: Aquí hay una regla mnemotécnica que te salva: al salir a fachada o patio, casi todas las distancias son cuarenta centímetros. Cuarenta a cualquier abertura permanente de ventilación, cuarenta a ventanas o puertas de otro local, cuarenta a paredes laterales externas, y cuarenta a cornisas y aleros. Solo cambian dos números: diez centímetros respecto al muro que el tubo atraviesa, y veinte centímetros a cualquier otro resalte de la fachada. Y una distancia grande: dos metros veinte respecto al suelo exterior, para que nadie meta la cara en los humos, salvo que salgan a tu propia zona privada. Todo esto se mide sin contar el deflector del extremo. Acercar la boca a una ventana es meterle los humos al vecino: mancha negra en la fachada y anomalía en la revisión.</a:t>
             </a:r>
           </a:p>
         </p:txBody>
@@ -670,12 +671,12 @@
           <a:lstStyle/>
           <a:p>
             <a:r>
-              <a:t>N1: ¿Y los conductos de tiro forzado tienen sus propias tablas de diámetros?</a:t>
-            </a:r>
-          </a:p>
-          <a:p>
-            <a:r>
-              <a:t>N2: No como los de tiro natural; aquí la regla es más simple de enunciar pero muy estricta: manda el fabricante. En los aparatos de tipo B y de tipo C de tiro forzado, los conductos, sus materiales, uniones, diámetro, configuración y longitud máxima, son los que indica el fabricante del aparato, porque él ha calculado con qué tubo funciona bien su ventilador. En el tipo C, tanto la entrada de aire como la salida de humos siguen sus dimensiones. Además, para todos: uniones estancas y rígidas, y un detalle importante, si el aparato no es de condensación, el conducto se monta con una ligera pendiente descendente hacia fuera, para que las gotas de condensado no vuelvan hacia dentro del aparato. Y sigue habiendo orificio de once milímetros para la toma de muestras.</a:t>
+              <a:t>N1: Si a un aparato de tiro natural le pongo un extractor, ¿es un simple accesorio?</a:t>
+            </a:r>
+          </a:p>
+          <a:p>
+            <a:r>
+              <a:t>N2: No, y este punto sorprende a mucha gente. Cuando a un aparato de tipo B o C de tiro natural le añades un dispositivo que empuja los humos y lo pasas a tiro forzado, la norma dice que eso equivale a cambiar el tipo de aparato. O sea, no es colgar un accesorio: tienes que cumplir todas las condiciones de instalación de su nueva configuración, la de tiro forzado. A cambio, como ahora los humos van empujados y no dependen de la altura, te perdonan la puntuación de la tabla y los veinte centímetros de tramo vertical antes del codo: esa función la hace el propio dispositivo. Se puede instalar después, si detectas que un conducto evacúa mal. Pero recuerda la idea de fondo: poner un extractor es, a ojos de la norma, instalar otro aparato.</a:t>
             </a:r>
           </a:p>
         </p:txBody>
@@ -745,12 +746,12 @@
           <a:lstStyle/>
           <a:p>
             <a:r>
-              <a:t>N1: La caldera de ventosa saca los humos por la pared... ¿cómo tiene que quedar?</a:t>
-            </a:r>
-          </a:p>
-          <a:p>
-            <a:r>
-              <a:t>N2: En los aparatos de tipo C de tiro forzado, las famosas calderas de ventosa, casi todo gira en torno a diez centímetros. El extremo del tubo se diseña para lanzar los humos de frente, en lo que se llama salida tipo cañón, y lo más lejos posible de la pared. El tubo puede asomar como máximo diez centímetros de la superficie de la fachada; si asoma más, la boca queda expuesta y devuelve humos hacia la pared. Y en balcones, terrazas o galerías techados aparece el número mágico: treinta centímetros de distancia del eje del tubo al techo. Por debajo de treinta, solo en obra existente y prolongando hasta el borde; por encima, el tubo no asoma más de diez centímetros. Y si luego cierran el balcón, hay que alargar los tubos para sacar los humos de verdad, o la caldera revoca en un cuarto cerrado.</a:t>
+              <a:t>N1: ¿Y los conductos de tiro forzado tienen sus propias tablas de diámetros?</a:t>
+            </a:r>
+          </a:p>
+          <a:p>
+            <a:r>
+              <a:t>N2: No como los de tiro natural; aquí la regla es más simple de enunciar pero muy estricta: manda el fabricante. En los aparatos de tipo B y de tipo C de tiro forzado, los conductos, sus materiales, uniones, diámetro, configuración y longitud máxima, son los que indica el fabricante del aparato, porque él ha calculado con qué tubo funciona bien su ventilador. En el tipo C, tanto la entrada de aire como la salida de humos siguen sus dimensiones. Además, para todos: uniones estancas y rígidas, y un detalle importante, si el aparato no es de condensación, el conducto se monta con una ligera pendiente descendente hacia fuera, para que las gotas de condensado no vuelvan hacia dentro del aparato. Y sigue habiendo orificio de once milímetros para la toma de muestras.</a:t>
             </a:r>
           </a:p>
         </p:txBody>
@@ -820,12 +821,12 @@
           <a:lstStyle/>
           <a:p>
             <a:r>
-              <a:t>N1: ¿Y la ventosa tiene que guardar distancia a las ventanas?</a:t>
-            </a:r>
-          </a:p>
-          <a:p>
-            <a:r>
-              <a:t>N2: Sí, y es de las cifras que más caen. La proyección del tubo de salida sobre el plano donde están los orificios de ventilación y la parte que se abre de las ventanas debe quedar a cuarenta centímetros o más de ellos. Hay una excepción cómoda: si la salida se hace por encima de esos huecos, no hace falta esa distancia, porque los humos suben y no vuelven a entrar. En edificación ya construida, cuando no puedas guardar los cuarenta centímetros, puedes usar deflectores desviadores laterales, esos accesorios que tuercen el chorro de humos, u otro método del fabricante que garantice que la salida se abre en abanico; pero ni así puedes bajar de veinte centímetros. Cuarenta es lo normal; veinte, el suelo absoluto con truco.</a:t>
+              <a:t>N1: La caldera de ventosa saca los humos por la pared... ¿cómo tiene que quedar?</a:t>
+            </a:r>
+          </a:p>
+          <a:p>
+            <a:r>
+              <a:t>N2: En los aparatos de tipo C de tiro forzado, las famosas calderas de ventosa, casi todo gira en torno a diez centímetros. El extremo del tubo se diseña para lanzar los humos de frente, en lo que se llama salida tipo cañón, y lo más lejos posible de la pared. El tubo puede asomar como máximo diez centímetros de la superficie de la fachada; si asoma más, la boca queda expuesta y devuelve humos hacia la pared. Y en balcones, terrazas o galerías techados aparece el número mágico: treinta centímetros de distancia del eje del tubo al techo. Por debajo de treinta, solo en obra existente y prolongando hasta el borde; por encima, el tubo no asoma más de diez centímetros. Y si luego cierran el balcón, hay que alargar los tubos para sacar los humos de verdad, o la caldera revoca en un cuarto cerrado.</a:t>
             </a:r>
           </a:p>
         </p:txBody>
@@ -895,12 +896,12 @@
           <a:lstStyle/>
           <a:p>
             <a:r>
-              <a:t>N1: Si el tubo da a un sitio por donde pasa la gente, ¿hay que subirlo?</a:t>
-            </a:r>
-          </a:p>
-          <a:p>
-            <a:r>
-              <a:t>N2: Sí. Cuando la salida de humos da directamente a una zona con tránsito o permanencia de personas, el eje del conducto tiene que estar a dos metros veinte o más del suelo por donde pasa o está la gente, medido en vertical. La razón es de cortesía y de salud: los humos salen por encima de la cabeza y nadie los respira de frente. Hay dos excepciones prácticas. Una: si los humos salen directamente a una zona privada de tu propiedad, donde no pasa gente ajena, no hace falta. Y dos: los radiadores murales de ventosa pequeños, de menos de cuatro coma dos kilovatios, se libran de esos dos veinte siempre que estén protegidos para que nadie toque el tubo caliente. Fuera de eso, dos veinte y a respetar la cabeza de la gente.</a:t>
+              <a:t>N1: ¿Y la ventosa tiene que guardar distancia a las ventanas?</a:t>
+            </a:r>
+          </a:p>
+          <a:p>
+            <a:r>
+              <a:t>N2: Sí, y es de las cifras que más caen. La proyección del tubo de salida sobre el plano donde están los orificios de ventilación y la parte que se abre de las ventanas debe quedar a cuarenta centímetros o más de ellos. Hay una excepción cómoda: si la salida se hace por encima de esos huecos, no hace falta esa distancia, porque los humos suben y no vuelven a entrar. En edificación ya construida, cuando no puedas guardar los cuarenta centímetros, puedes usar deflectores desviadores laterales, esos accesorios que tuercen el chorro de humos, u otro método del fabricante que garantice que la salida se abre en abanico; pero ni así puedes bajar de veinte centímetros. Cuarenta es lo normal; veinte, el suelo absoluto con truco.</a:t>
             </a:r>
           </a:p>
         </p:txBody>
@@ -970,12 +971,12 @@
           <a:lstStyle/>
           <a:p>
             <a:r>
-              <a:t>N1: Hay muchas distancias de fachada. ¿Me haces una chuleta?</a:t>
-            </a:r>
-          </a:p>
-          <a:p>
-            <a:r>
-              <a:t>N2: Claro, y con el porqué. A las paredes laterales, treinta centímetros en general; pero un metro si en esa pared hay ventanas por encima del tubo, cerca, a tres metros o menos y casi a su misma altura, para que los humos no entren por la ventana del vecino de al lado. A las paredes frontales, dos metros en general, y tres metros si hay ventanas en esa pared frontal en las mismas condiciones. Y entre dos salidas de humos al mismo nivel, sesenta centímetros, para que los humos de una no reentren por la otra. La buena noticia: todas esas distancias se reducen si usas deflectores desviadores de flujo a cuarenta y cinco grados; las laterales y frontales a la mitad, y las dos salidas de sesenta a treinta. El deflector es el truco que tuerce los humos y te deja acercarte.</a:t>
+              <a:t>N1: Si el tubo da a un sitio por donde pasa la gente, ¿hay que subirlo?</a:t>
+            </a:r>
+          </a:p>
+          <a:p>
+            <a:r>
+              <a:t>N2: Sí. Cuando la salida de humos da directamente a una zona con tránsito o permanencia de personas, el eje del conducto tiene que estar a dos metros veinte o más del suelo por donde pasa o está la gente, medido en vertical. La razón es de cortesía y de salud: los humos salen por encima de la cabeza y nadie los respira de frente. Hay dos excepciones prácticas. Una: si los humos salen directamente a una zona privada de tu propiedad, donde no pasa gente ajena, no hace falta. Y dos: los radiadores murales de ventosa pequeños, de menos de cuatro coma dos kilovatios, se libran de esos dos veinte siempre que estén protegidos para que nadie toque el tubo caliente. Fuera de eso, dos veinte y a respetar la cabeza de la gente.</a:t>
             </a:r>
           </a:p>
         </p:txBody>
@@ -1045,12 +1046,12 @@
           <a:lstStyle/>
           <a:p>
             <a:r>
-              <a:t>N1: ¿Qué cosas no se pueden juntar en la misma chimenea?</a:t>
-            </a:r>
-          </a:p>
-          <a:p>
-            <a:r>
-              <a:t>N2: Hay cuatro prohibiciones, todas de sentido común, y caen mucho. Una: no se mezclan aparatos de tiro natural y de tiro forzado en el mismo conducto vertical, porque el ventilador de uno revocaría los humos del otro hacia dentro. Dos: no se juntan aparatos de condensación y de no condensación, salvo que la chimenea sea especial, anticorrosión según la norma UNE ciento veintitrés mil uno, y se haga el cálculo de sección; es que el de condensación echa humos húmedos y ácidos que pudren un tubo normal. Tres: no se conecta a la chimenea del aparato ningún extractor ni campana de cocina, porque chuparían los humos. Y cuatro: no se mezcla el gas con humos de carbón o gasóleo; y si reaprovechas una chimenea vieja que llevó sólidos, antes la limpias y compruebas que tira. Cada una de estas mezclas es un caso real de revoco o de intoxicación.</a:t>
+              <a:t>N1: Hay muchas distancias de fachada. ¿Me haces una chuleta?</a:t>
+            </a:r>
+          </a:p>
+          <a:p>
+            <a:r>
+              <a:t>N2: Claro, y con el porqué. A las paredes laterales, treinta centímetros en general; pero un metro si en esa pared hay ventanas por encima del tubo, cerca, a tres metros o menos y casi a su misma altura, para que los humos no entren por la ventana del vecino de al lado. A las paredes frontales, dos metros en general, y tres metros si hay ventanas en esa pared frontal en las mismas condiciones. Y entre dos salidas de humos al mismo nivel, sesenta centímetros, para que los humos de una no reentren por la otra. La buena noticia: todas esas distancias se reducen si usas deflectores desviadores de flujo a cuarenta y cinco grados; las laterales y frontales a la mitad, y las dos salidas de sesenta a treinta. El deflector es el truco que tuerce los humos y te deja acercarte.</a:t>
             </a:r>
           </a:p>
         </p:txBody>
@@ -1120,12 +1121,12 @@
           <a:lstStyle/>
           <a:p>
             <a:r>
-              <a:t>N1: Cuando varios tubos individuales se unen a una chimenea común, ¿hay reglas?</a:t>
-            </a:r>
-          </a:p>
-          <a:p>
-            <a:r>
-              <a:t>N2: Sí, tres detalles que conviene fichar. Primero, al unir varios conductos individuales a la chimenea o shunt, se guarda una separación mínima de quince centímetros entre las generatrices más próximas, o sea entre los bordes de los tubos, para que los humos de uno no se metan en el de al lado; y los empalmes al conducto común se hacen en ángulo agudo, a favor del flujo, como te incorporas a una autopista, no de frente. Segundo, si el conducto atraviesa una pared o techo de madera u otro material combustible, el agujero de paso debe ser diez centímetros más ancho que el tubo, y ese hueco se rellena con material aislante e incombustible, para que la madera no coja calor. Y tercero, si hay regulación de tiro, nunca puede ser a mano: tiene que ser automática motorizada, por contrapeso, o fijada de fábrica en la puesta en marcha. A mano, alguien la tocaría y desajustaría la evacuación.</a:t>
+              <a:t>N1: ¿Qué cosas no se pueden juntar en la misma chimenea?</a:t>
+            </a:r>
+          </a:p>
+          <a:p>
+            <a:r>
+              <a:t>N2: Hay cuatro prohibiciones, todas de sentido común, y caen mucho. Una: no se mezclan aparatos de tiro natural y de tiro forzado en el mismo conducto vertical, porque el ventilador de uno revocaría los humos del otro hacia dentro. Dos: no se juntan aparatos de condensación y de no condensación, salvo que la chimenea sea especial, anticorrosión según la norma UNE ciento veintitrés mil uno, y se haga el cálculo de sección; es que el de condensación echa humos húmedos y ácidos que pudren un tubo normal. Tres: no se conecta a la chimenea del aparato ningún extractor ni campana de cocina, porque chuparían los humos. Y cuatro: no se mezcla el gas con humos de carbón o gasóleo; y si reaprovechas una chimenea vieja que llevó sólidos, antes la limpias y compruebas que tira. Cada una de estas mezclas es un caso real de revoco o de intoxicación.</a:t>
             </a:r>
           </a:p>
         </p:txBody>
@@ -1195,12 +1196,12 @@
           <a:lstStyle/>
           <a:p>
             <a:r>
-              <a:t>N1: Y la chimenea en sí, ¿de qué tiene que ser?</a:t>
-            </a:r>
-          </a:p>
-          <a:p>
-            <a:r>
-              <a:t>N2: Depende del material, y cada uno tiene su norma; te doy la chuleta. Si la chimenea es metálica, va por la UNE-EN mil ochocientos cincuenta y seis guion uno; si es no metálica, por la NTE-ISH setenta y cuatro; y si es de plástico, por la UNE-EN catorce mil cuatrocientos setenta y uno. Aparte del material, el cálculo de la chimenea, que tire bien y no se condense, va por la familia de la UNE ciento veintitrés mil uno y ciento veintitrés mil tres, y las UNE-EN trece mil trescientos ochenta y cuatro. Y una regla del sombrerete que cae: la terminación de una chimenea colectiva de tiro natural no puede taponar la salida de humos a la atmósfera; y si lleva un dispositivo de ayuda a la evacuación y se estropea, la chimenea tiene que seguir tirando sola, en tiro natural. Nunca puede quedar el edificio sin salida de humos porque falle un ventilador.</a:t>
+              <a:t>N1: Cuando varios tubos individuales se unen a una chimenea común, ¿hay reglas?</a:t>
+            </a:r>
+          </a:p>
+          <a:p>
+            <a:r>
+              <a:t>N2: Sí, tres detalles que conviene fichar. Primero, al unir varios conductos individuales a la chimenea o shunt, se guarda una separación mínima de quince centímetros entre las generatrices más próximas, o sea entre los bordes de los tubos, para que los humos de uno no se metan en el de al lado; y los empalmes al conducto común se hacen en ángulo agudo, a favor del flujo, como te incorporas a una autopista, no de frente. Segundo, si el conducto atraviesa una pared o techo de madera u otro material combustible, el agujero de paso debe ser diez centímetros más ancho que el tubo, y ese hueco se rellena con material aislante e incombustible, para que la madera no coja calor. Y tercero, si hay regulación de tiro, nunca puede ser a mano: tiene que ser automática motorizada, por contrapeso, o fijada de fábrica en la puesta en marcha. A mano, alguien la tocaría y desajustaría la evacuación.</a:t>
             </a:r>
           </a:p>
         </p:txBody>
@@ -1270,22 +1271,12 @@
           <a:lstStyle/>
           <a:p>
             <a:r>
-              <a:t>N1: Profe, cierra el tema entero. ¿Con qué me quedo?</a:t>
-            </a:r>
-          </a:p>
-          <a:p>
-            <a:r>
-              <a:t>N2: Con una frase: los humos tienen que salir bien o intoxican. Vamos a reconstruirlo. Solo el tipo B y el C evacúan por conducto, porque el A suelta los humos al local; y todo conducto es liso, rígido, estanco, de material que no arde, con el orificio de once milímetros para medir la combustión y su tramo vertical de veinte centímetros antes del codo. En tiro natural, el diámetro lo da la tabla según los kilovatios y el conducto tiene que aprobar la puntuación, más uno o más: sube mucho y dobla poco. En la ventosa, tiro forzado, manda el fabricante, el tubo asoma diez centímetros y guarda cuarenta a las ventanas. Y las distancias de fachada, laterales, frontales y los dos veinte sobre la gente, con el deflector como comodín para acercarte.</a:t>
-            </a:r>
-          </a:p>
-          <a:p>
-            <a:r>
-              <a:t>N1: ¿Y cómo se conecta esto con el examen y con el papeleo?</a:t>
-            </a:r>
-          </a:p>
-          <a:p>
-            <a:r>
-              <a:t>N2: En el examen te preguntan el centímetro exacto y la lista de «no mezclar»: tiro natural con forzado, condensación con no condensación, nada de extractores en la chimenea del aparato y nada de gas con sólidos. En la obra, todo esto se comprueba y se firma: la instalación en el certificado de instalación, el boletín, y la combustión del aparato en el de puesta en marcha, medida justo por ese orificio de once milímetros. Luego se entrega a la distribuidora para la puesta en servicio y queda registrado ante Industria de tu Comunidad, con copia para el usuario. Una evacuación mal resuelta es la anomalía que te tumba la puesta en servicio o la revisión periódica. Y con esto cierras el tema trece completo: ya sabes clasificar el aparato, dimensionar el local y sacar los humos con seguridad. Enhorabuena: hoy eres, de verdad, mucho más gasista que ayer.</a:t>
+              <a:t>N1: Y la chimenea en sí, ¿de qué tiene que ser?</a:t>
+            </a:r>
+          </a:p>
+          <a:p>
+            <a:r>
+              <a:t>N2: Depende del material, y cada uno tiene su norma; te doy la chuleta. Si la chimenea es metálica, va por la UNE-EN mil ochocientos cincuenta y seis guion uno; si es no metálica, por la NTE-ISH setenta y cuatro; y si es de plástico, por la UNE-EN catorce mil cuatrocientos setenta y uno. Aparte del material, el cálculo de la chimenea, que tire bien y no se condense, va por la familia de la UNE ciento veintitrés mil uno y ciento veintitrés mil tres, y las UNE-EN trece mil trescientos ochenta y cuatro. Y una regla del sombrerete que cae: la terminación de una chimenea colectiva de tiro natural no puede taponar la salida de humos a la atmósfera; y si lleva un dispositivo de ayuda a la evacuación y se estropea, la chimenea tiene que seguir tirando sola, en tiro natural. Nunca puede quedar el edificio sin salida de humos porque falle un ventilador.</a:t>
             </a:r>
           </a:p>
         </p:txBody>
@@ -1385,6 +1376,91 @@
 </p:notes>
 </file>
 
+<file path=ppt/notesSlides/notesSlide20.xml><?xml version="1.0" encoding="utf-8"?>
+<p:notes xmlns:a="http://schemas.openxmlformats.org/drawingml/2006/main" xmlns:p="http://schemas.openxmlformats.org/presentationml/2006/main" xmlns:r="http://schemas.openxmlformats.org/officeDocument/2006/relationships">
+  <p:cSld>
+    <p:spTree>
+      <p:nvGrpSpPr>
+        <p:cNvPr id="1" name=""/>
+        <p:cNvGrpSpPr/>
+        <p:nvPr/>
+      </p:nvGrpSpPr>
+      <p:grpSpPr>
+        <a:xfrm>
+          <a:off x="0" y="0"/>
+          <a:ext cx="0" cy="0"/>
+          <a:chOff x="0" y="0"/>
+          <a:chExt cx="0" cy="0"/>
+        </a:xfrm>
+      </p:grpSpPr>
+      <p:sp>
+        <p:nvSpPr>
+          <p:cNvPr id="2" name="Slide Image Placeholder 1"/>
+          <p:cNvSpPr>
+            <a:spLocks noGrp="1"/>
+          </p:cNvSpPr>
+          <p:nvPr>
+            <p:ph type="sldImg" idx="2"/>
+          </p:nvPr>
+        </p:nvSpPr>
+        <p:spPr/>
+      </p:sp>
+      <p:sp>
+        <p:nvSpPr>
+          <p:cNvPr id="3" name="Notes Placeholder 2"/>
+          <p:cNvSpPr>
+            <a:spLocks noGrp="1"/>
+          </p:cNvSpPr>
+          <p:nvPr>
+            <p:ph type="body" idx="3" sz="quarter"/>
+          </p:nvPr>
+        </p:nvSpPr>
+        <p:spPr/>
+        <p:txBody>
+          <a:bodyPr/>
+          <a:lstStyle/>
+          <a:p>
+            <a:r>
+              <a:t>N1: Profe, cierra el tema entero. ¿Con qué me quedo?</a:t>
+            </a:r>
+          </a:p>
+          <a:p>
+            <a:r>
+              <a:t>N2: Con una frase: los humos tienen que salir bien o intoxican. Vamos a reconstruirlo. Solo el tipo B y el C evacúan por conducto, porque el A suelta los humos al local; y todo conducto es liso, rígido, estanco, de material que no arde, con el orificio de once milímetros para medir la combustión y su tramo vertical de veinte centímetros antes del codo. En tiro natural, el diámetro lo da la tabla según los kilovatios y el conducto tiene que aprobar la puntuación, más uno o más: sube mucho y dobla poco. En la ventosa, tiro forzado, manda el fabricante, el tubo asoma diez centímetros y guarda cuarenta a las ventanas. Y las distancias de fachada, laterales, frontales y los dos veinte sobre la gente, con el deflector como comodín para acercarte.</a:t>
+            </a:r>
+          </a:p>
+          <a:p>
+            <a:r>
+              <a:t>N1: ¿Y cómo se conecta esto con el examen y con el papeleo?</a:t>
+            </a:r>
+          </a:p>
+          <a:p>
+            <a:r>
+              <a:t>N2: En el examen te preguntan el centímetro exacto y la lista de «no mezclar»: tiro natural con forzado, condensación con no condensación, nada de extractores en la chimenea del aparato y nada de gas con sólidos. En la obra, todo esto se comprueba y se firma: la instalación en el certificado de instalación, el boletín, y la combustión del aparato en el de puesta en marcha, medida justo por ese orificio de once milímetros. Luego se entrega a la distribuidora para la puesta en servicio y queda registrado ante Industria de tu Comunidad, con copia para el usuario. Una evacuación mal resuelta es la anomalía que te tumba la puesta en servicio o la revisión periódica. Y con esto cierras el tema trece completo: ya sabes clasificar el aparato, dimensionar el local y sacar los humos con seguridad. Enhorabuena: hoy eres, de verdad, mucho más gasista que ayer.</a:t>
+            </a:r>
+          </a:p>
+        </p:txBody>
+      </p:sp>
+      <p:sp>
+        <p:nvSpPr>
+          <p:cNvPr id="4" name="Slide Number Placeholder 3"/>
+          <p:cNvSpPr>
+            <a:spLocks noGrp="1"/>
+          </p:cNvSpPr>
+          <p:nvPr>
+            <p:ph type="sldNum" idx="5" sz="quarter"/>
+          </p:nvPr>
+        </p:nvSpPr>
+        <p:spPr/>
+      </p:sp>
+    </p:spTree>
+  </p:cSld>
+  <p:clrMapOvr>
+    <a:masterClrMapping/>
+  </p:clrMapOvr>
+</p:notes>
+</file>
+
 <file path=ppt/notesSlides/notesSlide3.xml><?xml version="1.0" encoding="utf-8"?>
 <p:notes xmlns:a="http://schemas.openxmlformats.org/drawingml/2006/main" xmlns:p="http://schemas.openxmlformats.org/presentationml/2006/main" xmlns:r="http://schemas.openxmlformats.org/officeDocument/2006/relationships">
   <p:cSld>
@@ -1428,16 +1504,7 @@
         <p:txBody>
           <a:bodyPr/>
           <a:lstStyle/>
-          <a:p>
-            <a:r>
-              <a:t>N1: ¿Este vídeo vale para los tres tipos de aparato?</a:t>
-            </a:r>
-          </a:p>
-          <a:p>
-            <a:r>
-              <a:t>N2: No, y conviene fijarlo desde el principio. El tipo A no tiene conducto de humos: los suelta al propio local, así que no evacúa por tubo. Por eso todo este vídeo va solo de los aparatos de tipo B y de tipo C, que sí llevan conducto de evacuación. Ese conducto puede desembocar en tres sitios: por la cubierta, es decir el tejado, por la fachada del edificio, o por un patio de ventilación, con las limitaciones que ponga la reglamentación. Ten esa foto en la cabeza antes de entrar en los detalles: B y C evacúan, y salen por tejado, fachada o patio. El A, fuera de esta película.</a:t>
-            </a:r>
-          </a:p>
+          <a:p/>
         </p:txBody>
       </p:sp>
       <p:sp>
@@ -1505,12 +1572,12 @@
           <a:lstStyle/>
           <a:p>
             <a:r>
-              <a:t>N1: ¿Qué es el cortatiro y de qué tiene que ser el conducto?</a:t>
-            </a:r>
-          </a:p>
-          <a:p>
-            <a:r>
-              <a:t>N2: Vamos por partes. El cortatiro es una pieza del propio aparato de tiro natural que estabiliza el tiro y protege la llama de las ráfagas que bajan por la chimenea; todos estos aparatos lo llevan, excepto las chimenea-hogar de gas, que no lo necesitan. En cuanto al conducto que lo une a la chimenea o al shunt, tiene que ser de material incombustible, lo que la norma llama clase A uno o A dos ese uno, d cero; en cristiano, que no arde. Además, liso por dentro para que los humos corran sin engancharse, rígido, resistente a la corrosión de los humos y capaz de aguantar la temperatura de trabajo sin estropearse. Nada de tubos de aluminio flexible de andar por casa: aquí manda el material homologado.</a:t>
+              <a:t>N1: ¿Este vídeo vale para los tres tipos de aparato?</a:t>
+            </a:r>
+          </a:p>
+          <a:p>
+            <a:r>
+              <a:t>N2: No, y conviene fijarlo desde el principio. El tipo A no tiene conducto de humos: los suelta al propio local, así que no evacúa por tubo. Por eso todo este vídeo va solo de los aparatos de tipo B y de tipo C, que sí llevan conducto de evacuación. Ese conducto puede desembocar en tres sitios: por la cubierta, es decir el tejado, por la fachada del edificio, o por un patio de ventilación, con las limitaciones que ponga la reglamentación. Ten esa foto en la cabeza antes de entrar en los detalles: B y C evacúan, y salen por tejado, fachada o patio. El A, fuera de esta película.</a:t>
             </a:r>
           </a:p>
         </p:txBody>
@@ -1580,12 +1647,12 @@
           <a:lstStyle/>
           <a:p>
             <a:r>
-              <a:t>N1: ¿Para qué sirve ese agujero de once milímetros del que hablabas?</a:t>
-            </a:r>
-          </a:p>
-          <a:p>
-            <a:r>
-              <a:t>N2: Es la ventana para mirar cómo respira el aparato. Todo conducto lleva un orificio accesible de once milímetros de diámetro como mínimo, situado lo más cerca posible del aparato, para la toma de muestras. Por ahí metes la sonda del analizador de combustión y mides la composición de los humos, el monóxido y el dióxido de carbono, y el tiro del conducto. Se usa en la puesta en marcha y en cada revisión: sin ese orificio no puedes certificar que la combustión es buena. Y como por ahí salen humos calientes, su tapón tiene que aguantar doscientos grados sin alterarse, resistir la corrosión y ser fácilmente desmontable, para abrirlo y cerrarlo sin pelearte.</a:t>
+              <a:t>N1: ¿Qué es el cortatiro y de qué tiene que ser el conducto?</a:t>
+            </a:r>
+          </a:p>
+          <a:p>
+            <a:r>
+              <a:t>N2: Vamos por partes. El cortatiro es una pieza del propio aparato de tiro natural que estabiliza el tiro y protege la llama de las ráfagas que bajan por la chimenea; todos estos aparatos lo llevan, excepto las chimenea-hogar de gas, que no lo necesitan. En cuanto al conducto que lo une a la chimenea o al shunt, tiene que ser de material incombustible, lo que la norma llama clase A uno o A dos ese uno, d cero; en cristiano, que no arde. Además, liso por dentro para que los humos corran sin engancharse, rígido, resistente a la corrosión de los humos y capaz de aguantar la temperatura de trabajo sin estropearse. Nada de tubos de aluminio flexible de andar por casa: aquí manda el material homologado.</a:t>
             </a:r>
           </a:p>
         </p:txBody>
@@ -1655,12 +1722,12 @@
           <a:lstStyle/>
           <a:p>
             <a:r>
-              <a:t>N1: ¿Hay una forma correcta de montar el tubo o vale cualquiera?</a:t>
-            </a:r>
-          </a:p>
-          <a:p>
-            <a:r>
-              <a:t>N2: Hay reglas, y son de puro sentido físico. Las uniones, del collarín con el conducto y entre tramos, tienen que asegurar estanquidad y rigidez; el collarín es la boca del aparato donde enchufas el tubo, y estanquidad quiere decir que no se escape ni una voluta de humo. El diámetro interior es el que diga el fabricante, sin estrechamientos ni reducciones: si estrechas el tubo, ahogas el tiro. El conducto debe ser lo más corto posible y siempre con pendiente positiva, es decir, subiendo en todos sus tramos, porque el humo caliente quiere ir hacia arriba. Y arriba del aparato, un tramo vertical de al menos veinte centímetros antes del primer codo, para que los humos cojan impulso antes de doblar. En cascada, cada ramal sube al menos veinte centímetros antes de unirse al común.</a:t>
+              <a:t>N1: ¿Para qué sirve ese agujero de once milímetros del que hablabas?</a:t>
+            </a:r>
+          </a:p>
+          <a:p>
+            <a:r>
+              <a:t>N2: Es la ventana para mirar cómo respira el aparato. Todo conducto lleva un orificio accesible de once milímetros de diámetro como mínimo, situado lo más cerca posible del aparato, para la toma de muestras. Por ahí metes la sonda del analizador de combustión y mides la composición de los humos, el monóxido y el dióxido de carbono, y el tiro del conducto. Se usa en la puesta en marcha y en cada revisión: sin ese orificio no puedes certificar que la combustión es buena. Y como por ahí salen humos calientes, su tapón tiene que aguantar doscientos grados sin alterarse, resistir la corrosión y ser fácilmente desmontable, para abrirlo y cerrarlo sin pelearte.</a:t>
             </a:r>
           </a:p>
         </p:txBody>
@@ -1730,12 +1797,12 @@
           <a:lstStyle/>
           <a:p>
             <a:r>
-              <a:t>N1: ¿De qué grosor tiene que ser el tubo de salida directa?</a:t>
-            </a:r>
-          </a:p>
-          <a:p>
-            <a:r>
-              <a:t>N2: Depende de la potencia del aparato, y lo da la tabla tres. La idea: a más kilovatios, más humos, y por tanto más diámetro. Para aparatos pequeños, de hasta once coma cinco kilovatios, noventa milímetros; y va subiendo por escalones, ciento diez, ciento veinticinco, hasta ciento setenta y cinco milímetros para los más potentes, por encima de cuarenta y cinco kilovatios. Lo importante para el examen y la obra: el diámetro nunca puede ser inferior al de la tabla y nunca con reducciones. Un instalador que mete un tubo más fino del que toca «para que quepa» está ahogando la salida de humos: el aparato revocará. El diámetro lo manda el fabricante, y nunca por debajo de esa tabla.</a:t>
+              <a:t>N1: ¿Hay una forma correcta de montar el tubo o vale cualquiera?</a:t>
+            </a:r>
+          </a:p>
+          <a:p>
+            <a:r>
+              <a:t>N2: Hay reglas, y son de puro sentido físico. Las uniones, del collarín con el conducto y entre tramos, tienen que asegurar estanquidad y rigidez; el collarín es la boca del aparato donde enchufas el tubo, y estanquidad quiere decir que no se escape ni una voluta de humo. El diámetro interior es el que diga el fabricante, sin estrechamientos ni reducciones: si estrechas el tubo, ahogas el tiro. El conducto debe ser lo más corto posible y siempre con pendiente positiva, es decir, subiendo en todos sus tramos, porque el humo caliente quiere ir hacia arriba. Y arriba del aparato, un tramo vertical de al menos veinte centímetros antes del primer codo, para que los humos cojan impulso antes de doblar. En cascada, cada ramal sube al menos veinte centímetros antes de unirse al común.</a:t>
             </a:r>
           </a:p>
         </p:txBody>
@@ -1805,12 +1872,12 @@
           <a:lstStyle/>
           <a:p>
             <a:r>
-              <a:t>N1: ¿Qué es eso de la «puntuación» del conducto?</a:t>
-            </a:r>
-          </a:p>
-          <a:p>
-            <a:r>
-              <a:t>N2: Es una forma ingeniosa de comprobar sobre el papel si el conducto va a tirar bien, antes de montarlo. Funciona como un juego de puntos. Ganar altura suma: cada centímetro que sube el conducto aporta cero coma uno puntos, porque la altura es lo que hace que los humos suban solos. Y cada codo o cada tramo horizontal resta, porque frenan los humos; un codo cerrado puede quitarte dos puntos, y la longitud recta también descuenta. El deflector del extremo resta un poco también. Al final, la suma tiene que dar al menos más uno. Idea corta: sube mucho y dobla poco. Un conducto vertical y corto aprueba de sobra; uno muy tumbado y lleno de codos suspende, y en obra eso es revoco y el aparato apagándose.</a:t>
+              <a:t>N1: ¿De qué grosor tiene que ser el tubo de salida directa?</a:t>
+            </a:r>
+          </a:p>
+          <a:p>
+            <a:r>
+              <a:t>N2: Depende de la potencia del aparato, y lo da la tabla tres. La idea: a más kilovatios, más humos, y por tanto más diámetro. Para aparatos pequeños, de hasta once coma cinco kilovatios, noventa milímetros; y va subiendo por escalones, ciento diez, ciento veinticinco, hasta ciento setenta y cinco milímetros para los más potentes, por encima de cuarenta y cinco kilovatios. Lo importante para el examen y la obra: el diámetro nunca puede ser inferior al de la tabla y nunca con reducciones. Un instalador que mete un tubo más fino del que toca «para que quepa» está ahogando la salida de humos: el aparato revocará. El diámetro lo manda el fabricante, y nunca por debajo de esa tabla.</a:t>
             </a:r>
           </a:p>
         </p:txBody>
@@ -1880,12 +1947,12 @@
           <a:lstStyle/>
           <a:p>
             <a:r>
-              <a:t>N1: ¿Y a qué distancia tiene que quedar la boca del tubo de las cosas de alrededor?</a:t>
-            </a:r>
-          </a:p>
-          <a:p>
-            <a:r>
-              <a:t>N2: Aquí hay una regla mnemotécnica que te salva: al salir a fachada o patio, casi todas las distancias son cuarenta centímetros. Cuarenta a cualquier abertura permanente de ventilación, cuarenta a ventanas o puertas de otro local, cuarenta a paredes laterales externas, y cuarenta a cornisas y aleros. Solo cambian dos números: diez centímetros respecto al muro que el tubo atraviesa, y veinte centímetros a cualquier otro resalte de la fachada. Y una distancia grande: dos metros veinte respecto al suelo exterior, para que nadie meta la cara en los humos, salvo que salgan a tu propia zona privada. Todo esto se mide sin contar el deflector del extremo. Acercar la boca a una ventana es meterle los humos al vecino: mancha negra en la fachada y anomalía en la revisión.</a:t>
+              <a:t>N1: ¿Qué es eso de la «puntuación» del conducto?</a:t>
+            </a:r>
+          </a:p>
+          <a:p>
+            <a:r>
+              <a:t>N2: Es una forma ingeniosa de comprobar sobre el papel si el conducto va a tirar bien, antes de montarlo. Funciona como un juego de puntos. Ganar altura suma: cada centímetro que sube el conducto aporta cero coma uno puntos, porque la altura es lo que hace que los humos suban solos. Y cada codo o cada tramo horizontal resta, porque frenan los humos; un codo cerrado puede quitarte dos puntos, y la longitud recta también descuenta. El deflector del extremo resta un poco también. Al final, la suma tiene que dar al menos más uno. Idea corta: sube mucho y dobla poco. Un conducto vertical y corto aprueba de sobra; uno muy tumbado y lleno de codos suspende, y en obra eso es revoco y el aparato apagándose.</a:t>
             </a:r>
           </a:p>
         </p:txBody>
@@ -4960,7 +5027,7 @@
             <a:r>
               <a:rPr sz="1400" b="1" i="0">
                 <a:solidFill>
-                  <a:srgbClr val="CADCFC"/>
+                  <a:srgbClr val="F4A24C"/>
                 </a:solidFill>
                 <a:latin typeface="Montserrat"/>
               </a:rPr>
@@ -4971,13 +5038,57 @@
       </p:sp>
       <p:sp>
         <p:nvSpPr>
-          <p:cNvPr id="4" name="TextBox 3"/>
+          <p:cNvPr id="4" name="Rounded Rectangle 3"/>
+          <p:cNvSpPr/>
+          <p:nvPr/>
+        </p:nvSpPr>
+        <p:spPr>
+          <a:xfrm>
+            <a:off x="868680" y="2057400"/>
+            <a:ext cx="1463040" cy="82296"/>
+          </a:xfrm>
+          <a:prstGeom prst="roundRect">
+            <a:avLst/>
+          </a:prstGeom>
+          <a:solidFill>
+            <a:srgbClr val="E8801A"/>
+          </a:solidFill>
+          <a:ln>
+            <a:noFill/>
+          </a:ln>
+          <a:effectLst/>
+        </p:spPr>
+        <p:style>
+          <a:lnRef idx="1">
+            <a:schemeClr val="accent1"/>
+          </a:lnRef>
+          <a:fillRef idx="3">
+            <a:schemeClr val="accent1"/>
+          </a:fillRef>
+          <a:effectRef idx="2">
+            <a:schemeClr val="accent1"/>
+          </a:effectRef>
+          <a:fontRef idx="minor">
+            <a:schemeClr val="lt1"/>
+          </a:fontRef>
+        </p:style>
+        <p:txBody>
+          <a:bodyPr rtlCol="0" anchor="ctr"/>
+          <a:lstStyle/>
+          <a:p>
+            <a:pPr algn="ctr"/>
+          </a:p>
+        </p:txBody>
+      </p:sp>
+      <p:sp>
+        <p:nvSpPr>
+          <p:cNvPr id="5" name="TextBox 4"/>
           <p:cNvSpPr txBox="1"/>
           <p:nvPr/>
         </p:nvSpPr>
         <p:spPr>
           <a:xfrm>
-            <a:off x="822960" y="2194560"/>
+            <a:off x="822960" y="2286000"/>
             <a:ext cx="10515600" cy="2011680"/>
           </a:xfrm>
           <a:prstGeom prst="rect">
@@ -5016,7 +5127,7 @@
       </p:sp>
       <p:sp>
         <p:nvSpPr>
-          <p:cNvPr id="5" name="TextBox 4"/>
+          <p:cNvPr id="6" name="TextBox 5"/>
           <p:cNvSpPr txBox="1"/>
           <p:nvPr/>
         </p:nvSpPr>
@@ -5140,7 +5251,7 @@
                 </a:solidFill>
                 <a:latin typeface="Montserrat"/>
               </a:rPr>
-              <a:t>010 / 019</a:t>
+              <a:t>010 / 020</a:t>
             </a:r>
           </a:p>
         </p:txBody>
@@ -5188,7 +5299,7 @@
         <p:spPr>
           <a:xfrm>
             <a:off x="822960" y="457200"/>
-            <a:ext cx="8229600" cy="365760"/>
+            <a:ext cx="10058400" cy="365760"/>
           </a:xfrm>
           <a:prstGeom prst="rect">
             <a:avLst/>
@@ -5202,13 +5313,13 @@
           <a:lstStyle/>
           <a:p>
             <a:r>
-              <a:rPr sz="1200" b="1" i="0">
-                <a:solidFill>
-                  <a:srgbClr val="64748B"/>
-                </a:solidFill>
-                <a:latin typeface="Montserrat"/>
-              </a:rPr>
-              <a:t>AYUDA A LA EVACUACIÓN</a:t>
+              <a:rPr sz="1300" b="1" i="0">
+                <a:solidFill>
+                  <a:srgbClr val="E8801A"/>
+                </a:solidFill>
+                <a:latin typeface="Montserrat"/>
+              </a:rPr>
+              <a:t>TIRO NATURAL · DISTANCIAS</a:t>
             </a:r>
           </a:p>
         </p:txBody>
@@ -5236,26 +5347,70 @@
           <a:lstStyle/>
           <a:p>
             <a:r>
-              <a:rPr sz="2700" b="1" i="0">
+              <a:rPr sz="2800" b="1" i="0">
                 <a:solidFill>
                   <a:srgbClr val="1E2761"/>
                 </a:solidFill>
                 <a:latin typeface="Montserrat"/>
               </a:rPr>
-              <a:t>De tiro natural a forzado</a:t>
-            </a:r>
-          </a:p>
-        </p:txBody>
-      </p:sp>
-      <p:sp>
-        <p:nvSpPr>
-          <p:cNvPr id="7" name="TextBox 6"/>
+              <a:t>Distancias del extremo</a:t>
+            </a:r>
+          </a:p>
+        </p:txBody>
+      </p:sp>
+      <p:sp>
+        <p:nvSpPr>
+          <p:cNvPr id="7" name="Rounded Rectangle 6"/>
+          <p:cNvSpPr/>
+          <p:nvPr/>
+        </p:nvSpPr>
+        <p:spPr>
+          <a:xfrm>
+            <a:off x="868680" y="1627632"/>
+            <a:ext cx="2011680" cy="73152"/>
+          </a:xfrm>
+          <a:prstGeom prst="roundRect">
+            <a:avLst/>
+          </a:prstGeom>
+          <a:solidFill>
+            <a:srgbClr val="E8801A"/>
+          </a:solidFill>
+          <a:ln>
+            <a:noFill/>
+          </a:ln>
+          <a:effectLst/>
+        </p:spPr>
+        <p:style>
+          <a:lnRef idx="1">
+            <a:schemeClr val="accent1"/>
+          </a:lnRef>
+          <a:fillRef idx="3">
+            <a:schemeClr val="accent1"/>
+          </a:fillRef>
+          <a:effectRef idx="2">
+            <a:schemeClr val="accent1"/>
+          </a:effectRef>
+          <a:fontRef idx="minor">
+            <a:schemeClr val="lt1"/>
+          </a:fontRef>
+        </p:style>
+        <p:txBody>
+          <a:bodyPr rtlCol="0" anchor="ctr"/>
+          <a:lstStyle/>
+          <a:p>
+            <a:pPr algn="ctr"/>
+          </a:p>
+        </p:txBody>
+      </p:sp>
+      <p:sp>
+        <p:nvSpPr>
+          <p:cNvPr id="8" name="TextBox 7"/>
           <p:cNvSpPr txBox="1"/>
           <p:nvPr/>
         </p:nvSpPr>
         <p:spPr>
           <a:xfrm>
-            <a:off x="822960" y="1920240"/>
+            <a:off x="822960" y="1965960"/>
             <a:ext cx="4983480" cy="4206240"/>
           </a:xfrm>
           <a:prstGeom prst="rect">
@@ -5271,17 +5426,17 @@
           <a:p>
             <a:pPr>
               <a:spcAft>
-                <a:spcPts val="1000"/>
+                <a:spcPts val="1100"/>
               </a:spcAft>
             </a:pPr>
             <a:r>
               <a:rPr sz="1600" b="1" i="0">
                 <a:solidFill>
-                  <a:srgbClr val="2E3A80"/>
-                </a:solidFill>
-                <a:latin typeface="Montserrat"/>
-              </a:rPr>
-              <a:t>•  </a:t>
+                  <a:srgbClr val="E8801A"/>
+                </a:solidFill>
+                <a:latin typeface="Montserrat"/>
+              </a:rPr>
+              <a:t>▸  </a:t>
             </a:r>
             <a:r>
               <a:rPr sz="1600" b="0" i="0">
@@ -5290,23 +5445,23 @@
                 </a:solidFill>
                 <a:latin typeface="Montserrat"/>
               </a:rPr>
-              <a:t>Añadir extractor = cambiar de aparato</a:t>
+              <a:t>10 cm al muro que atraviesa</a:t>
             </a:r>
           </a:p>
           <a:p>
             <a:pPr>
               <a:spcAft>
-                <a:spcPts val="1000"/>
+                <a:spcPts val="1100"/>
               </a:spcAft>
             </a:pPr>
             <a:r>
               <a:rPr sz="1600" b="1" i="0">
                 <a:solidFill>
-                  <a:srgbClr val="2E3A80"/>
-                </a:solidFill>
-                <a:latin typeface="Montserrat"/>
-              </a:rPr>
-              <a:t>•  </a:t>
+                  <a:srgbClr val="E8801A"/>
+                </a:solidFill>
+                <a:latin typeface="Montserrat"/>
+              </a:rPr>
+              <a:t>▸  </a:t>
             </a:r>
             <a:r>
               <a:rPr sz="1600" b="0" i="0">
@@ -5315,23 +5470,23 @@
                 </a:solidFill>
                 <a:latin typeface="Montserrat"/>
               </a:rPr>
-              <a:t>Cumple las condiciones del tiro forzado</a:t>
+              <a:t>40 cm a aberturas, ventanas y aleros</a:t>
             </a:r>
           </a:p>
           <a:p>
             <a:pPr>
               <a:spcAft>
-                <a:spcPts val="1000"/>
+                <a:spcPts val="1100"/>
               </a:spcAft>
             </a:pPr>
             <a:r>
               <a:rPr sz="1600" b="1" i="0">
                 <a:solidFill>
-                  <a:srgbClr val="2E3A80"/>
-                </a:solidFill>
-                <a:latin typeface="Montserrat"/>
-              </a:rPr>
-              <a:t>•  </a:t>
+                  <a:srgbClr val="E8801A"/>
+                </a:solidFill>
+                <a:latin typeface="Montserrat"/>
+              </a:rPr>
+              <a:t>▸  </a:t>
             </a:r>
             <a:r>
               <a:rPr sz="1600" b="0" i="0">
@@ -5340,14 +5495,14 @@
                 </a:solidFill>
                 <a:latin typeface="Montserrat"/>
               </a:rPr>
-              <a:t>Se perdona la puntuación de la tabla</a:t>
-            </a:r>
-          </a:p>
-        </p:txBody>
-      </p:sp>
-      <p:sp>
-        <p:nvSpPr>
-          <p:cNvPr id="8" name="imgph" descr="IMGQ:flue fan extractor unit"/>
+              <a:t>220 cm al suelo exterior</a:t>
+            </a:r>
+          </a:p>
+        </p:txBody>
+      </p:sp>
+      <p:sp>
+        <p:nvSpPr>
+          <p:cNvPr id="9" name="imgph" descr="IMGQ:flue terminal on exterior wall"/>
           <p:cNvSpPr/>
           <p:nvPr/>
         </p:nvSpPr>
@@ -5393,7 +5548,7 @@
       </p:sp>
       <p:sp>
         <p:nvSpPr>
-          <p:cNvPr id="9" name="TextBox 8"/>
+          <p:cNvPr id="10" name="TextBox 9"/>
           <p:cNvSpPr txBox="1"/>
           <p:nvPr/>
         </p:nvSpPr>
@@ -5433,7 +5588,7 @@
                 </a:solidFill>
                 <a:latin typeface="Montserrat"/>
               </a:rPr>
-              <a:t>flue fan extractor unit</a:t>
+              <a:t>flue terminal on exterior wall</a:t>
             </a:r>
           </a:p>
         </p:txBody>
@@ -5530,7 +5685,7 @@
                 </a:solidFill>
                 <a:latin typeface="Montserrat"/>
               </a:rPr>
-              <a:t>011 / 019</a:t>
+              <a:t>011 / 020</a:t>
             </a:r>
           </a:p>
         </p:txBody>
@@ -5578,7 +5733,7 @@
         <p:spPr>
           <a:xfrm>
             <a:off x="822960" y="457200"/>
-            <a:ext cx="8229600" cy="365760"/>
+            <a:ext cx="10058400" cy="365760"/>
           </a:xfrm>
           <a:prstGeom prst="rect">
             <a:avLst/>
@@ -5592,13 +5747,13 @@
           <a:lstStyle/>
           <a:p>
             <a:r>
-              <a:rPr sz="1200" b="1" i="0">
-                <a:solidFill>
-                  <a:srgbClr val="64748B"/>
-                </a:solidFill>
-                <a:latin typeface="Montserrat"/>
-              </a:rPr>
-              <a:t>TIRO FORZADO · CONDUCTOS</a:t>
+              <a:rPr sz="1300" b="1" i="0">
+                <a:solidFill>
+                  <a:srgbClr val="E8801A"/>
+                </a:solidFill>
+                <a:latin typeface="Montserrat"/>
+              </a:rPr>
+              <a:t>AYUDA A LA EVACUACIÓN</a:t>
             </a:r>
           </a:p>
         </p:txBody>
@@ -5626,26 +5781,70 @@
           <a:lstStyle/>
           <a:p>
             <a:r>
-              <a:rPr sz="2700" b="1" i="0">
+              <a:rPr sz="2800" b="1" i="0">
                 <a:solidFill>
                   <a:srgbClr val="1E2761"/>
                 </a:solidFill>
                 <a:latin typeface="Montserrat"/>
               </a:rPr>
-              <a:t>Tiro forzado: manda el fabricante</a:t>
-            </a:r>
-          </a:p>
-        </p:txBody>
-      </p:sp>
-      <p:sp>
-        <p:nvSpPr>
-          <p:cNvPr id="7" name="TextBox 6"/>
+              <a:t>De tiro natural a forzado</a:t>
+            </a:r>
+          </a:p>
+        </p:txBody>
+      </p:sp>
+      <p:sp>
+        <p:nvSpPr>
+          <p:cNvPr id="7" name="Rounded Rectangle 6"/>
+          <p:cNvSpPr/>
+          <p:nvPr/>
+        </p:nvSpPr>
+        <p:spPr>
+          <a:xfrm>
+            <a:off x="868680" y="1627632"/>
+            <a:ext cx="2011680" cy="73152"/>
+          </a:xfrm>
+          <a:prstGeom prst="roundRect">
+            <a:avLst/>
+          </a:prstGeom>
+          <a:solidFill>
+            <a:srgbClr val="E8801A"/>
+          </a:solidFill>
+          <a:ln>
+            <a:noFill/>
+          </a:ln>
+          <a:effectLst/>
+        </p:spPr>
+        <p:style>
+          <a:lnRef idx="1">
+            <a:schemeClr val="accent1"/>
+          </a:lnRef>
+          <a:fillRef idx="3">
+            <a:schemeClr val="accent1"/>
+          </a:fillRef>
+          <a:effectRef idx="2">
+            <a:schemeClr val="accent1"/>
+          </a:effectRef>
+          <a:fontRef idx="minor">
+            <a:schemeClr val="lt1"/>
+          </a:fontRef>
+        </p:style>
+        <p:txBody>
+          <a:bodyPr rtlCol="0" anchor="ctr"/>
+          <a:lstStyle/>
+          <a:p>
+            <a:pPr algn="ctr"/>
+          </a:p>
+        </p:txBody>
+      </p:sp>
+      <p:sp>
+        <p:nvSpPr>
+          <p:cNvPr id="8" name="TextBox 7"/>
           <p:cNvSpPr txBox="1"/>
           <p:nvPr/>
         </p:nvSpPr>
         <p:spPr>
           <a:xfrm>
-            <a:off x="822960" y="1920240"/>
+            <a:off x="822960" y="1965960"/>
             <a:ext cx="4983480" cy="4206240"/>
           </a:xfrm>
           <a:prstGeom prst="rect">
@@ -5661,17 +5860,17 @@
           <a:p>
             <a:pPr>
               <a:spcAft>
-                <a:spcPts val="1000"/>
+                <a:spcPts val="1100"/>
               </a:spcAft>
             </a:pPr>
             <a:r>
               <a:rPr sz="1600" b="1" i="0">
                 <a:solidFill>
-                  <a:srgbClr val="2E3A80"/>
-                </a:solidFill>
-                <a:latin typeface="Montserrat"/>
-              </a:rPr>
-              <a:t>•  </a:t>
+                  <a:srgbClr val="E8801A"/>
+                </a:solidFill>
+                <a:latin typeface="Montserrat"/>
+              </a:rPr>
+              <a:t>▸  </a:t>
             </a:r>
             <a:r>
               <a:rPr sz="1600" b="0" i="0">
@@ -5680,23 +5879,23 @@
                 </a:solidFill>
                 <a:latin typeface="Montserrat"/>
               </a:rPr>
-              <a:t>Materiales y longitud según fabricante</a:t>
+              <a:t>Añadir extractor = cambiar de aparato</a:t>
             </a:r>
           </a:p>
           <a:p>
             <a:pPr>
               <a:spcAft>
-                <a:spcPts val="1000"/>
+                <a:spcPts val="1100"/>
               </a:spcAft>
             </a:pPr>
             <a:r>
               <a:rPr sz="1600" b="1" i="0">
                 <a:solidFill>
-                  <a:srgbClr val="2E3A80"/>
-                </a:solidFill>
-                <a:latin typeface="Montserrat"/>
-              </a:rPr>
-              <a:t>•  </a:t>
+                  <a:srgbClr val="E8801A"/>
+                </a:solidFill>
+                <a:latin typeface="Montserrat"/>
+              </a:rPr>
+              <a:t>▸  </a:t>
             </a:r>
             <a:r>
               <a:rPr sz="1600" b="0" i="0">
@@ -5705,23 +5904,23 @@
                 </a:solidFill>
                 <a:latin typeface="Montserrat"/>
               </a:rPr>
-              <a:t>Uniones estancas y rígidas</a:t>
+              <a:t>Cumple las condiciones del tiro forzado</a:t>
             </a:r>
           </a:p>
           <a:p>
             <a:pPr>
               <a:spcAft>
-                <a:spcPts val="1000"/>
+                <a:spcPts val="1100"/>
               </a:spcAft>
             </a:pPr>
             <a:r>
               <a:rPr sz="1600" b="1" i="0">
                 <a:solidFill>
-                  <a:srgbClr val="2E3A80"/>
-                </a:solidFill>
-                <a:latin typeface="Montserrat"/>
-              </a:rPr>
-              <a:t>•  </a:t>
+                  <a:srgbClr val="E8801A"/>
+                </a:solidFill>
+                <a:latin typeface="Montserrat"/>
+              </a:rPr>
+              <a:t>▸  </a:t>
             </a:r>
             <a:r>
               <a:rPr sz="1600" b="0" i="0">
@@ -5730,14 +5929,14 @@
                 </a:solidFill>
                 <a:latin typeface="Montserrat"/>
               </a:rPr>
-              <a:t>Sin condensación: ligera pendiente descendente</a:t>
-            </a:r>
-          </a:p>
-        </p:txBody>
-      </p:sp>
-      <p:sp>
-        <p:nvSpPr>
-          <p:cNvPr id="8" name="imgph" descr="IMGQ:condensing boiler flue installation"/>
+              <a:t>Se perdona la puntuación de la tabla</a:t>
+            </a:r>
+          </a:p>
+        </p:txBody>
+      </p:sp>
+      <p:sp>
+        <p:nvSpPr>
+          <p:cNvPr id="9" name="imgph" descr="IMGQ:flue fan extractor unit"/>
           <p:cNvSpPr/>
           <p:nvPr/>
         </p:nvSpPr>
@@ -5783,7 +5982,7 @@
       </p:sp>
       <p:sp>
         <p:nvSpPr>
-          <p:cNvPr id="9" name="TextBox 8"/>
+          <p:cNvPr id="10" name="TextBox 9"/>
           <p:cNvSpPr txBox="1"/>
           <p:nvPr/>
         </p:nvSpPr>
@@ -5823,7 +6022,7 @@
                 </a:solidFill>
                 <a:latin typeface="Montserrat"/>
               </a:rPr>
-              <a:t>condensing boiler flue installation</a:t>
+              <a:t>flue fan extractor unit</a:t>
             </a:r>
           </a:p>
         </p:txBody>
@@ -5920,7 +6119,7 @@
                 </a:solidFill>
                 <a:latin typeface="Montserrat"/>
               </a:rPr>
-              <a:t>012 / 019</a:t>
+              <a:t>012 / 020</a:t>
             </a:r>
           </a:p>
         </p:txBody>
@@ -5968,7 +6167,7 @@
         <p:spPr>
           <a:xfrm>
             <a:off x="822960" y="457200"/>
-            <a:ext cx="8229600" cy="365760"/>
+            <a:ext cx="10058400" cy="365760"/>
           </a:xfrm>
           <a:prstGeom prst="rect">
             <a:avLst/>
@@ -5982,13 +6181,13 @@
           <a:lstStyle/>
           <a:p>
             <a:r>
-              <a:rPr sz="1200" b="1" i="0">
-                <a:solidFill>
-                  <a:srgbClr val="64748B"/>
-                </a:solidFill>
-                <a:latin typeface="Montserrat"/>
-              </a:rPr>
-              <a:t>TIRO FORZADO · VENTOSA</a:t>
+              <a:rPr sz="1300" b="1" i="0">
+                <a:solidFill>
+                  <a:srgbClr val="E8801A"/>
+                </a:solidFill>
+                <a:latin typeface="Montserrat"/>
+              </a:rPr>
+              <a:t>TIRO FORZADO · CONDUCTOS</a:t>
             </a:r>
           </a:p>
         </p:txBody>
@@ -6016,26 +6215,70 @@
           <a:lstStyle/>
           <a:p>
             <a:r>
-              <a:rPr sz="2700" b="1" i="0">
+              <a:rPr sz="2800" b="1" i="0">
                 <a:solidFill>
                   <a:srgbClr val="1E2761"/>
                 </a:solidFill>
                 <a:latin typeface="Montserrat"/>
               </a:rPr>
-              <a:t>La ventosa: salida frontal y 10 cm</a:t>
-            </a:r>
-          </a:p>
-        </p:txBody>
-      </p:sp>
-      <p:sp>
-        <p:nvSpPr>
-          <p:cNvPr id="7" name="TextBox 6"/>
+              <a:t>Tiro forzado: manda el fabricante</a:t>
+            </a:r>
+          </a:p>
+        </p:txBody>
+      </p:sp>
+      <p:sp>
+        <p:nvSpPr>
+          <p:cNvPr id="7" name="Rounded Rectangle 6"/>
+          <p:cNvSpPr/>
+          <p:nvPr/>
+        </p:nvSpPr>
+        <p:spPr>
+          <a:xfrm>
+            <a:off x="868680" y="1627632"/>
+            <a:ext cx="2011680" cy="73152"/>
+          </a:xfrm>
+          <a:prstGeom prst="roundRect">
+            <a:avLst/>
+          </a:prstGeom>
+          <a:solidFill>
+            <a:srgbClr val="E8801A"/>
+          </a:solidFill>
+          <a:ln>
+            <a:noFill/>
+          </a:ln>
+          <a:effectLst/>
+        </p:spPr>
+        <p:style>
+          <a:lnRef idx="1">
+            <a:schemeClr val="accent1"/>
+          </a:lnRef>
+          <a:fillRef idx="3">
+            <a:schemeClr val="accent1"/>
+          </a:fillRef>
+          <a:effectRef idx="2">
+            <a:schemeClr val="accent1"/>
+          </a:effectRef>
+          <a:fontRef idx="minor">
+            <a:schemeClr val="lt1"/>
+          </a:fontRef>
+        </p:style>
+        <p:txBody>
+          <a:bodyPr rtlCol="0" anchor="ctr"/>
+          <a:lstStyle/>
+          <a:p>
+            <a:pPr algn="ctr"/>
+          </a:p>
+        </p:txBody>
+      </p:sp>
+      <p:sp>
+        <p:nvSpPr>
+          <p:cNvPr id="8" name="TextBox 7"/>
           <p:cNvSpPr txBox="1"/>
           <p:nvPr/>
         </p:nvSpPr>
         <p:spPr>
           <a:xfrm>
-            <a:off x="822960" y="1920240"/>
+            <a:off x="822960" y="1965960"/>
             <a:ext cx="4983480" cy="4206240"/>
           </a:xfrm>
           <a:prstGeom prst="rect">
@@ -6051,17 +6294,17 @@
           <a:p>
             <a:pPr>
               <a:spcAft>
-                <a:spcPts val="1000"/>
+                <a:spcPts val="1100"/>
               </a:spcAft>
             </a:pPr>
             <a:r>
               <a:rPr sz="1600" b="1" i="0">
                 <a:solidFill>
-                  <a:srgbClr val="2E3A80"/>
-                </a:solidFill>
-                <a:latin typeface="Montserrat"/>
-              </a:rPr>
-              <a:t>•  </a:t>
+                  <a:srgbClr val="E8801A"/>
+                </a:solidFill>
+                <a:latin typeface="Montserrat"/>
+              </a:rPr>
+              <a:t>▸  </a:t>
             </a:r>
             <a:r>
               <a:rPr sz="1600" b="0" i="0">
@@ -6070,23 +6313,23 @@
                 </a:solidFill>
                 <a:latin typeface="Montserrat"/>
               </a:rPr>
-              <a:t>Salida frontal tipo cañón</a:t>
+              <a:t>Materiales y longitud según fabricante</a:t>
             </a:r>
           </a:p>
           <a:p>
             <a:pPr>
               <a:spcAft>
-                <a:spcPts val="1000"/>
+                <a:spcPts val="1100"/>
               </a:spcAft>
             </a:pPr>
             <a:r>
               <a:rPr sz="1600" b="1" i="0">
                 <a:solidFill>
-                  <a:srgbClr val="2E3A80"/>
-                </a:solidFill>
-                <a:latin typeface="Montserrat"/>
-              </a:rPr>
-              <a:t>•  </a:t>
+                  <a:srgbClr val="E8801A"/>
+                </a:solidFill>
+                <a:latin typeface="Montserrat"/>
+              </a:rPr>
+              <a:t>▸  </a:t>
             </a:r>
             <a:r>
               <a:rPr sz="1600" b="0" i="0">
@@ -6095,23 +6338,23 @@
                 </a:solidFill>
                 <a:latin typeface="Montserrat"/>
               </a:rPr>
-              <a:t>Asoma máximo 10 cm de la fachada</a:t>
+              <a:t>Uniones estancas y rígidas</a:t>
             </a:r>
           </a:p>
           <a:p>
             <a:pPr>
               <a:spcAft>
-                <a:spcPts val="1000"/>
+                <a:spcPts val="1100"/>
               </a:spcAft>
             </a:pPr>
             <a:r>
               <a:rPr sz="1600" b="1" i="0">
                 <a:solidFill>
-                  <a:srgbClr val="2E3A80"/>
-                </a:solidFill>
-                <a:latin typeface="Montserrat"/>
-              </a:rPr>
-              <a:t>•  </a:t>
+                  <a:srgbClr val="E8801A"/>
+                </a:solidFill>
+                <a:latin typeface="Montserrat"/>
+              </a:rPr>
+              <a:t>▸  </a:t>
             </a:r>
             <a:r>
               <a:rPr sz="1600" b="0" i="0">
@@ -6120,14 +6363,14 @@
                 </a:solidFill>
                 <a:latin typeface="Montserrat"/>
               </a:rPr>
-              <a:t>Balcón techado: 30 cm de eje al techo</a:t>
-            </a:r>
-          </a:p>
-        </p:txBody>
-      </p:sp>
-      <p:sp>
-        <p:nvSpPr>
-          <p:cNvPr id="8" name="imgph" descr="IMGQ:balanced flue terminal exterior wall"/>
+              <a:t>Sin condensación: ligera pendiente descendente</a:t>
+            </a:r>
+          </a:p>
+        </p:txBody>
+      </p:sp>
+      <p:sp>
+        <p:nvSpPr>
+          <p:cNvPr id="9" name="imgph" descr="IMGQ:condensing boiler flue installation"/>
           <p:cNvSpPr/>
           <p:nvPr/>
         </p:nvSpPr>
@@ -6173,7 +6416,7 @@
       </p:sp>
       <p:sp>
         <p:nvSpPr>
-          <p:cNvPr id="9" name="TextBox 8"/>
+          <p:cNvPr id="10" name="TextBox 9"/>
           <p:cNvSpPr txBox="1"/>
           <p:nvPr/>
         </p:nvSpPr>
@@ -6213,7 +6456,7 @@
                 </a:solidFill>
                 <a:latin typeface="Montserrat"/>
               </a:rPr>
-              <a:t>balanced flue terminal exterior wall</a:t>
+              <a:t>condensing boiler flue installation</a:t>
             </a:r>
           </a:p>
         </p:txBody>
@@ -6310,7 +6553,7 @@
                 </a:solidFill>
                 <a:latin typeface="Montserrat"/>
               </a:rPr>
-              <a:t>013 / 019</a:t>
+              <a:t>013 / 020</a:t>
             </a:r>
           </a:p>
         </p:txBody>
@@ -6358,7 +6601,7 @@
         <p:spPr>
           <a:xfrm>
             <a:off x="822960" y="457200"/>
-            <a:ext cx="8229600" cy="365760"/>
+            <a:ext cx="10058400" cy="365760"/>
           </a:xfrm>
           <a:prstGeom prst="rect">
             <a:avLst/>
@@ -6372,13 +6615,13 @@
           <a:lstStyle/>
           <a:p>
             <a:r>
-              <a:rPr sz="1200" b="1" i="0">
-                <a:solidFill>
-                  <a:srgbClr val="64748B"/>
-                </a:solidFill>
-                <a:latin typeface="Montserrat"/>
-              </a:rPr>
-              <a:t>TIRO FORZADO · DISTANCIAS</a:t>
+              <a:rPr sz="1300" b="1" i="0">
+                <a:solidFill>
+                  <a:srgbClr val="E8801A"/>
+                </a:solidFill>
+                <a:latin typeface="Montserrat"/>
+              </a:rPr>
+              <a:t>TIRO FORZADO · VENTOSA</a:t>
             </a:r>
           </a:p>
         </p:txBody>
@@ -6406,26 +6649,70 @@
           <a:lstStyle/>
           <a:p>
             <a:r>
-              <a:rPr sz="2700" b="1" i="0">
+              <a:rPr sz="2800" b="1" i="0">
                 <a:solidFill>
                   <a:srgbClr val="1E2761"/>
                 </a:solidFill>
                 <a:latin typeface="Montserrat"/>
               </a:rPr>
-              <a:t>Distancia a ventanas y orificios</a:t>
-            </a:r>
-          </a:p>
-        </p:txBody>
-      </p:sp>
-      <p:sp>
-        <p:nvSpPr>
-          <p:cNvPr id="7" name="TextBox 6"/>
+              <a:t>La ventosa: salida frontal y 10 cm</a:t>
+            </a:r>
+          </a:p>
+        </p:txBody>
+      </p:sp>
+      <p:sp>
+        <p:nvSpPr>
+          <p:cNvPr id="7" name="Rounded Rectangle 6"/>
+          <p:cNvSpPr/>
+          <p:nvPr/>
+        </p:nvSpPr>
+        <p:spPr>
+          <a:xfrm>
+            <a:off x="868680" y="1627632"/>
+            <a:ext cx="2011680" cy="73152"/>
+          </a:xfrm>
+          <a:prstGeom prst="roundRect">
+            <a:avLst/>
+          </a:prstGeom>
+          <a:solidFill>
+            <a:srgbClr val="E8801A"/>
+          </a:solidFill>
+          <a:ln>
+            <a:noFill/>
+          </a:ln>
+          <a:effectLst/>
+        </p:spPr>
+        <p:style>
+          <a:lnRef idx="1">
+            <a:schemeClr val="accent1"/>
+          </a:lnRef>
+          <a:fillRef idx="3">
+            <a:schemeClr val="accent1"/>
+          </a:fillRef>
+          <a:effectRef idx="2">
+            <a:schemeClr val="accent1"/>
+          </a:effectRef>
+          <a:fontRef idx="minor">
+            <a:schemeClr val="lt1"/>
+          </a:fontRef>
+        </p:style>
+        <p:txBody>
+          <a:bodyPr rtlCol="0" anchor="ctr"/>
+          <a:lstStyle/>
+          <a:p>
+            <a:pPr algn="ctr"/>
+          </a:p>
+        </p:txBody>
+      </p:sp>
+      <p:sp>
+        <p:nvSpPr>
+          <p:cNvPr id="8" name="TextBox 7"/>
           <p:cNvSpPr txBox="1"/>
           <p:nvPr/>
         </p:nvSpPr>
         <p:spPr>
           <a:xfrm>
-            <a:off x="822960" y="1920240"/>
+            <a:off x="822960" y="1965960"/>
             <a:ext cx="4983480" cy="4206240"/>
           </a:xfrm>
           <a:prstGeom prst="rect">
@@ -6441,17 +6728,17 @@
           <a:p>
             <a:pPr>
               <a:spcAft>
-                <a:spcPts val="1000"/>
+                <a:spcPts val="1100"/>
               </a:spcAft>
             </a:pPr>
             <a:r>
               <a:rPr sz="1600" b="1" i="0">
                 <a:solidFill>
-                  <a:srgbClr val="2E3A80"/>
-                </a:solidFill>
-                <a:latin typeface="Montserrat"/>
-              </a:rPr>
-              <a:t>•  </a:t>
+                  <a:srgbClr val="E8801A"/>
+                </a:solidFill>
+                <a:latin typeface="Montserrat"/>
+              </a:rPr>
+              <a:t>▸  </a:t>
             </a:r>
             <a:r>
               <a:rPr sz="1600" b="0" i="0">
@@ -6460,23 +6747,23 @@
                 </a:solidFill>
                 <a:latin typeface="Montserrat"/>
               </a:rPr>
-              <a:t>≥ 40 cm a orificios y ventanas</a:t>
+              <a:t>Salida frontal tipo cañón</a:t>
             </a:r>
           </a:p>
           <a:p>
             <a:pPr>
               <a:spcAft>
-                <a:spcPts val="1000"/>
+                <a:spcPts val="1100"/>
               </a:spcAft>
             </a:pPr>
             <a:r>
               <a:rPr sz="1600" b="1" i="0">
                 <a:solidFill>
-                  <a:srgbClr val="2E3A80"/>
-                </a:solidFill>
-                <a:latin typeface="Montserrat"/>
-              </a:rPr>
-              <a:t>•  </a:t>
+                  <a:srgbClr val="E8801A"/>
+                </a:solidFill>
+                <a:latin typeface="Montserrat"/>
+              </a:rPr>
+              <a:t>▸  </a:t>
             </a:r>
             <a:r>
               <a:rPr sz="1600" b="0" i="0">
@@ -6485,23 +6772,23 @@
                 </a:solidFill>
                 <a:latin typeface="Montserrat"/>
               </a:rPr>
-              <a:t>Salvo si la salida es por encima</a:t>
+              <a:t>Asoma máximo 10 cm de la fachada</a:t>
             </a:r>
           </a:p>
           <a:p>
             <a:pPr>
               <a:spcAft>
-                <a:spcPts val="1000"/>
+                <a:spcPts val="1100"/>
               </a:spcAft>
             </a:pPr>
             <a:r>
               <a:rPr sz="1600" b="1" i="0">
                 <a:solidFill>
-                  <a:srgbClr val="2E3A80"/>
-                </a:solidFill>
-                <a:latin typeface="Montserrat"/>
-              </a:rPr>
-              <a:t>•  </a:t>
+                  <a:srgbClr val="E8801A"/>
+                </a:solidFill>
+                <a:latin typeface="Montserrat"/>
+              </a:rPr>
+              <a:t>▸  </a:t>
             </a:r>
             <a:r>
               <a:rPr sz="1600" b="0" i="0">
@@ -6510,14 +6797,14 @@
                 </a:solidFill>
                 <a:latin typeface="Montserrat"/>
               </a:rPr>
-              <a:t>Con deflector, nunca menos de 20 cm</a:t>
-            </a:r>
-          </a:p>
-        </p:txBody>
-      </p:sp>
-      <p:sp>
-        <p:nvSpPr>
-          <p:cNvPr id="8" name="imgph" descr="IMGQ:boiler flue near window wall"/>
+              <a:t>Balcón techado: 30 cm de eje al techo</a:t>
+            </a:r>
+          </a:p>
+        </p:txBody>
+      </p:sp>
+      <p:sp>
+        <p:nvSpPr>
+          <p:cNvPr id="9" name="imgph" descr="IMGQ:balanced flue terminal exterior wall"/>
           <p:cNvSpPr/>
           <p:nvPr/>
         </p:nvSpPr>
@@ -6563,7 +6850,7 @@
       </p:sp>
       <p:sp>
         <p:nvSpPr>
-          <p:cNvPr id="9" name="TextBox 8"/>
+          <p:cNvPr id="10" name="TextBox 9"/>
           <p:cNvSpPr txBox="1"/>
           <p:nvPr/>
         </p:nvSpPr>
@@ -6603,7 +6890,7 @@
                 </a:solidFill>
                 <a:latin typeface="Montserrat"/>
               </a:rPr>
-              <a:t>boiler flue near window wall</a:t>
+              <a:t>balanced flue terminal exterior wall</a:t>
             </a:r>
           </a:p>
         </p:txBody>
@@ -6700,7 +6987,7 @@
                 </a:solidFill>
                 <a:latin typeface="Montserrat"/>
               </a:rPr>
-              <a:t>014 / 019</a:t>
+              <a:t>014 / 020</a:t>
             </a:r>
           </a:p>
         </p:txBody>
@@ -6748,7 +7035,7 @@
         <p:spPr>
           <a:xfrm>
             <a:off x="822960" y="457200"/>
-            <a:ext cx="8229600" cy="365760"/>
+            <a:ext cx="10058400" cy="365760"/>
           </a:xfrm>
           <a:prstGeom prst="rect">
             <a:avLst/>
@@ -6762,13 +7049,13 @@
           <a:lstStyle/>
           <a:p>
             <a:r>
-              <a:rPr sz="1200" b="1" i="0">
-                <a:solidFill>
-                  <a:srgbClr val="64748B"/>
-                </a:solidFill>
-                <a:latin typeface="Montserrat"/>
-              </a:rPr>
-              <a:t>DISTANCIAS GENERALES</a:t>
+              <a:rPr sz="1300" b="1" i="0">
+                <a:solidFill>
+                  <a:srgbClr val="E8801A"/>
+                </a:solidFill>
+                <a:latin typeface="Montserrat"/>
+              </a:rPr>
+              <a:t>TIRO FORZADO · DISTANCIAS</a:t>
             </a:r>
           </a:p>
         </p:txBody>
@@ -6796,26 +7083,70 @@
           <a:lstStyle/>
           <a:p>
             <a:r>
-              <a:rPr sz="2700" b="1" i="0">
+              <a:rPr sz="2800" b="1" i="0">
                 <a:solidFill>
                   <a:srgbClr val="1E2761"/>
                 </a:solidFill>
                 <a:latin typeface="Montserrat"/>
               </a:rPr>
-              <a:t>2,20 m sobre zona de personas</a:t>
-            </a:r>
-          </a:p>
-        </p:txBody>
-      </p:sp>
-      <p:sp>
-        <p:nvSpPr>
-          <p:cNvPr id="7" name="TextBox 6"/>
+              <a:t>Distancia a ventanas y orificios</a:t>
+            </a:r>
+          </a:p>
+        </p:txBody>
+      </p:sp>
+      <p:sp>
+        <p:nvSpPr>
+          <p:cNvPr id="7" name="Rounded Rectangle 6"/>
+          <p:cNvSpPr/>
+          <p:nvPr/>
+        </p:nvSpPr>
+        <p:spPr>
+          <a:xfrm>
+            <a:off x="868680" y="1627632"/>
+            <a:ext cx="2011680" cy="73152"/>
+          </a:xfrm>
+          <a:prstGeom prst="roundRect">
+            <a:avLst/>
+          </a:prstGeom>
+          <a:solidFill>
+            <a:srgbClr val="E8801A"/>
+          </a:solidFill>
+          <a:ln>
+            <a:noFill/>
+          </a:ln>
+          <a:effectLst/>
+        </p:spPr>
+        <p:style>
+          <a:lnRef idx="1">
+            <a:schemeClr val="accent1"/>
+          </a:lnRef>
+          <a:fillRef idx="3">
+            <a:schemeClr val="accent1"/>
+          </a:fillRef>
+          <a:effectRef idx="2">
+            <a:schemeClr val="accent1"/>
+          </a:effectRef>
+          <a:fontRef idx="minor">
+            <a:schemeClr val="lt1"/>
+          </a:fontRef>
+        </p:style>
+        <p:txBody>
+          <a:bodyPr rtlCol="0" anchor="ctr"/>
+          <a:lstStyle/>
+          <a:p>
+            <a:pPr algn="ctr"/>
+          </a:p>
+        </p:txBody>
+      </p:sp>
+      <p:sp>
+        <p:nvSpPr>
+          <p:cNvPr id="8" name="TextBox 7"/>
           <p:cNvSpPr txBox="1"/>
           <p:nvPr/>
         </p:nvSpPr>
         <p:spPr>
           <a:xfrm>
-            <a:off x="822960" y="1920240"/>
+            <a:off x="822960" y="1965960"/>
             <a:ext cx="4983480" cy="4206240"/>
           </a:xfrm>
           <a:prstGeom prst="rect">
@@ -6831,17 +7162,17 @@
           <a:p>
             <a:pPr>
               <a:spcAft>
-                <a:spcPts val="1000"/>
+                <a:spcPts val="1100"/>
               </a:spcAft>
             </a:pPr>
             <a:r>
               <a:rPr sz="1600" b="1" i="0">
                 <a:solidFill>
-                  <a:srgbClr val="2E3A80"/>
-                </a:solidFill>
-                <a:latin typeface="Montserrat"/>
-              </a:rPr>
-              <a:t>•  </a:t>
+                  <a:srgbClr val="E8801A"/>
+                </a:solidFill>
+                <a:latin typeface="Montserrat"/>
+              </a:rPr>
+              <a:t>▸  </a:t>
             </a:r>
             <a:r>
               <a:rPr sz="1600" b="0" i="0">
@@ -6850,23 +7181,23 @@
                 </a:solidFill>
                 <a:latin typeface="Montserrat"/>
               </a:rPr>
-              <a:t>Eje a ≥ 2,20 m del suelo</a:t>
+              <a:t>≥ 40 cm a orificios y ventanas</a:t>
             </a:r>
           </a:p>
           <a:p>
             <a:pPr>
               <a:spcAft>
-                <a:spcPts val="1000"/>
+                <a:spcPts val="1100"/>
               </a:spcAft>
             </a:pPr>
             <a:r>
               <a:rPr sz="1600" b="1" i="0">
                 <a:solidFill>
-                  <a:srgbClr val="2E3A80"/>
-                </a:solidFill>
-                <a:latin typeface="Montserrat"/>
-              </a:rPr>
-              <a:t>•  </a:t>
+                  <a:srgbClr val="E8801A"/>
+                </a:solidFill>
+                <a:latin typeface="Montserrat"/>
+              </a:rPr>
+              <a:t>▸  </a:t>
             </a:r>
             <a:r>
               <a:rPr sz="1600" b="0" i="0">
@@ -6875,23 +7206,23 @@
                 </a:solidFill>
                 <a:latin typeface="Montserrat"/>
               </a:rPr>
-              <a:t>Salvo salida a zona privada</a:t>
+              <a:t>Salvo si la salida es por encima</a:t>
             </a:r>
           </a:p>
           <a:p>
             <a:pPr>
               <a:spcAft>
-                <a:spcPts val="1000"/>
+                <a:spcPts val="1100"/>
               </a:spcAft>
             </a:pPr>
             <a:r>
               <a:rPr sz="1600" b="1" i="0">
                 <a:solidFill>
-                  <a:srgbClr val="2E3A80"/>
-                </a:solidFill>
-                <a:latin typeface="Montserrat"/>
-              </a:rPr>
-              <a:t>•  </a:t>
+                  <a:srgbClr val="E8801A"/>
+                </a:solidFill>
+                <a:latin typeface="Montserrat"/>
+              </a:rPr>
+              <a:t>▸  </a:t>
             </a:r>
             <a:r>
               <a:rPr sz="1600" b="0" i="0">
@@ -6900,14 +7231,14 @@
                 </a:solidFill>
                 <a:latin typeface="Montserrat"/>
               </a:rPr>
-              <a:t>Ventosa &lt; 4,2 kW protegida: exenta</a:t>
-            </a:r>
-          </a:p>
-        </p:txBody>
-      </p:sp>
-      <p:sp>
-        <p:nvSpPr>
-          <p:cNvPr id="8" name="imgph" descr="IMGQ:flue outlet above pedestrian passage"/>
+              <a:t>Con deflector, nunca menos de 20 cm</a:t>
+            </a:r>
+          </a:p>
+        </p:txBody>
+      </p:sp>
+      <p:sp>
+        <p:nvSpPr>
+          <p:cNvPr id="9" name="imgph" descr="IMGQ:boiler flue near window wall"/>
           <p:cNvSpPr/>
           <p:nvPr/>
         </p:nvSpPr>
@@ -6953,7 +7284,7 @@
       </p:sp>
       <p:sp>
         <p:nvSpPr>
-          <p:cNvPr id="9" name="TextBox 8"/>
+          <p:cNvPr id="10" name="TextBox 9"/>
           <p:cNvSpPr txBox="1"/>
           <p:nvPr/>
         </p:nvSpPr>
@@ -6993,7 +7324,7 @@
                 </a:solidFill>
                 <a:latin typeface="Montserrat"/>
               </a:rPr>
-              <a:t>flue outlet above pedestrian passage</a:t>
+              <a:t>boiler flue near window wall</a:t>
             </a:r>
           </a:p>
         </p:txBody>
@@ -7090,7 +7421,7 @@
                 </a:solidFill>
                 <a:latin typeface="Montserrat"/>
               </a:rPr>
-              <a:t>015 / 019</a:t>
+              <a:t>015 / 020</a:t>
             </a:r>
           </a:p>
         </p:txBody>
@@ -7138,7 +7469,7 @@
         <p:spPr>
           <a:xfrm>
             <a:off x="822960" y="457200"/>
-            <a:ext cx="8229600" cy="365760"/>
+            <a:ext cx="10058400" cy="365760"/>
           </a:xfrm>
           <a:prstGeom prst="rect">
             <a:avLst/>
@@ -7152,9 +7483,9 @@
           <a:lstStyle/>
           <a:p>
             <a:r>
-              <a:rPr sz="1200" b="1" i="0">
-                <a:solidFill>
-                  <a:srgbClr val="64748B"/>
+              <a:rPr sz="1300" b="1" i="0">
+                <a:solidFill>
+                  <a:srgbClr val="E8801A"/>
                 </a:solidFill>
                 <a:latin typeface="Montserrat"/>
               </a:rPr>
@@ -7186,26 +7517,70 @@
           <a:lstStyle/>
           <a:p>
             <a:r>
-              <a:rPr sz="2700" b="1" i="0">
+              <a:rPr sz="2800" b="1" i="0">
                 <a:solidFill>
                   <a:srgbClr val="1E2761"/>
                 </a:solidFill>
                 <a:latin typeface="Montserrat"/>
               </a:rPr>
-              <a:t>Distancias de fachada, con y sin deflector</a:t>
-            </a:r>
-          </a:p>
-        </p:txBody>
-      </p:sp>
-      <p:sp>
-        <p:nvSpPr>
-          <p:cNvPr id="7" name="TextBox 6"/>
+              <a:t>2,20 m sobre zona de personas</a:t>
+            </a:r>
+          </a:p>
+        </p:txBody>
+      </p:sp>
+      <p:sp>
+        <p:nvSpPr>
+          <p:cNvPr id="7" name="Rounded Rectangle 6"/>
+          <p:cNvSpPr/>
+          <p:nvPr/>
+        </p:nvSpPr>
+        <p:spPr>
+          <a:xfrm>
+            <a:off x="868680" y="1627632"/>
+            <a:ext cx="2011680" cy="73152"/>
+          </a:xfrm>
+          <a:prstGeom prst="roundRect">
+            <a:avLst/>
+          </a:prstGeom>
+          <a:solidFill>
+            <a:srgbClr val="E8801A"/>
+          </a:solidFill>
+          <a:ln>
+            <a:noFill/>
+          </a:ln>
+          <a:effectLst/>
+        </p:spPr>
+        <p:style>
+          <a:lnRef idx="1">
+            <a:schemeClr val="accent1"/>
+          </a:lnRef>
+          <a:fillRef idx="3">
+            <a:schemeClr val="accent1"/>
+          </a:fillRef>
+          <a:effectRef idx="2">
+            <a:schemeClr val="accent1"/>
+          </a:effectRef>
+          <a:fontRef idx="minor">
+            <a:schemeClr val="lt1"/>
+          </a:fontRef>
+        </p:style>
+        <p:txBody>
+          <a:bodyPr rtlCol="0" anchor="ctr"/>
+          <a:lstStyle/>
+          <a:p>
+            <a:pPr algn="ctr"/>
+          </a:p>
+        </p:txBody>
+      </p:sp>
+      <p:sp>
+        <p:nvSpPr>
+          <p:cNvPr id="8" name="TextBox 7"/>
           <p:cNvSpPr txBox="1"/>
           <p:nvPr/>
         </p:nvSpPr>
         <p:spPr>
           <a:xfrm>
-            <a:off x="822960" y="1920240"/>
+            <a:off x="822960" y="1965960"/>
             <a:ext cx="4983480" cy="4206240"/>
           </a:xfrm>
           <a:prstGeom prst="rect">
@@ -7221,17 +7596,17 @@
           <a:p>
             <a:pPr>
               <a:spcAft>
-                <a:spcPts val="1000"/>
+                <a:spcPts val="1100"/>
               </a:spcAft>
             </a:pPr>
             <a:r>
               <a:rPr sz="1600" b="1" i="0">
                 <a:solidFill>
-                  <a:srgbClr val="2E3A80"/>
-                </a:solidFill>
-                <a:latin typeface="Montserrat"/>
-              </a:rPr>
-              <a:t>•  </a:t>
+                  <a:srgbClr val="E8801A"/>
+                </a:solidFill>
+                <a:latin typeface="Montserrat"/>
+              </a:rPr>
+              <a:t>▸  </a:t>
             </a:r>
             <a:r>
               <a:rPr sz="1600" b="0" i="0">
@@ -7240,23 +7615,23 @@
                 </a:solidFill>
                 <a:latin typeface="Montserrat"/>
               </a:rPr>
-              <a:t>Laterales: 30 cm / 1 m</a:t>
+              <a:t>Eje a ≥ 2,20 m del suelo</a:t>
             </a:r>
           </a:p>
           <a:p>
             <a:pPr>
               <a:spcAft>
-                <a:spcPts val="1000"/>
+                <a:spcPts val="1100"/>
               </a:spcAft>
             </a:pPr>
             <a:r>
               <a:rPr sz="1600" b="1" i="0">
                 <a:solidFill>
-                  <a:srgbClr val="2E3A80"/>
-                </a:solidFill>
-                <a:latin typeface="Montserrat"/>
-              </a:rPr>
-              <a:t>•  </a:t>
+                  <a:srgbClr val="E8801A"/>
+                </a:solidFill>
+                <a:latin typeface="Montserrat"/>
+              </a:rPr>
+              <a:t>▸  </a:t>
             </a:r>
             <a:r>
               <a:rPr sz="1600" b="0" i="0">
@@ -7265,23 +7640,23 @@
                 </a:solidFill>
                 <a:latin typeface="Montserrat"/>
               </a:rPr>
-              <a:t>Frontales: 2 m / 3 m</a:t>
+              <a:t>Salvo salida a zona privada</a:t>
             </a:r>
           </a:p>
           <a:p>
             <a:pPr>
               <a:spcAft>
-                <a:spcPts val="1000"/>
+                <a:spcPts val="1100"/>
               </a:spcAft>
             </a:pPr>
             <a:r>
               <a:rPr sz="1600" b="1" i="0">
                 <a:solidFill>
-                  <a:srgbClr val="2E3A80"/>
-                </a:solidFill>
-                <a:latin typeface="Montserrat"/>
-              </a:rPr>
-              <a:t>•  </a:t>
+                  <a:srgbClr val="E8801A"/>
+                </a:solidFill>
+                <a:latin typeface="Montserrat"/>
+              </a:rPr>
+              <a:t>▸  </a:t>
             </a:r>
             <a:r>
               <a:rPr sz="1600" b="0" i="0">
@@ -7290,14 +7665,14 @@
                 </a:solidFill>
                 <a:latin typeface="Montserrat"/>
               </a:rPr>
-              <a:t>Entre dos salidas: 60 cm (30 con deflector)</a:t>
-            </a:r>
-          </a:p>
-        </p:txBody>
-      </p:sp>
-      <p:sp>
-        <p:nvSpPr>
-          <p:cNvPr id="8" name="imgph" descr="IMGQ:two flue terminals on facade"/>
+              <a:t>Ventosa &lt; 4,2 kW protegida: exenta</a:t>
+            </a:r>
+          </a:p>
+        </p:txBody>
+      </p:sp>
+      <p:sp>
+        <p:nvSpPr>
+          <p:cNvPr id="9" name="imgph" descr="IMGQ:flue outlet above pedestrian passage"/>
           <p:cNvSpPr/>
           <p:nvPr/>
         </p:nvSpPr>
@@ -7343,7 +7718,7 @@
       </p:sp>
       <p:sp>
         <p:nvSpPr>
-          <p:cNvPr id="9" name="TextBox 8"/>
+          <p:cNvPr id="10" name="TextBox 9"/>
           <p:cNvSpPr txBox="1"/>
           <p:nvPr/>
         </p:nvSpPr>
@@ -7383,7 +7758,7 @@
                 </a:solidFill>
                 <a:latin typeface="Montserrat"/>
               </a:rPr>
-              <a:t>two flue terminals on facade</a:t>
+              <a:t>flue outlet above pedestrian passage</a:t>
             </a:r>
           </a:p>
         </p:txBody>
@@ -7480,7 +7855,7 @@
                 </a:solidFill>
                 <a:latin typeface="Montserrat"/>
               </a:rPr>
-              <a:t>016 / 019</a:t>
+              <a:t>016 / 020</a:t>
             </a:r>
           </a:p>
         </p:txBody>
@@ -7528,7 +7903,7 @@
         <p:spPr>
           <a:xfrm>
             <a:off x="822960" y="457200"/>
-            <a:ext cx="8229600" cy="365760"/>
+            <a:ext cx="10058400" cy="365760"/>
           </a:xfrm>
           <a:prstGeom prst="rect">
             <a:avLst/>
@@ -7542,13 +7917,13 @@
           <a:lstStyle/>
           <a:p>
             <a:r>
-              <a:rPr sz="1200" b="1" i="0">
-                <a:solidFill>
-                  <a:srgbClr val="64748B"/>
-                </a:solidFill>
-                <a:latin typeface="Montserrat"/>
-              </a:rPr>
-              <a:t>REQUISITOS ADICIONALES</a:t>
+              <a:rPr sz="1300" b="1" i="0">
+                <a:solidFill>
+                  <a:srgbClr val="E8801A"/>
+                </a:solidFill>
+                <a:latin typeface="Montserrat"/>
+              </a:rPr>
+              <a:t>DISTANCIAS GENERALES</a:t>
             </a:r>
           </a:p>
         </p:txBody>
@@ -7576,26 +7951,70 @@
           <a:lstStyle/>
           <a:p>
             <a:r>
-              <a:rPr sz="2700" b="1" i="0">
+              <a:rPr sz="2800" b="1" i="0">
                 <a:solidFill>
                   <a:srgbClr val="1E2761"/>
                 </a:solidFill>
                 <a:latin typeface="Montserrat"/>
               </a:rPr>
-              <a:t>La lista de «no mezclar»</a:t>
-            </a:r>
-          </a:p>
-        </p:txBody>
-      </p:sp>
-      <p:sp>
-        <p:nvSpPr>
-          <p:cNvPr id="7" name="TextBox 6"/>
+              <a:t>Distancias de fachada, con y sin deflector</a:t>
+            </a:r>
+          </a:p>
+        </p:txBody>
+      </p:sp>
+      <p:sp>
+        <p:nvSpPr>
+          <p:cNvPr id="7" name="Rounded Rectangle 6"/>
+          <p:cNvSpPr/>
+          <p:nvPr/>
+        </p:nvSpPr>
+        <p:spPr>
+          <a:xfrm>
+            <a:off x="868680" y="1627632"/>
+            <a:ext cx="2011680" cy="73152"/>
+          </a:xfrm>
+          <a:prstGeom prst="roundRect">
+            <a:avLst/>
+          </a:prstGeom>
+          <a:solidFill>
+            <a:srgbClr val="E8801A"/>
+          </a:solidFill>
+          <a:ln>
+            <a:noFill/>
+          </a:ln>
+          <a:effectLst/>
+        </p:spPr>
+        <p:style>
+          <a:lnRef idx="1">
+            <a:schemeClr val="accent1"/>
+          </a:lnRef>
+          <a:fillRef idx="3">
+            <a:schemeClr val="accent1"/>
+          </a:fillRef>
+          <a:effectRef idx="2">
+            <a:schemeClr val="accent1"/>
+          </a:effectRef>
+          <a:fontRef idx="minor">
+            <a:schemeClr val="lt1"/>
+          </a:fontRef>
+        </p:style>
+        <p:txBody>
+          <a:bodyPr rtlCol="0" anchor="ctr"/>
+          <a:lstStyle/>
+          <a:p>
+            <a:pPr algn="ctr"/>
+          </a:p>
+        </p:txBody>
+      </p:sp>
+      <p:sp>
+        <p:nvSpPr>
+          <p:cNvPr id="8" name="TextBox 7"/>
           <p:cNvSpPr txBox="1"/>
           <p:nvPr/>
         </p:nvSpPr>
         <p:spPr>
           <a:xfrm>
-            <a:off x="822960" y="1920240"/>
+            <a:off x="822960" y="1965960"/>
             <a:ext cx="4983480" cy="4206240"/>
           </a:xfrm>
           <a:prstGeom prst="rect">
@@ -7611,17 +8030,17 @@
           <a:p>
             <a:pPr>
               <a:spcAft>
-                <a:spcPts val="1000"/>
+                <a:spcPts val="1100"/>
               </a:spcAft>
             </a:pPr>
             <a:r>
               <a:rPr sz="1600" b="1" i="0">
                 <a:solidFill>
-                  <a:srgbClr val="2E3A80"/>
-                </a:solidFill>
-                <a:latin typeface="Montserrat"/>
-              </a:rPr>
-              <a:t>•  </a:t>
+                  <a:srgbClr val="E8801A"/>
+                </a:solidFill>
+                <a:latin typeface="Montserrat"/>
+              </a:rPr>
+              <a:t>▸  </a:t>
             </a:r>
             <a:r>
               <a:rPr sz="1600" b="0" i="0">
@@ -7630,23 +8049,23 @@
                 </a:solidFill>
                 <a:latin typeface="Montserrat"/>
               </a:rPr>
-              <a:t>Tiro natural con tiro forzado: no</a:t>
+              <a:t>Laterales: 30 cm / 1 m</a:t>
             </a:r>
           </a:p>
           <a:p>
             <a:pPr>
               <a:spcAft>
-                <a:spcPts val="1000"/>
+                <a:spcPts val="1100"/>
               </a:spcAft>
             </a:pPr>
             <a:r>
               <a:rPr sz="1600" b="1" i="0">
                 <a:solidFill>
-                  <a:srgbClr val="2E3A80"/>
-                </a:solidFill>
-                <a:latin typeface="Montserrat"/>
-              </a:rPr>
-              <a:t>•  </a:t>
+                  <a:srgbClr val="E8801A"/>
+                </a:solidFill>
+                <a:latin typeface="Montserrat"/>
+              </a:rPr>
+              <a:t>▸  </a:t>
             </a:r>
             <a:r>
               <a:rPr sz="1600" b="0" i="0">
@@ -7655,23 +8074,23 @@
                 </a:solidFill>
                 <a:latin typeface="Montserrat"/>
               </a:rPr>
-              <a:t>Condensación con no condensación: no</a:t>
+              <a:t>Frontales: 2 m / 3 m</a:t>
             </a:r>
           </a:p>
           <a:p>
             <a:pPr>
               <a:spcAft>
-                <a:spcPts val="1000"/>
+                <a:spcPts val="1100"/>
               </a:spcAft>
             </a:pPr>
             <a:r>
               <a:rPr sz="1600" b="1" i="0">
                 <a:solidFill>
-                  <a:srgbClr val="2E3A80"/>
-                </a:solidFill>
-                <a:latin typeface="Montserrat"/>
-              </a:rPr>
-              <a:t>•  </a:t>
+                  <a:srgbClr val="E8801A"/>
+                </a:solidFill>
+                <a:latin typeface="Montserrat"/>
+              </a:rPr>
+              <a:t>▸  </a:t>
             </a:r>
             <a:r>
               <a:rPr sz="1600" b="0" i="0">
@@ -7680,39 +8099,14 @@
                 </a:solidFill>
                 <a:latin typeface="Montserrat"/>
               </a:rPr>
-              <a:t>Extractores y campanas: no</a:t>
-            </a:r>
-          </a:p>
-          <a:p>
-            <a:pPr>
-              <a:spcAft>
-                <a:spcPts val="1000"/>
-              </a:spcAft>
-            </a:pPr>
-            <a:r>
-              <a:rPr sz="1600" b="1" i="0">
-                <a:solidFill>
-                  <a:srgbClr val="2E3A80"/>
-                </a:solidFill>
-                <a:latin typeface="Montserrat"/>
-              </a:rPr>
-              <a:t>•  </a:t>
-            </a:r>
-            <a:r>
-              <a:rPr sz="1600" b="0" i="0">
-                <a:solidFill>
-                  <a:srgbClr val="1B2330"/>
-                </a:solidFill>
-                <a:latin typeface="Montserrat"/>
-              </a:rPr>
-              <a:t>Gas con sólidos o líquidos: no</a:t>
-            </a:r>
-          </a:p>
-        </p:txBody>
-      </p:sp>
-      <p:sp>
-        <p:nvSpPr>
-          <p:cNvPr id="8" name="imgph" descr="IMGQ:multiple flue pipes shared chimney"/>
+              <a:t>Entre dos salidas: 60 cm (30 con deflector)</a:t>
+            </a:r>
+          </a:p>
+        </p:txBody>
+      </p:sp>
+      <p:sp>
+        <p:nvSpPr>
+          <p:cNvPr id="9" name="imgph" descr="IMGQ:two flue terminals on facade"/>
           <p:cNvSpPr/>
           <p:nvPr/>
         </p:nvSpPr>
@@ -7758,7 +8152,7 @@
       </p:sp>
       <p:sp>
         <p:nvSpPr>
-          <p:cNvPr id="9" name="TextBox 8"/>
+          <p:cNvPr id="10" name="TextBox 9"/>
           <p:cNvSpPr txBox="1"/>
           <p:nvPr/>
         </p:nvSpPr>
@@ -7798,7 +8192,7 @@
                 </a:solidFill>
                 <a:latin typeface="Montserrat"/>
               </a:rPr>
-              <a:t>multiple flue pipes shared chimney</a:t>
+              <a:t>two flue terminals on facade</a:t>
             </a:r>
           </a:p>
         </p:txBody>
@@ -7895,7 +8289,7 @@
                 </a:solidFill>
                 <a:latin typeface="Montserrat"/>
               </a:rPr>
-              <a:t>017 / 019</a:t>
+              <a:t>017 / 020</a:t>
             </a:r>
           </a:p>
         </p:txBody>
@@ -7943,7 +8337,7 @@
         <p:spPr>
           <a:xfrm>
             <a:off x="822960" y="457200"/>
-            <a:ext cx="8229600" cy="365760"/>
+            <a:ext cx="10058400" cy="365760"/>
           </a:xfrm>
           <a:prstGeom prst="rect">
             <a:avLst/>
@@ -7957,9 +8351,9 @@
           <a:lstStyle/>
           <a:p>
             <a:r>
-              <a:rPr sz="1200" b="1" i="0">
-                <a:solidFill>
-                  <a:srgbClr val="64748B"/>
+              <a:rPr sz="1300" b="1" i="0">
+                <a:solidFill>
+                  <a:srgbClr val="E8801A"/>
                 </a:solidFill>
                 <a:latin typeface="Montserrat"/>
               </a:rPr>
@@ -7991,26 +8385,70 @@
           <a:lstStyle/>
           <a:p>
             <a:r>
-              <a:rPr sz="2700" b="1" i="0">
+              <a:rPr sz="2800" b="1" i="0">
                 <a:solidFill>
                   <a:srgbClr val="1E2761"/>
                 </a:solidFill>
                 <a:latin typeface="Montserrat"/>
               </a:rPr>
-              <a:t>Detalles de conductos comunes</a:t>
-            </a:r>
-          </a:p>
-        </p:txBody>
-      </p:sp>
-      <p:sp>
-        <p:nvSpPr>
-          <p:cNvPr id="7" name="TextBox 6"/>
+              <a:t>La lista de «no mezclar»</a:t>
+            </a:r>
+          </a:p>
+        </p:txBody>
+      </p:sp>
+      <p:sp>
+        <p:nvSpPr>
+          <p:cNvPr id="7" name="Rounded Rectangle 6"/>
+          <p:cNvSpPr/>
+          <p:nvPr/>
+        </p:nvSpPr>
+        <p:spPr>
+          <a:xfrm>
+            <a:off x="868680" y="1627632"/>
+            <a:ext cx="2011680" cy="73152"/>
+          </a:xfrm>
+          <a:prstGeom prst="roundRect">
+            <a:avLst/>
+          </a:prstGeom>
+          <a:solidFill>
+            <a:srgbClr val="E8801A"/>
+          </a:solidFill>
+          <a:ln>
+            <a:noFill/>
+          </a:ln>
+          <a:effectLst/>
+        </p:spPr>
+        <p:style>
+          <a:lnRef idx="1">
+            <a:schemeClr val="accent1"/>
+          </a:lnRef>
+          <a:fillRef idx="3">
+            <a:schemeClr val="accent1"/>
+          </a:fillRef>
+          <a:effectRef idx="2">
+            <a:schemeClr val="accent1"/>
+          </a:effectRef>
+          <a:fontRef idx="minor">
+            <a:schemeClr val="lt1"/>
+          </a:fontRef>
+        </p:style>
+        <p:txBody>
+          <a:bodyPr rtlCol="0" anchor="ctr"/>
+          <a:lstStyle/>
+          <a:p>
+            <a:pPr algn="ctr"/>
+          </a:p>
+        </p:txBody>
+      </p:sp>
+      <p:sp>
+        <p:nvSpPr>
+          <p:cNvPr id="8" name="TextBox 7"/>
           <p:cNvSpPr txBox="1"/>
           <p:nvPr/>
         </p:nvSpPr>
         <p:spPr>
           <a:xfrm>
-            <a:off x="822960" y="1920240"/>
+            <a:off x="822960" y="1965960"/>
             <a:ext cx="4983480" cy="4206240"/>
           </a:xfrm>
           <a:prstGeom prst="rect">
@@ -8026,17 +8464,17 @@
           <a:p>
             <a:pPr>
               <a:spcAft>
-                <a:spcPts val="1000"/>
+                <a:spcPts val="1100"/>
               </a:spcAft>
             </a:pPr>
             <a:r>
               <a:rPr sz="1600" b="1" i="0">
                 <a:solidFill>
-                  <a:srgbClr val="2E3A80"/>
-                </a:solidFill>
-                <a:latin typeface="Montserrat"/>
-              </a:rPr>
-              <a:t>•  </a:t>
+                  <a:srgbClr val="E8801A"/>
+                </a:solidFill>
+                <a:latin typeface="Montserrat"/>
+              </a:rPr>
+              <a:t>▸  </a:t>
             </a:r>
             <a:r>
               <a:rPr sz="1600" b="0" i="0">
@@ -8045,23 +8483,23 @@
                 </a:solidFill>
                 <a:latin typeface="Montserrat"/>
               </a:rPr>
-              <a:t>15 cm entre generatrices al unir</a:t>
+              <a:t>Tiro natural con tiro forzado: no</a:t>
             </a:r>
           </a:p>
           <a:p>
             <a:pPr>
               <a:spcAft>
-                <a:spcPts val="1000"/>
+                <a:spcPts val="1100"/>
               </a:spcAft>
             </a:pPr>
             <a:r>
               <a:rPr sz="1600" b="1" i="0">
                 <a:solidFill>
-                  <a:srgbClr val="2E3A80"/>
-                </a:solidFill>
-                <a:latin typeface="Montserrat"/>
-              </a:rPr>
-              <a:t>•  </a:t>
+                  <a:srgbClr val="E8801A"/>
+                </a:solidFill>
+                <a:latin typeface="Montserrat"/>
+              </a:rPr>
+              <a:t>▸  </a:t>
             </a:r>
             <a:r>
               <a:rPr sz="1600" b="0" i="0">
@@ -8070,23 +8508,23 @@
                 </a:solidFill>
                 <a:latin typeface="Montserrat"/>
               </a:rPr>
-              <a:t>Paso por madera: 10 cm más de hueco</a:t>
+              <a:t>Condensación con no condensación: no</a:t>
             </a:r>
           </a:p>
           <a:p>
             <a:pPr>
               <a:spcAft>
-                <a:spcPts val="1000"/>
+                <a:spcPts val="1100"/>
               </a:spcAft>
             </a:pPr>
             <a:r>
               <a:rPr sz="1600" b="1" i="0">
                 <a:solidFill>
-                  <a:srgbClr val="2E3A80"/>
-                </a:solidFill>
-                <a:latin typeface="Montserrat"/>
-              </a:rPr>
-              <a:t>•  </a:t>
+                  <a:srgbClr val="E8801A"/>
+                </a:solidFill>
+                <a:latin typeface="Montserrat"/>
+              </a:rPr>
+              <a:t>▸  </a:t>
             </a:r>
             <a:r>
               <a:rPr sz="1600" b="0" i="0">
@@ -8095,14 +8533,39 @@
                 </a:solidFill>
                 <a:latin typeface="Montserrat"/>
               </a:rPr>
-              <a:t>Regulación de tiro: nunca manual</a:t>
-            </a:r>
-          </a:p>
-        </p:txBody>
-      </p:sp>
-      <p:sp>
-        <p:nvSpPr>
-          <p:cNvPr id="8" name="imgph" descr="IMGQ:collective flue duct junction"/>
+              <a:t>Extractores y campanas: no</a:t>
+            </a:r>
+          </a:p>
+          <a:p>
+            <a:pPr>
+              <a:spcAft>
+                <a:spcPts val="1100"/>
+              </a:spcAft>
+            </a:pPr>
+            <a:r>
+              <a:rPr sz="1600" b="1" i="0">
+                <a:solidFill>
+                  <a:srgbClr val="E8801A"/>
+                </a:solidFill>
+                <a:latin typeface="Montserrat"/>
+              </a:rPr>
+              <a:t>▸  </a:t>
+            </a:r>
+            <a:r>
+              <a:rPr sz="1600" b="0" i="0">
+                <a:solidFill>
+                  <a:srgbClr val="1B2330"/>
+                </a:solidFill>
+                <a:latin typeface="Montserrat"/>
+              </a:rPr>
+              <a:t>Gas con sólidos o líquidos: no</a:t>
+            </a:r>
+          </a:p>
+        </p:txBody>
+      </p:sp>
+      <p:sp>
+        <p:nvSpPr>
+          <p:cNvPr id="9" name="imgph" descr="IMGQ:multiple flue pipes shared chimney"/>
           <p:cNvSpPr/>
           <p:nvPr/>
         </p:nvSpPr>
@@ -8148,7 +8611,7 @@
       </p:sp>
       <p:sp>
         <p:nvSpPr>
-          <p:cNvPr id="9" name="TextBox 8"/>
+          <p:cNvPr id="10" name="TextBox 9"/>
           <p:cNvSpPr txBox="1"/>
           <p:nvPr/>
         </p:nvSpPr>
@@ -8188,7 +8651,7 @@
                 </a:solidFill>
                 <a:latin typeface="Montserrat"/>
               </a:rPr>
-              <a:t>collective flue duct junction</a:t>
+              <a:t>multiple flue pipes shared chimney</a:t>
             </a:r>
           </a:p>
         </p:txBody>
@@ -8285,7 +8748,7 @@
                 </a:solidFill>
                 <a:latin typeface="Montserrat"/>
               </a:rPr>
-              <a:t>018 / 019</a:t>
+              <a:t>018 / 020</a:t>
             </a:r>
           </a:p>
         </p:txBody>
@@ -8333,7 +8796,7 @@
         <p:spPr>
           <a:xfrm>
             <a:off x="822960" y="457200"/>
-            <a:ext cx="8229600" cy="365760"/>
+            <a:ext cx="10058400" cy="365760"/>
           </a:xfrm>
           <a:prstGeom prst="rect">
             <a:avLst/>
@@ -8347,13 +8810,13 @@
           <a:lstStyle/>
           <a:p>
             <a:r>
-              <a:rPr sz="1200" b="1" i="0">
-                <a:solidFill>
-                  <a:srgbClr val="64748B"/>
-                </a:solidFill>
-                <a:latin typeface="Montserrat"/>
-              </a:rPr>
-              <a:t>CHIMENEAS</a:t>
+              <a:rPr sz="1300" b="1" i="0">
+                <a:solidFill>
+                  <a:srgbClr val="E8801A"/>
+                </a:solidFill>
+                <a:latin typeface="Montserrat"/>
+              </a:rPr>
+              <a:t>REQUISITOS ADICIONALES</a:t>
             </a:r>
           </a:p>
         </p:txBody>
@@ -8381,26 +8844,70 @@
           <a:lstStyle/>
           <a:p>
             <a:r>
-              <a:rPr sz="2700" b="1" i="0">
+              <a:rPr sz="2800" b="1" i="0">
                 <a:solidFill>
                   <a:srgbClr val="1E2761"/>
                 </a:solidFill>
                 <a:latin typeface="Montserrat"/>
               </a:rPr>
-              <a:t>Cada material, su norma</a:t>
-            </a:r>
-          </a:p>
-        </p:txBody>
-      </p:sp>
-      <p:sp>
-        <p:nvSpPr>
-          <p:cNvPr id="7" name="TextBox 6"/>
+              <a:t>Detalles de conductos comunes</a:t>
+            </a:r>
+          </a:p>
+        </p:txBody>
+      </p:sp>
+      <p:sp>
+        <p:nvSpPr>
+          <p:cNvPr id="7" name="Rounded Rectangle 6"/>
+          <p:cNvSpPr/>
+          <p:nvPr/>
+        </p:nvSpPr>
+        <p:spPr>
+          <a:xfrm>
+            <a:off x="868680" y="1627632"/>
+            <a:ext cx="2011680" cy="73152"/>
+          </a:xfrm>
+          <a:prstGeom prst="roundRect">
+            <a:avLst/>
+          </a:prstGeom>
+          <a:solidFill>
+            <a:srgbClr val="E8801A"/>
+          </a:solidFill>
+          <a:ln>
+            <a:noFill/>
+          </a:ln>
+          <a:effectLst/>
+        </p:spPr>
+        <p:style>
+          <a:lnRef idx="1">
+            <a:schemeClr val="accent1"/>
+          </a:lnRef>
+          <a:fillRef idx="3">
+            <a:schemeClr val="accent1"/>
+          </a:fillRef>
+          <a:effectRef idx="2">
+            <a:schemeClr val="accent1"/>
+          </a:effectRef>
+          <a:fontRef idx="minor">
+            <a:schemeClr val="lt1"/>
+          </a:fontRef>
+        </p:style>
+        <p:txBody>
+          <a:bodyPr rtlCol="0" anchor="ctr"/>
+          <a:lstStyle/>
+          <a:p>
+            <a:pPr algn="ctr"/>
+          </a:p>
+        </p:txBody>
+      </p:sp>
+      <p:sp>
+        <p:nvSpPr>
+          <p:cNvPr id="8" name="TextBox 7"/>
           <p:cNvSpPr txBox="1"/>
           <p:nvPr/>
         </p:nvSpPr>
         <p:spPr>
           <a:xfrm>
-            <a:off x="822960" y="1920240"/>
+            <a:off x="822960" y="1965960"/>
             <a:ext cx="4983480" cy="4206240"/>
           </a:xfrm>
           <a:prstGeom prst="rect">
@@ -8416,17 +8923,17 @@
           <a:p>
             <a:pPr>
               <a:spcAft>
-                <a:spcPts val="1000"/>
+                <a:spcPts val="1100"/>
               </a:spcAft>
             </a:pPr>
             <a:r>
               <a:rPr sz="1600" b="1" i="0">
                 <a:solidFill>
-                  <a:srgbClr val="2E3A80"/>
-                </a:solidFill>
-                <a:latin typeface="Montserrat"/>
-              </a:rPr>
-              <a:t>•  </a:t>
+                  <a:srgbClr val="E8801A"/>
+                </a:solidFill>
+                <a:latin typeface="Montserrat"/>
+              </a:rPr>
+              <a:t>▸  </a:t>
             </a:r>
             <a:r>
               <a:rPr sz="1600" b="0" i="0">
@@ -8435,23 +8942,23 @@
                 </a:solidFill>
                 <a:latin typeface="Montserrat"/>
               </a:rPr>
-              <a:t>Metálica: UNE-EN 1856-1</a:t>
+              <a:t>15 cm entre generatrices al unir</a:t>
             </a:r>
           </a:p>
           <a:p>
             <a:pPr>
               <a:spcAft>
-                <a:spcPts val="1000"/>
+                <a:spcPts val="1100"/>
               </a:spcAft>
             </a:pPr>
             <a:r>
               <a:rPr sz="1600" b="1" i="0">
                 <a:solidFill>
-                  <a:srgbClr val="2E3A80"/>
-                </a:solidFill>
-                <a:latin typeface="Montserrat"/>
-              </a:rPr>
-              <a:t>•  </a:t>
+                  <a:srgbClr val="E8801A"/>
+                </a:solidFill>
+                <a:latin typeface="Montserrat"/>
+              </a:rPr>
+              <a:t>▸  </a:t>
             </a:r>
             <a:r>
               <a:rPr sz="1600" b="0" i="0">
@@ -8460,23 +8967,23 @@
                 </a:solidFill>
                 <a:latin typeface="Montserrat"/>
               </a:rPr>
-              <a:t>No metálica: NTE-ISH-74</a:t>
+              <a:t>Paso por madera: 10 cm más de hueco</a:t>
             </a:r>
           </a:p>
           <a:p>
             <a:pPr>
               <a:spcAft>
-                <a:spcPts val="1000"/>
+                <a:spcPts val="1100"/>
               </a:spcAft>
             </a:pPr>
             <a:r>
               <a:rPr sz="1600" b="1" i="0">
                 <a:solidFill>
-                  <a:srgbClr val="2E3A80"/>
-                </a:solidFill>
-                <a:latin typeface="Montserrat"/>
-              </a:rPr>
-              <a:t>•  </a:t>
+                  <a:srgbClr val="E8801A"/>
+                </a:solidFill>
+                <a:latin typeface="Montserrat"/>
+              </a:rPr>
+              <a:t>▸  </a:t>
             </a:r>
             <a:r>
               <a:rPr sz="1600" b="0" i="0">
@@ -8485,14 +8992,14 @@
                 </a:solidFill>
                 <a:latin typeface="Montserrat"/>
               </a:rPr>
-              <a:t>Plástico: UNE-EN 14471</a:t>
-            </a:r>
-          </a:p>
-        </p:txBody>
-      </p:sp>
-      <p:sp>
-        <p:nvSpPr>
-          <p:cNvPr id="8" name="imgph" descr="IMGQ:rooftop chimney cap terminal"/>
+              <a:t>Regulación de tiro: nunca manual</a:t>
+            </a:r>
+          </a:p>
+        </p:txBody>
+      </p:sp>
+      <p:sp>
+        <p:nvSpPr>
+          <p:cNvPr id="9" name="imgph" descr="IMGQ:collective flue duct junction"/>
           <p:cNvSpPr/>
           <p:nvPr/>
         </p:nvSpPr>
@@ -8538,7 +9045,7 @@
       </p:sp>
       <p:sp>
         <p:nvSpPr>
-          <p:cNvPr id="9" name="TextBox 8"/>
+          <p:cNvPr id="10" name="TextBox 9"/>
           <p:cNvSpPr txBox="1"/>
           <p:nvPr/>
         </p:nvSpPr>
@@ -8578,7 +9085,7 @@
                 </a:solidFill>
                 <a:latin typeface="Montserrat"/>
               </a:rPr>
-              <a:t>rooftop chimney cap terminal</a:t>
+              <a:t>collective flue duct junction</a:t>
             </a:r>
           </a:p>
         </p:txBody>
@@ -8616,7 +9123,7 @@
             <a:avLst/>
           </a:prstGeom>
           <a:solidFill>
-            <a:srgbClr val="1E2761"/>
+            <a:srgbClr val="FFFFFF"/>
           </a:solidFill>
           <a:ln>
             <a:noFill/>
@@ -8653,8 +9160,8 @@
         </p:nvSpPr>
         <p:spPr>
           <a:xfrm>
-            <a:off x="822960" y="640080"/>
-            <a:ext cx="10515600" cy="457200"/>
+            <a:off x="10607040" y="320040"/>
+            <a:ext cx="1371600" cy="365760"/>
           </a:xfrm>
           <a:prstGeom prst="rect">
             <a:avLst/>
@@ -8667,14 +9174,15 @@
           </a:bodyPr>
           <a:lstStyle/>
           <a:p>
-            <a:r>
-              <a:rPr sz="1400" b="1" i="0">
-                <a:solidFill>
-                  <a:srgbClr val="CADCFC"/>
-                </a:solidFill>
-                <a:latin typeface="Montserrat"/>
-              </a:rPr>
-              <a:t>LO QUE YA DOMINAS</a:t>
+            <a:pPr algn="r"/>
+            <a:r>
+              <a:rPr sz="1000" b="1" i="0">
+                <a:solidFill>
+                  <a:srgbClr val="64748B"/>
+                </a:solidFill>
+                <a:latin typeface="Montserrat"/>
+              </a:rPr>
+              <a:t>019 / 020</a:t>
             </a:r>
           </a:p>
         </p:txBody>
@@ -8687,8 +9195,8 @@
         </p:nvSpPr>
         <p:spPr>
           <a:xfrm>
-            <a:off x="822960" y="1143000"/>
-            <a:ext cx="10515600" cy="1097280"/>
+            <a:off x="457200" y="6419088"/>
+            <a:ext cx="8229600" cy="365760"/>
           </a:xfrm>
           <a:prstGeom prst="rect">
             <a:avLst/>
@@ -8702,13 +9210,13 @@
           <a:lstStyle/>
           <a:p>
             <a:r>
-              <a:rPr sz="3400" b="1" i="0">
-                <a:solidFill>
-                  <a:srgbClr val="FFFFFF"/>
-                </a:solidFill>
-                <a:latin typeface="Montserrat"/>
-              </a:rPr>
-              <a:t>Ya sacas los humos de casa con seguridad</a:t>
+              <a:rPr sz="900" b="0" i="0">
+                <a:solidFill>
+                  <a:srgbClr val="64748B"/>
+                </a:solidFill>
+                <a:latin typeface="Montserrat"/>
+              </a:rPr>
+              <a:t>Curso Gas B · Tema 13 · UNE 60670-6</a:t>
             </a:r>
           </a:p>
         </p:txBody>
@@ -8721,8 +9229,8 @@
         </p:nvSpPr>
         <p:spPr>
           <a:xfrm>
-            <a:off x="822960" y="2514600"/>
-            <a:ext cx="10515600" cy="2834640"/>
+            <a:off x="822960" y="457200"/>
+            <a:ext cx="10058400" cy="365760"/>
           </a:xfrm>
           <a:prstGeom prst="rect">
             <a:avLst/>
@@ -8735,123 +9243,68 @@
           </a:bodyPr>
           <a:lstStyle/>
           <a:p>
-            <a:pPr>
-              <a:spcAft>
-                <a:spcPts val="1200"/>
-              </a:spcAft>
-            </a:pPr>
-            <a:r>
-              <a:rPr sz="2000" b="1" i="0">
-                <a:solidFill>
-                  <a:srgbClr val="CADCFC"/>
-                </a:solidFill>
-                <a:latin typeface="Montserrat"/>
-              </a:rPr>
-              <a:t>✓  </a:t>
-            </a:r>
-            <a:r>
-              <a:rPr sz="1900" b="0" i="0">
-                <a:solidFill>
-                  <a:srgbClr val="FFFFFF"/>
-                </a:solidFill>
-                <a:latin typeface="Montserrat"/>
-              </a:rPr>
-              <a:t>Solo B y C evacúan; conducto liso, estanco y con orificio de 11 mm</a:t>
-            </a:r>
-          </a:p>
-          <a:p>
-            <a:pPr>
-              <a:spcAft>
-                <a:spcPts val="1200"/>
-              </a:spcAft>
-            </a:pPr>
-            <a:r>
-              <a:rPr sz="2000" b="1" i="0">
-                <a:solidFill>
-                  <a:srgbClr val="CADCFC"/>
-                </a:solidFill>
-                <a:latin typeface="Montserrat"/>
-              </a:rPr>
-              <a:t>✓  </a:t>
-            </a:r>
-            <a:r>
-              <a:rPr sz="1900" b="0" i="0">
-                <a:solidFill>
-                  <a:srgbClr val="FFFFFF"/>
-                </a:solidFill>
-                <a:latin typeface="Montserrat"/>
-              </a:rPr>
-              <a:t>Tiro natural: diámetro por tabla y puntuación ≥ +1</a:t>
-            </a:r>
-          </a:p>
-          <a:p>
-            <a:pPr>
-              <a:spcAft>
-                <a:spcPts val="1200"/>
-              </a:spcAft>
-            </a:pPr>
-            <a:r>
-              <a:rPr sz="2000" b="1" i="0">
-                <a:solidFill>
-                  <a:srgbClr val="CADCFC"/>
-                </a:solidFill>
-                <a:latin typeface="Montserrat"/>
-              </a:rPr>
-              <a:t>✓  </a:t>
-            </a:r>
-            <a:r>
-              <a:rPr sz="1900" b="0" i="0">
-                <a:solidFill>
-                  <a:srgbClr val="FFFFFF"/>
-                </a:solidFill>
-                <a:latin typeface="Montserrat"/>
-              </a:rPr>
-              <a:t>Ventosa: todo del fabricante y el 40 cm a ventanas</a:t>
-            </a:r>
-          </a:p>
-          <a:p>
-            <a:pPr>
-              <a:spcAft>
-                <a:spcPts val="1200"/>
-              </a:spcAft>
-            </a:pPr>
-            <a:r>
-              <a:rPr sz="2000" b="1" i="0">
-                <a:solidFill>
-                  <a:srgbClr val="CADCFC"/>
-                </a:solidFill>
-                <a:latin typeface="Montserrat"/>
-              </a:rPr>
-              <a:t>✓  </a:t>
-            </a:r>
-            <a:r>
-              <a:rPr sz="1900" b="0" i="0">
-                <a:solidFill>
-                  <a:srgbClr val="FFFFFF"/>
-                </a:solidFill>
-                <a:latin typeface="Montserrat"/>
-              </a:rPr>
-              <a:t>La lista de «no mezclar» en una misma chimenea</a:t>
-            </a:r>
-          </a:p>
-        </p:txBody>
-      </p:sp>
-      <p:sp>
-        <p:nvSpPr>
-          <p:cNvPr id="6" name="Rounded Rectangle 5"/>
+            <a:r>
+              <a:rPr sz="1300" b="1" i="0">
+                <a:solidFill>
+                  <a:srgbClr val="E8801A"/>
+                </a:solidFill>
+                <a:latin typeface="Montserrat"/>
+              </a:rPr>
+              <a:t>CHIMENEAS</a:t>
+            </a:r>
+          </a:p>
+        </p:txBody>
+      </p:sp>
+      <p:sp>
+        <p:nvSpPr>
+          <p:cNvPr id="6" name="TextBox 5"/>
+          <p:cNvSpPr txBox="1"/>
+          <p:nvPr/>
+        </p:nvSpPr>
+        <p:spPr>
+          <a:xfrm>
+            <a:off x="822960" y="868680"/>
+            <a:ext cx="10515600" cy="914400"/>
+          </a:xfrm>
+          <a:prstGeom prst="rect">
+            <a:avLst/>
+          </a:prstGeom>
+          <a:noFill/>
+        </p:spPr>
+        <p:txBody>
+          <a:bodyPr wrap="square">
+            <a:spAutoFit/>
+          </a:bodyPr>
+          <a:lstStyle/>
+          <a:p>
+            <a:r>
+              <a:rPr sz="2800" b="1" i="0">
+                <a:solidFill>
+                  <a:srgbClr val="1E2761"/>
+                </a:solidFill>
+                <a:latin typeface="Montserrat"/>
+              </a:rPr>
+              <a:t>Cada material, su norma</a:t>
+            </a:r>
+          </a:p>
+        </p:txBody>
+      </p:sp>
+      <p:sp>
+        <p:nvSpPr>
+          <p:cNvPr id="7" name="Rounded Rectangle 6"/>
           <p:cNvSpPr/>
           <p:nvPr/>
         </p:nvSpPr>
         <p:spPr>
           <a:xfrm>
-            <a:off x="822960" y="5532120"/>
-            <a:ext cx="10515600" cy="777240"/>
+            <a:off x="868680" y="1627632"/>
+            <a:ext cx="2011680" cy="73152"/>
           </a:xfrm>
           <a:prstGeom prst="roundRect">
             <a:avLst/>
           </a:prstGeom>
           <a:solidFill>
-            <a:srgbClr val="2E3A80"/>
+            <a:srgbClr val="E8801A"/>
           </a:solidFill>
           <a:ln>
             <a:noFill/>
@@ -8882,14 +9335,14 @@
       </p:sp>
       <p:sp>
         <p:nvSpPr>
-          <p:cNvPr id="7" name="TextBox 6"/>
+          <p:cNvPr id="8" name="TextBox 7"/>
           <p:cNvSpPr txBox="1"/>
           <p:nvPr/>
         </p:nvSpPr>
         <p:spPr>
           <a:xfrm>
-            <a:off x="1051560" y="5605272"/>
-            <a:ext cx="10058400" cy="640080"/>
+            <a:off x="822960" y="1965960"/>
+            <a:ext cx="4983480" cy="4206240"/>
           </a:xfrm>
           <a:prstGeom prst="rect">
             <a:avLst/>
@@ -8902,14 +9355,171 @@
           </a:bodyPr>
           <a:lstStyle/>
           <a:p>
-            <a:r>
-              <a:rPr sz="1500" b="1" i="1">
-                <a:solidFill>
-                  <a:srgbClr val="CADCFC"/>
-                </a:solidFill>
-                <a:latin typeface="Montserrat"/>
-              </a:rPr>
-              <a:t>Una evacuación bien resuelta es lo que firma tu boletín y cierra el tema. ¡Enhorabuena!</a:t>
+            <a:pPr>
+              <a:spcAft>
+                <a:spcPts val="1100"/>
+              </a:spcAft>
+            </a:pPr>
+            <a:r>
+              <a:rPr sz="1600" b="1" i="0">
+                <a:solidFill>
+                  <a:srgbClr val="E8801A"/>
+                </a:solidFill>
+                <a:latin typeface="Montserrat"/>
+              </a:rPr>
+              <a:t>▸  </a:t>
+            </a:r>
+            <a:r>
+              <a:rPr sz="1600" b="0" i="0">
+                <a:solidFill>
+                  <a:srgbClr val="1B2330"/>
+                </a:solidFill>
+                <a:latin typeface="Montserrat"/>
+              </a:rPr>
+              <a:t>Metálica: UNE-EN 1856-1</a:t>
+            </a:r>
+          </a:p>
+          <a:p>
+            <a:pPr>
+              <a:spcAft>
+                <a:spcPts val="1100"/>
+              </a:spcAft>
+            </a:pPr>
+            <a:r>
+              <a:rPr sz="1600" b="1" i="0">
+                <a:solidFill>
+                  <a:srgbClr val="E8801A"/>
+                </a:solidFill>
+                <a:latin typeface="Montserrat"/>
+              </a:rPr>
+              <a:t>▸  </a:t>
+            </a:r>
+            <a:r>
+              <a:rPr sz="1600" b="0" i="0">
+                <a:solidFill>
+                  <a:srgbClr val="1B2330"/>
+                </a:solidFill>
+                <a:latin typeface="Montserrat"/>
+              </a:rPr>
+              <a:t>No metálica: NTE-ISH-74</a:t>
+            </a:r>
+          </a:p>
+          <a:p>
+            <a:pPr>
+              <a:spcAft>
+                <a:spcPts val="1100"/>
+              </a:spcAft>
+            </a:pPr>
+            <a:r>
+              <a:rPr sz="1600" b="1" i="0">
+                <a:solidFill>
+                  <a:srgbClr val="E8801A"/>
+                </a:solidFill>
+                <a:latin typeface="Montserrat"/>
+              </a:rPr>
+              <a:t>▸  </a:t>
+            </a:r>
+            <a:r>
+              <a:rPr sz="1600" b="0" i="0">
+                <a:solidFill>
+                  <a:srgbClr val="1B2330"/>
+                </a:solidFill>
+                <a:latin typeface="Montserrat"/>
+              </a:rPr>
+              <a:t>Plástico: UNE-EN 14471</a:t>
+            </a:r>
+          </a:p>
+        </p:txBody>
+      </p:sp>
+      <p:sp>
+        <p:nvSpPr>
+          <p:cNvPr id="9" name="imgph" descr="IMGQ:rooftop chimney cap terminal"/>
+          <p:cNvSpPr/>
+          <p:nvPr/>
+        </p:nvSpPr>
+        <p:spPr>
+          <a:xfrm>
+            <a:off x="5806440" y="1051560"/>
+            <a:ext cx="5298947" cy="4629150"/>
+          </a:xfrm>
+          <a:prstGeom prst="roundRect">
+            <a:avLst/>
+          </a:prstGeom>
+          <a:solidFill>
+            <a:srgbClr val="F3F6FB"/>
+          </a:solidFill>
+          <a:ln w="12700">
+            <a:solidFill>
+              <a:srgbClr val="C7D2E6"/>
+            </a:solidFill>
+          </a:ln>
+          <a:effectLst/>
+        </p:spPr>
+        <p:style>
+          <a:lnRef idx="1">
+            <a:schemeClr val="accent1"/>
+          </a:lnRef>
+          <a:fillRef idx="3">
+            <a:schemeClr val="accent1"/>
+          </a:fillRef>
+          <a:effectRef idx="2">
+            <a:schemeClr val="accent1"/>
+          </a:effectRef>
+          <a:fontRef idx="minor">
+            <a:schemeClr val="lt1"/>
+          </a:fontRef>
+        </p:style>
+        <p:txBody>
+          <a:bodyPr rtlCol="0" anchor="ctr"/>
+          <a:lstStyle/>
+          <a:p>
+            <a:pPr algn="ctr"/>
+          </a:p>
+        </p:txBody>
+      </p:sp>
+      <p:sp>
+        <p:nvSpPr>
+          <p:cNvPr id="10" name="TextBox 9"/>
+          <p:cNvSpPr txBox="1"/>
+          <p:nvPr/>
+        </p:nvSpPr>
+        <p:spPr>
+          <a:xfrm>
+            <a:off x="6080760" y="2726055"/>
+            <a:ext cx="4750307" cy="1280160"/>
+          </a:xfrm>
+          <a:prstGeom prst="rect">
+            <a:avLst/>
+          </a:prstGeom>
+          <a:noFill/>
+        </p:spPr>
+        <p:txBody>
+          <a:bodyPr wrap="square">
+            <a:spAutoFit/>
+          </a:bodyPr>
+          <a:lstStyle/>
+          <a:p>
+            <a:pPr algn="ctr"/>
+            <a:r>
+              <a:rPr sz="1400" b="1" i="0">
+                <a:solidFill>
+                  <a:srgbClr val="64748B"/>
+                </a:solidFill>
+                <a:latin typeface="Montserrat"/>
+              </a:rPr>
+              <a:t>IMAGEN REALISTA</a:t>
+            </a:r>
+          </a:p>
+          <a:p>
+            <a:pPr algn="ctr"/>
+            <a:r>
+              <a:rPr sz="1100" b="0" i="1">
+                <a:solidFill>
+                  <a:srgbClr val="64748B"/>
+                </a:solidFill>
+                <a:latin typeface="Montserrat"/>
+              </a:rPr>
+              <a:t>rooftop chimney cap terminal</a:t>
             </a:r>
           </a:p>
         </p:txBody>
@@ -9006,7 +9616,7 @@
                 </a:solidFill>
                 <a:latin typeface="Montserrat"/>
               </a:rPr>
-              <a:t>002 / 019</a:t>
+              <a:t>002 / 020</a:t>
             </a:r>
           </a:p>
         </p:txBody>
@@ -9070,7 +9680,7 @@
             <a:r>
               <a:rPr sz="2700" b="1" i="0">
                 <a:solidFill>
-                  <a:srgbClr val="1E2761"/>
+                  <a:srgbClr val="E8801A"/>
                 </a:solidFill>
                 <a:latin typeface="Montserrat"/>
               </a:rPr>
@@ -9082,6 +9692,50 @@
       <p:sp>
         <p:nvSpPr>
           <p:cNvPr id="6" name="Rounded Rectangle 5"/>
+          <p:cNvSpPr/>
+          <p:nvPr/>
+        </p:nvSpPr>
+        <p:spPr>
+          <a:xfrm>
+            <a:off x="868680" y="1234440"/>
+            <a:ext cx="1463040" cy="73152"/>
+          </a:xfrm>
+          <a:prstGeom prst="roundRect">
+            <a:avLst/>
+          </a:prstGeom>
+          <a:solidFill>
+            <a:srgbClr val="1E2761"/>
+          </a:solidFill>
+          <a:ln>
+            <a:noFill/>
+          </a:ln>
+          <a:effectLst/>
+        </p:spPr>
+        <p:style>
+          <a:lnRef idx="1">
+            <a:schemeClr val="accent1"/>
+          </a:lnRef>
+          <a:fillRef idx="3">
+            <a:schemeClr val="accent1"/>
+          </a:fillRef>
+          <a:effectRef idx="2">
+            <a:schemeClr val="accent1"/>
+          </a:effectRef>
+          <a:fontRef idx="minor">
+            <a:schemeClr val="lt1"/>
+          </a:fontRef>
+        </p:style>
+        <p:txBody>
+          <a:bodyPr rtlCol="0" anchor="ctr"/>
+          <a:lstStyle/>
+          <a:p>
+            <a:pPr algn="ctr"/>
+          </a:p>
+        </p:txBody>
+      </p:sp>
+      <p:sp>
+        <p:nvSpPr>
+          <p:cNvPr id="7" name="Rounded Rectangle 6"/>
           <p:cNvSpPr/>
           <p:nvPr/>
         </p:nvSpPr>
@@ -9127,7 +9781,7 @@
       </p:sp>
       <p:sp>
         <p:nvSpPr>
-          <p:cNvPr id="7" name="TextBox 6"/>
+          <p:cNvPr id="8" name="TextBox 7"/>
           <p:cNvSpPr txBox="1"/>
           <p:nvPr/>
         </p:nvSpPr>
@@ -9162,7 +9816,7 @@
       </p:sp>
       <p:sp>
         <p:nvSpPr>
-          <p:cNvPr id="8" name="TextBox 7"/>
+          <p:cNvPr id="9" name="TextBox 8"/>
           <p:cNvSpPr txBox="1"/>
           <p:nvPr/>
         </p:nvSpPr>
@@ -9197,7 +9851,7 @@
       </p:sp>
       <p:sp>
         <p:nvSpPr>
-          <p:cNvPr id="9" name="Rounded Rectangle 8"/>
+          <p:cNvPr id="10" name="Rounded Rectangle 9"/>
           <p:cNvSpPr/>
           <p:nvPr/>
         </p:nvSpPr>
@@ -9243,7 +9897,7 @@
       </p:sp>
       <p:sp>
         <p:nvSpPr>
-          <p:cNvPr id="10" name="TextBox 9"/>
+          <p:cNvPr id="11" name="TextBox 10"/>
           <p:cNvSpPr txBox="1"/>
           <p:nvPr/>
         </p:nvSpPr>
@@ -9278,7 +9932,7 @@
       </p:sp>
       <p:sp>
         <p:nvSpPr>
-          <p:cNvPr id="11" name="TextBox 10"/>
+          <p:cNvPr id="12" name="TextBox 11"/>
           <p:cNvSpPr txBox="1"/>
           <p:nvPr/>
         </p:nvSpPr>
@@ -9313,7 +9967,7 @@
       </p:sp>
       <p:sp>
         <p:nvSpPr>
-          <p:cNvPr id="12" name="Rounded Rectangle 11"/>
+          <p:cNvPr id="13" name="Rounded Rectangle 12"/>
           <p:cNvSpPr/>
           <p:nvPr/>
         </p:nvSpPr>
@@ -9359,7 +10013,7 @@
       </p:sp>
       <p:sp>
         <p:nvSpPr>
-          <p:cNvPr id="13" name="TextBox 12"/>
+          <p:cNvPr id="14" name="TextBox 13"/>
           <p:cNvSpPr txBox="1"/>
           <p:nvPr/>
         </p:nvSpPr>
@@ -9394,7 +10048,7 @@
       </p:sp>
       <p:sp>
         <p:nvSpPr>
-          <p:cNvPr id="14" name="TextBox 13"/>
+          <p:cNvPr id="15" name="TextBox 14"/>
           <p:cNvSpPr txBox="1"/>
           <p:nvPr/>
         </p:nvSpPr>
@@ -9423,6 +10077,381 @@
                 <a:latin typeface="Montserrat"/>
               </a:rPr>
               <a:t>altura sobre zona de personas</a:t>
+            </a:r>
+          </a:p>
+        </p:txBody>
+      </p:sp>
+    </p:spTree>
+  </p:cSld>
+  <p:clrMapOvr>
+    <a:masterClrMapping/>
+  </p:clrMapOvr>
+</p:sld>
+</file>
+
+<file path=ppt/slides/slide20.xml><?xml version="1.0" encoding="utf-8"?>
+<p:sld xmlns:a="http://schemas.openxmlformats.org/drawingml/2006/main" xmlns:p="http://schemas.openxmlformats.org/presentationml/2006/main" xmlns:r="http://schemas.openxmlformats.org/officeDocument/2006/relationships">
+  <p:cSld>
+    <p:spTree>
+      <p:nvGrpSpPr>
+        <p:cNvPr id="1" name=""/>
+        <p:cNvGrpSpPr/>
+        <p:nvPr/>
+      </p:nvGrpSpPr>
+      <p:grpSpPr/>
+      <p:sp>
+        <p:nvSpPr>
+          <p:cNvPr id="2" name="Rectangle 1"/>
+          <p:cNvSpPr/>
+          <p:nvPr/>
+        </p:nvSpPr>
+        <p:spPr>
+          <a:xfrm>
+            <a:off x="0" y="0"/>
+            <a:ext cx="12191695" cy="6858000"/>
+          </a:xfrm>
+          <a:prstGeom prst="rect">
+            <a:avLst/>
+          </a:prstGeom>
+          <a:solidFill>
+            <a:srgbClr val="1E2761"/>
+          </a:solidFill>
+          <a:ln>
+            <a:noFill/>
+          </a:ln>
+          <a:effectLst/>
+        </p:spPr>
+        <p:style>
+          <a:lnRef idx="1">
+            <a:schemeClr val="accent1"/>
+          </a:lnRef>
+          <a:fillRef idx="3">
+            <a:schemeClr val="accent1"/>
+          </a:fillRef>
+          <a:effectRef idx="2">
+            <a:schemeClr val="accent1"/>
+          </a:effectRef>
+          <a:fontRef idx="minor">
+            <a:schemeClr val="lt1"/>
+          </a:fontRef>
+        </p:style>
+        <p:txBody>
+          <a:bodyPr rtlCol="0" anchor="ctr"/>
+          <a:lstStyle/>
+          <a:p>
+            <a:pPr algn="ctr"/>
+          </a:p>
+        </p:txBody>
+      </p:sp>
+      <p:sp>
+        <p:nvSpPr>
+          <p:cNvPr id="3" name="TextBox 2"/>
+          <p:cNvSpPr txBox="1"/>
+          <p:nvPr/>
+        </p:nvSpPr>
+        <p:spPr>
+          <a:xfrm>
+            <a:off x="822960" y="640080"/>
+            <a:ext cx="10515600" cy="457200"/>
+          </a:xfrm>
+          <a:prstGeom prst="rect">
+            <a:avLst/>
+          </a:prstGeom>
+          <a:noFill/>
+        </p:spPr>
+        <p:txBody>
+          <a:bodyPr wrap="square">
+            <a:spAutoFit/>
+          </a:bodyPr>
+          <a:lstStyle/>
+          <a:p>
+            <a:r>
+              <a:rPr sz="1400" b="1" i="0">
+                <a:solidFill>
+                  <a:srgbClr val="F4A24C"/>
+                </a:solidFill>
+                <a:latin typeface="Montserrat"/>
+              </a:rPr>
+              <a:t>LO QUE YA DOMINAS</a:t>
+            </a:r>
+          </a:p>
+        </p:txBody>
+      </p:sp>
+      <p:sp>
+        <p:nvSpPr>
+          <p:cNvPr id="4" name="Rounded Rectangle 3"/>
+          <p:cNvSpPr/>
+          <p:nvPr/>
+        </p:nvSpPr>
+        <p:spPr>
+          <a:xfrm>
+            <a:off x="868680" y="1051560"/>
+            <a:ext cx="1463040" cy="82296"/>
+          </a:xfrm>
+          <a:prstGeom prst="roundRect">
+            <a:avLst/>
+          </a:prstGeom>
+          <a:solidFill>
+            <a:srgbClr val="E8801A"/>
+          </a:solidFill>
+          <a:ln>
+            <a:noFill/>
+          </a:ln>
+          <a:effectLst/>
+        </p:spPr>
+        <p:style>
+          <a:lnRef idx="1">
+            <a:schemeClr val="accent1"/>
+          </a:lnRef>
+          <a:fillRef idx="3">
+            <a:schemeClr val="accent1"/>
+          </a:fillRef>
+          <a:effectRef idx="2">
+            <a:schemeClr val="accent1"/>
+          </a:effectRef>
+          <a:fontRef idx="minor">
+            <a:schemeClr val="lt1"/>
+          </a:fontRef>
+        </p:style>
+        <p:txBody>
+          <a:bodyPr rtlCol="0" anchor="ctr"/>
+          <a:lstStyle/>
+          <a:p>
+            <a:pPr algn="ctr"/>
+          </a:p>
+        </p:txBody>
+      </p:sp>
+      <p:sp>
+        <p:nvSpPr>
+          <p:cNvPr id="5" name="TextBox 4"/>
+          <p:cNvSpPr txBox="1"/>
+          <p:nvPr/>
+        </p:nvSpPr>
+        <p:spPr>
+          <a:xfrm>
+            <a:off x="822960" y="1234440"/>
+            <a:ext cx="10515600" cy="1097280"/>
+          </a:xfrm>
+          <a:prstGeom prst="rect">
+            <a:avLst/>
+          </a:prstGeom>
+          <a:noFill/>
+        </p:spPr>
+        <p:txBody>
+          <a:bodyPr wrap="square">
+            <a:spAutoFit/>
+          </a:bodyPr>
+          <a:lstStyle/>
+          <a:p>
+            <a:r>
+              <a:rPr sz="3400" b="1" i="0">
+                <a:solidFill>
+                  <a:srgbClr val="FFFFFF"/>
+                </a:solidFill>
+                <a:latin typeface="Montserrat"/>
+              </a:rPr>
+              <a:t>Ya sacas los humos de casa con seguridad</a:t>
+            </a:r>
+          </a:p>
+        </p:txBody>
+      </p:sp>
+      <p:sp>
+        <p:nvSpPr>
+          <p:cNvPr id="6" name="TextBox 5"/>
+          <p:cNvSpPr txBox="1"/>
+          <p:nvPr/>
+        </p:nvSpPr>
+        <p:spPr>
+          <a:xfrm>
+            <a:off x="822960" y="2606040"/>
+            <a:ext cx="10515600" cy="2743200"/>
+          </a:xfrm>
+          <a:prstGeom prst="rect">
+            <a:avLst/>
+          </a:prstGeom>
+          <a:noFill/>
+        </p:spPr>
+        <p:txBody>
+          <a:bodyPr wrap="square">
+            <a:spAutoFit/>
+          </a:bodyPr>
+          <a:lstStyle/>
+          <a:p>
+            <a:pPr>
+              <a:spcAft>
+                <a:spcPts val="1200"/>
+              </a:spcAft>
+            </a:pPr>
+            <a:r>
+              <a:rPr sz="2000" b="1" i="0">
+                <a:solidFill>
+                  <a:srgbClr val="F4A24C"/>
+                </a:solidFill>
+                <a:latin typeface="Montserrat"/>
+              </a:rPr>
+              <a:t>✓  </a:t>
+            </a:r>
+            <a:r>
+              <a:rPr sz="1900" b="0" i="0">
+                <a:solidFill>
+                  <a:srgbClr val="FFFFFF"/>
+                </a:solidFill>
+                <a:latin typeface="Montserrat"/>
+              </a:rPr>
+              <a:t>Solo B y C evacúan; conducto liso, estanco y con orificio de 11 mm</a:t>
+            </a:r>
+          </a:p>
+          <a:p>
+            <a:pPr>
+              <a:spcAft>
+                <a:spcPts val="1200"/>
+              </a:spcAft>
+            </a:pPr>
+            <a:r>
+              <a:rPr sz="2000" b="1" i="0">
+                <a:solidFill>
+                  <a:srgbClr val="F4A24C"/>
+                </a:solidFill>
+                <a:latin typeface="Montserrat"/>
+              </a:rPr>
+              <a:t>✓  </a:t>
+            </a:r>
+            <a:r>
+              <a:rPr sz="1900" b="0" i="0">
+                <a:solidFill>
+                  <a:srgbClr val="FFFFFF"/>
+                </a:solidFill>
+                <a:latin typeface="Montserrat"/>
+              </a:rPr>
+              <a:t>Tiro natural: diámetro por tabla y puntuación ≥ +1</a:t>
+            </a:r>
+          </a:p>
+          <a:p>
+            <a:pPr>
+              <a:spcAft>
+                <a:spcPts val="1200"/>
+              </a:spcAft>
+            </a:pPr>
+            <a:r>
+              <a:rPr sz="2000" b="1" i="0">
+                <a:solidFill>
+                  <a:srgbClr val="F4A24C"/>
+                </a:solidFill>
+                <a:latin typeface="Montserrat"/>
+              </a:rPr>
+              <a:t>✓  </a:t>
+            </a:r>
+            <a:r>
+              <a:rPr sz="1900" b="0" i="0">
+                <a:solidFill>
+                  <a:srgbClr val="FFFFFF"/>
+                </a:solidFill>
+                <a:latin typeface="Montserrat"/>
+              </a:rPr>
+              <a:t>Ventosa: todo del fabricante y el 40 cm a ventanas</a:t>
+            </a:r>
+          </a:p>
+          <a:p>
+            <a:pPr>
+              <a:spcAft>
+                <a:spcPts val="1200"/>
+              </a:spcAft>
+            </a:pPr>
+            <a:r>
+              <a:rPr sz="2000" b="1" i="0">
+                <a:solidFill>
+                  <a:srgbClr val="F4A24C"/>
+                </a:solidFill>
+                <a:latin typeface="Montserrat"/>
+              </a:rPr>
+              <a:t>✓  </a:t>
+            </a:r>
+            <a:r>
+              <a:rPr sz="1900" b="0" i="0">
+                <a:solidFill>
+                  <a:srgbClr val="FFFFFF"/>
+                </a:solidFill>
+                <a:latin typeface="Montserrat"/>
+              </a:rPr>
+              <a:t>La lista de «no mezclar» en una misma chimenea</a:t>
+            </a:r>
+          </a:p>
+        </p:txBody>
+      </p:sp>
+      <p:sp>
+        <p:nvSpPr>
+          <p:cNvPr id="7" name="Rounded Rectangle 6"/>
+          <p:cNvSpPr/>
+          <p:nvPr/>
+        </p:nvSpPr>
+        <p:spPr>
+          <a:xfrm>
+            <a:off x="822960" y="5532120"/>
+            <a:ext cx="10515600" cy="822960"/>
+          </a:xfrm>
+          <a:prstGeom prst="roundRect">
+            <a:avLst/>
+          </a:prstGeom>
+          <a:solidFill>
+            <a:srgbClr val="E8801A"/>
+          </a:solidFill>
+          <a:ln>
+            <a:noFill/>
+          </a:ln>
+          <a:effectLst/>
+        </p:spPr>
+        <p:style>
+          <a:lnRef idx="1">
+            <a:schemeClr val="accent1"/>
+          </a:lnRef>
+          <a:fillRef idx="3">
+            <a:schemeClr val="accent1"/>
+          </a:fillRef>
+          <a:effectRef idx="2">
+            <a:schemeClr val="accent1"/>
+          </a:effectRef>
+          <a:fontRef idx="minor">
+            <a:schemeClr val="lt1"/>
+          </a:fontRef>
+        </p:style>
+        <p:txBody>
+          <a:bodyPr rtlCol="0" anchor="ctr"/>
+          <a:lstStyle/>
+          <a:p>
+            <a:pPr algn="ctr"/>
+          </a:p>
+        </p:txBody>
+      </p:sp>
+      <p:sp>
+        <p:nvSpPr>
+          <p:cNvPr id="8" name="TextBox 7"/>
+          <p:cNvSpPr txBox="1"/>
+          <p:nvPr/>
+        </p:nvSpPr>
+        <p:spPr>
+          <a:xfrm>
+            <a:off x="1051560" y="5623560"/>
+            <a:ext cx="10058400" cy="640080"/>
+          </a:xfrm>
+          <a:prstGeom prst="rect">
+            <a:avLst/>
+          </a:prstGeom>
+          <a:noFill/>
+        </p:spPr>
+        <p:txBody>
+          <a:bodyPr wrap="square">
+            <a:spAutoFit/>
+          </a:bodyPr>
+          <a:lstStyle/>
+          <a:p>
+            <a:r>
+              <a:rPr sz="1500" b="1" i="1">
+                <a:solidFill>
+                  <a:srgbClr val="1E2761"/>
+                </a:solidFill>
+                <a:latin typeface="Montserrat"/>
+              </a:rPr>
+              <a:t>Una evacuación bien resuelta es lo que firma tu boletín y cierra el tema. ¡Enhorabuena!</a:t>
             </a:r>
           </a:p>
         </p:txBody>
@@ -9519,7 +10548,7 @@
                 </a:solidFill>
                 <a:latin typeface="Montserrat"/>
               </a:rPr>
-              <a:t>003 / 019</a:t>
+              <a:t>003 / 020</a:t>
             </a:r>
           </a:p>
         </p:txBody>
@@ -9566,7 +10595,7 @@
         </p:nvSpPr>
         <p:spPr>
           <a:xfrm>
-            <a:off x="822960" y="457200"/>
+            <a:off x="822960" y="502920"/>
             <a:ext cx="8229600" cy="365760"/>
           </a:xfrm>
           <a:prstGeom prst="rect">
@@ -9581,13 +10610,13 @@
           <a:lstStyle/>
           <a:p>
             <a:r>
-              <a:rPr sz="1200" b="1" i="0">
-                <a:solidFill>
-                  <a:srgbClr val="64748B"/>
-                </a:solidFill>
-                <a:latin typeface="Montserrat"/>
-              </a:rPr>
-              <a:t>EVACUACIÓN · QUIÉN</a:t>
+              <a:rPr sz="1300" b="1" i="0">
+                <a:solidFill>
+                  <a:srgbClr val="E8801A"/>
+                </a:solidFill>
+                <a:latin typeface="Montserrat"/>
+              </a:rPr>
+              <a:t>PARTES DE ESTE VÍDEO</a:t>
             </a:r>
           </a:p>
         </p:txBody>
@@ -9600,7 +10629,7 @@
         </p:nvSpPr>
         <p:spPr>
           <a:xfrm>
-            <a:off x="822960" y="868680"/>
+            <a:off x="822960" y="914400"/>
             <a:ext cx="10515600" cy="914400"/>
           </a:xfrm>
           <a:prstGeom prst="rect">
@@ -9621,130 +10650,30 @@
                 </a:solidFill>
                 <a:latin typeface="Montserrat"/>
               </a:rPr>
-              <a:t>Solo B y C evacúan por conducto</a:t>
-            </a:r>
-          </a:p>
-        </p:txBody>
-      </p:sp>
-      <p:sp>
-        <p:nvSpPr>
-          <p:cNvPr id="7" name="TextBox 6"/>
-          <p:cNvSpPr txBox="1"/>
-          <p:nvPr/>
-        </p:nvSpPr>
-        <p:spPr>
-          <a:xfrm>
-            <a:off x="822960" y="1920240"/>
-            <a:ext cx="4983480" cy="4206240"/>
-          </a:xfrm>
-          <a:prstGeom prst="rect">
-            <a:avLst/>
-          </a:prstGeom>
-          <a:noFill/>
-        </p:spPr>
-        <p:txBody>
-          <a:bodyPr wrap="square">
-            <a:spAutoFit/>
-          </a:bodyPr>
-          <a:lstStyle/>
-          <a:p>
-            <a:pPr>
-              <a:spcAft>
-                <a:spcPts val="1000"/>
-              </a:spcAft>
-            </a:pPr>
-            <a:r>
-              <a:rPr sz="1600" b="1" i="0">
-                <a:solidFill>
-                  <a:srgbClr val="2E3A80"/>
-                </a:solidFill>
-                <a:latin typeface="Montserrat"/>
-              </a:rPr>
-              <a:t>•  </a:t>
-            </a:r>
-            <a:r>
-              <a:rPr sz="1600" b="0" i="0">
-                <a:solidFill>
-                  <a:srgbClr val="1B2330"/>
-                </a:solidFill>
-                <a:latin typeface="Montserrat"/>
-              </a:rPr>
-              <a:t>El tipo A no tiene conducto de humos</a:t>
-            </a:r>
-          </a:p>
-          <a:p>
-            <a:pPr>
-              <a:spcAft>
-                <a:spcPts val="1000"/>
-              </a:spcAft>
-            </a:pPr>
-            <a:r>
-              <a:rPr sz="1600" b="1" i="0">
-                <a:solidFill>
-                  <a:srgbClr val="2E3A80"/>
-                </a:solidFill>
-                <a:latin typeface="Montserrat"/>
-              </a:rPr>
-              <a:t>•  </a:t>
-            </a:r>
-            <a:r>
-              <a:rPr sz="1600" b="0" i="0">
-                <a:solidFill>
-                  <a:srgbClr val="1B2330"/>
-                </a:solidFill>
-                <a:latin typeface="Montserrat"/>
-              </a:rPr>
-              <a:t>Salida por cubierta, fachada o patio</a:t>
-            </a:r>
-          </a:p>
-          <a:p>
-            <a:pPr>
-              <a:spcAft>
-                <a:spcPts val="1000"/>
-              </a:spcAft>
-            </a:pPr>
-            <a:r>
-              <a:rPr sz="1600" b="1" i="0">
-                <a:solidFill>
-                  <a:srgbClr val="2E3A80"/>
-                </a:solidFill>
-                <a:latin typeface="Montserrat"/>
-              </a:rPr>
-              <a:t>•  </a:t>
-            </a:r>
-            <a:r>
-              <a:rPr sz="1600" b="0" i="0">
-                <a:solidFill>
-                  <a:srgbClr val="1B2330"/>
-                </a:solidFill>
-                <a:latin typeface="Montserrat"/>
-              </a:rPr>
-              <a:t>Todo el vídeo va de B y C</a:t>
-            </a:r>
-          </a:p>
-        </p:txBody>
-      </p:sp>
-      <p:sp>
-        <p:nvSpPr>
-          <p:cNvPr id="8" name="imgph" descr="IMGQ:flue pipes on building facade"/>
+              <a:t>En este vídeo</a:t>
+            </a:r>
+          </a:p>
+        </p:txBody>
+      </p:sp>
+      <p:sp>
+        <p:nvSpPr>
+          <p:cNvPr id="7" name="Rounded Rectangle 6"/>
           <p:cNvSpPr/>
           <p:nvPr/>
         </p:nvSpPr>
         <p:spPr>
           <a:xfrm>
-            <a:off x="5806440" y="1051560"/>
-            <a:ext cx="5298947" cy="4629150"/>
+            <a:off x="868680" y="1673352"/>
+            <a:ext cx="2011680" cy="73152"/>
           </a:xfrm>
           <a:prstGeom prst="roundRect">
             <a:avLst/>
           </a:prstGeom>
           <a:solidFill>
-            <a:srgbClr val="F3F6FB"/>
+            <a:srgbClr val="E8801A"/>
           </a:solidFill>
-          <a:ln w="12700">
-            <a:solidFill>
-              <a:srgbClr val="C7D2E6"/>
-            </a:solidFill>
+          <a:ln>
+            <a:noFill/>
           </a:ln>
           <a:effectLst/>
         </p:spPr>
@@ -9772,14 +10701,14 @@
       </p:sp>
       <p:sp>
         <p:nvSpPr>
-          <p:cNvPr id="9" name="TextBox 8"/>
+          <p:cNvPr id="8" name="TextBox 7"/>
           <p:cNvSpPr txBox="1"/>
           <p:nvPr/>
         </p:nvSpPr>
         <p:spPr>
           <a:xfrm>
-            <a:off x="6080760" y="2726055"/>
-            <a:ext cx="4750307" cy="1280160"/>
+            <a:off x="822960" y="2103120"/>
+            <a:ext cx="10515600" cy="4023360"/>
           </a:xfrm>
           <a:prstGeom prst="rect">
             <a:avLst/>
@@ -9792,27 +10721,178 @@
           </a:bodyPr>
           <a:lstStyle/>
           <a:p>
-            <a:pPr algn="ctr"/>
-            <a:r>
-              <a:rPr sz="1400" b="1" i="0">
-                <a:solidFill>
-                  <a:srgbClr val="64748B"/>
-                </a:solidFill>
-                <a:latin typeface="Montserrat"/>
-              </a:rPr>
-              <a:t>IMAGEN REALISTA</a:t>
-            </a:r>
-          </a:p>
-          <a:p>
-            <a:pPr algn="ctr"/>
-            <a:r>
-              <a:rPr sz="1100" b="0" i="1">
-                <a:solidFill>
-                  <a:srgbClr val="64748B"/>
-                </a:solidFill>
-                <a:latin typeface="Montserrat"/>
-              </a:rPr>
-              <a:t>flue pipes on building facade</a:t>
+            <a:pPr>
+              <a:spcAft>
+                <a:spcPts val="900"/>
+              </a:spcAft>
+            </a:pPr>
+            <a:r>
+              <a:rPr sz="1800" b="1" i="0">
+                <a:solidFill>
+                  <a:srgbClr val="E8801A"/>
+                </a:solidFill>
+                <a:latin typeface="Montserrat"/>
+              </a:rPr>
+              <a:t>01   </a:t>
+            </a:r>
+            <a:r>
+              <a:rPr sz="1700" b="0" i="0">
+                <a:solidFill>
+                  <a:srgbClr val="1B2330"/>
+                </a:solidFill>
+                <a:latin typeface="Montserrat"/>
+              </a:rPr>
+              <a:t>Evacuación</a:t>
+            </a:r>
+          </a:p>
+          <a:p>
+            <a:pPr>
+              <a:spcAft>
+                <a:spcPts val="900"/>
+              </a:spcAft>
+            </a:pPr>
+            <a:r>
+              <a:rPr sz="1800" b="1" i="0">
+                <a:solidFill>
+                  <a:srgbClr val="E8801A"/>
+                </a:solidFill>
+                <a:latin typeface="Montserrat"/>
+              </a:rPr>
+              <a:t>02   </a:t>
+            </a:r>
+            <a:r>
+              <a:rPr sz="1700" b="0" i="0">
+                <a:solidFill>
+                  <a:srgbClr val="1B2330"/>
+                </a:solidFill>
+                <a:latin typeface="Montserrat"/>
+              </a:rPr>
+              <a:t>Tiro natural</a:t>
+            </a:r>
+          </a:p>
+          <a:p>
+            <a:pPr>
+              <a:spcAft>
+                <a:spcPts val="900"/>
+              </a:spcAft>
+            </a:pPr>
+            <a:r>
+              <a:rPr sz="1800" b="1" i="0">
+                <a:solidFill>
+                  <a:srgbClr val="E8801A"/>
+                </a:solidFill>
+                <a:latin typeface="Montserrat"/>
+              </a:rPr>
+              <a:t>03   </a:t>
+            </a:r>
+            <a:r>
+              <a:rPr sz="1700" b="0" i="0">
+                <a:solidFill>
+                  <a:srgbClr val="1B2330"/>
+                </a:solidFill>
+                <a:latin typeface="Montserrat"/>
+              </a:rPr>
+              <a:t>Ayuda a la evacuación</a:t>
+            </a:r>
+          </a:p>
+          <a:p>
+            <a:pPr>
+              <a:spcAft>
+                <a:spcPts val="900"/>
+              </a:spcAft>
+            </a:pPr>
+            <a:r>
+              <a:rPr sz="1800" b="1" i="0">
+                <a:solidFill>
+                  <a:srgbClr val="E8801A"/>
+                </a:solidFill>
+                <a:latin typeface="Montserrat"/>
+              </a:rPr>
+              <a:t>04   </a:t>
+            </a:r>
+            <a:r>
+              <a:rPr sz="1700" b="0" i="0">
+                <a:solidFill>
+                  <a:srgbClr val="1B2330"/>
+                </a:solidFill>
+                <a:latin typeface="Montserrat"/>
+              </a:rPr>
+              <a:t>Tiro forzado</a:t>
+            </a:r>
+          </a:p>
+          <a:p>
+            <a:pPr>
+              <a:spcAft>
+                <a:spcPts val="900"/>
+              </a:spcAft>
+            </a:pPr>
+            <a:r>
+              <a:rPr sz="1800" b="1" i="0">
+                <a:solidFill>
+                  <a:srgbClr val="E8801A"/>
+                </a:solidFill>
+                <a:latin typeface="Montserrat"/>
+              </a:rPr>
+              <a:t>05   </a:t>
+            </a:r>
+            <a:r>
+              <a:rPr sz="1700" b="0" i="0">
+                <a:solidFill>
+                  <a:srgbClr val="1B2330"/>
+                </a:solidFill>
+                <a:latin typeface="Montserrat"/>
+              </a:rPr>
+              <a:t>Distancias generales</a:t>
+            </a:r>
+          </a:p>
+          <a:p>
+            <a:pPr>
+              <a:spcAft>
+                <a:spcPts val="900"/>
+              </a:spcAft>
+            </a:pPr>
+            <a:r>
+              <a:rPr sz="1800" b="1" i="0">
+                <a:solidFill>
+                  <a:srgbClr val="E8801A"/>
+                </a:solidFill>
+                <a:latin typeface="Montserrat"/>
+              </a:rPr>
+              <a:t>06   </a:t>
+            </a:r>
+            <a:r>
+              <a:rPr sz="1700" b="0" i="0">
+                <a:solidFill>
+                  <a:srgbClr val="1B2330"/>
+                </a:solidFill>
+                <a:latin typeface="Montserrat"/>
+              </a:rPr>
+              <a:t>Requisitos adicionales</a:t>
+            </a:r>
+          </a:p>
+          <a:p>
+            <a:pPr>
+              <a:spcAft>
+                <a:spcPts val="900"/>
+              </a:spcAft>
+            </a:pPr>
+            <a:r>
+              <a:rPr sz="1800" b="1" i="0">
+                <a:solidFill>
+                  <a:srgbClr val="E8801A"/>
+                </a:solidFill>
+                <a:latin typeface="Montserrat"/>
+              </a:rPr>
+              <a:t>07   </a:t>
+            </a:r>
+            <a:r>
+              <a:rPr sz="1700" b="0" i="0">
+                <a:solidFill>
+                  <a:srgbClr val="1B2330"/>
+                </a:solidFill>
+                <a:latin typeface="Montserrat"/>
+              </a:rPr>
+              <a:t>Chimeneas</a:t>
             </a:r>
           </a:p>
         </p:txBody>
@@ -9909,7 +10989,7 @@
                 </a:solidFill>
                 <a:latin typeface="Montserrat"/>
               </a:rPr>
-              <a:t>004 / 019</a:t>
+              <a:t>004 / 020</a:t>
             </a:r>
           </a:p>
         </p:txBody>
@@ -9957,7 +11037,7 @@
         <p:spPr>
           <a:xfrm>
             <a:off x="822960" y="457200"/>
-            <a:ext cx="8229600" cy="365760"/>
+            <a:ext cx="10058400" cy="365760"/>
           </a:xfrm>
           <a:prstGeom prst="rect">
             <a:avLst/>
@@ -9971,13 +11051,13 @@
           <a:lstStyle/>
           <a:p>
             <a:r>
-              <a:rPr sz="1200" b="1" i="0">
-                <a:solidFill>
-                  <a:srgbClr val="64748B"/>
-                </a:solidFill>
-                <a:latin typeface="Montserrat"/>
-              </a:rPr>
-              <a:t>TIRO NATURAL · CONEXIÓN</a:t>
+              <a:rPr sz="1300" b="1" i="0">
+                <a:solidFill>
+                  <a:srgbClr val="E8801A"/>
+                </a:solidFill>
+                <a:latin typeface="Montserrat"/>
+              </a:rPr>
+              <a:t>EVACUACIÓN · QUIÉN</a:t>
             </a:r>
           </a:p>
         </p:txBody>
@@ -10005,26 +11085,70 @@
           <a:lstStyle/>
           <a:p>
             <a:r>
-              <a:rPr sz="2700" b="1" i="0">
+              <a:rPr sz="2800" b="1" i="0">
                 <a:solidFill>
                   <a:srgbClr val="1E2761"/>
                 </a:solidFill>
                 <a:latin typeface="Montserrat"/>
               </a:rPr>
-              <a:t>Cortatiro y conexión a chimenea</a:t>
-            </a:r>
-          </a:p>
-        </p:txBody>
-      </p:sp>
-      <p:sp>
-        <p:nvSpPr>
-          <p:cNvPr id="7" name="TextBox 6"/>
+              <a:t>Solo B y C evacúan por conducto</a:t>
+            </a:r>
+          </a:p>
+        </p:txBody>
+      </p:sp>
+      <p:sp>
+        <p:nvSpPr>
+          <p:cNvPr id="7" name="Rounded Rectangle 6"/>
+          <p:cNvSpPr/>
+          <p:nvPr/>
+        </p:nvSpPr>
+        <p:spPr>
+          <a:xfrm>
+            <a:off x="868680" y="1627632"/>
+            <a:ext cx="2011680" cy="73152"/>
+          </a:xfrm>
+          <a:prstGeom prst="roundRect">
+            <a:avLst/>
+          </a:prstGeom>
+          <a:solidFill>
+            <a:srgbClr val="E8801A"/>
+          </a:solidFill>
+          <a:ln>
+            <a:noFill/>
+          </a:ln>
+          <a:effectLst/>
+        </p:spPr>
+        <p:style>
+          <a:lnRef idx="1">
+            <a:schemeClr val="accent1"/>
+          </a:lnRef>
+          <a:fillRef idx="3">
+            <a:schemeClr val="accent1"/>
+          </a:fillRef>
+          <a:effectRef idx="2">
+            <a:schemeClr val="accent1"/>
+          </a:effectRef>
+          <a:fontRef idx="minor">
+            <a:schemeClr val="lt1"/>
+          </a:fontRef>
+        </p:style>
+        <p:txBody>
+          <a:bodyPr rtlCol="0" anchor="ctr"/>
+          <a:lstStyle/>
+          <a:p>
+            <a:pPr algn="ctr"/>
+          </a:p>
+        </p:txBody>
+      </p:sp>
+      <p:sp>
+        <p:nvSpPr>
+          <p:cNvPr id="8" name="TextBox 7"/>
           <p:cNvSpPr txBox="1"/>
           <p:nvPr/>
         </p:nvSpPr>
         <p:spPr>
           <a:xfrm>
-            <a:off x="822960" y="1920240"/>
+            <a:off x="822960" y="1965960"/>
             <a:ext cx="4983480" cy="4206240"/>
           </a:xfrm>
           <a:prstGeom prst="rect">
@@ -10040,17 +11164,17 @@
           <a:p>
             <a:pPr>
               <a:spcAft>
-                <a:spcPts val="1000"/>
+                <a:spcPts val="1100"/>
               </a:spcAft>
             </a:pPr>
             <a:r>
               <a:rPr sz="1600" b="1" i="0">
                 <a:solidFill>
-                  <a:srgbClr val="2E3A80"/>
-                </a:solidFill>
-                <a:latin typeface="Montserrat"/>
-              </a:rPr>
-              <a:t>•  </a:t>
+                  <a:srgbClr val="E8801A"/>
+                </a:solidFill>
+                <a:latin typeface="Montserrat"/>
+              </a:rPr>
+              <a:t>▸  </a:t>
             </a:r>
             <a:r>
               <a:rPr sz="1600" b="0" i="0">
@@ -10059,23 +11183,23 @@
                 </a:solidFill>
                 <a:latin typeface="Montserrat"/>
               </a:rPr>
-              <a:t>Material incombustible A1 o A2-s1, d0</a:t>
+              <a:t>El tipo A no tiene conducto de humos</a:t>
             </a:r>
           </a:p>
           <a:p>
             <a:pPr>
               <a:spcAft>
-                <a:spcPts val="1000"/>
+                <a:spcPts val="1100"/>
               </a:spcAft>
             </a:pPr>
             <a:r>
               <a:rPr sz="1600" b="1" i="0">
                 <a:solidFill>
-                  <a:srgbClr val="2E3A80"/>
-                </a:solidFill>
-                <a:latin typeface="Montserrat"/>
-              </a:rPr>
-              <a:t>•  </a:t>
+                  <a:srgbClr val="E8801A"/>
+                </a:solidFill>
+                <a:latin typeface="Montserrat"/>
+              </a:rPr>
+              <a:t>▸  </a:t>
             </a:r>
             <a:r>
               <a:rPr sz="1600" b="0" i="0">
@@ -10084,23 +11208,23 @@
                 </a:solidFill>
                 <a:latin typeface="Montserrat"/>
               </a:rPr>
-              <a:t>Liso, rígido y resistente a corrosión</a:t>
+              <a:t>Salida por cubierta, fachada o patio</a:t>
             </a:r>
           </a:p>
           <a:p>
             <a:pPr>
               <a:spcAft>
-                <a:spcPts val="1000"/>
+                <a:spcPts val="1100"/>
               </a:spcAft>
             </a:pPr>
             <a:r>
               <a:rPr sz="1600" b="1" i="0">
                 <a:solidFill>
-                  <a:srgbClr val="2E3A80"/>
-                </a:solidFill>
-                <a:latin typeface="Montserrat"/>
-              </a:rPr>
-              <a:t>•  </a:t>
+                  <a:srgbClr val="E8801A"/>
+                </a:solidFill>
+                <a:latin typeface="Montserrat"/>
+              </a:rPr>
+              <a:t>▸  </a:t>
             </a:r>
             <a:r>
               <a:rPr sz="1600" b="0" i="0">
@@ -10109,14 +11233,14 @@
                 </a:solidFill>
                 <a:latin typeface="Montserrat"/>
               </a:rPr>
-              <a:t>Cortatiro, salvo la chimenea-hogar</a:t>
-            </a:r>
-          </a:p>
-        </p:txBody>
-      </p:sp>
-      <p:sp>
-        <p:nvSpPr>
-          <p:cNvPr id="8" name="imgph" descr="IMGQ:metal flue pipe connection boiler"/>
+              <a:t>Todo el vídeo va de B y C</a:t>
+            </a:r>
+          </a:p>
+        </p:txBody>
+      </p:sp>
+      <p:sp>
+        <p:nvSpPr>
+          <p:cNvPr id="9" name="imgph" descr="IMGQ:flue pipes on building facade"/>
           <p:cNvSpPr/>
           <p:nvPr/>
         </p:nvSpPr>
@@ -10162,7 +11286,7 @@
       </p:sp>
       <p:sp>
         <p:nvSpPr>
-          <p:cNvPr id="9" name="TextBox 8"/>
+          <p:cNvPr id="10" name="TextBox 9"/>
           <p:cNvSpPr txBox="1"/>
           <p:nvPr/>
         </p:nvSpPr>
@@ -10202,7 +11326,7 @@
                 </a:solidFill>
                 <a:latin typeface="Montserrat"/>
               </a:rPr>
-              <a:t>metal flue pipe connection boiler</a:t>
+              <a:t>flue pipes on building facade</a:t>
             </a:r>
           </a:p>
         </p:txBody>
@@ -10299,7 +11423,7 @@
                 </a:solidFill>
                 <a:latin typeface="Montserrat"/>
               </a:rPr>
-              <a:t>005 / 019</a:t>
+              <a:t>005 / 020</a:t>
             </a:r>
           </a:p>
         </p:txBody>
@@ -10347,7 +11471,7 @@
         <p:spPr>
           <a:xfrm>
             <a:off x="822960" y="457200"/>
-            <a:ext cx="8229600" cy="365760"/>
+            <a:ext cx="10058400" cy="365760"/>
           </a:xfrm>
           <a:prstGeom prst="rect">
             <a:avLst/>
@@ -10361,9 +11485,9 @@
           <a:lstStyle/>
           <a:p>
             <a:r>
-              <a:rPr sz="1200" b="1" i="0">
-                <a:solidFill>
-                  <a:srgbClr val="64748B"/>
+              <a:rPr sz="1300" b="1" i="0">
+                <a:solidFill>
+                  <a:srgbClr val="E8801A"/>
                 </a:solidFill>
                 <a:latin typeface="Montserrat"/>
               </a:rPr>
@@ -10395,26 +11519,70 @@
           <a:lstStyle/>
           <a:p>
             <a:r>
-              <a:rPr sz="2700" b="1" i="0">
+              <a:rPr sz="2800" b="1" i="0">
                 <a:solidFill>
                   <a:srgbClr val="1E2761"/>
                 </a:solidFill>
                 <a:latin typeface="Montserrat"/>
               </a:rPr>
-              <a:t>El orificio de 11 mm</a:t>
-            </a:r>
-          </a:p>
-        </p:txBody>
-      </p:sp>
-      <p:sp>
-        <p:nvSpPr>
-          <p:cNvPr id="7" name="TextBox 6"/>
+              <a:t>Cortatiro y conexión a chimenea</a:t>
+            </a:r>
+          </a:p>
+        </p:txBody>
+      </p:sp>
+      <p:sp>
+        <p:nvSpPr>
+          <p:cNvPr id="7" name="Rounded Rectangle 6"/>
+          <p:cNvSpPr/>
+          <p:nvPr/>
+        </p:nvSpPr>
+        <p:spPr>
+          <a:xfrm>
+            <a:off x="868680" y="1627632"/>
+            <a:ext cx="2011680" cy="73152"/>
+          </a:xfrm>
+          <a:prstGeom prst="roundRect">
+            <a:avLst/>
+          </a:prstGeom>
+          <a:solidFill>
+            <a:srgbClr val="E8801A"/>
+          </a:solidFill>
+          <a:ln>
+            <a:noFill/>
+          </a:ln>
+          <a:effectLst/>
+        </p:spPr>
+        <p:style>
+          <a:lnRef idx="1">
+            <a:schemeClr val="accent1"/>
+          </a:lnRef>
+          <a:fillRef idx="3">
+            <a:schemeClr val="accent1"/>
+          </a:fillRef>
+          <a:effectRef idx="2">
+            <a:schemeClr val="accent1"/>
+          </a:effectRef>
+          <a:fontRef idx="minor">
+            <a:schemeClr val="lt1"/>
+          </a:fontRef>
+        </p:style>
+        <p:txBody>
+          <a:bodyPr rtlCol="0" anchor="ctr"/>
+          <a:lstStyle/>
+          <a:p>
+            <a:pPr algn="ctr"/>
+          </a:p>
+        </p:txBody>
+      </p:sp>
+      <p:sp>
+        <p:nvSpPr>
+          <p:cNvPr id="8" name="TextBox 7"/>
           <p:cNvSpPr txBox="1"/>
           <p:nvPr/>
         </p:nvSpPr>
         <p:spPr>
           <a:xfrm>
-            <a:off x="822960" y="1920240"/>
+            <a:off x="822960" y="1965960"/>
             <a:ext cx="4983480" cy="4206240"/>
           </a:xfrm>
           <a:prstGeom prst="rect">
@@ -10430,17 +11598,17 @@
           <a:p>
             <a:pPr>
               <a:spcAft>
-                <a:spcPts val="1000"/>
+                <a:spcPts val="1100"/>
               </a:spcAft>
             </a:pPr>
             <a:r>
               <a:rPr sz="1600" b="1" i="0">
                 <a:solidFill>
-                  <a:srgbClr val="2E3A80"/>
-                </a:solidFill>
-                <a:latin typeface="Montserrat"/>
-              </a:rPr>
-              <a:t>•  </a:t>
+                  <a:srgbClr val="E8801A"/>
+                </a:solidFill>
+                <a:latin typeface="Montserrat"/>
+              </a:rPr>
+              <a:t>▸  </a:t>
             </a:r>
             <a:r>
               <a:rPr sz="1600" b="0" i="0">
@@ -10449,23 +11617,23 @@
                 </a:solidFill>
                 <a:latin typeface="Montserrat"/>
               </a:rPr>
-              <a:t>Toma de muestras de los humos</a:t>
+              <a:t>Material incombustible A1 o A2-s1, d0</a:t>
             </a:r>
           </a:p>
           <a:p>
             <a:pPr>
               <a:spcAft>
-                <a:spcPts val="1000"/>
+                <a:spcPts val="1100"/>
               </a:spcAft>
             </a:pPr>
             <a:r>
               <a:rPr sz="1600" b="1" i="0">
                 <a:solidFill>
-                  <a:srgbClr val="2E3A80"/>
-                </a:solidFill>
-                <a:latin typeface="Montserrat"/>
-              </a:rPr>
-              <a:t>•  </a:t>
+                  <a:srgbClr val="E8801A"/>
+                </a:solidFill>
+                <a:latin typeface="Montserrat"/>
+              </a:rPr>
+              <a:t>▸  </a:t>
             </a:r>
             <a:r>
               <a:rPr sz="1600" b="0" i="0">
@@ -10474,23 +11642,23 @@
                 </a:solidFill>
                 <a:latin typeface="Montserrat"/>
               </a:rPr>
-              <a:t>Lo más cerca posible del aparato</a:t>
+              <a:t>Liso, rígido y resistente a corrosión</a:t>
             </a:r>
           </a:p>
           <a:p>
             <a:pPr>
               <a:spcAft>
-                <a:spcPts val="1000"/>
+                <a:spcPts val="1100"/>
               </a:spcAft>
             </a:pPr>
             <a:r>
               <a:rPr sz="1600" b="1" i="0">
                 <a:solidFill>
-                  <a:srgbClr val="2E3A80"/>
-                </a:solidFill>
-                <a:latin typeface="Montserrat"/>
-              </a:rPr>
-              <a:t>•  </a:t>
+                  <a:srgbClr val="E8801A"/>
+                </a:solidFill>
+                <a:latin typeface="Montserrat"/>
+              </a:rPr>
+              <a:t>▸  </a:t>
             </a:r>
             <a:r>
               <a:rPr sz="1600" b="0" i="0">
@@ -10499,14 +11667,14 @@
                 </a:solidFill>
                 <a:latin typeface="Montserrat"/>
               </a:rPr>
-              <a:t>Cierre que aguanta 200 °C</a:t>
-            </a:r>
-          </a:p>
-        </p:txBody>
-      </p:sp>
-      <p:sp>
-        <p:nvSpPr>
-          <p:cNvPr id="8" name="imgph" descr="IMGQ:combustion gas analyzer probe flue"/>
+              <a:t>Cortatiro, salvo la chimenea-hogar</a:t>
+            </a:r>
+          </a:p>
+        </p:txBody>
+      </p:sp>
+      <p:sp>
+        <p:nvSpPr>
+          <p:cNvPr id="9" name="imgph" descr="IMGQ:metal flue pipe connection boiler"/>
           <p:cNvSpPr/>
           <p:nvPr/>
         </p:nvSpPr>
@@ -10552,7 +11720,7 @@
       </p:sp>
       <p:sp>
         <p:nvSpPr>
-          <p:cNvPr id="9" name="TextBox 8"/>
+          <p:cNvPr id="10" name="TextBox 9"/>
           <p:cNvSpPr txBox="1"/>
           <p:nvPr/>
         </p:nvSpPr>
@@ -10592,7 +11760,7 @@
                 </a:solidFill>
                 <a:latin typeface="Montserrat"/>
               </a:rPr>
-              <a:t>combustion gas analyzer probe flue</a:t>
+              <a:t>metal flue pipe connection boiler</a:t>
             </a:r>
           </a:p>
         </p:txBody>
@@ -10689,7 +11857,7 @@
                 </a:solidFill>
                 <a:latin typeface="Montserrat"/>
               </a:rPr>
-              <a:t>006 / 019</a:t>
+              <a:t>006 / 020</a:t>
             </a:r>
           </a:p>
         </p:txBody>
@@ -10737,7 +11905,7 @@
         <p:spPr>
           <a:xfrm>
             <a:off x="822960" y="457200"/>
-            <a:ext cx="8229600" cy="365760"/>
+            <a:ext cx="10058400" cy="365760"/>
           </a:xfrm>
           <a:prstGeom prst="rect">
             <a:avLst/>
@@ -10751,13 +11919,13 @@
           <a:lstStyle/>
           <a:p>
             <a:r>
-              <a:rPr sz="1200" b="1" i="0">
-                <a:solidFill>
-                  <a:srgbClr val="64748B"/>
-                </a:solidFill>
-                <a:latin typeface="Montserrat"/>
-              </a:rPr>
-              <a:t>TIRO NATURAL · MONTAJE</a:t>
+              <a:rPr sz="1300" b="1" i="0">
+                <a:solidFill>
+                  <a:srgbClr val="E8801A"/>
+                </a:solidFill>
+                <a:latin typeface="Montserrat"/>
+              </a:rPr>
+              <a:t>TIRO NATURAL · CONEXIÓN</a:t>
             </a:r>
           </a:p>
         </p:txBody>
@@ -10785,26 +11953,70 @@
           <a:lstStyle/>
           <a:p>
             <a:r>
-              <a:rPr sz="2700" b="1" i="0">
+              <a:rPr sz="2800" b="1" i="0">
                 <a:solidFill>
                   <a:srgbClr val="1E2761"/>
                 </a:solidFill>
                 <a:latin typeface="Montserrat"/>
               </a:rPr>
-              <a:t>Cómo se monta el conducto</a:t>
-            </a:r>
-          </a:p>
-        </p:txBody>
-      </p:sp>
-      <p:sp>
-        <p:nvSpPr>
-          <p:cNvPr id="7" name="TextBox 6"/>
+              <a:t>El orificio de 11 mm</a:t>
+            </a:r>
+          </a:p>
+        </p:txBody>
+      </p:sp>
+      <p:sp>
+        <p:nvSpPr>
+          <p:cNvPr id="7" name="Rounded Rectangle 6"/>
+          <p:cNvSpPr/>
+          <p:nvPr/>
+        </p:nvSpPr>
+        <p:spPr>
+          <a:xfrm>
+            <a:off x="868680" y="1627632"/>
+            <a:ext cx="2011680" cy="73152"/>
+          </a:xfrm>
+          <a:prstGeom prst="roundRect">
+            <a:avLst/>
+          </a:prstGeom>
+          <a:solidFill>
+            <a:srgbClr val="E8801A"/>
+          </a:solidFill>
+          <a:ln>
+            <a:noFill/>
+          </a:ln>
+          <a:effectLst/>
+        </p:spPr>
+        <p:style>
+          <a:lnRef idx="1">
+            <a:schemeClr val="accent1"/>
+          </a:lnRef>
+          <a:fillRef idx="3">
+            <a:schemeClr val="accent1"/>
+          </a:fillRef>
+          <a:effectRef idx="2">
+            <a:schemeClr val="accent1"/>
+          </a:effectRef>
+          <a:fontRef idx="minor">
+            <a:schemeClr val="lt1"/>
+          </a:fontRef>
+        </p:style>
+        <p:txBody>
+          <a:bodyPr rtlCol="0" anchor="ctr"/>
+          <a:lstStyle/>
+          <a:p>
+            <a:pPr algn="ctr"/>
+          </a:p>
+        </p:txBody>
+      </p:sp>
+      <p:sp>
+        <p:nvSpPr>
+          <p:cNvPr id="8" name="TextBox 7"/>
           <p:cNvSpPr txBox="1"/>
           <p:nvPr/>
         </p:nvSpPr>
         <p:spPr>
           <a:xfrm>
-            <a:off x="822960" y="1920240"/>
+            <a:off x="822960" y="1965960"/>
             <a:ext cx="4983480" cy="4206240"/>
           </a:xfrm>
           <a:prstGeom prst="rect">
@@ -10820,17 +12032,17 @@
           <a:p>
             <a:pPr>
               <a:spcAft>
-                <a:spcPts val="1000"/>
+                <a:spcPts val="1100"/>
               </a:spcAft>
             </a:pPr>
             <a:r>
               <a:rPr sz="1600" b="1" i="0">
                 <a:solidFill>
-                  <a:srgbClr val="2E3A80"/>
-                </a:solidFill>
-                <a:latin typeface="Montserrat"/>
-              </a:rPr>
-              <a:t>•  </a:t>
+                  <a:srgbClr val="E8801A"/>
+                </a:solidFill>
+                <a:latin typeface="Montserrat"/>
+              </a:rPr>
+              <a:t>▸  </a:t>
             </a:r>
             <a:r>
               <a:rPr sz="1600" b="0" i="0">
@@ -10839,23 +12051,23 @@
                 </a:solidFill>
                 <a:latin typeface="Montserrat"/>
               </a:rPr>
-              <a:t>Uniones estancas y rígidas</a:t>
+              <a:t>Toma de muestras de los humos</a:t>
             </a:r>
           </a:p>
           <a:p>
             <a:pPr>
               <a:spcAft>
-                <a:spcPts val="1000"/>
+                <a:spcPts val="1100"/>
               </a:spcAft>
             </a:pPr>
             <a:r>
               <a:rPr sz="1600" b="1" i="0">
                 <a:solidFill>
-                  <a:srgbClr val="2E3A80"/>
-                </a:solidFill>
-                <a:latin typeface="Montserrat"/>
-              </a:rPr>
-              <a:t>•  </a:t>
+                  <a:srgbClr val="E8801A"/>
+                </a:solidFill>
+                <a:latin typeface="Montserrat"/>
+              </a:rPr>
+              <a:t>▸  </a:t>
             </a:r>
             <a:r>
               <a:rPr sz="1600" b="0" i="0">
@@ -10864,23 +12076,23 @@
                 </a:solidFill>
                 <a:latin typeface="Montserrat"/>
               </a:rPr>
-              <a:t>Diámetro sin reducciones</a:t>
+              <a:t>Lo más cerca posible del aparato</a:t>
             </a:r>
           </a:p>
           <a:p>
             <a:pPr>
               <a:spcAft>
-                <a:spcPts val="1000"/>
+                <a:spcPts val="1100"/>
               </a:spcAft>
             </a:pPr>
             <a:r>
               <a:rPr sz="1600" b="1" i="0">
                 <a:solidFill>
-                  <a:srgbClr val="2E3A80"/>
-                </a:solidFill>
-                <a:latin typeface="Montserrat"/>
-              </a:rPr>
-              <a:t>•  </a:t>
+                  <a:srgbClr val="E8801A"/>
+                </a:solidFill>
+                <a:latin typeface="Montserrat"/>
+              </a:rPr>
+              <a:t>▸  </a:t>
             </a:r>
             <a:r>
               <a:rPr sz="1600" b="0" i="0">
@@ -10889,14 +12101,14 @@
                 </a:solidFill>
                 <a:latin typeface="Montserrat"/>
               </a:rPr>
-              <a:t>Tramo vertical ≥ 20 cm antes del codo</a:t>
-            </a:r>
-          </a:p>
-        </p:txBody>
-      </p:sp>
-      <p:sp>
-        <p:nvSpPr>
-          <p:cNvPr id="8" name="imgph" descr="IMGQ:vertical flue pipe elbow ceiling"/>
+              <a:t>Cierre que aguanta 200 °C</a:t>
+            </a:r>
+          </a:p>
+        </p:txBody>
+      </p:sp>
+      <p:sp>
+        <p:nvSpPr>
+          <p:cNvPr id="9" name="imgph" descr="IMGQ:combustion gas analyzer probe flue"/>
           <p:cNvSpPr/>
           <p:nvPr/>
         </p:nvSpPr>
@@ -10942,7 +12154,7 @@
       </p:sp>
       <p:sp>
         <p:nvSpPr>
-          <p:cNvPr id="9" name="TextBox 8"/>
+          <p:cNvPr id="10" name="TextBox 9"/>
           <p:cNvSpPr txBox="1"/>
           <p:nvPr/>
         </p:nvSpPr>
@@ -10982,7 +12194,7 @@
                 </a:solidFill>
                 <a:latin typeface="Montserrat"/>
               </a:rPr>
-              <a:t>vertical flue pipe elbow ceiling</a:t>
+              <a:t>combustion gas analyzer probe flue</a:t>
             </a:r>
           </a:p>
         </p:txBody>
@@ -11079,7 +12291,7 @@
                 </a:solidFill>
                 <a:latin typeface="Montserrat"/>
               </a:rPr>
-              <a:t>007 / 019</a:t>
+              <a:t>007 / 020</a:t>
             </a:r>
           </a:p>
         </p:txBody>
@@ -11127,7 +12339,7 @@
         <p:spPr>
           <a:xfrm>
             <a:off x="822960" y="457200"/>
-            <a:ext cx="8229600" cy="365760"/>
+            <a:ext cx="10058400" cy="365760"/>
           </a:xfrm>
           <a:prstGeom prst="rect">
             <a:avLst/>
@@ -11141,13 +12353,13 @@
           <a:lstStyle/>
           <a:p>
             <a:r>
-              <a:rPr sz="1200" b="1" i="0">
-                <a:solidFill>
-                  <a:srgbClr val="64748B"/>
-                </a:solidFill>
-                <a:latin typeface="Montserrat"/>
-              </a:rPr>
-              <a:t>TIRO NATURAL · SALIDA DIRECTA</a:t>
+              <a:rPr sz="1300" b="1" i="0">
+                <a:solidFill>
+                  <a:srgbClr val="E8801A"/>
+                </a:solidFill>
+                <a:latin typeface="Montserrat"/>
+              </a:rPr>
+              <a:t>TIRO NATURAL · MONTAJE</a:t>
             </a:r>
           </a:p>
         </p:txBody>
@@ -11175,26 +12387,70 @@
           <a:lstStyle/>
           <a:p>
             <a:r>
-              <a:rPr sz="2700" b="1" i="0">
+              <a:rPr sz="2800" b="1" i="0">
                 <a:solidFill>
                   <a:srgbClr val="1E2761"/>
                 </a:solidFill>
                 <a:latin typeface="Montserrat"/>
               </a:rPr>
-              <a:t>Diámetros mínimos (tabla 3)</a:t>
-            </a:r>
-          </a:p>
-        </p:txBody>
-      </p:sp>
-      <p:sp>
-        <p:nvSpPr>
-          <p:cNvPr id="7" name="TextBox 6"/>
+              <a:t>Cómo se monta el conducto</a:t>
+            </a:r>
+          </a:p>
+        </p:txBody>
+      </p:sp>
+      <p:sp>
+        <p:nvSpPr>
+          <p:cNvPr id="7" name="Rounded Rectangle 6"/>
+          <p:cNvSpPr/>
+          <p:nvPr/>
+        </p:nvSpPr>
+        <p:spPr>
+          <a:xfrm>
+            <a:off x="868680" y="1627632"/>
+            <a:ext cx="2011680" cy="73152"/>
+          </a:xfrm>
+          <a:prstGeom prst="roundRect">
+            <a:avLst/>
+          </a:prstGeom>
+          <a:solidFill>
+            <a:srgbClr val="E8801A"/>
+          </a:solidFill>
+          <a:ln>
+            <a:noFill/>
+          </a:ln>
+          <a:effectLst/>
+        </p:spPr>
+        <p:style>
+          <a:lnRef idx="1">
+            <a:schemeClr val="accent1"/>
+          </a:lnRef>
+          <a:fillRef idx="3">
+            <a:schemeClr val="accent1"/>
+          </a:fillRef>
+          <a:effectRef idx="2">
+            <a:schemeClr val="accent1"/>
+          </a:effectRef>
+          <a:fontRef idx="minor">
+            <a:schemeClr val="lt1"/>
+          </a:fontRef>
+        </p:style>
+        <p:txBody>
+          <a:bodyPr rtlCol="0" anchor="ctr"/>
+          <a:lstStyle/>
+          <a:p>
+            <a:pPr algn="ctr"/>
+          </a:p>
+        </p:txBody>
+      </p:sp>
+      <p:sp>
+        <p:nvSpPr>
+          <p:cNvPr id="8" name="TextBox 7"/>
           <p:cNvSpPr txBox="1"/>
           <p:nvPr/>
         </p:nvSpPr>
         <p:spPr>
           <a:xfrm>
-            <a:off x="822960" y="1920240"/>
+            <a:off x="822960" y="1965960"/>
             <a:ext cx="4983480" cy="4206240"/>
           </a:xfrm>
           <a:prstGeom prst="rect">
@@ -11210,17 +12466,17 @@
           <a:p>
             <a:pPr>
               <a:spcAft>
-                <a:spcPts val="1000"/>
+                <a:spcPts val="1100"/>
               </a:spcAft>
             </a:pPr>
             <a:r>
               <a:rPr sz="1600" b="1" i="0">
                 <a:solidFill>
-                  <a:srgbClr val="2E3A80"/>
-                </a:solidFill>
-                <a:latin typeface="Montserrat"/>
-              </a:rPr>
-              <a:t>•  </a:t>
+                  <a:srgbClr val="E8801A"/>
+                </a:solidFill>
+                <a:latin typeface="Montserrat"/>
+              </a:rPr>
+              <a:t>▸  </a:t>
             </a:r>
             <a:r>
               <a:rPr sz="1600" b="0" i="0">
@@ -11229,23 +12485,23 @@
                 </a:solidFill>
                 <a:latin typeface="Montserrat"/>
               </a:rPr>
-              <a:t>De 90 a 175 mm según kW</a:t>
+              <a:t>Uniones estancas y rígidas</a:t>
             </a:r>
           </a:p>
           <a:p>
             <a:pPr>
               <a:spcAft>
-                <a:spcPts val="1000"/>
+                <a:spcPts val="1100"/>
               </a:spcAft>
             </a:pPr>
             <a:r>
               <a:rPr sz="1600" b="1" i="0">
                 <a:solidFill>
-                  <a:srgbClr val="2E3A80"/>
-                </a:solidFill>
-                <a:latin typeface="Montserrat"/>
-              </a:rPr>
-              <a:t>•  </a:t>
+                  <a:srgbClr val="E8801A"/>
+                </a:solidFill>
+                <a:latin typeface="Montserrat"/>
+              </a:rPr>
+              <a:t>▸  </a:t>
             </a:r>
             <a:r>
               <a:rPr sz="1600" b="0" i="0">
@@ -11254,23 +12510,23 @@
                 </a:solidFill>
                 <a:latin typeface="Montserrat"/>
               </a:rPr>
-              <a:t>Nunca por debajo de la tabla</a:t>
+              <a:t>Diámetro sin reducciones</a:t>
             </a:r>
           </a:p>
           <a:p>
             <a:pPr>
               <a:spcAft>
-                <a:spcPts val="1000"/>
+                <a:spcPts val="1100"/>
               </a:spcAft>
             </a:pPr>
             <a:r>
               <a:rPr sz="1600" b="1" i="0">
                 <a:solidFill>
-                  <a:srgbClr val="2E3A80"/>
-                </a:solidFill>
-                <a:latin typeface="Montserrat"/>
-              </a:rPr>
-              <a:t>•  </a:t>
+                  <a:srgbClr val="E8801A"/>
+                </a:solidFill>
+                <a:latin typeface="Montserrat"/>
+              </a:rPr>
+              <a:t>▸  </a:t>
             </a:r>
             <a:r>
               <a:rPr sz="1600" b="0" i="0">
@@ -11279,14 +12535,14 @@
                 </a:solidFill>
                 <a:latin typeface="Montserrat"/>
               </a:rPr>
-              <a:t>Sin estrechamientos ni reducciones</a:t>
-            </a:r>
-          </a:p>
-        </p:txBody>
-      </p:sp>
-      <p:sp>
-        <p:nvSpPr>
-          <p:cNvPr id="8" name="imgph" descr="IMGQ:round metal flue pipe wall outlet"/>
+              <a:t>Tramo vertical ≥ 20 cm antes del codo</a:t>
+            </a:r>
+          </a:p>
+        </p:txBody>
+      </p:sp>
+      <p:sp>
+        <p:nvSpPr>
+          <p:cNvPr id="9" name="imgph" descr="IMGQ:vertical flue pipe elbow ceiling"/>
           <p:cNvSpPr/>
           <p:nvPr/>
         </p:nvSpPr>
@@ -11332,7 +12588,7 @@
       </p:sp>
       <p:sp>
         <p:nvSpPr>
-          <p:cNvPr id="9" name="TextBox 8"/>
+          <p:cNvPr id="10" name="TextBox 9"/>
           <p:cNvSpPr txBox="1"/>
           <p:nvPr/>
         </p:nvSpPr>
@@ -11372,7 +12628,7 @@
                 </a:solidFill>
                 <a:latin typeface="Montserrat"/>
               </a:rPr>
-              <a:t>round metal flue pipe wall outlet</a:t>
+              <a:t>vertical flue pipe elbow ceiling</a:t>
             </a:r>
           </a:p>
         </p:txBody>
@@ -11469,7 +12725,7 @@
                 </a:solidFill>
                 <a:latin typeface="Montserrat"/>
               </a:rPr>
-              <a:t>008 / 019</a:t>
+              <a:t>008 / 020</a:t>
             </a:r>
           </a:p>
         </p:txBody>
@@ -11517,7 +12773,7 @@
         <p:spPr>
           <a:xfrm>
             <a:off x="822960" y="457200"/>
-            <a:ext cx="8229600" cy="365760"/>
+            <a:ext cx="10058400" cy="365760"/>
           </a:xfrm>
           <a:prstGeom prst="rect">
             <a:avLst/>
@@ -11531,13 +12787,13 @@
           <a:lstStyle/>
           <a:p>
             <a:r>
-              <a:rPr sz="1200" b="1" i="0">
-                <a:solidFill>
-                  <a:srgbClr val="64748B"/>
-                </a:solidFill>
-                <a:latin typeface="Montserrat"/>
-              </a:rPr>
-              <a:t>TIRO NATURAL · PUNTUACIÓN</a:t>
+              <a:rPr sz="1300" b="1" i="0">
+                <a:solidFill>
+                  <a:srgbClr val="E8801A"/>
+                </a:solidFill>
+                <a:latin typeface="Montserrat"/>
+              </a:rPr>
+              <a:t>TIRO NATURAL · SALIDA DIRECTA</a:t>
             </a:r>
           </a:p>
         </p:txBody>
@@ -11565,26 +12821,70 @@
           <a:lstStyle/>
           <a:p>
             <a:r>
-              <a:rPr sz="2700" b="1" i="0">
+              <a:rPr sz="2800" b="1" i="0">
                 <a:solidFill>
                   <a:srgbClr val="1E2761"/>
                 </a:solidFill>
                 <a:latin typeface="Montserrat"/>
               </a:rPr>
-              <a:t>La puntuación del conducto (tabla 4)</a:t>
-            </a:r>
-          </a:p>
-        </p:txBody>
-      </p:sp>
-      <p:sp>
-        <p:nvSpPr>
-          <p:cNvPr id="7" name="TextBox 6"/>
+              <a:t>Diámetros mínimos (tabla 3)</a:t>
+            </a:r>
+          </a:p>
+        </p:txBody>
+      </p:sp>
+      <p:sp>
+        <p:nvSpPr>
+          <p:cNvPr id="7" name="Rounded Rectangle 6"/>
+          <p:cNvSpPr/>
+          <p:nvPr/>
+        </p:nvSpPr>
+        <p:spPr>
+          <a:xfrm>
+            <a:off x="868680" y="1627632"/>
+            <a:ext cx="2011680" cy="73152"/>
+          </a:xfrm>
+          <a:prstGeom prst="roundRect">
+            <a:avLst/>
+          </a:prstGeom>
+          <a:solidFill>
+            <a:srgbClr val="E8801A"/>
+          </a:solidFill>
+          <a:ln>
+            <a:noFill/>
+          </a:ln>
+          <a:effectLst/>
+        </p:spPr>
+        <p:style>
+          <a:lnRef idx="1">
+            <a:schemeClr val="accent1"/>
+          </a:lnRef>
+          <a:fillRef idx="3">
+            <a:schemeClr val="accent1"/>
+          </a:fillRef>
+          <a:effectRef idx="2">
+            <a:schemeClr val="accent1"/>
+          </a:effectRef>
+          <a:fontRef idx="minor">
+            <a:schemeClr val="lt1"/>
+          </a:fontRef>
+        </p:style>
+        <p:txBody>
+          <a:bodyPr rtlCol="0" anchor="ctr"/>
+          <a:lstStyle/>
+          <a:p>
+            <a:pPr algn="ctr"/>
+          </a:p>
+        </p:txBody>
+      </p:sp>
+      <p:sp>
+        <p:nvSpPr>
+          <p:cNvPr id="8" name="TextBox 7"/>
           <p:cNvSpPr txBox="1"/>
           <p:nvPr/>
         </p:nvSpPr>
         <p:spPr>
           <a:xfrm>
-            <a:off x="822960" y="1920240"/>
+            <a:off x="822960" y="1965960"/>
             <a:ext cx="4983480" cy="4206240"/>
           </a:xfrm>
           <a:prstGeom prst="rect">
@@ -11600,17 +12900,17 @@
           <a:p>
             <a:pPr>
               <a:spcAft>
-                <a:spcPts val="1000"/>
+                <a:spcPts val="1100"/>
               </a:spcAft>
             </a:pPr>
             <a:r>
               <a:rPr sz="1600" b="1" i="0">
                 <a:solidFill>
-                  <a:srgbClr val="2E3A80"/>
-                </a:solidFill>
-                <a:latin typeface="Montserrat"/>
-              </a:rPr>
-              <a:t>•  </a:t>
+                  <a:srgbClr val="E8801A"/>
+                </a:solidFill>
+                <a:latin typeface="Montserrat"/>
+              </a:rPr>
+              <a:t>▸  </a:t>
             </a:r>
             <a:r>
               <a:rPr sz="1600" b="0" i="0">
@@ -11619,23 +12919,23 @@
                 </a:solidFill>
                 <a:latin typeface="Montserrat"/>
               </a:rPr>
-              <a:t>Subir suma: +0,1 por cada cm</a:t>
+              <a:t>De 90 a 175 mm según kW</a:t>
             </a:r>
           </a:p>
           <a:p>
             <a:pPr>
               <a:spcAft>
-                <a:spcPts val="1000"/>
+                <a:spcPts val="1100"/>
               </a:spcAft>
             </a:pPr>
             <a:r>
               <a:rPr sz="1600" b="1" i="0">
                 <a:solidFill>
-                  <a:srgbClr val="2E3A80"/>
-                </a:solidFill>
-                <a:latin typeface="Montserrat"/>
-              </a:rPr>
-              <a:t>•  </a:t>
+                  <a:srgbClr val="E8801A"/>
+                </a:solidFill>
+                <a:latin typeface="Montserrat"/>
+              </a:rPr>
+              <a:t>▸  </a:t>
             </a:r>
             <a:r>
               <a:rPr sz="1600" b="0" i="0">
@@ -11644,23 +12944,23 @@
                 </a:solidFill>
                 <a:latin typeface="Montserrat"/>
               </a:rPr>
-              <a:t>Codos y tramos horizontales restan</a:t>
+              <a:t>Nunca por debajo de la tabla</a:t>
             </a:r>
           </a:p>
           <a:p>
             <a:pPr>
               <a:spcAft>
-                <a:spcPts val="1000"/>
+                <a:spcPts val="1100"/>
               </a:spcAft>
             </a:pPr>
             <a:r>
               <a:rPr sz="1600" b="1" i="0">
                 <a:solidFill>
-                  <a:srgbClr val="2E3A80"/>
-                </a:solidFill>
-                <a:latin typeface="Montserrat"/>
-              </a:rPr>
-              <a:t>•  </a:t>
+                  <a:srgbClr val="E8801A"/>
+                </a:solidFill>
+                <a:latin typeface="Montserrat"/>
+              </a:rPr>
+              <a:t>▸  </a:t>
             </a:r>
             <a:r>
               <a:rPr sz="1600" b="0" i="0">
@@ -11669,14 +12969,14 @@
                 </a:solidFill>
                 <a:latin typeface="Montserrat"/>
               </a:rPr>
-              <a:t>Hay que acabar en ≥ +1</a:t>
-            </a:r>
-          </a:p>
-        </p:txBody>
-      </p:sp>
-      <p:sp>
-        <p:nvSpPr>
-          <p:cNvPr id="8" name="imgph" descr="IMGQ:chimney flue diagram vertical rise"/>
+              <a:t>Sin estrechamientos ni reducciones</a:t>
+            </a:r>
+          </a:p>
+        </p:txBody>
+      </p:sp>
+      <p:sp>
+        <p:nvSpPr>
+          <p:cNvPr id="9" name="imgph" descr="IMGQ:round metal flue pipe wall outlet"/>
           <p:cNvSpPr/>
           <p:nvPr/>
         </p:nvSpPr>
@@ -11722,7 +13022,7 @@
       </p:sp>
       <p:sp>
         <p:nvSpPr>
-          <p:cNvPr id="9" name="TextBox 8"/>
+          <p:cNvPr id="10" name="TextBox 9"/>
           <p:cNvSpPr txBox="1"/>
           <p:nvPr/>
         </p:nvSpPr>
@@ -11762,7 +13062,7 @@
                 </a:solidFill>
                 <a:latin typeface="Montserrat"/>
               </a:rPr>
-              <a:t>chimney flue diagram vertical rise</a:t>
+              <a:t>round metal flue pipe wall outlet</a:t>
             </a:r>
           </a:p>
         </p:txBody>
@@ -11859,7 +13159,7 @@
                 </a:solidFill>
                 <a:latin typeface="Montserrat"/>
               </a:rPr>
-              <a:t>009 / 019</a:t>
+              <a:t>009 / 020</a:t>
             </a:r>
           </a:p>
         </p:txBody>
@@ -11907,7 +13207,7 @@
         <p:spPr>
           <a:xfrm>
             <a:off x="822960" y="457200"/>
-            <a:ext cx="8229600" cy="365760"/>
+            <a:ext cx="10058400" cy="365760"/>
           </a:xfrm>
           <a:prstGeom prst="rect">
             <a:avLst/>
@@ -11921,13 +13221,13 @@
           <a:lstStyle/>
           <a:p>
             <a:r>
-              <a:rPr sz="1200" b="1" i="0">
-                <a:solidFill>
-                  <a:srgbClr val="64748B"/>
-                </a:solidFill>
-                <a:latin typeface="Montserrat"/>
-              </a:rPr>
-              <a:t>TIRO NATURAL · DISTANCIAS</a:t>
+              <a:rPr sz="1300" b="1" i="0">
+                <a:solidFill>
+                  <a:srgbClr val="E8801A"/>
+                </a:solidFill>
+                <a:latin typeface="Montserrat"/>
+              </a:rPr>
+              <a:t>TIRO NATURAL · PUNTUACIÓN</a:t>
             </a:r>
           </a:p>
         </p:txBody>
@@ -11955,26 +13255,70 @@
           <a:lstStyle/>
           <a:p>
             <a:r>
-              <a:rPr sz="2700" b="1" i="0">
+              <a:rPr sz="2800" b="1" i="0">
                 <a:solidFill>
                   <a:srgbClr val="1E2761"/>
                 </a:solidFill>
                 <a:latin typeface="Montserrat"/>
               </a:rPr>
-              <a:t>Distancias del extremo</a:t>
-            </a:r>
-          </a:p>
-        </p:txBody>
-      </p:sp>
-      <p:sp>
-        <p:nvSpPr>
-          <p:cNvPr id="7" name="TextBox 6"/>
+              <a:t>La puntuación del conducto (tabla 4)</a:t>
+            </a:r>
+          </a:p>
+        </p:txBody>
+      </p:sp>
+      <p:sp>
+        <p:nvSpPr>
+          <p:cNvPr id="7" name="Rounded Rectangle 6"/>
+          <p:cNvSpPr/>
+          <p:nvPr/>
+        </p:nvSpPr>
+        <p:spPr>
+          <a:xfrm>
+            <a:off x="868680" y="1627632"/>
+            <a:ext cx="2011680" cy="73152"/>
+          </a:xfrm>
+          <a:prstGeom prst="roundRect">
+            <a:avLst/>
+          </a:prstGeom>
+          <a:solidFill>
+            <a:srgbClr val="E8801A"/>
+          </a:solidFill>
+          <a:ln>
+            <a:noFill/>
+          </a:ln>
+          <a:effectLst/>
+        </p:spPr>
+        <p:style>
+          <a:lnRef idx="1">
+            <a:schemeClr val="accent1"/>
+          </a:lnRef>
+          <a:fillRef idx="3">
+            <a:schemeClr val="accent1"/>
+          </a:fillRef>
+          <a:effectRef idx="2">
+            <a:schemeClr val="accent1"/>
+          </a:effectRef>
+          <a:fontRef idx="minor">
+            <a:schemeClr val="lt1"/>
+          </a:fontRef>
+        </p:style>
+        <p:txBody>
+          <a:bodyPr rtlCol="0" anchor="ctr"/>
+          <a:lstStyle/>
+          <a:p>
+            <a:pPr algn="ctr"/>
+          </a:p>
+        </p:txBody>
+      </p:sp>
+      <p:sp>
+        <p:nvSpPr>
+          <p:cNvPr id="8" name="TextBox 7"/>
           <p:cNvSpPr txBox="1"/>
           <p:nvPr/>
         </p:nvSpPr>
         <p:spPr>
           <a:xfrm>
-            <a:off x="822960" y="1920240"/>
+            <a:off x="822960" y="1965960"/>
             <a:ext cx="4983480" cy="4206240"/>
           </a:xfrm>
           <a:prstGeom prst="rect">
@@ -11990,17 +13334,17 @@
           <a:p>
             <a:pPr>
               <a:spcAft>
-                <a:spcPts val="1000"/>
+                <a:spcPts val="1100"/>
               </a:spcAft>
             </a:pPr>
             <a:r>
               <a:rPr sz="1600" b="1" i="0">
                 <a:solidFill>
-                  <a:srgbClr val="2E3A80"/>
-                </a:solidFill>
-                <a:latin typeface="Montserrat"/>
-              </a:rPr>
-              <a:t>•  </a:t>
+                  <a:srgbClr val="E8801A"/>
+                </a:solidFill>
+                <a:latin typeface="Montserrat"/>
+              </a:rPr>
+              <a:t>▸  </a:t>
             </a:r>
             <a:r>
               <a:rPr sz="1600" b="0" i="0">
@@ -12009,23 +13353,23 @@
                 </a:solidFill>
                 <a:latin typeface="Montserrat"/>
               </a:rPr>
-              <a:t>10 cm al muro que atraviesa</a:t>
+              <a:t>Subir suma: +0,1 por cada cm</a:t>
             </a:r>
           </a:p>
           <a:p>
             <a:pPr>
               <a:spcAft>
-                <a:spcPts val="1000"/>
+                <a:spcPts val="1100"/>
               </a:spcAft>
             </a:pPr>
             <a:r>
               <a:rPr sz="1600" b="1" i="0">
                 <a:solidFill>
-                  <a:srgbClr val="2E3A80"/>
-                </a:solidFill>
-                <a:latin typeface="Montserrat"/>
-              </a:rPr>
-              <a:t>•  </a:t>
+                  <a:srgbClr val="E8801A"/>
+                </a:solidFill>
+                <a:latin typeface="Montserrat"/>
+              </a:rPr>
+              <a:t>▸  </a:t>
             </a:r>
             <a:r>
               <a:rPr sz="1600" b="0" i="0">
@@ -12034,23 +13378,23 @@
                 </a:solidFill>
                 <a:latin typeface="Montserrat"/>
               </a:rPr>
-              <a:t>40 cm a aberturas, ventanas y aleros</a:t>
+              <a:t>Codos y tramos horizontales restan</a:t>
             </a:r>
           </a:p>
           <a:p>
             <a:pPr>
               <a:spcAft>
-                <a:spcPts val="1000"/>
+                <a:spcPts val="1100"/>
               </a:spcAft>
             </a:pPr>
             <a:r>
               <a:rPr sz="1600" b="1" i="0">
                 <a:solidFill>
-                  <a:srgbClr val="2E3A80"/>
-                </a:solidFill>
-                <a:latin typeface="Montserrat"/>
-              </a:rPr>
-              <a:t>•  </a:t>
+                  <a:srgbClr val="E8801A"/>
+                </a:solidFill>
+                <a:latin typeface="Montserrat"/>
+              </a:rPr>
+              <a:t>▸  </a:t>
             </a:r>
             <a:r>
               <a:rPr sz="1600" b="0" i="0">
@@ -12059,14 +13403,14 @@
                 </a:solidFill>
                 <a:latin typeface="Montserrat"/>
               </a:rPr>
-              <a:t>220 cm al suelo exterior</a:t>
-            </a:r>
-          </a:p>
-        </p:txBody>
-      </p:sp>
-      <p:sp>
-        <p:nvSpPr>
-          <p:cNvPr id="8" name="imgph" descr="IMGQ:flue terminal on exterior wall"/>
+              <a:t>Hay que acabar en ≥ +1</a:t>
+            </a:r>
+          </a:p>
+        </p:txBody>
+      </p:sp>
+      <p:sp>
+        <p:nvSpPr>
+          <p:cNvPr id="9" name="imgph" descr="IMGQ:chimney flue diagram vertical rise"/>
           <p:cNvSpPr/>
           <p:nvPr/>
         </p:nvSpPr>
@@ -12112,7 +13456,7 @@
       </p:sp>
       <p:sp>
         <p:nvSpPr>
-          <p:cNvPr id="9" name="TextBox 8"/>
+          <p:cNvPr id="10" name="TextBox 9"/>
           <p:cNvSpPr txBox="1"/>
           <p:nvPr/>
         </p:nvSpPr>
@@ -12152,7 +13496,7 @@
                 </a:solidFill>
                 <a:latin typeface="Montserrat"/>
               </a:rPr>
-              <a:t>flue terminal on exterior wall</a:t>
+              <a:t>chimney flue diagram vertical rise</a:t>
             </a:r>
           </a:p>
         </p:txBody>

--- a/Curso Gas B/13 - UNE 60670 - Ventilacion y evacuacion de humos/13 - UNE 60670 - Ventilacion y evacuacion de humos - Vídeo 3.pptx
+++ b/Curso Gas B/13 - UNE 60670 - Ventilacion y evacuacion de humos/13 - UNE 60670 - Ventilacion y evacuacion de humos - Vídeo 3.pptx
@@ -25,6 +25,12 @@
     <p:sldId id="273" r:id="rId25"/>
     <p:sldId id="274" r:id="rId26"/>
     <p:sldId id="275" r:id="rId27"/>
+    <p:sldId id="276" r:id="rId28"/>
+    <p:sldId id="277" r:id="rId29"/>
+    <p:sldId id="278" r:id="rId30"/>
+    <p:sldId id="279" r:id="rId31"/>
+    <p:sldId id="280" r:id="rId32"/>
+    <p:sldId id="281" r:id="rId33"/>
   </p:sldIdLst>
   <p:sldSz cx="12191695" cy="6858000" type="screen4x3"/>
   <p:notesSz cx="6858000" cy="9144000"/>
@@ -596,12 +602,12 @@
           <a:lstStyle/>
           <a:p>
             <a:r>
-              <a:t>N1: ¿Y a qué distancia tiene que quedar la boca del tubo de las cosas de alrededor?</a:t>
-            </a:r>
-          </a:p>
-          <a:p>
-            <a:r>
-              <a:t>N2: Aquí hay una regla mnemotécnica que te salva: al salir a fachada o patio, casi todas las distancias son cuarenta centímetros. Cuarenta a cualquier abertura permanente de ventilación, cuarenta a ventanas o puertas de otro local, cuarenta a paredes laterales externas, y cuarenta a cornisas y aleros. Solo cambian dos números: diez centímetros respecto al muro que el tubo atraviesa, y veinte centímetros a cualquier otro resalte de la fachada. Y una distancia grande: dos metros veinte respecto al suelo exterior, para que nadie meta la cara en los humos, salvo que salgan a tu propia zona privada. Todo esto se mide sin contar el deflector del extremo. Acercar la boca a una ventana es meterle los humos al vecino: mancha negra en la fachada y anomalía en la revisión.</a:t>
+              <a:t>N1: ¿Qué es eso de la «puntuación» del conducto?</a:t>
+            </a:r>
+          </a:p>
+          <a:p>
+            <a:r>
+              <a:t>N2: Es una forma ingeniosa de comprobar sobre el papel si el conducto va a tirar bien, antes de montarlo. Funciona como un juego de puntos. Ganar altura suma: cada centímetro que sube el conducto aporta cero coma uno puntos, porque la altura es lo que hace que los humos suban solos. Y cada codo o cada tramo horizontal resta, porque frenan los humos; un codo cerrado puede quitarte dos puntos, y la longitud recta también descuenta. El deflector del extremo resta un poco también. Al final, la suma tiene que dar al menos más uno. Idea corta: sube mucho y dobla poco. Un conducto vertical y corto aprueba de sobra; uno muy tumbado y lleno de codos suspende, y en obra eso es revoco y el aparato apagándose.</a:t>
             </a:r>
           </a:p>
         </p:txBody>
@@ -671,12 +677,12 @@
           <a:lstStyle/>
           <a:p>
             <a:r>
-              <a:t>N1: Si a un aparato de tiro natural le pongo un extractor, ¿es un simple accesorio?</a:t>
-            </a:r>
-          </a:p>
-          <a:p>
-            <a:r>
-              <a:t>N2: No, y este punto sorprende a mucha gente. Cuando a un aparato de tipo B o C de tiro natural le añades un dispositivo que empuja los humos y lo pasas a tiro forzado, la norma dice que eso equivale a cambiar el tipo de aparato. O sea, no es colgar un accesorio: tienes que cumplir todas las condiciones de instalación de su nueva configuración, la de tiro forzado. A cambio, como ahora los humos van empujados y no dependen de la altura, te perdonan la puntuación de la tabla y los veinte centímetros de tramo vertical antes del codo: esa función la hace el propio dispositivo. Se puede instalar después, si detectas que un conducto evacúa mal. Pero recuerda la idea de fondo: poner un extractor es, a ojos de la norma, instalar otro aparato.</a:t>
+              <a:t>N1: ¿Cómo se puntúa si un conducto va a tirar bien?</a:t>
+            </a:r>
+          </a:p>
+          <a:p>
+            <a:r>
+              <a:t>N2: Con la tabla cuatro, que es un juego de sumar y restar. Ganar altura suma: cero coma uno puntos por cada centímetro que sube el conducto, porque la altura es lo que empuja los humos hacia arriba. A partir de ahí, casi todo resta. Un codo cerrado, de más de cuarenta y cinco grados, que pase de vertical a horizontal, quita dos puntos; los codos suaves, de hasta cuarenta y cinco grados, restan menos, un punto o unas décimas. Cada metro de tramo recto resta medio punto, y el deflector del extremo, tres décimas. Sumas todo y el resultado tiene que dar al menos más uno. Ejemplo de obra: un conducto vertical y corto suma altura y apenas resta, aprueba de sobra; uno muy tumbado y con codos suspende, y eso en la práctica es revoco. La regla: sube mucho y dobla poco.</a:t>
             </a:r>
           </a:p>
         </p:txBody>
@@ -746,12 +752,12 @@
           <a:lstStyle/>
           <a:p>
             <a:r>
-              <a:t>N1: ¿Y los conductos de tiro forzado tienen sus propias tablas de diámetros?</a:t>
-            </a:r>
-          </a:p>
-          <a:p>
-            <a:r>
-              <a:t>N2: No como los de tiro natural; aquí la regla es más simple de enunciar pero muy estricta: manda el fabricante. En los aparatos de tipo B y de tipo C de tiro forzado, los conductos, sus materiales, uniones, diámetro, configuración y longitud máxima, son los que indica el fabricante del aparato, porque él ha calculado con qué tubo funciona bien su ventilador. En el tipo C, tanto la entrada de aire como la salida de humos siguen sus dimensiones. Además, para todos: uniones estancas y rígidas, y un detalle importante, si el aparato no es de condensación, el conducto se monta con una ligera pendiente descendente hacia fuera, para que las gotas de condensado no vuelvan hacia dentro del aparato. Y sigue habiendo orificio de once milímetros para la toma de muestras.</a:t>
+              <a:t>N1: ¿Y a qué distancia tiene que quedar la boca del tubo de las cosas de alrededor?</a:t>
+            </a:r>
+          </a:p>
+          <a:p>
+            <a:r>
+              <a:t>N2: Aquí hay una regla mnemotécnica que te salva: al salir a fachada o patio, casi todas las distancias son cuarenta centímetros. Cuarenta a cualquier abertura permanente de ventilación, cuarenta a ventanas o puertas de otro local, cuarenta a paredes laterales externas, y cuarenta a cornisas y aleros. Solo cambian dos números: diez centímetros respecto al muro que el tubo atraviesa, y veinte centímetros a cualquier otro resalte de la fachada. Y una distancia grande: dos metros veinte respecto al suelo exterior, para que nadie meta la cara en los humos, salvo que salgan a tu propia zona privada. Todo esto se mide sin contar el deflector del extremo. Acercar la boca a una ventana es meterle los humos al vecino: mancha negra en la fachada y anomalía en la revisión.</a:t>
             </a:r>
           </a:p>
         </p:txBody>
@@ -821,12 +827,12 @@
           <a:lstStyle/>
           <a:p>
             <a:r>
-              <a:t>N1: La caldera de ventosa saca los humos por la pared... ¿cómo tiene que quedar?</a:t>
-            </a:r>
-          </a:p>
-          <a:p>
-            <a:r>
-              <a:t>N2: En los aparatos de tipo C de tiro forzado, las famosas calderas de ventosa, casi todo gira en torno a diez centímetros. El extremo del tubo se diseña para lanzar los humos de frente, en lo que se llama salida tipo cañón, y lo más lejos posible de la pared. El tubo puede asomar como máximo diez centímetros de la superficie de la fachada; si asoma más, la boca queda expuesta y devuelve humos hacia la pared. Y en balcones, terrazas o galerías techados aparece el número mágico: treinta centímetros de distancia del eje del tubo al techo. Por debajo de treinta, solo en obra existente y prolongando hasta el borde; por encima, el tubo no asoma más de diez centímetros. Y si luego cierran el balcón, hay que alargar los tubos para sacar los humos de verdad, o la caldera revoca en un cuarto cerrado.</a:t>
+              <a:t>N1: Chuleta de distancias del extremo. ¿Cuánto al muro que el tubo atraviesa?</a:t>
+            </a:r>
+          </a:p>
+          <a:p>
+            <a:r>
+              <a:t>N2: Recuerda que casi todo es cuarenta, pero hay dos excepciones. Esta es una de ellas, la más pequeña.</a:t>
             </a:r>
           </a:p>
         </p:txBody>
@@ -896,12 +902,12 @@
           <a:lstStyle/>
           <a:p>
             <a:r>
-              <a:t>N1: ¿Y la ventosa tiene que guardar distancia a las ventanas?</a:t>
-            </a:r>
-          </a:p>
-          <a:p>
-            <a:r>
-              <a:t>N2: Sí, y es de las cifras que más caen. La proyección del tubo de salida sobre el plano donde están los orificios de ventilación y la parte que se abre de las ventanas debe quedar a cuarenta centímetros o más de ellos. Hay una excepción cómoda: si la salida se hace por encima de esos huecos, no hace falta esa distancia, porque los humos suben y no vuelven a entrar. En edificación ya construida, cuando no puedas guardar los cuarenta centímetros, puedes usar deflectores desviadores laterales, esos accesorios que tuercen el chorro de humos, u otro método del fabricante que garantice que la salida se abre en abanico; pero ni así puedes bajar de veinte centímetros. Cuarenta es lo normal; veinte, el suelo absoluto con truco.</a:t>
+              <a:t>N1: ¿Por qué diez?</a:t>
+            </a:r>
+          </a:p>
+          <a:p>
+            <a:r>
+              <a:t>N2: Porque la regla mnemotécnica es «casi todo cuarenta, dos excepciones». Cuarenta centímetros a aberturas permanentes, a ventanas o puertas de otro local, a paredes laterales y a cornisas y aleros. Las dos que se salen: diez centímetros al muro que el tubo atraviesa, y veinte centímetros a cualquier otro resalte. Y aparte, dos metros veinte al suelo exterior. El truco: memoriza las dos excepciones, diez y veinte, y todo lo demás es cuarenta.</a:t>
             </a:r>
           </a:p>
         </p:txBody>
@@ -971,12 +977,12 @@
           <a:lstStyle/>
           <a:p>
             <a:r>
-              <a:t>N1: Si el tubo da a un sitio por donde pasa la gente, ¿hay que subirlo?</a:t>
-            </a:r>
-          </a:p>
-          <a:p>
-            <a:r>
-              <a:t>N2: Sí. Cuando la salida de humos da directamente a una zona con tránsito o permanencia de personas, el eje del conducto tiene que estar a dos metros veinte o más del suelo por donde pasa o está la gente, medido en vertical. La razón es de cortesía y de salud: los humos salen por encima de la cabeza y nadie los respira de frente. Hay dos excepciones prácticas. Una: si los humos salen directamente a una zona privada de tu propiedad, donde no pasa gente ajena, no hace falta. Y dos: los radiadores murales de ventosa pequeños, de menos de cuatro coma dos kilovatios, se libran de esos dos veinte siempre que estén protegidos para que nadie toque el tubo caliente. Fuera de eso, dos veinte y a respetar la cabeza de la gente.</a:t>
+              <a:t>N1: Si a un aparato de tiro natural le pongo un extractor, ¿es un simple accesorio?</a:t>
+            </a:r>
+          </a:p>
+          <a:p>
+            <a:r>
+              <a:t>N2: No, y este punto sorprende a mucha gente. Cuando a un aparato de tipo B o C de tiro natural le añades un dispositivo que empuja los humos y lo pasas a tiro forzado, la norma dice que eso equivale a cambiar el tipo de aparato. O sea, no es colgar un accesorio: tienes que cumplir todas las condiciones de instalación de su nueva configuración, la de tiro forzado. A cambio, como ahora los humos van empujados y no dependen de la altura, te perdonan la puntuación de la tabla y los veinte centímetros de tramo vertical antes del codo: esa función la hace el propio dispositivo. Se puede instalar después, si detectas que un conducto evacúa mal. Pero recuerda la idea de fondo: poner un extractor es, a ojos de la norma, instalar otro aparato.</a:t>
             </a:r>
           </a:p>
         </p:txBody>
@@ -1046,12 +1052,12 @@
           <a:lstStyle/>
           <a:p>
             <a:r>
-              <a:t>N1: Hay muchas distancias de fachada. ¿Me haces una chuleta?</a:t>
-            </a:r>
-          </a:p>
-          <a:p>
-            <a:r>
-              <a:t>N2: Claro, y con el porqué. A las paredes laterales, treinta centímetros en general; pero un metro si en esa pared hay ventanas por encima del tubo, cerca, a tres metros o menos y casi a su misma altura, para que los humos no entren por la ventana del vecino de al lado. A las paredes frontales, dos metros en general, y tres metros si hay ventanas en esa pared frontal en las mismas condiciones. Y entre dos salidas de humos al mismo nivel, sesenta centímetros, para que los humos de una no reentren por la otra. La buena noticia: todas esas distancias se reducen si usas deflectores desviadores de flujo a cuarenta y cinco grados; las laterales y frontales a la mitad, y las dos salidas de sesenta a treinta. El deflector es el truco que tuerce los humos y te deja acercarte.</a:t>
+              <a:t>N1: ¿Y los conductos de tiro forzado tienen sus propias tablas de diámetros?</a:t>
+            </a:r>
+          </a:p>
+          <a:p>
+            <a:r>
+              <a:t>N2: No como los de tiro natural; aquí la regla es más simple de enunciar pero muy estricta: manda el fabricante. En los aparatos de tipo B y de tipo C de tiro forzado, los conductos, sus materiales, uniones, diámetro, configuración y longitud máxima, son los que indica el fabricante del aparato, porque él ha calculado con qué tubo funciona bien su ventilador. En el tipo C, tanto la entrada de aire como la salida de humos siguen sus dimensiones. Además, para todos: uniones estancas y rígidas, y un detalle importante, si el aparato no es de condensación, el conducto se monta con una ligera pendiente descendente hacia fuera, para que las gotas de condensado no vuelvan hacia dentro del aparato. Y sigue habiendo orificio de once milímetros para la toma de muestras.</a:t>
             </a:r>
           </a:p>
         </p:txBody>
@@ -1121,12 +1127,12 @@
           <a:lstStyle/>
           <a:p>
             <a:r>
-              <a:t>N1: ¿Qué cosas no se pueden juntar en la misma chimenea?</a:t>
-            </a:r>
-          </a:p>
-          <a:p>
-            <a:r>
-              <a:t>N2: Hay cuatro prohibiciones, todas de sentido común, y caen mucho. Una: no se mezclan aparatos de tiro natural y de tiro forzado en el mismo conducto vertical, porque el ventilador de uno revocaría los humos del otro hacia dentro. Dos: no se juntan aparatos de condensación y de no condensación, salvo que la chimenea sea especial, anticorrosión según la norma UNE ciento veintitrés mil uno, y se haga el cálculo de sección; es que el de condensación echa humos húmedos y ácidos que pudren un tubo normal. Tres: no se conecta a la chimenea del aparato ningún extractor ni campana de cocina, porque chuparían los humos. Y cuatro: no se mezcla el gas con humos de carbón o gasóleo; y si reaprovechas una chimenea vieja que llevó sólidos, antes la limpias y compruebas que tira. Cada una de estas mezclas es un caso real de revoco o de intoxicación.</a:t>
+              <a:t>N1: La caldera de ventosa saca los humos por la pared... ¿cómo tiene que quedar?</a:t>
+            </a:r>
+          </a:p>
+          <a:p>
+            <a:r>
+              <a:t>N2: En los aparatos de tipo C de tiro forzado, las famosas calderas de ventosa, casi todo gira en torno a diez centímetros. El extremo del tubo se diseña para lanzar los humos de frente, en lo que se llama salida tipo cañón, y lo más lejos posible de la pared. El tubo puede asomar como máximo diez centímetros de la superficie de la fachada; si asoma más, la boca queda expuesta y devuelve humos hacia la pared. Y en balcones, terrazas o galerías techados aparece el número mágico: treinta centímetros de distancia del eje del tubo al techo. Por debajo de treinta, solo en obra existente y prolongando hasta el borde; por encima, el tubo no asoma más de diez centímetros. Y si luego cierran el balcón, hay que alargar los tubos para sacar los humos de verdad, o la caldera revoca en un cuarto cerrado.</a:t>
             </a:r>
           </a:p>
         </p:txBody>
@@ -1196,12 +1202,12 @@
           <a:lstStyle/>
           <a:p>
             <a:r>
-              <a:t>N1: Cuando varios tubos individuales se unen a una chimenea común, ¿hay reglas?</a:t>
-            </a:r>
-          </a:p>
-          <a:p>
-            <a:r>
-              <a:t>N2: Sí, tres detalles que conviene fichar. Primero, al unir varios conductos individuales a la chimenea o shunt, se guarda una separación mínima de quince centímetros entre las generatrices más próximas, o sea entre los bordes de los tubos, para que los humos de uno no se metan en el de al lado; y los empalmes al conducto común se hacen en ángulo agudo, a favor del flujo, como te incorporas a una autopista, no de frente. Segundo, si el conducto atraviesa una pared o techo de madera u otro material combustible, el agujero de paso debe ser diez centímetros más ancho que el tubo, y ese hueco se rellena con material aislante e incombustible, para que la madera no coja calor. Y tercero, si hay regulación de tiro, nunca puede ser a mano: tiene que ser automática motorizada, por contrapeso, o fijada de fábrica en la puesta en marcha. A mano, alguien la tocaría y desajustaría la evacuación.</a:t>
+              <a:t>N1: ¿Y la ventosa tiene que guardar distancia a las ventanas?</a:t>
+            </a:r>
+          </a:p>
+          <a:p>
+            <a:r>
+              <a:t>N2: Sí, y es de las cifras que más caen. La proyección del tubo de salida sobre el plano donde están los orificios de ventilación y la parte que se abre de las ventanas debe quedar a cuarenta centímetros o más de ellos. Hay una excepción cómoda: si la salida se hace por encima de esos huecos, no hace falta esa distancia, porque los humos suben y no vuelven a entrar. En edificación ya construida, cuando no puedas guardar los cuarenta centímetros, puedes usar deflectores desviadores laterales, esos accesorios que tuercen el chorro de humos, u otro método del fabricante que garantice que la salida se abre en abanico; pero ni así puedes bajar de veinte centímetros. Cuarenta es lo normal; veinte, el suelo absoluto con truco.</a:t>
             </a:r>
           </a:p>
         </p:txBody>
@@ -1271,12 +1277,12 @@
           <a:lstStyle/>
           <a:p>
             <a:r>
-              <a:t>N1: Y la chimenea en sí, ¿de qué tiene que ser?</a:t>
-            </a:r>
-          </a:p>
-          <a:p>
-            <a:r>
-              <a:t>N2: Depende del material, y cada uno tiene su norma; te doy la chuleta. Si la chimenea es metálica, va por la UNE-EN mil ochocientos cincuenta y seis guion uno; si es no metálica, por la NTE-ISH setenta y cuatro; y si es de plástico, por la UNE-EN catorce mil cuatrocientos setenta y uno. Aparte del material, el cálculo de la chimenea, que tire bien y no se condense, va por la familia de la UNE ciento veintitrés mil uno y ciento veintitrés mil tres, y las UNE-EN trece mil trescientos ochenta y cuatro. Y una regla del sombrerete que cae: la terminación de una chimenea colectiva de tiro natural no puede taponar la salida de humos a la atmósfera; y si lleva un dispositivo de ayuda a la evacuación y se estropea, la chimenea tiene que seguir tirando sola, en tiro natural. Nunca puede quedar el edificio sin salida de humos porque falle un ventilador.</a:t>
+              <a:t>N1: Si el tubo da a un sitio por donde pasa la gente, ¿hay que subirlo?</a:t>
+            </a:r>
+          </a:p>
+          <a:p>
+            <a:r>
+              <a:t>N2: Sí. Cuando la salida de humos da directamente a una zona con tránsito o permanencia de personas, el eje del conducto tiene que estar a dos metros veinte o más del suelo por donde pasa o está la gente, medido en vertical. La razón es de cortesía y de salud: los humos salen por encima de la cabeza y nadie los respira de frente. Hay dos excepciones prácticas. Una: si los humos salen directamente a una zona privada de tu propiedad, donde no pasa gente ajena, no hace falta. Y dos: los radiadores murales de ventosa pequeños, de menos de cuatro coma dos kilovatios, se libran de esos dos veinte siempre que estén protegidos para que nadie toque el tubo caliente. Fuera de eso, dos veinte y a respetar la cabeza de la gente.</a:t>
             </a:r>
           </a:p>
         </p:txBody>
@@ -1421,6 +1427,456 @@
           <a:lstStyle/>
           <a:p>
             <a:r>
+              <a:t>N1: Hay muchas distancias de fachada. ¿Me haces una chuleta?</a:t>
+            </a:r>
+          </a:p>
+          <a:p>
+            <a:r>
+              <a:t>N2: Claro, y con el porqué. A las paredes laterales, treinta centímetros en general; pero un metro si en esa pared hay ventanas por encima del tubo, cerca, a tres metros o menos y casi a su misma altura, para que los humos no entren por la ventana del vecino de al lado. A las paredes frontales, dos metros en general, y tres metros si hay ventanas en esa pared frontal en las mismas condiciones. Y entre dos salidas de humos al mismo nivel, sesenta centímetros, para que los humos de una no reentren por la otra. La buena noticia: todas esas distancias se reducen si usas deflectores desviadores de flujo a cuarenta y cinco grados; las laterales y frontales a la mitad, y las dos salidas de sesenta a treinta. El deflector es el truco que tuerce los humos y te deja acercarte.</a:t>
+            </a:r>
+          </a:p>
+        </p:txBody>
+      </p:sp>
+      <p:sp>
+        <p:nvSpPr>
+          <p:cNvPr id="4" name="Slide Number Placeholder 3"/>
+          <p:cNvSpPr>
+            <a:spLocks noGrp="1"/>
+          </p:cNvSpPr>
+          <p:nvPr>
+            <p:ph type="sldNum" idx="5" sz="quarter"/>
+          </p:nvPr>
+        </p:nvSpPr>
+        <p:spPr/>
+      </p:sp>
+    </p:spTree>
+  </p:cSld>
+  <p:clrMapOvr>
+    <a:masterClrMapping/>
+  </p:clrMapOvr>
+</p:notes>
+</file>
+
+<file path=ppt/notesSlides/notesSlide21.xml><?xml version="1.0" encoding="utf-8"?>
+<p:notes xmlns:a="http://schemas.openxmlformats.org/drawingml/2006/main" xmlns:p="http://schemas.openxmlformats.org/presentationml/2006/main" xmlns:r="http://schemas.openxmlformats.org/officeDocument/2006/relationships">
+  <p:cSld>
+    <p:spTree>
+      <p:nvGrpSpPr>
+        <p:cNvPr id="1" name=""/>
+        <p:cNvGrpSpPr/>
+        <p:nvPr/>
+      </p:nvGrpSpPr>
+      <p:grpSpPr>
+        <a:xfrm>
+          <a:off x="0" y="0"/>
+          <a:ext cx="0" cy="0"/>
+          <a:chOff x="0" y="0"/>
+          <a:chExt cx="0" cy="0"/>
+        </a:xfrm>
+      </p:grpSpPr>
+      <p:sp>
+        <p:nvSpPr>
+          <p:cNvPr id="2" name="Slide Image Placeholder 1"/>
+          <p:cNvSpPr>
+            <a:spLocks noGrp="1"/>
+          </p:cNvSpPr>
+          <p:nvPr>
+            <p:ph type="sldImg" idx="2"/>
+          </p:nvPr>
+        </p:nvSpPr>
+        <p:spPr/>
+      </p:sp>
+      <p:sp>
+        <p:nvSpPr>
+          <p:cNvPr id="3" name="Notes Placeholder 2"/>
+          <p:cNvSpPr>
+            <a:spLocks noGrp="1"/>
+          </p:cNvSpPr>
+          <p:nvPr>
+            <p:ph type="body" idx="3" sz="quarter"/>
+          </p:nvPr>
+        </p:nvSpPr>
+        <p:spPr/>
+        <p:txBody>
+          <a:bodyPr/>
+          <a:lstStyle/>
+          <a:p>
+            <a:r>
+              <a:t>N1: ¿Qué cosas no se pueden juntar en la misma chimenea?</a:t>
+            </a:r>
+          </a:p>
+          <a:p>
+            <a:r>
+              <a:t>N2: Hay cuatro prohibiciones, todas de sentido común, y caen mucho. Una: no se mezclan aparatos de tiro natural y de tiro forzado en el mismo conducto vertical, porque el ventilador de uno revocaría los humos del otro hacia dentro. Dos: no se juntan aparatos de condensación y de no condensación, salvo que la chimenea sea especial, anticorrosión según la norma UNE ciento veintitrés mil uno, y se haga el cálculo de sección; es que el de condensación echa humos húmedos y ácidos que pudren un tubo normal. Tres: no se conecta a la chimenea del aparato ningún extractor ni campana de cocina, porque chuparían los humos. Y cuatro: no se mezcla el gas con humos de carbón o gasóleo; y si reaprovechas una chimenea vieja que llevó sólidos, antes la limpias y compruebas que tira. Cada una de estas mezclas es un caso real de revoco o de intoxicación.</a:t>
+            </a:r>
+          </a:p>
+        </p:txBody>
+      </p:sp>
+      <p:sp>
+        <p:nvSpPr>
+          <p:cNvPr id="4" name="Slide Number Placeholder 3"/>
+          <p:cNvSpPr>
+            <a:spLocks noGrp="1"/>
+          </p:cNvSpPr>
+          <p:nvPr>
+            <p:ph type="sldNum" idx="5" sz="quarter"/>
+          </p:nvPr>
+        </p:nvSpPr>
+        <p:spPr/>
+      </p:sp>
+    </p:spTree>
+  </p:cSld>
+  <p:clrMapOvr>
+    <a:masterClrMapping/>
+  </p:clrMapOvr>
+</p:notes>
+</file>
+
+<file path=ppt/notesSlides/notesSlide22.xml><?xml version="1.0" encoding="utf-8"?>
+<p:notes xmlns:a="http://schemas.openxmlformats.org/drawingml/2006/main" xmlns:p="http://schemas.openxmlformats.org/presentationml/2006/main" xmlns:r="http://schemas.openxmlformats.org/officeDocument/2006/relationships">
+  <p:cSld>
+    <p:spTree>
+      <p:nvGrpSpPr>
+        <p:cNvPr id="1" name=""/>
+        <p:cNvGrpSpPr/>
+        <p:nvPr/>
+      </p:nvGrpSpPr>
+      <p:grpSpPr>
+        <a:xfrm>
+          <a:off x="0" y="0"/>
+          <a:ext cx="0" cy="0"/>
+          <a:chOff x="0" y="0"/>
+          <a:chExt cx="0" cy="0"/>
+        </a:xfrm>
+      </p:grpSpPr>
+      <p:sp>
+        <p:nvSpPr>
+          <p:cNvPr id="2" name="Slide Image Placeholder 1"/>
+          <p:cNvSpPr>
+            <a:spLocks noGrp="1"/>
+          </p:cNvSpPr>
+          <p:nvPr>
+            <p:ph type="sldImg" idx="2"/>
+          </p:nvPr>
+        </p:nvSpPr>
+        <p:spPr/>
+      </p:sp>
+      <p:sp>
+        <p:nvSpPr>
+          <p:cNvPr id="3" name="Notes Placeholder 2"/>
+          <p:cNvSpPr>
+            <a:spLocks noGrp="1"/>
+          </p:cNvSpPr>
+          <p:nvPr>
+            <p:ph type="body" idx="3" sz="quarter"/>
+          </p:nvPr>
+        </p:nvSpPr>
+        <p:spPr/>
+        <p:txBody>
+          <a:bodyPr/>
+          <a:lstStyle/>
+          <a:p>
+            <a:r>
+              <a:t>N1: La lista de «no mezclar». De estas cuatro, ¿cuál sí se permite sin líos?</a:t>
+            </a:r>
+          </a:p>
+          <a:p>
+            <a:r>
+              <a:t>N2: Tres son prohibiciones que caen siempre. Busca la que no rompe ninguna regla.</a:t>
+            </a:r>
+          </a:p>
+        </p:txBody>
+      </p:sp>
+      <p:sp>
+        <p:nvSpPr>
+          <p:cNvPr id="4" name="Slide Number Placeholder 3"/>
+          <p:cNvSpPr>
+            <a:spLocks noGrp="1"/>
+          </p:cNvSpPr>
+          <p:nvPr>
+            <p:ph type="sldNum" idx="5" sz="quarter"/>
+          </p:nvPr>
+        </p:nvSpPr>
+        <p:spPr/>
+      </p:sp>
+    </p:spTree>
+  </p:cSld>
+  <p:clrMapOvr>
+    <a:masterClrMapping/>
+  </p:clrMapOvr>
+</p:notes>
+</file>
+
+<file path=ppt/notesSlides/notesSlide23.xml><?xml version="1.0" encoding="utf-8"?>
+<p:notes xmlns:a="http://schemas.openxmlformats.org/drawingml/2006/main" xmlns:p="http://schemas.openxmlformats.org/presentationml/2006/main" xmlns:r="http://schemas.openxmlformats.org/officeDocument/2006/relationships">
+  <p:cSld>
+    <p:spTree>
+      <p:nvGrpSpPr>
+        <p:cNvPr id="1" name=""/>
+        <p:cNvGrpSpPr/>
+        <p:nvPr/>
+      </p:nvGrpSpPr>
+      <p:grpSpPr>
+        <a:xfrm>
+          <a:off x="0" y="0"/>
+          <a:ext cx="0" cy="0"/>
+          <a:chOff x="0" y="0"/>
+          <a:chExt cx="0" cy="0"/>
+        </a:xfrm>
+      </p:grpSpPr>
+      <p:sp>
+        <p:nvSpPr>
+          <p:cNvPr id="2" name="Slide Image Placeholder 1"/>
+          <p:cNvSpPr>
+            <a:spLocks noGrp="1"/>
+          </p:cNvSpPr>
+          <p:nvPr>
+            <p:ph type="sldImg" idx="2"/>
+          </p:nvPr>
+        </p:nvSpPr>
+        <p:spPr/>
+      </p:sp>
+      <p:sp>
+        <p:nvSpPr>
+          <p:cNvPr id="3" name="Notes Placeholder 2"/>
+          <p:cNvSpPr>
+            <a:spLocks noGrp="1"/>
+          </p:cNvSpPr>
+          <p:nvPr>
+            <p:ph type="body" idx="3" sz="quarter"/>
+          </p:nvPr>
+        </p:nvSpPr>
+        <p:spPr/>
+        <p:txBody>
+          <a:bodyPr/>
+          <a:lstStyle/>
+          <a:p>
+            <a:r>
+              <a:t>N1: ¿Por qué esa?</a:t>
+            </a:r>
+          </a:p>
+          <a:p>
+            <a:r>
+              <a:t>N2: Porque las otras tres son prohibiciones de la norma: no se juntan tiro natural y tiro forzado en el mismo tubo vertical, porque el ventilador de uno revoca al otro; no se conecta una campana o un extractor a la chimenea del aparato, porque chuparía los humos; y no se mezcla el gas con gasóleo o carbón. En cambio, dos aparatos de no condensación compatibles sí pueden compartir chimenea. El truco: si en la opción aparece «tiro forzado con natural», «campana o extractor», «condensación con no condensación» o «gasóleo», es que no se puede.</a:t>
+            </a:r>
+          </a:p>
+        </p:txBody>
+      </p:sp>
+      <p:sp>
+        <p:nvSpPr>
+          <p:cNvPr id="4" name="Slide Number Placeholder 3"/>
+          <p:cNvSpPr>
+            <a:spLocks noGrp="1"/>
+          </p:cNvSpPr>
+          <p:nvPr>
+            <p:ph type="sldNum" idx="5" sz="quarter"/>
+          </p:nvPr>
+        </p:nvSpPr>
+        <p:spPr/>
+      </p:sp>
+    </p:spTree>
+  </p:cSld>
+  <p:clrMapOvr>
+    <a:masterClrMapping/>
+  </p:clrMapOvr>
+</p:notes>
+</file>
+
+<file path=ppt/notesSlides/notesSlide24.xml><?xml version="1.0" encoding="utf-8"?>
+<p:notes xmlns:a="http://schemas.openxmlformats.org/drawingml/2006/main" xmlns:p="http://schemas.openxmlformats.org/presentationml/2006/main" xmlns:r="http://schemas.openxmlformats.org/officeDocument/2006/relationships">
+  <p:cSld>
+    <p:spTree>
+      <p:nvGrpSpPr>
+        <p:cNvPr id="1" name=""/>
+        <p:cNvGrpSpPr/>
+        <p:nvPr/>
+      </p:nvGrpSpPr>
+      <p:grpSpPr>
+        <a:xfrm>
+          <a:off x="0" y="0"/>
+          <a:ext cx="0" cy="0"/>
+          <a:chOff x="0" y="0"/>
+          <a:chExt cx="0" cy="0"/>
+        </a:xfrm>
+      </p:grpSpPr>
+      <p:sp>
+        <p:nvSpPr>
+          <p:cNvPr id="2" name="Slide Image Placeholder 1"/>
+          <p:cNvSpPr>
+            <a:spLocks noGrp="1"/>
+          </p:cNvSpPr>
+          <p:nvPr>
+            <p:ph type="sldImg" idx="2"/>
+          </p:nvPr>
+        </p:nvSpPr>
+        <p:spPr/>
+      </p:sp>
+      <p:sp>
+        <p:nvSpPr>
+          <p:cNvPr id="3" name="Notes Placeholder 2"/>
+          <p:cNvSpPr>
+            <a:spLocks noGrp="1"/>
+          </p:cNvSpPr>
+          <p:nvPr>
+            <p:ph type="body" idx="3" sz="quarter"/>
+          </p:nvPr>
+        </p:nvSpPr>
+        <p:spPr/>
+        <p:txBody>
+          <a:bodyPr/>
+          <a:lstStyle/>
+          <a:p>
+            <a:r>
+              <a:t>N1: Cuando varios tubos individuales se unen a una chimenea común, ¿hay reglas?</a:t>
+            </a:r>
+          </a:p>
+          <a:p>
+            <a:r>
+              <a:t>N2: Sí, tres detalles que conviene fichar. Primero, al unir varios conductos individuales a la chimenea o shunt, se guarda una separación mínima de quince centímetros entre las generatrices más próximas, o sea entre los bordes de los tubos, para que los humos de uno no se metan en el de al lado; y los empalmes al conducto común se hacen en ángulo agudo, a favor del flujo, como te incorporas a una autopista, no de frente. Segundo, si el conducto atraviesa una pared o techo de madera u otro material combustible, el agujero de paso debe ser diez centímetros más ancho que el tubo, y ese hueco se rellena con material aislante e incombustible, para que la madera no coja calor. Y tercero, si hay regulación de tiro, nunca puede ser a mano: tiene que ser automática motorizada, por contrapeso, o fijada de fábrica en la puesta en marcha. A mano, alguien la tocaría y desajustaría la evacuación.</a:t>
+            </a:r>
+          </a:p>
+        </p:txBody>
+      </p:sp>
+      <p:sp>
+        <p:nvSpPr>
+          <p:cNvPr id="4" name="Slide Number Placeholder 3"/>
+          <p:cNvSpPr>
+            <a:spLocks noGrp="1"/>
+          </p:cNvSpPr>
+          <p:nvPr>
+            <p:ph type="sldNum" idx="5" sz="quarter"/>
+          </p:nvPr>
+        </p:nvSpPr>
+        <p:spPr/>
+      </p:sp>
+    </p:spTree>
+  </p:cSld>
+  <p:clrMapOvr>
+    <a:masterClrMapping/>
+  </p:clrMapOvr>
+</p:notes>
+</file>
+
+<file path=ppt/notesSlides/notesSlide25.xml><?xml version="1.0" encoding="utf-8"?>
+<p:notes xmlns:a="http://schemas.openxmlformats.org/drawingml/2006/main" xmlns:p="http://schemas.openxmlformats.org/presentationml/2006/main" xmlns:r="http://schemas.openxmlformats.org/officeDocument/2006/relationships">
+  <p:cSld>
+    <p:spTree>
+      <p:nvGrpSpPr>
+        <p:cNvPr id="1" name=""/>
+        <p:cNvGrpSpPr/>
+        <p:nvPr/>
+      </p:nvGrpSpPr>
+      <p:grpSpPr>
+        <a:xfrm>
+          <a:off x="0" y="0"/>
+          <a:ext cx="0" cy="0"/>
+          <a:chOff x="0" y="0"/>
+          <a:chExt cx="0" cy="0"/>
+        </a:xfrm>
+      </p:grpSpPr>
+      <p:sp>
+        <p:nvSpPr>
+          <p:cNvPr id="2" name="Slide Image Placeholder 1"/>
+          <p:cNvSpPr>
+            <a:spLocks noGrp="1"/>
+          </p:cNvSpPr>
+          <p:nvPr>
+            <p:ph type="sldImg" idx="2"/>
+          </p:nvPr>
+        </p:nvSpPr>
+        <p:spPr/>
+      </p:sp>
+      <p:sp>
+        <p:nvSpPr>
+          <p:cNvPr id="3" name="Notes Placeholder 2"/>
+          <p:cNvSpPr>
+            <a:spLocks noGrp="1"/>
+          </p:cNvSpPr>
+          <p:nvPr>
+            <p:ph type="body" idx="3" sz="quarter"/>
+          </p:nvPr>
+        </p:nvSpPr>
+        <p:spPr/>
+        <p:txBody>
+          <a:bodyPr/>
+          <a:lstStyle/>
+          <a:p>
+            <a:r>
+              <a:t>N1: Y la chimenea en sí, ¿de qué tiene que ser?</a:t>
+            </a:r>
+          </a:p>
+          <a:p>
+            <a:r>
+              <a:t>N2: Depende del material, y cada uno tiene su norma; te doy la chuleta. Si la chimenea es metálica, va por la UNE-EN mil ochocientos cincuenta y seis guion uno; si es no metálica, por la NTE-ISH setenta y cuatro; y si es de plástico, por la UNE-EN catorce mil cuatrocientos setenta y uno. Aparte del material, el cálculo de la chimenea, que tire bien y no se condense, va por la familia de la UNE ciento veintitrés mil uno y ciento veintitrés mil tres, y las UNE-EN trece mil trescientos ochenta y cuatro. Y una regla del sombrerete que cae: la terminación de una chimenea colectiva de tiro natural no puede taponar la salida de humos a la atmósfera; y si lleva un dispositivo de ayuda a la evacuación y se estropea, la chimenea tiene que seguir tirando sola, en tiro natural. Nunca puede quedar el edificio sin salida de humos porque falle un ventilador.</a:t>
+            </a:r>
+          </a:p>
+        </p:txBody>
+      </p:sp>
+      <p:sp>
+        <p:nvSpPr>
+          <p:cNvPr id="4" name="Slide Number Placeholder 3"/>
+          <p:cNvSpPr>
+            <a:spLocks noGrp="1"/>
+          </p:cNvSpPr>
+          <p:nvPr>
+            <p:ph type="sldNum" idx="5" sz="quarter"/>
+          </p:nvPr>
+        </p:nvSpPr>
+        <p:spPr/>
+      </p:sp>
+    </p:spTree>
+  </p:cSld>
+  <p:clrMapOvr>
+    <a:masterClrMapping/>
+  </p:clrMapOvr>
+</p:notes>
+</file>
+
+<file path=ppt/notesSlides/notesSlide26.xml><?xml version="1.0" encoding="utf-8"?>
+<p:notes xmlns:a="http://schemas.openxmlformats.org/drawingml/2006/main" xmlns:p="http://schemas.openxmlformats.org/presentationml/2006/main" xmlns:r="http://schemas.openxmlformats.org/officeDocument/2006/relationships">
+  <p:cSld>
+    <p:spTree>
+      <p:nvGrpSpPr>
+        <p:cNvPr id="1" name=""/>
+        <p:cNvGrpSpPr/>
+        <p:nvPr/>
+      </p:nvGrpSpPr>
+      <p:grpSpPr>
+        <a:xfrm>
+          <a:off x="0" y="0"/>
+          <a:ext cx="0" cy="0"/>
+          <a:chOff x="0" y="0"/>
+          <a:chExt cx="0" cy="0"/>
+        </a:xfrm>
+      </p:grpSpPr>
+      <p:sp>
+        <p:nvSpPr>
+          <p:cNvPr id="2" name="Slide Image Placeholder 1"/>
+          <p:cNvSpPr>
+            <a:spLocks noGrp="1"/>
+          </p:cNvSpPr>
+          <p:nvPr>
+            <p:ph type="sldImg" idx="2"/>
+          </p:nvPr>
+        </p:nvSpPr>
+        <p:spPr/>
+      </p:sp>
+      <p:sp>
+        <p:nvSpPr>
+          <p:cNvPr id="3" name="Notes Placeholder 2"/>
+          <p:cNvSpPr>
+            <a:spLocks noGrp="1"/>
+          </p:cNvSpPr>
+          <p:nvPr>
+            <p:ph type="body" idx="3" sz="quarter"/>
+          </p:nvPr>
+        </p:nvSpPr>
+        <p:spPr/>
+        <p:txBody>
+          <a:bodyPr/>
+          <a:lstStyle/>
+          <a:p>
+            <a:r>
               <a:t>N1: Profe, cierra el tema entero. ¿Con qué me quedo?</a:t>
             </a:r>
           </a:p>
@@ -1947,12 +2403,12 @@
           <a:lstStyle/>
           <a:p>
             <a:r>
-              <a:t>N1: ¿Qué es eso de la «puntuación» del conducto?</a:t>
-            </a:r>
-          </a:p>
-          <a:p>
-            <a:r>
-              <a:t>N2: Es una forma ingeniosa de comprobar sobre el papel si el conducto va a tirar bien, antes de montarlo. Funciona como un juego de puntos. Ganar altura suma: cada centímetro que sube el conducto aporta cero coma uno puntos, porque la altura es lo que hace que los humos suban solos. Y cada codo o cada tramo horizontal resta, porque frenan los humos; un codo cerrado puede quitarte dos puntos, y la longitud recta también descuenta. El deflector del extremo resta un poco también. Al final, la suma tiene que dar al menos más uno. Idea corta: sube mucho y dobla poco. Un conducto vertical y corto aprueba de sobra; uno muy tumbado y lleno de codos suspende, y en obra eso es revoco y el aparato apagándose.</a:t>
+              <a:t>N1: ¿De qué diámetro tiene que ser el tubo de salida directa en tiro natural?</a:t>
+            </a:r>
+          </a:p>
+          <a:p>
+            <a:r>
+              <a:t>N2: Lo da la tabla tres, según la potencia del aparato: a más kilovatios, más humos, y por tanto más diámetro. Para los pequeños, hasta once coma cinco kilovatios, noventa milímetros. Y va subiendo por escalones: ciento diez hasta veintitrés kilovatios, ciento veinticinco hasta treinta coma siete, ciento treinta y nueve hasta treinta y nueve, ciento cincuenta hasta cuarenta y cinco, y ciento setenta y cinco para los más potentes, por encima de cuarenta y cinco kilovatios. La regla de obra: el diámetro nunca por debajo del de la tabla y nunca con reducciones, porque estrechar el tubo ahoga la salida y el aparato revoca. Además, sea cual sea el escalón, la puntuación del conducto tiene que dar al menos más uno.</a:t>
             </a:r>
           </a:p>
         </p:txBody>
@@ -5038,7 +5494,7 @@
       </p:sp>
       <p:sp>
         <p:nvSpPr>
-          <p:cNvPr id="4" name="Rounded Rectangle 3"/>
+          <p:cNvPr id="4" name="Rectangle 3"/>
           <p:cNvSpPr/>
           <p:nvPr/>
         </p:nvSpPr>
@@ -5047,7 +5503,7 @@
             <a:off x="868680" y="2057400"/>
             <a:ext cx="1463040" cy="82296"/>
           </a:xfrm>
-          <a:prstGeom prst="roundRect">
+          <a:prstGeom prst="rect">
             <a:avLst/>
           </a:prstGeom>
           <a:solidFill>
@@ -5164,6 +5620,18 @@
   <p:clrMapOvr>
     <a:masterClrMapping/>
   </p:clrMapOvr>
+  <mc:AlternateContent xmlns:mc="http://schemas.openxmlformats.org/markup-compatibility/2006">
+    <mc:Choice xmlns:p14="http://schemas.microsoft.com/office/powerpoint/2010/main" Requires="p14">
+      <p:transition spd="med" p14:dur="700">
+        <p14:cube dir="l"/>
+      </p:transition>
+    </mc:Choice>
+    <mc:Fallback>
+      <p:transition spd="med">
+        <p:push dir="l"/>
+      </p:transition>
+    </mc:Fallback>
+  </mc:AlternateContent>
 </p:sld>
 </file>
 
@@ -5251,7 +5719,7 @@
                 </a:solidFill>
                 <a:latin typeface="Montserrat"/>
               </a:rPr>
-              <a:t>010 / 020</a:t>
+              <a:t>010 / 026</a:t>
             </a:r>
           </a:p>
         </p:txBody>
@@ -5319,7 +5787,7 @@
                 </a:solidFill>
                 <a:latin typeface="Montserrat"/>
               </a:rPr>
-              <a:t>TIRO NATURAL · DISTANCIAS</a:t>
+              <a:t>TIRO NATURAL · PUNTUACIÓN</a:t>
             </a:r>
           </a:p>
         </p:txBody>
@@ -5353,14 +5821,14 @@
                 </a:solidFill>
                 <a:latin typeface="Montserrat"/>
               </a:rPr>
-              <a:t>Distancias del extremo</a:t>
-            </a:r>
-          </a:p>
-        </p:txBody>
-      </p:sp>
-      <p:sp>
-        <p:nvSpPr>
-          <p:cNvPr id="7" name="Rounded Rectangle 6"/>
+              <a:t>La puntuación del conducto (tabla 4)</a:t>
+            </a:r>
+          </a:p>
+        </p:txBody>
+      </p:sp>
+      <p:sp>
+        <p:nvSpPr>
+          <p:cNvPr id="7" name="Rectangle 6"/>
           <p:cNvSpPr/>
           <p:nvPr/>
         </p:nvSpPr>
@@ -5369,7 +5837,7 @@
             <a:off x="868680" y="1627632"/>
             <a:ext cx="2011680" cy="73152"/>
           </a:xfrm>
-          <a:prstGeom prst="roundRect">
+          <a:prstGeom prst="rect">
             <a:avLst/>
           </a:prstGeom>
           <a:solidFill>
@@ -5410,8 +5878,8 @@
         </p:nvSpPr>
         <p:spPr>
           <a:xfrm>
-            <a:off x="822960" y="1965960"/>
-            <a:ext cx="4983480" cy="4206240"/>
+            <a:off x="6355080" y="1965960"/>
+            <a:ext cx="5029200" cy="4206240"/>
           </a:xfrm>
           <a:prstGeom prst="rect">
             <a:avLst/>
@@ -5445,7 +5913,7 @@
                 </a:solidFill>
                 <a:latin typeface="Montserrat"/>
               </a:rPr>
-              <a:t>10 cm al muro que atraviesa</a:t>
+              <a:t>Subir suma: +0,1 por cada cm</a:t>
             </a:r>
           </a:p>
           <a:p>
@@ -5470,7 +5938,7 @@
                 </a:solidFill>
                 <a:latin typeface="Montserrat"/>
               </a:rPr>
-              <a:t>40 cm a aberturas, ventanas y aleros</a:t>
+              <a:t>Codos y tramos horizontales restan</a:t>
             </a:r>
           </a:p>
           <a:p>
@@ -5495,21 +5963,21 @@
                 </a:solidFill>
                 <a:latin typeface="Montserrat"/>
               </a:rPr>
-              <a:t>220 cm al suelo exterior</a:t>
-            </a:r>
-          </a:p>
-        </p:txBody>
-      </p:sp>
-      <p:sp>
-        <p:nvSpPr>
-          <p:cNvPr id="9" name="imgph" descr="IMGQ:flue terminal on exterior wall"/>
+              <a:t>Hay que acabar en ≥ +1</a:t>
+            </a:r>
+          </a:p>
+        </p:txBody>
+      </p:sp>
+      <p:sp>
+        <p:nvSpPr>
+          <p:cNvPr id="9" name="imgph" descr="IMGQ:chimney flue diagram vertical rise"/>
           <p:cNvSpPr/>
           <p:nvPr/>
         </p:nvSpPr>
         <p:spPr>
           <a:xfrm>
-            <a:off x="5806440" y="1051560"/>
-            <a:ext cx="5298947" cy="4629150"/>
+            <a:off x="822960" y="1965960"/>
+            <a:ext cx="5303520" cy="4572000"/>
           </a:xfrm>
           <a:prstGeom prst="roundRect">
             <a:avLst/>
@@ -5554,8 +6022,8 @@
         </p:nvSpPr>
         <p:spPr>
           <a:xfrm>
-            <a:off x="6080760" y="2726055"/>
-            <a:ext cx="4750307" cy="1280160"/>
+            <a:off x="1097280" y="3611880"/>
+            <a:ext cx="4754880" cy="1280160"/>
           </a:xfrm>
           <a:prstGeom prst="rect">
             <a:avLst/>
@@ -5576,7 +6044,7 @@
                 </a:solidFill>
                 <a:latin typeface="Montserrat"/>
               </a:rPr>
-              <a:t>IMAGEN REALISTA</a:t>
+              <a:t>IMAGEN</a:t>
             </a:r>
           </a:p>
           <a:p>
@@ -5588,7 +6056,7 @@
                 </a:solidFill>
                 <a:latin typeface="Montserrat"/>
               </a:rPr>
-              <a:t>flue terminal on exterior wall</a:t>
+              <a:t>chimney flue diagram vertical rise</a:t>
             </a:r>
           </a:p>
         </p:txBody>
@@ -5598,6 +6066,18 @@
   <p:clrMapOvr>
     <a:masterClrMapping/>
   </p:clrMapOvr>
+  <mc:AlternateContent xmlns:mc="http://schemas.openxmlformats.org/markup-compatibility/2006">
+    <mc:Choice xmlns:p14="http://schemas.microsoft.com/office/powerpoint/2010/main" Requires="p14">
+      <p:transition spd="med" p14:dur="700">
+        <p14:cube dir="r"/>
+      </p:transition>
+    </mc:Choice>
+    <mc:Fallback>
+      <p:transition spd="med">
+        <p:push dir="r"/>
+      </p:transition>
+    </mc:Fallback>
+  </mc:AlternateContent>
 </p:sld>
 </file>
 
@@ -5685,7 +6165,7 @@
                 </a:solidFill>
                 <a:latin typeface="Montserrat"/>
               </a:rPr>
-              <a:t>011 / 020</a:t>
+              <a:t>011 / 026</a:t>
             </a:r>
           </a:p>
         </p:txBody>
@@ -5732,7 +6212,7 @@
         </p:nvSpPr>
         <p:spPr>
           <a:xfrm>
-            <a:off x="822960" y="457200"/>
+            <a:off x="822960" y="411480"/>
             <a:ext cx="10058400" cy="365760"/>
           </a:xfrm>
           <a:prstGeom prst="rect">
@@ -5753,7 +6233,7 @@
                 </a:solidFill>
                 <a:latin typeface="Montserrat"/>
               </a:rPr>
-              <a:t>AYUDA A LA EVACUACIÓN</a:t>
+              <a:t>TIRO NATURAL · PUNTUACIÓN</a:t>
             </a:r>
           </a:p>
         </p:txBody>
@@ -5766,8 +6246,8 @@
         </p:nvSpPr>
         <p:spPr>
           <a:xfrm>
-            <a:off x="822960" y="868680"/>
-            <a:ext cx="10515600" cy="914400"/>
+            <a:off x="822960" y="777240"/>
+            <a:ext cx="10515600" cy="822960"/>
           </a:xfrm>
           <a:prstGeom prst="rect">
             <a:avLst/>
@@ -5781,29 +6261,29 @@
           <a:lstStyle/>
           <a:p>
             <a:r>
-              <a:rPr sz="2800" b="1" i="0">
+              <a:rPr sz="2600" b="1" i="0">
                 <a:solidFill>
                   <a:srgbClr val="1E2761"/>
                 </a:solidFill>
                 <a:latin typeface="Montserrat"/>
               </a:rPr>
-              <a:t>De tiro natural a forzado</a:t>
-            </a:r>
-          </a:p>
-        </p:txBody>
-      </p:sp>
-      <p:sp>
-        <p:nvSpPr>
-          <p:cNvPr id="7" name="Rounded Rectangle 6"/>
+              <a:t>Valoración de singularidades (tabla 4)</a:t>
+            </a:r>
+          </a:p>
+        </p:txBody>
+      </p:sp>
+      <p:sp>
+        <p:nvSpPr>
+          <p:cNvPr id="7" name="Rectangle 6"/>
           <p:cNvSpPr/>
           <p:nvPr/>
         </p:nvSpPr>
         <p:spPr>
           <a:xfrm>
-            <a:off x="868680" y="1627632"/>
+            <a:off x="868680" y="1481328"/>
             <a:ext cx="2011680" cy="73152"/>
           </a:xfrm>
-          <a:prstGeom prst="roundRect">
+          <a:prstGeom prst="rect">
             <a:avLst/>
           </a:prstGeom>
           <a:solidFill>
@@ -5836,114 +6316,502 @@
           </a:p>
         </p:txBody>
       </p:sp>
-      <p:sp>
-        <p:nvSpPr>
-          <p:cNvPr id="8" name="TextBox 7"/>
-          <p:cNvSpPr txBox="1"/>
-          <p:nvPr/>
-        </p:nvSpPr>
-        <p:spPr>
-          <a:xfrm>
-            <a:off x="822960" y="1965960"/>
-            <a:ext cx="4983480" cy="4206240"/>
-          </a:xfrm>
-          <a:prstGeom prst="rect">
-            <a:avLst/>
-          </a:prstGeom>
-          <a:noFill/>
-        </p:spPr>
-        <p:txBody>
-          <a:bodyPr wrap="square">
-            <a:spAutoFit/>
-          </a:bodyPr>
-          <a:lstStyle/>
-          <a:p>
-            <a:pPr>
-              <a:spcAft>
-                <a:spcPts val="1100"/>
-              </a:spcAft>
-            </a:pPr>
-            <a:r>
-              <a:rPr sz="1600" b="1" i="0">
-                <a:solidFill>
-                  <a:srgbClr val="E8801A"/>
-                </a:solidFill>
-                <a:latin typeface="Montserrat"/>
-              </a:rPr>
-              <a:t>▸  </a:t>
-            </a:r>
-            <a:r>
-              <a:rPr sz="1600" b="0" i="0">
-                <a:solidFill>
-                  <a:srgbClr val="1B2330"/>
-                </a:solidFill>
-                <a:latin typeface="Montserrat"/>
-              </a:rPr>
-              <a:t>Añadir extractor = cambiar de aparato</a:t>
-            </a:r>
-          </a:p>
-          <a:p>
-            <a:pPr>
-              <a:spcAft>
-                <a:spcPts val="1100"/>
-              </a:spcAft>
-            </a:pPr>
-            <a:r>
-              <a:rPr sz="1600" b="1" i="0">
-                <a:solidFill>
-                  <a:srgbClr val="E8801A"/>
-                </a:solidFill>
-                <a:latin typeface="Montserrat"/>
-              </a:rPr>
-              <a:t>▸  </a:t>
-            </a:r>
-            <a:r>
-              <a:rPr sz="1600" b="0" i="0">
-                <a:solidFill>
-                  <a:srgbClr val="1B2330"/>
-                </a:solidFill>
-                <a:latin typeface="Montserrat"/>
-              </a:rPr>
-              <a:t>Cumple las condiciones del tiro forzado</a:t>
-            </a:r>
-          </a:p>
-          <a:p>
-            <a:pPr>
-              <a:spcAft>
-                <a:spcPts val="1100"/>
-              </a:spcAft>
-            </a:pPr>
-            <a:r>
-              <a:rPr sz="1600" b="1" i="0">
-                <a:solidFill>
-                  <a:srgbClr val="E8801A"/>
-                </a:solidFill>
-                <a:latin typeface="Montserrat"/>
-              </a:rPr>
-              <a:t>▸  </a:t>
-            </a:r>
-            <a:r>
-              <a:rPr sz="1600" b="0" i="0">
-                <a:solidFill>
-                  <a:srgbClr val="1B2330"/>
-                </a:solidFill>
-                <a:latin typeface="Montserrat"/>
-              </a:rPr>
-              <a:t>Se perdona la puntuación de la tabla</a:t>
-            </a:r>
-          </a:p>
-        </p:txBody>
-      </p:sp>
-      <p:sp>
-        <p:nvSpPr>
-          <p:cNvPr id="9" name="imgph" descr="IMGQ:flue fan extractor unit"/>
+      <p:graphicFrame>
+        <p:nvGraphicFramePr>
+          <p:cNvPr id="8" name="Table 7"/>
+          <p:cNvGraphicFramePr>
+            <a:graphicFrameLocks noGrp="1"/>
+          </p:cNvGraphicFramePr>
+          <p:nvPr/>
+        </p:nvGraphicFramePr>
+        <p:xfrm>
+          <a:off x="548640" y="1783080"/>
+          <a:ext cx="11091672" cy="4023360"/>
+        </p:xfrm>
+        <a:graphic>
+          <a:graphicData uri="http://schemas.openxmlformats.org/drawingml/2006/table">
+            <a:tbl>
+              <a:tblPr firstRow="1" bandRow="1">
+                <a:tableStyleId>{5C22544A-7EE6-4342-B048-85BDC9FD1C3A}</a:tableStyleId>
+              </a:tblPr>
+              <a:tblGrid>
+                <a:gridCol w="5545836"/>
+                <a:gridCol w="5545836"/>
+              </a:tblGrid>
+              <a:tr h="402336">
+                <a:tc>
+                  <a:txBody>
+                    <a:bodyPr/>
+                    <a:lstStyle/>
+                    <a:p>
+                      <a:r>
+                        <a:rPr sz="1200" b="1" i="0">
+                          <a:solidFill>
+                            <a:srgbClr val="FFFFFF"/>
+                          </a:solidFill>
+                          <a:latin typeface="Montserrat"/>
+                        </a:rPr>
+                        <a:t>Singularidad</a:t>
+                      </a:r>
+                    </a:p>
+                  </a:txBody>
+                  <a:tcPr>
+                    <a:solidFill>
+                      <a:srgbClr val="1E2761"/>
+                    </a:solidFill>
+                  </a:tcPr>
+                </a:tc>
+                <a:tc>
+                  <a:txBody>
+                    <a:bodyPr/>
+                    <a:lstStyle/>
+                    <a:p>
+                      <a:r>
+                        <a:rPr sz="1200" b="1" i="0">
+                          <a:solidFill>
+                            <a:srgbClr val="FFFFFF"/>
+                          </a:solidFill>
+                          <a:latin typeface="Montserrat"/>
+                        </a:rPr>
+                        <a:t>Valoración</a:t>
+                      </a:r>
+                    </a:p>
+                  </a:txBody>
+                  <a:tcPr>
+                    <a:solidFill>
+                      <a:srgbClr val="1E2761"/>
+                    </a:solidFill>
+                  </a:tcPr>
+                </a:tc>
+              </a:tr>
+              <a:tr h="402336">
+                <a:tc>
+                  <a:txBody>
+                    <a:bodyPr/>
+                    <a:lstStyle/>
+                    <a:p>
+                      <a:r>
+                        <a:rPr sz="1200" b="0" i="0">
+                          <a:solidFill>
+                            <a:srgbClr val="1B2330"/>
+                          </a:solidFill>
+                          <a:latin typeface="Montserrat"/>
+                        </a:rPr>
+                        <a:t>Cota total ganada por cualquier concepto (H, en cm)</a:t>
+                      </a:r>
+                    </a:p>
+                  </a:txBody>
+                  <a:tcPr>
+                    <a:solidFill>
+                      <a:srgbClr val="F6F8FC"/>
+                    </a:solidFill>
+                  </a:tcPr>
+                </a:tc>
+                <a:tc>
+                  <a:txBody>
+                    <a:bodyPr/>
+                    <a:lstStyle/>
+                    <a:p>
+                      <a:r>
+                        <a:rPr sz="1200" b="0" i="0">
+                          <a:solidFill>
+                            <a:srgbClr val="1B2330"/>
+                          </a:solidFill>
+                          <a:latin typeface="Montserrat"/>
+                        </a:rPr>
+                        <a:t>+ 0,1 · H</a:t>
+                      </a:r>
+                    </a:p>
+                  </a:txBody>
+                  <a:tcPr>
+                    <a:solidFill>
+                      <a:srgbClr val="F6F8FC"/>
+                    </a:solidFill>
+                  </a:tcPr>
+                </a:tc>
+              </a:tr>
+              <a:tr h="402336">
+                <a:tc>
+                  <a:txBody>
+                    <a:bodyPr/>
+                    <a:lstStyle/>
+                    <a:p>
+                      <a:r>
+                        <a:rPr sz="1200" b="0" i="0">
+                          <a:solidFill>
+                            <a:srgbClr val="1B2330"/>
+                          </a:solidFill>
+                          <a:latin typeface="Montserrat"/>
+                        </a:rPr>
+                        <a:t>Codo &gt; 45° y ≤ 90°, vertical → horizontal</a:t>
+                      </a:r>
+                    </a:p>
+                  </a:txBody>
+                  <a:tcPr>
+                    <a:solidFill>
+                      <a:srgbClr val="FFFFFF"/>
+                    </a:solidFill>
+                  </a:tcPr>
+                </a:tc>
+                <a:tc>
+                  <a:txBody>
+                    <a:bodyPr/>
+                    <a:lstStyle/>
+                    <a:p>
+                      <a:r>
+                        <a:rPr sz="1200" b="0" i="0">
+                          <a:solidFill>
+                            <a:srgbClr val="1B2330"/>
+                          </a:solidFill>
+                          <a:latin typeface="Montserrat"/>
+                        </a:rPr>
+                        <a:t>− 2</a:t>
+                      </a:r>
+                    </a:p>
+                  </a:txBody>
+                  <a:tcPr>
+                    <a:solidFill>
+                      <a:srgbClr val="FFFFFF"/>
+                    </a:solidFill>
+                  </a:tcPr>
+                </a:tc>
+              </a:tr>
+              <a:tr h="402336">
+                <a:tc>
+                  <a:txBody>
+                    <a:bodyPr/>
+                    <a:lstStyle/>
+                    <a:p>
+                      <a:r>
+                        <a:rPr sz="1200" b="0" i="0">
+                          <a:solidFill>
+                            <a:srgbClr val="1B2330"/>
+                          </a:solidFill>
+                          <a:latin typeface="Montserrat"/>
+                        </a:rPr>
+                        <a:t>Codo ≤ 45°, vertical ascendente</a:t>
+                      </a:r>
+                    </a:p>
+                  </a:txBody>
+                  <a:tcPr>
+                    <a:solidFill>
+                      <a:srgbClr val="F6F8FC"/>
+                    </a:solidFill>
+                  </a:tcPr>
+                </a:tc>
+                <a:tc>
+                  <a:txBody>
+                    <a:bodyPr/>
+                    <a:lstStyle/>
+                    <a:p>
+                      <a:r>
+                        <a:rPr sz="1200" b="0" i="0">
+                          <a:solidFill>
+                            <a:srgbClr val="1B2330"/>
+                          </a:solidFill>
+                          <a:latin typeface="Montserrat"/>
+                        </a:rPr>
+                        <a:t>− 1</a:t>
+                      </a:r>
+                    </a:p>
+                  </a:txBody>
+                  <a:tcPr>
+                    <a:solidFill>
+                      <a:srgbClr val="F6F8FC"/>
+                    </a:solidFill>
+                  </a:tcPr>
+                </a:tc>
+              </a:tr>
+              <a:tr h="402336">
+                <a:tc>
+                  <a:txBody>
+                    <a:bodyPr/>
+                    <a:lstStyle/>
+                    <a:p>
+                      <a:r>
+                        <a:rPr sz="1200" b="0" i="0">
+                          <a:solidFill>
+                            <a:srgbClr val="1B2330"/>
+                          </a:solidFill>
+                          <a:latin typeface="Montserrat"/>
+                        </a:rPr>
+                        <a:t>Codo &gt; 45° y ≤ 90°, no vertical no ascendente</a:t>
+                      </a:r>
+                    </a:p>
+                  </a:txBody>
+                  <a:tcPr>
+                    <a:solidFill>
+                      <a:srgbClr val="FFFFFF"/>
+                    </a:solidFill>
+                  </a:tcPr>
+                </a:tc>
+                <a:tc>
+                  <a:txBody>
+                    <a:bodyPr/>
+                    <a:lstStyle/>
+                    <a:p>
+                      <a:r>
+                        <a:rPr sz="1200" b="0" i="0">
+                          <a:solidFill>
+                            <a:srgbClr val="1B2330"/>
+                          </a:solidFill>
+                          <a:latin typeface="Montserrat"/>
+                        </a:rPr>
+                        <a:t>− 2</a:t>
+                      </a:r>
+                    </a:p>
+                  </a:txBody>
+                  <a:tcPr>
+                    <a:solidFill>
+                      <a:srgbClr val="FFFFFF"/>
+                    </a:solidFill>
+                  </a:tcPr>
+                </a:tc>
+              </a:tr>
+              <a:tr h="402336">
+                <a:tc>
+                  <a:txBody>
+                    <a:bodyPr/>
+                    <a:lstStyle/>
+                    <a:p>
+                      <a:r>
+                        <a:rPr sz="1200" b="0" i="0">
+                          <a:solidFill>
+                            <a:srgbClr val="1B2330"/>
+                          </a:solidFill>
+                          <a:latin typeface="Montserrat"/>
+                        </a:rPr>
+                        <a:t>Codo ≤ 45°, no vertical no ascendente</a:t>
+                      </a:r>
+                    </a:p>
+                  </a:txBody>
+                  <a:tcPr>
+                    <a:solidFill>
+                      <a:srgbClr val="F6F8FC"/>
+                    </a:solidFill>
+                  </a:tcPr>
+                </a:tc>
+                <a:tc>
+                  <a:txBody>
+                    <a:bodyPr/>
+                    <a:lstStyle/>
+                    <a:p>
+                      <a:r>
+                        <a:rPr sz="1200" b="0" i="0">
+                          <a:solidFill>
+                            <a:srgbClr val="1B2330"/>
+                          </a:solidFill>
+                          <a:latin typeface="Montserrat"/>
+                        </a:rPr>
+                        <a:t>− 1</a:t>
+                      </a:r>
+                    </a:p>
+                  </a:txBody>
+                  <a:tcPr>
+                    <a:solidFill>
+                      <a:srgbClr val="F6F8FC"/>
+                    </a:solidFill>
+                  </a:tcPr>
+                </a:tc>
+              </a:tr>
+              <a:tr h="402336">
+                <a:tc>
+                  <a:txBody>
+                    <a:bodyPr/>
+                    <a:lstStyle/>
+                    <a:p>
+                      <a:r>
+                        <a:rPr sz="1200" b="0" i="0">
+                          <a:solidFill>
+                            <a:srgbClr val="1B2330"/>
+                          </a:solidFill>
+                          <a:latin typeface="Montserrat"/>
+                        </a:rPr>
+                        <a:t>Codo &gt; 45° y ≤ 90°, horizontal → vertical</a:t>
+                      </a:r>
+                    </a:p>
+                  </a:txBody>
+                  <a:tcPr>
+                    <a:solidFill>
+                      <a:srgbClr val="FFFFFF"/>
+                    </a:solidFill>
+                  </a:tcPr>
+                </a:tc>
+                <a:tc>
+                  <a:txBody>
+                    <a:bodyPr/>
+                    <a:lstStyle/>
+                    <a:p>
+                      <a:r>
+                        <a:rPr sz="1200" b="0" i="0">
+                          <a:solidFill>
+                            <a:srgbClr val="1B2330"/>
+                          </a:solidFill>
+                          <a:latin typeface="Montserrat"/>
+                        </a:rPr>
+                        <a:t>− 0,3</a:t>
+                      </a:r>
+                    </a:p>
+                  </a:txBody>
+                  <a:tcPr>
+                    <a:solidFill>
+                      <a:srgbClr val="FFFFFF"/>
+                    </a:solidFill>
+                  </a:tcPr>
+                </a:tc>
+              </a:tr>
+              <a:tr h="402336">
+                <a:tc>
+                  <a:txBody>
+                    <a:bodyPr/>
+                    <a:lstStyle/>
+                    <a:p>
+                      <a:r>
+                        <a:rPr sz="1200" b="0" i="0">
+                          <a:solidFill>
+                            <a:srgbClr val="1B2330"/>
+                          </a:solidFill>
+                          <a:latin typeface="Montserrat"/>
+                        </a:rPr>
+                        <a:t>Codo ≤ 45°, horizontal ascendente</a:t>
+                      </a:r>
+                    </a:p>
+                  </a:txBody>
+                  <a:tcPr>
+                    <a:solidFill>
+                      <a:srgbClr val="F6F8FC"/>
+                    </a:solidFill>
+                  </a:tcPr>
+                </a:tc>
+                <a:tc>
+                  <a:txBody>
+                    <a:bodyPr/>
+                    <a:lstStyle/>
+                    <a:p>
+                      <a:r>
+                        <a:rPr sz="1200" b="0" i="0">
+                          <a:solidFill>
+                            <a:srgbClr val="1B2330"/>
+                          </a:solidFill>
+                          <a:latin typeface="Montserrat"/>
+                        </a:rPr>
+                        <a:t>− 0,1</a:t>
+                      </a:r>
+                    </a:p>
+                  </a:txBody>
+                  <a:tcPr>
+                    <a:solidFill>
+                      <a:srgbClr val="F6F8FC"/>
+                    </a:solidFill>
+                  </a:tcPr>
+                </a:tc>
+              </a:tr>
+              <a:tr h="402336">
+                <a:tc>
+                  <a:txBody>
+                    <a:bodyPr/>
+                    <a:lstStyle/>
+                    <a:p>
+                      <a:r>
+                        <a:rPr sz="1200" b="0" i="0">
+                          <a:solidFill>
+                            <a:srgbClr val="1B2330"/>
+                          </a:solidFill>
+                          <a:latin typeface="Montserrat"/>
+                        </a:rPr>
+                        <a:t>Longitud de los tramos rectos (L, en m)</a:t>
+                      </a:r>
+                    </a:p>
+                  </a:txBody>
+                  <a:tcPr>
+                    <a:solidFill>
+                      <a:srgbClr val="FFFFFF"/>
+                    </a:solidFill>
+                  </a:tcPr>
+                </a:tc>
+                <a:tc>
+                  <a:txBody>
+                    <a:bodyPr/>
+                    <a:lstStyle/>
+                    <a:p>
+                      <a:r>
+                        <a:rPr sz="1200" b="0" i="0">
+                          <a:solidFill>
+                            <a:srgbClr val="1B2330"/>
+                          </a:solidFill>
+                          <a:latin typeface="Montserrat"/>
+                        </a:rPr>
+                        <a:t>− 0,5 · L</a:t>
+                      </a:r>
+                    </a:p>
+                  </a:txBody>
+                  <a:tcPr>
+                    <a:solidFill>
+                      <a:srgbClr val="FFFFFF"/>
+                    </a:solidFill>
+                  </a:tcPr>
+                </a:tc>
+              </a:tr>
+              <a:tr h="402336">
+                <a:tc>
+                  <a:txBody>
+                    <a:bodyPr/>
+                    <a:lstStyle/>
+                    <a:p>
+                      <a:r>
+                        <a:rPr sz="1200" b="0" i="0">
+                          <a:solidFill>
+                            <a:srgbClr val="1B2330"/>
+                          </a:solidFill>
+                          <a:latin typeface="Montserrat"/>
+                        </a:rPr>
+                        <a:t>Deflector (en tipo B, según UNE 60406)</a:t>
+                      </a:r>
+                    </a:p>
+                  </a:txBody>
+                  <a:tcPr>
+                    <a:solidFill>
+                      <a:srgbClr val="F6F8FC"/>
+                    </a:solidFill>
+                  </a:tcPr>
+                </a:tc>
+                <a:tc>
+                  <a:txBody>
+                    <a:bodyPr/>
+                    <a:lstStyle/>
+                    <a:p>
+                      <a:r>
+                        <a:rPr sz="1200" b="0" i="0">
+                          <a:solidFill>
+                            <a:srgbClr val="1B2330"/>
+                          </a:solidFill>
+                          <a:latin typeface="Montserrat"/>
+                        </a:rPr>
+                        <a:t>− 0,3</a:t>
+                      </a:r>
+                    </a:p>
+                  </a:txBody>
+                  <a:tcPr>
+                    <a:solidFill>
+                      <a:srgbClr val="F6F8FC"/>
+                    </a:solidFill>
+                  </a:tcPr>
+                </a:tc>
+              </a:tr>
+            </a:tbl>
+          </a:graphicData>
+        </a:graphic>
+      </p:graphicFrame>
+      <p:sp>
+        <p:nvSpPr>
+          <p:cNvPr id="9" name="Rounded Rectangle 8"/>
           <p:cNvSpPr/>
           <p:nvPr/>
         </p:nvSpPr>
         <p:spPr>
           <a:xfrm>
-            <a:off x="5806440" y="1051560"/>
-            <a:ext cx="5298947" cy="4629150"/>
+            <a:off x="548640" y="5943600"/>
+            <a:ext cx="11091672" cy="384048"/>
           </a:xfrm>
           <a:prstGeom prst="roundRect">
             <a:avLst/>
@@ -5953,7 +6821,7 @@
           </a:solidFill>
           <a:ln w="12700">
             <a:solidFill>
-              <a:srgbClr val="C7D2E6"/>
+              <a:srgbClr val="D7DEEA"/>
             </a:solidFill>
           </a:ln>
           <a:effectLst/>
@@ -5988,8 +6856,8 @@
         </p:nvSpPr>
         <p:spPr>
           <a:xfrm>
-            <a:off x="6080760" y="2726055"/>
-            <a:ext cx="4750307" cy="1280160"/>
+            <a:off x="731520" y="5961888"/>
+            <a:ext cx="10789920" cy="365760"/>
           </a:xfrm>
           <a:prstGeom prst="rect">
             <a:avLst/>
@@ -6002,27 +6870,23 @@
           </a:bodyPr>
           <a:lstStyle/>
           <a:p>
-            <a:pPr algn="ctr"/>
-            <a:r>
-              <a:rPr sz="1400" b="1" i="0">
-                <a:solidFill>
-                  <a:srgbClr val="64748B"/>
-                </a:solidFill>
-                <a:latin typeface="Montserrat"/>
-              </a:rPr>
-              <a:t>IMAGEN REALISTA</a:t>
-            </a:r>
-          </a:p>
-          <a:p>
-            <a:pPr algn="ctr"/>
-            <a:r>
-              <a:rPr sz="1100" b="0" i="1">
-                <a:solidFill>
-                  <a:srgbClr val="64748B"/>
-                </a:solidFill>
-                <a:latin typeface="Montserrat"/>
-              </a:rPr>
-              <a:t>flue fan extractor unit</a:t>
+            <a:r>
+              <a:rPr sz="1100" b="1" i="0">
+                <a:solidFill>
+                  <a:srgbClr val="E8801A"/>
+                </a:solidFill>
+                <a:latin typeface="Montserrat"/>
+              </a:rPr>
+              <a:t>Qué significa:  </a:t>
+            </a:r>
+            <a:r>
+              <a:rPr sz="1100" b="0" i="0">
+                <a:solidFill>
+                  <a:srgbClr val="1B2330"/>
+                </a:solidFill>
+                <a:latin typeface="Montserrat"/>
+              </a:rPr>
+              <a:t>Sumas todo: subir suma, codos y tramos rectos restan. El total debe quedar en ≥ +1 para que el conducto tire.</a:t>
             </a:r>
           </a:p>
         </p:txBody>
@@ -6032,6 +6896,18 @@
   <p:clrMapOvr>
     <a:masterClrMapping/>
   </p:clrMapOvr>
+  <mc:AlternateContent xmlns:mc="http://schemas.openxmlformats.org/markup-compatibility/2006">
+    <mc:Choice xmlns:p14="http://schemas.microsoft.com/office/powerpoint/2010/main" Requires="p14">
+      <p:transition spd="med" p14:dur="700">
+        <p14:cube dir="l"/>
+      </p:transition>
+    </mc:Choice>
+    <mc:Fallback>
+      <p:transition spd="med">
+        <p:push dir="l"/>
+      </p:transition>
+    </mc:Fallback>
+  </mc:AlternateContent>
 </p:sld>
 </file>
 
@@ -6119,7 +6995,7 @@
                 </a:solidFill>
                 <a:latin typeface="Montserrat"/>
               </a:rPr>
-              <a:t>012 / 020</a:t>
+              <a:t>012 / 026</a:t>
             </a:r>
           </a:p>
         </p:txBody>
@@ -6187,7 +7063,7 @@
                 </a:solidFill>
                 <a:latin typeface="Montserrat"/>
               </a:rPr>
-              <a:t>TIRO FORZADO · CONDUCTOS</a:t>
+              <a:t>TIRO NATURAL · DISTANCIAS</a:t>
             </a:r>
           </a:p>
         </p:txBody>
@@ -6221,14 +7097,14 @@
                 </a:solidFill>
                 <a:latin typeface="Montserrat"/>
               </a:rPr>
-              <a:t>Tiro forzado: manda el fabricante</a:t>
-            </a:r>
-          </a:p>
-        </p:txBody>
-      </p:sp>
-      <p:sp>
-        <p:nvSpPr>
-          <p:cNvPr id="7" name="Rounded Rectangle 6"/>
+              <a:t>Distancias del extremo</a:t>
+            </a:r>
+          </a:p>
+        </p:txBody>
+      </p:sp>
+      <p:sp>
+        <p:nvSpPr>
+          <p:cNvPr id="7" name="Rectangle 6"/>
           <p:cNvSpPr/>
           <p:nvPr/>
         </p:nvSpPr>
@@ -6237,7 +7113,7 @@
             <a:off x="868680" y="1627632"/>
             <a:ext cx="2011680" cy="73152"/>
           </a:xfrm>
-          <a:prstGeom prst="roundRect">
+          <a:prstGeom prst="rect">
             <a:avLst/>
           </a:prstGeom>
           <a:solidFill>
@@ -6279,7 +7155,7 @@
         <p:spPr>
           <a:xfrm>
             <a:off x="822960" y="1965960"/>
-            <a:ext cx="4983480" cy="4206240"/>
+            <a:ext cx="5029200" cy="4206240"/>
           </a:xfrm>
           <a:prstGeom prst="rect">
             <a:avLst/>
@@ -6313,7 +7189,7 @@
                 </a:solidFill>
                 <a:latin typeface="Montserrat"/>
               </a:rPr>
-              <a:t>Materiales y longitud según fabricante</a:t>
+              <a:t>10 cm al muro que atraviesa</a:t>
             </a:r>
           </a:p>
           <a:p>
@@ -6338,7 +7214,7 @@
                 </a:solidFill>
                 <a:latin typeface="Montserrat"/>
               </a:rPr>
-              <a:t>Uniones estancas y rígidas</a:t>
+              <a:t>40 cm a aberturas, ventanas y aleros</a:t>
             </a:r>
           </a:p>
           <a:p>
@@ -6363,21 +7239,21 @@
                 </a:solidFill>
                 <a:latin typeface="Montserrat"/>
               </a:rPr>
-              <a:t>Sin condensación: ligera pendiente descendente</a:t>
-            </a:r>
-          </a:p>
-        </p:txBody>
-      </p:sp>
-      <p:sp>
-        <p:nvSpPr>
-          <p:cNvPr id="9" name="imgph" descr="IMGQ:condensing boiler flue installation"/>
+              <a:t>220 cm al suelo exterior</a:t>
+            </a:r>
+          </a:p>
+        </p:txBody>
+      </p:sp>
+      <p:sp>
+        <p:nvSpPr>
+          <p:cNvPr id="9" name="imgph" descr="IMGQ:flue terminal on exterior wall"/>
           <p:cNvSpPr/>
           <p:nvPr/>
         </p:nvSpPr>
         <p:spPr>
           <a:xfrm>
-            <a:off x="5806440" y="1051560"/>
-            <a:ext cx="5298947" cy="4629150"/>
+            <a:off x="6080760" y="1965960"/>
+            <a:ext cx="5303520" cy="4572000"/>
           </a:xfrm>
           <a:prstGeom prst="roundRect">
             <a:avLst/>
@@ -6422,8 +7298,8 @@
         </p:nvSpPr>
         <p:spPr>
           <a:xfrm>
-            <a:off x="6080760" y="2726055"/>
-            <a:ext cx="4750307" cy="1280160"/>
+            <a:off x="6355080" y="3611880"/>
+            <a:ext cx="4754880" cy="1280160"/>
           </a:xfrm>
           <a:prstGeom prst="rect">
             <a:avLst/>
@@ -6444,7 +7320,7 @@
                 </a:solidFill>
                 <a:latin typeface="Montserrat"/>
               </a:rPr>
-              <a:t>IMAGEN REALISTA</a:t>
+              <a:t>IMAGEN</a:t>
             </a:r>
           </a:p>
           <a:p>
@@ -6456,7 +7332,7 @@
                 </a:solidFill>
                 <a:latin typeface="Montserrat"/>
               </a:rPr>
-              <a:t>condensing boiler flue installation</a:t>
+              <a:t>flue terminal on exterior wall</a:t>
             </a:r>
           </a:p>
         </p:txBody>
@@ -6466,6 +7342,18 @@
   <p:clrMapOvr>
     <a:masterClrMapping/>
   </p:clrMapOvr>
+  <mc:AlternateContent xmlns:mc="http://schemas.openxmlformats.org/markup-compatibility/2006">
+    <mc:Choice xmlns:p14="http://schemas.microsoft.com/office/powerpoint/2010/main" Requires="p14">
+      <p:transition spd="med" p14:dur="700">
+        <p14:cube dir="r"/>
+      </p:transition>
+    </mc:Choice>
+    <mc:Fallback>
+      <p:transition spd="med">
+        <p:push dir="r"/>
+      </p:transition>
+    </mc:Fallback>
+  </mc:AlternateContent>
 </p:sld>
 </file>
 
@@ -6553,7 +7441,7 @@
                 </a:solidFill>
                 <a:latin typeface="Montserrat"/>
               </a:rPr>
-              <a:t>013 / 020</a:t>
+              <a:t>013 / 026</a:t>
             </a:r>
           </a:p>
         </p:txBody>
@@ -6594,84 +7482,16 @@
       </p:sp>
       <p:sp>
         <p:nvSpPr>
-          <p:cNvPr id="5" name="TextBox 4"/>
-          <p:cNvSpPr txBox="1"/>
-          <p:nvPr/>
-        </p:nvSpPr>
-        <p:spPr>
-          <a:xfrm>
-            <a:off x="822960" y="457200"/>
-            <a:ext cx="10058400" cy="365760"/>
-          </a:xfrm>
-          <a:prstGeom prst="rect">
-            <a:avLst/>
-          </a:prstGeom>
-          <a:noFill/>
-        </p:spPr>
-        <p:txBody>
-          <a:bodyPr wrap="square">
-            <a:spAutoFit/>
-          </a:bodyPr>
-          <a:lstStyle/>
-          <a:p>
-            <a:r>
-              <a:rPr sz="1300" b="1" i="0">
-                <a:solidFill>
-                  <a:srgbClr val="E8801A"/>
-                </a:solidFill>
-                <a:latin typeface="Montserrat"/>
-              </a:rPr>
-              <a:t>TIRO FORZADO · VENTOSA</a:t>
-            </a:r>
-          </a:p>
-        </p:txBody>
-      </p:sp>
-      <p:sp>
-        <p:nvSpPr>
-          <p:cNvPr id="6" name="TextBox 5"/>
-          <p:cNvSpPr txBox="1"/>
-          <p:nvPr/>
-        </p:nvSpPr>
-        <p:spPr>
-          <a:xfrm>
-            <a:off x="822960" y="868680"/>
-            <a:ext cx="10515600" cy="914400"/>
-          </a:xfrm>
-          <a:prstGeom prst="rect">
-            <a:avLst/>
-          </a:prstGeom>
-          <a:noFill/>
-        </p:spPr>
-        <p:txBody>
-          <a:bodyPr wrap="square">
-            <a:spAutoFit/>
-          </a:bodyPr>
-          <a:lstStyle/>
-          <a:p>
-            <a:r>
-              <a:rPr sz="2800" b="1" i="0">
-                <a:solidFill>
-                  <a:srgbClr val="1E2761"/>
-                </a:solidFill>
-                <a:latin typeface="Montserrat"/>
-              </a:rPr>
-              <a:t>La ventosa: salida frontal y 10 cm</a:t>
-            </a:r>
-          </a:p>
-        </p:txBody>
-      </p:sp>
-      <p:sp>
-        <p:nvSpPr>
-          <p:cNvPr id="7" name="Rounded Rectangle 6"/>
+          <p:cNvPr id="5" name="Rectangle 4"/>
           <p:cNvSpPr/>
           <p:nvPr/>
         </p:nvSpPr>
         <p:spPr>
           <a:xfrm>
-            <a:off x="868680" y="1627632"/>
-            <a:ext cx="2011680" cy="73152"/>
-          </a:xfrm>
-          <a:prstGeom prst="roundRect">
+            <a:off x="0" y="0"/>
+            <a:ext cx="12191695" cy="1143000"/>
+          </a:xfrm>
+          <a:prstGeom prst="rect">
             <a:avLst/>
           </a:prstGeom>
           <a:solidFill>
@@ -6706,14 +7526,14 @@
       </p:sp>
       <p:sp>
         <p:nvSpPr>
-          <p:cNvPr id="8" name="TextBox 7"/>
+          <p:cNvPr id="6" name="TextBox 5"/>
           <p:cNvSpPr txBox="1"/>
           <p:nvPr/>
         </p:nvSpPr>
         <p:spPr>
           <a:xfrm>
-            <a:off x="822960" y="1965960"/>
-            <a:ext cx="4983480" cy="4206240"/>
+            <a:off x="822960" y="274320"/>
+            <a:ext cx="10515600" cy="640080"/>
           </a:xfrm>
           <a:prstGeom prst="rect">
             <a:avLst/>
@@ -6726,92 +7546,62 @@
           </a:bodyPr>
           <a:lstStyle/>
           <a:p>
-            <a:pPr>
-              <a:spcAft>
-                <a:spcPts val="1100"/>
-              </a:spcAft>
-            </a:pPr>
-            <a:r>
-              <a:rPr sz="1600" b="1" i="0">
-                <a:solidFill>
-                  <a:srgbClr val="E8801A"/>
-                </a:solidFill>
-                <a:latin typeface="Montserrat"/>
-              </a:rPr>
-              <a:t>▸  </a:t>
-            </a:r>
-            <a:r>
-              <a:rPr sz="1600" b="0" i="0">
-                <a:solidFill>
-                  <a:srgbClr val="1B2330"/>
-                </a:solidFill>
-                <a:latin typeface="Montserrat"/>
-              </a:rPr>
-              <a:t>Salida frontal tipo cañón</a:t>
-            </a:r>
-          </a:p>
-          <a:p>
-            <a:pPr>
-              <a:spcAft>
-                <a:spcPts val="1100"/>
-              </a:spcAft>
-            </a:pPr>
-            <a:r>
-              <a:rPr sz="1600" b="1" i="0">
-                <a:solidFill>
-                  <a:srgbClr val="E8801A"/>
-                </a:solidFill>
-                <a:latin typeface="Montserrat"/>
-              </a:rPr>
-              <a:t>▸  </a:t>
-            </a:r>
-            <a:r>
-              <a:rPr sz="1600" b="0" i="0">
-                <a:solidFill>
-                  <a:srgbClr val="1B2330"/>
-                </a:solidFill>
-                <a:latin typeface="Montserrat"/>
-              </a:rPr>
-              <a:t>Asoma máximo 10 cm de la fachada</a:t>
-            </a:r>
-          </a:p>
-          <a:p>
-            <a:pPr>
-              <a:spcAft>
-                <a:spcPts val="1100"/>
-              </a:spcAft>
-            </a:pPr>
-            <a:r>
-              <a:rPr sz="1600" b="1" i="0">
-                <a:solidFill>
-                  <a:srgbClr val="E8801A"/>
-                </a:solidFill>
-                <a:latin typeface="Montserrat"/>
-              </a:rPr>
-              <a:t>▸  </a:t>
-            </a:r>
-            <a:r>
-              <a:rPr sz="1600" b="0" i="0">
-                <a:solidFill>
-                  <a:srgbClr val="1B2330"/>
-                </a:solidFill>
-                <a:latin typeface="Montserrat"/>
-              </a:rPr>
-              <a:t>Balcón techado: 30 cm de eje al techo</a:t>
-            </a:r>
-          </a:p>
-        </p:txBody>
-      </p:sp>
-      <p:sp>
-        <p:nvSpPr>
-          <p:cNvPr id="9" name="imgph" descr="IMGQ:balanced flue terminal exterior wall"/>
+            <a:r>
+              <a:rPr sz="2400" b="1" i="0">
+                <a:solidFill>
+                  <a:srgbClr val="FFFFFF"/>
+                </a:solidFill>
+                <a:latin typeface="Montserrat"/>
+              </a:rPr>
+              <a:t>⚡  PREGUNTA RÁPIDA</a:t>
+            </a:r>
+          </a:p>
+        </p:txBody>
+      </p:sp>
+      <p:sp>
+        <p:nvSpPr>
+          <p:cNvPr id="7" name="TextBox 6"/>
+          <p:cNvSpPr txBox="1"/>
+          <p:nvPr/>
+        </p:nvSpPr>
+        <p:spPr>
+          <a:xfrm>
+            <a:off x="822960" y="1508760"/>
+            <a:ext cx="10515600" cy="1371600"/>
+          </a:xfrm>
+          <a:prstGeom prst="rect">
+            <a:avLst/>
+          </a:prstGeom>
+          <a:noFill/>
+        </p:spPr>
+        <p:txBody>
+          <a:bodyPr wrap="square">
+            <a:spAutoFit/>
+          </a:bodyPr>
+          <a:lstStyle/>
+          <a:p>
+            <a:r>
+              <a:rPr sz="2400" b="1" i="0">
+                <a:solidFill>
+                  <a:srgbClr val="1E2761"/>
+                </a:solidFill>
+                <a:latin typeface="Montserrat"/>
+              </a:rPr>
+              <a:t>En una salida de tiro natural a fachada, ¿qué distancia se guarda respecto al muro que atraviesa?</a:t>
+            </a:r>
+          </a:p>
+        </p:txBody>
+      </p:sp>
+      <p:sp>
+        <p:nvSpPr>
+          <p:cNvPr id="8" name="Rounded Rectangle 7"/>
           <p:cNvSpPr/>
           <p:nvPr/>
         </p:nvSpPr>
         <p:spPr>
           <a:xfrm>
-            <a:off x="5806440" y="1051560"/>
-            <a:ext cx="5298947" cy="4629150"/>
+            <a:off x="822960" y="3291840"/>
+            <a:ext cx="4983480" cy="1143000"/>
           </a:xfrm>
           <a:prstGeom prst="roundRect">
             <a:avLst/>
@@ -6850,14 +7640,58 @@
       </p:sp>
       <p:sp>
         <p:nvSpPr>
+          <p:cNvPr id="9" name="Rectangle 8"/>
+          <p:cNvSpPr/>
+          <p:nvPr/>
+        </p:nvSpPr>
+        <p:spPr>
+          <a:xfrm>
+            <a:off x="822960" y="3291840"/>
+            <a:ext cx="640080" cy="1143000"/>
+          </a:xfrm>
+          <a:prstGeom prst="rect">
+            <a:avLst/>
+          </a:prstGeom>
+          <a:solidFill>
+            <a:srgbClr val="1E2761"/>
+          </a:solidFill>
+          <a:ln>
+            <a:noFill/>
+          </a:ln>
+          <a:effectLst/>
+        </p:spPr>
+        <p:style>
+          <a:lnRef idx="1">
+            <a:schemeClr val="accent1"/>
+          </a:lnRef>
+          <a:fillRef idx="3">
+            <a:schemeClr val="accent1"/>
+          </a:fillRef>
+          <a:effectRef idx="2">
+            <a:schemeClr val="accent1"/>
+          </a:effectRef>
+          <a:fontRef idx="minor">
+            <a:schemeClr val="lt1"/>
+          </a:fontRef>
+        </p:style>
+        <p:txBody>
+          <a:bodyPr rtlCol="0" anchor="ctr"/>
+          <a:lstStyle/>
+          <a:p>
+            <a:pPr algn="ctr"/>
+          </a:p>
+        </p:txBody>
+      </p:sp>
+      <p:sp>
+        <p:nvSpPr>
           <p:cNvPr id="10" name="TextBox 9"/>
           <p:cNvSpPr txBox="1"/>
           <p:nvPr/>
         </p:nvSpPr>
         <p:spPr>
           <a:xfrm>
-            <a:off x="6080760" y="2726055"/>
-            <a:ext cx="4750307" cy="1280160"/>
+            <a:off x="822960" y="3611880"/>
+            <a:ext cx="640080" cy="548640"/>
           </a:xfrm>
           <a:prstGeom prst="rect">
             <a:avLst/>
@@ -6872,25 +7706,524 @@
           <a:p>
             <a:pPr algn="ctr"/>
             <a:r>
-              <a:rPr sz="1400" b="1" i="0">
-                <a:solidFill>
-                  <a:srgbClr val="64748B"/>
-                </a:solidFill>
-                <a:latin typeface="Montserrat"/>
-              </a:rPr>
-              <a:t>IMAGEN REALISTA</a:t>
-            </a:r>
-          </a:p>
+              <a:rPr sz="2200" b="1" i="0">
+                <a:solidFill>
+                  <a:srgbClr val="FFFFFF"/>
+                </a:solidFill>
+                <a:latin typeface="Montserrat"/>
+              </a:rPr>
+              <a:t>A</a:t>
+            </a:r>
+          </a:p>
+        </p:txBody>
+      </p:sp>
+      <p:sp>
+        <p:nvSpPr>
+          <p:cNvPr id="11" name="TextBox 10"/>
+          <p:cNvSpPr txBox="1"/>
+          <p:nvPr/>
+        </p:nvSpPr>
+        <p:spPr>
+          <a:xfrm>
+            <a:off x="1600200" y="3474720"/>
+            <a:ext cx="4114800" cy="868680"/>
+          </a:xfrm>
+          <a:prstGeom prst="rect">
+            <a:avLst/>
+          </a:prstGeom>
+          <a:noFill/>
+        </p:spPr>
+        <p:txBody>
+          <a:bodyPr wrap="square">
+            <a:spAutoFit/>
+          </a:bodyPr>
+          <a:lstStyle/>
+          <a:p>
+            <a:r>
+              <a:rPr sz="1400" b="0" i="0">
+                <a:solidFill>
+                  <a:srgbClr val="1B2330"/>
+                </a:solidFill>
+                <a:latin typeface="Montserrat"/>
+              </a:rPr>
+              <a:t>10 cm</a:t>
+            </a:r>
+          </a:p>
+        </p:txBody>
+      </p:sp>
+      <p:sp>
+        <p:nvSpPr>
+          <p:cNvPr id="12" name="Rounded Rectangle 11"/>
+          <p:cNvSpPr/>
+          <p:nvPr/>
+        </p:nvSpPr>
+        <p:spPr>
+          <a:xfrm>
+            <a:off x="6355080" y="3291840"/>
+            <a:ext cx="4983480" cy="1143000"/>
+          </a:xfrm>
+          <a:prstGeom prst="roundRect">
+            <a:avLst/>
+          </a:prstGeom>
+          <a:solidFill>
+            <a:srgbClr val="F3F6FB"/>
+          </a:solidFill>
+          <a:ln w="12700">
+            <a:solidFill>
+              <a:srgbClr val="C7D2E6"/>
+            </a:solidFill>
+          </a:ln>
+          <a:effectLst/>
+        </p:spPr>
+        <p:style>
+          <a:lnRef idx="1">
+            <a:schemeClr val="accent1"/>
+          </a:lnRef>
+          <a:fillRef idx="3">
+            <a:schemeClr val="accent1"/>
+          </a:fillRef>
+          <a:effectRef idx="2">
+            <a:schemeClr val="accent1"/>
+          </a:effectRef>
+          <a:fontRef idx="minor">
+            <a:schemeClr val="lt1"/>
+          </a:fontRef>
+        </p:style>
+        <p:txBody>
+          <a:bodyPr rtlCol="0" anchor="ctr"/>
+          <a:lstStyle/>
           <a:p>
             <a:pPr algn="ctr"/>
-            <a:r>
-              <a:rPr sz="1100" b="0" i="1">
-                <a:solidFill>
-                  <a:srgbClr val="64748B"/>
-                </a:solidFill>
-                <a:latin typeface="Montserrat"/>
-              </a:rPr>
-              <a:t>balanced flue terminal exterior wall</a:t>
+          </a:p>
+        </p:txBody>
+      </p:sp>
+      <p:sp>
+        <p:nvSpPr>
+          <p:cNvPr id="13" name="Rectangle 12"/>
+          <p:cNvSpPr/>
+          <p:nvPr/>
+        </p:nvSpPr>
+        <p:spPr>
+          <a:xfrm>
+            <a:off x="6355080" y="3291840"/>
+            <a:ext cx="640080" cy="1143000"/>
+          </a:xfrm>
+          <a:prstGeom prst="rect">
+            <a:avLst/>
+          </a:prstGeom>
+          <a:solidFill>
+            <a:srgbClr val="1E2761"/>
+          </a:solidFill>
+          <a:ln>
+            <a:noFill/>
+          </a:ln>
+          <a:effectLst/>
+        </p:spPr>
+        <p:style>
+          <a:lnRef idx="1">
+            <a:schemeClr val="accent1"/>
+          </a:lnRef>
+          <a:fillRef idx="3">
+            <a:schemeClr val="accent1"/>
+          </a:fillRef>
+          <a:effectRef idx="2">
+            <a:schemeClr val="accent1"/>
+          </a:effectRef>
+          <a:fontRef idx="minor">
+            <a:schemeClr val="lt1"/>
+          </a:fontRef>
+        </p:style>
+        <p:txBody>
+          <a:bodyPr rtlCol="0" anchor="ctr"/>
+          <a:lstStyle/>
+          <a:p>
+            <a:pPr algn="ctr"/>
+          </a:p>
+        </p:txBody>
+      </p:sp>
+      <p:sp>
+        <p:nvSpPr>
+          <p:cNvPr id="14" name="TextBox 13"/>
+          <p:cNvSpPr txBox="1"/>
+          <p:nvPr/>
+        </p:nvSpPr>
+        <p:spPr>
+          <a:xfrm>
+            <a:off x="6355080" y="3611880"/>
+            <a:ext cx="640080" cy="548640"/>
+          </a:xfrm>
+          <a:prstGeom prst="rect">
+            <a:avLst/>
+          </a:prstGeom>
+          <a:noFill/>
+        </p:spPr>
+        <p:txBody>
+          <a:bodyPr wrap="square">
+            <a:spAutoFit/>
+          </a:bodyPr>
+          <a:lstStyle/>
+          <a:p>
+            <a:pPr algn="ctr"/>
+            <a:r>
+              <a:rPr sz="2200" b="1" i="0">
+                <a:solidFill>
+                  <a:srgbClr val="FFFFFF"/>
+                </a:solidFill>
+                <a:latin typeface="Montserrat"/>
+              </a:rPr>
+              <a:t>B</a:t>
+            </a:r>
+          </a:p>
+        </p:txBody>
+      </p:sp>
+      <p:sp>
+        <p:nvSpPr>
+          <p:cNvPr id="15" name="TextBox 14"/>
+          <p:cNvSpPr txBox="1"/>
+          <p:nvPr/>
+        </p:nvSpPr>
+        <p:spPr>
+          <a:xfrm>
+            <a:off x="7132320" y="3474720"/>
+            <a:ext cx="4114800" cy="868680"/>
+          </a:xfrm>
+          <a:prstGeom prst="rect">
+            <a:avLst/>
+          </a:prstGeom>
+          <a:noFill/>
+        </p:spPr>
+        <p:txBody>
+          <a:bodyPr wrap="square">
+            <a:spAutoFit/>
+          </a:bodyPr>
+          <a:lstStyle/>
+          <a:p>
+            <a:r>
+              <a:rPr sz="1400" b="0" i="0">
+                <a:solidFill>
+                  <a:srgbClr val="1B2330"/>
+                </a:solidFill>
+                <a:latin typeface="Montserrat"/>
+              </a:rPr>
+              <a:t>20 cm</a:t>
+            </a:r>
+          </a:p>
+        </p:txBody>
+      </p:sp>
+      <p:sp>
+        <p:nvSpPr>
+          <p:cNvPr id="16" name="Rounded Rectangle 15"/>
+          <p:cNvSpPr/>
+          <p:nvPr/>
+        </p:nvSpPr>
+        <p:spPr>
+          <a:xfrm>
+            <a:off x="822960" y="4617720"/>
+            <a:ext cx="4983480" cy="1143000"/>
+          </a:xfrm>
+          <a:prstGeom prst="roundRect">
+            <a:avLst/>
+          </a:prstGeom>
+          <a:solidFill>
+            <a:srgbClr val="F3F6FB"/>
+          </a:solidFill>
+          <a:ln w="12700">
+            <a:solidFill>
+              <a:srgbClr val="C7D2E6"/>
+            </a:solidFill>
+          </a:ln>
+          <a:effectLst/>
+        </p:spPr>
+        <p:style>
+          <a:lnRef idx="1">
+            <a:schemeClr val="accent1"/>
+          </a:lnRef>
+          <a:fillRef idx="3">
+            <a:schemeClr val="accent1"/>
+          </a:fillRef>
+          <a:effectRef idx="2">
+            <a:schemeClr val="accent1"/>
+          </a:effectRef>
+          <a:fontRef idx="minor">
+            <a:schemeClr val="lt1"/>
+          </a:fontRef>
+        </p:style>
+        <p:txBody>
+          <a:bodyPr rtlCol="0" anchor="ctr"/>
+          <a:lstStyle/>
+          <a:p>
+            <a:pPr algn="ctr"/>
+          </a:p>
+        </p:txBody>
+      </p:sp>
+      <p:sp>
+        <p:nvSpPr>
+          <p:cNvPr id="17" name="Rectangle 16"/>
+          <p:cNvSpPr/>
+          <p:nvPr/>
+        </p:nvSpPr>
+        <p:spPr>
+          <a:xfrm>
+            <a:off x="822960" y="4617720"/>
+            <a:ext cx="640080" cy="1143000"/>
+          </a:xfrm>
+          <a:prstGeom prst="rect">
+            <a:avLst/>
+          </a:prstGeom>
+          <a:solidFill>
+            <a:srgbClr val="1E2761"/>
+          </a:solidFill>
+          <a:ln>
+            <a:noFill/>
+          </a:ln>
+          <a:effectLst/>
+        </p:spPr>
+        <p:style>
+          <a:lnRef idx="1">
+            <a:schemeClr val="accent1"/>
+          </a:lnRef>
+          <a:fillRef idx="3">
+            <a:schemeClr val="accent1"/>
+          </a:fillRef>
+          <a:effectRef idx="2">
+            <a:schemeClr val="accent1"/>
+          </a:effectRef>
+          <a:fontRef idx="minor">
+            <a:schemeClr val="lt1"/>
+          </a:fontRef>
+        </p:style>
+        <p:txBody>
+          <a:bodyPr rtlCol="0" anchor="ctr"/>
+          <a:lstStyle/>
+          <a:p>
+            <a:pPr algn="ctr"/>
+          </a:p>
+        </p:txBody>
+      </p:sp>
+      <p:sp>
+        <p:nvSpPr>
+          <p:cNvPr id="18" name="TextBox 17"/>
+          <p:cNvSpPr txBox="1"/>
+          <p:nvPr/>
+        </p:nvSpPr>
+        <p:spPr>
+          <a:xfrm>
+            <a:off x="822960" y="4937760"/>
+            <a:ext cx="640080" cy="548640"/>
+          </a:xfrm>
+          <a:prstGeom prst="rect">
+            <a:avLst/>
+          </a:prstGeom>
+          <a:noFill/>
+        </p:spPr>
+        <p:txBody>
+          <a:bodyPr wrap="square">
+            <a:spAutoFit/>
+          </a:bodyPr>
+          <a:lstStyle/>
+          <a:p>
+            <a:pPr algn="ctr"/>
+            <a:r>
+              <a:rPr sz="2200" b="1" i="0">
+                <a:solidFill>
+                  <a:srgbClr val="FFFFFF"/>
+                </a:solidFill>
+                <a:latin typeface="Montserrat"/>
+              </a:rPr>
+              <a:t>C</a:t>
+            </a:r>
+          </a:p>
+        </p:txBody>
+      </p:sp>
+      <p:sp>
+        <p:nvSpPr>
+          <p:cNvPr id="19" name="TextBox 18"/>
+          <p:cNvSpPr txBox="1"/>
+          <p:nvPr/>
+        </p:nvSpPr>
+        <p:spPr>
+          <a:xfrm>
+            <a:off x="1600200" y="4800600"/>
+            <a:ext cx="4114800" cy="868680"/>
+          </a:xfrm>
+          <a:prstGeom prst="rect">
+            <a:avLst/>
+          </a:prstGeom>
+          <a:noFill/>
+        </p:spPr>
+        <p:txBody>
+          <a:bodyPr wrap="square">
+            <a:spAutoFit/>
+          </a:bodyPr>
+          <a:lstStyle/>
+          <a:p>
+            <a:r>
+              <a:rPr sz="1400" b="0" i="0">
+                <a:solidFill>
+                  <a:srgbClr val="1B2330"/>
+                </a:solidFill>
+                <a:latin typeface="Montserrat"/>
+              </a:rPr>
+              <a:t>40 cm</a:t>
+            </a:r>
+          </a:p>
+        </p:txBody>
+      </p:sp>
+      <p:sp>
+        <p:nvSpPr>
+          <p:cNvPr id="20" name="Rounded Rectangle 19"/>
+          <p:cNvSpPr/>
+          <p:nvPr/>
+        </p:nvSpPr>
+        <p:spPr>
+          <a:xfrm>
+            <a:off x="6355080" y="4617720"/>
+            <a:ext cx="4983480" cy="1143000"/>
+          </a:xfrm>
+          <a:prstGeom prst="roundRect">
+            <a:avLst/>
+          </a:prstGeom>
+          <a:solidFill>
+            <a:srgbClr val="F3F6FB"/>
+          </a:solidFill>
+          <a:ln w="12700">
+            <a:solidFill>
+              <a:srgbClr val="C7D2E6"/>
+            </a:solidFill>
+          </a:ln>
+          <a:effectLst/>
+        </p:spPr>
+        <p:style>
+          <a:lnRef idx="1">
+            <a:schemeClr val="accent1"/>
+          </a:lnRef>
+          <a:fillRef idx="3">
+            <a:schemeClr val="accent1"/>
+          </a:fillRef>
+          <a:effectRef idx="2">
+            <a:schemeClr val="accent1"/>
+          </a:effectRef>
+          <a:fontRef idx="minor">
+            <a:schemeClr val="lt1"/>
+          </a:fontRef>
+        </p:style>
+        <p:txBody>
+          <a:bodyPr rtlCol="0" anchor="ctr"/>
+          <a:lstStyle/>
+          <a:p>
+            <a:pPr algn="ctr"/>
+          </a:p>
+        </p:txBody>
+      </p:sp>
+      <p:sp>
+        <p:nvSpPr>
+          <p:cNvPr id="21" name="Rectangle 20"/>
+          <p:cNvSpPr/>
+          <p:nvPr/>
+        </p:nvSpPr>
+        <p:spPr>
+          <a:xfrm>
+            <a:off x="6355080" y="4617720"/>
+            <a:ext cx="640080" cy="1143000"/>
+          </a:xfrm>
+          <a:prstGeom prst="rect">
+            <a:avLst/>
+          </a:prstGeom>
+          <a:solidFill>
+            <a:srgbClr val="1E2761"/>
+          </a:solidFill>
+          <a:ln>
+            <a:noFill/>
+          </a:ln>
+          <a:effectLst/>
+        </p:spPr>
+        <p:style>
+          <a:lnRef idx="1">
+            <a:schemeClr val="accent1"/>
+          </a:lnRef>
+          <a:fillRef idx="3">
+            <a:schemeClr val="accent1"/>
+          </a:fillRef>
+          <a:effectRef idx="2">
+            <a:schemeClr val="accent1"/>
+          </a:effectRef>
+          <a:fontRef idx="minor">
+            <a:schemeClr val="lt1"/>
+          </a:fontRef>
+        </p:style>
+        <p:txBody>
+          <a:bodyPr rtlCol="0" anchor="ctr"/>
+          <a:lstStyle/>
+          <a:p>
+            <a:pPr algn="ctr"/>
+          </a:p>
+        </p:txBody>
+      </p:sp>
+      <p:sp>
+        <p:nvSpPr>
+          <p:cNvPr id="22" name="TextBox 21"/>
+          <p:cNvSpPr txBox="1"/>
+          <p:nvPr/>
+        </p:nvSpPr>
+        <p:spPr>
+          <a:xfrm>
+            <a:off x="6355080" y="4937760"/>
+            <a:ext cx="640080" cy="548640"/>
+          </a:xfrm>
+          <a:prstGeom prst="rect">
+            <a:avLst/>
+          </a:prstGeom>
+          <a:noFill/>
+        </p:spPr>
+        <p:txBody>
+          <a:bodyPr wrap="square">
+            <a:spAutoFit/>
+          </a:bodyPr>
+          <a:lstStyle/>
+          <a:p>
+            <a:pPr algn="ctr"/>
+            <a:r>
+              <a:rPr sz="2200" b="1" i="0">
+                <a:solidFill>
+                  <a:srgbClr val="FFFFFF"/>
+                </a:solidFill>
+                <a:latin typeface="Montserrat"/>
+              </a:rPr>
+              <a:t>D</a:t>
+            </a:r>
+          </a:p>
+        </p:txBody>
+      </p:sp>
+      <p:sp>
+        <p:nvSpPr>
+          <p:cNvPr id="23" name="TextBox 22"/>
+          <p:cNvSpPr txBox="1"/>
+          <p:nvPr/>
+        </p:nvSpPr>
+        <p:spPr>
+          <a:xfrm>
+            <a:off x="7132320" y="4800600"/>
+            <a:ext cx="4114800" cy="868680"/>
+          </a:xfrm>
+          <a:prstGeom prst="rect">
+            <a:avLst/>
+          </a:prstGeom>
+          <a:noFill/>
+        </p:spPr>
+        <p:txBody>
+          <a:bodyPr wrap="square">
+            <a:spAutoFit/>
+          </a:bodyPr>
+          <a:lstStyle/>
+          <a:p>
+            <a:r>
+              <a:rPr sz="1400" b="0" i="0">
+                <a:solidFill>
+                  <a:srgbClr val="1B2330"/>
+                </a:solidFill>
+                <a:latin typeface="Montserrat"/>
+              </a:rPr>
+              <a:t>220 cm</a:t>
             </a:r>
           </a:p>
         </p:txBody>
@@ -6900,6 +8233,18 @@
   <p:clrMapOvr>
     <a:masterClrMapping/>
   </p:clrMapOvr>
+  <mc:AlternateContent xmlns:mc="http://schemas.openxmlformats.org/markup-compatibility/2006">
+    <mc:Choice xmlns:p14="http://schemas.microsoft.com/office/powerpoint/2010/main" Requires="p14">
+      <p:transition spd="med" p14:dur="700">
+        <p14:cube dir="l"/>
+      </p:transition>
+    </mc:Choice>
+    <mc:Fallback>
+      <p:transition spd="med">
+        <p:push dir="l"/>
+      </p:transition>
+    </mc:Fallback>
+  </mc:AlternateContent>
 </p:sld>
 </file>
 
@@ -6987,7 +8332,7 @@
                 </a:solidFill>
                 <a:latin typeface="Montserrat"/>
               </a:rPr>
-              <a:t>014 / 020</a:t>
+              <a:t>014 / 026</a:t>
             </a:r>
           </a:p>
         </p:txBody>
@@ -7028,88 +8373,20 @@
       </p:sp>
       <p:sp>
         <p:nvSpPr>
-          <p:cNvPr id="5" name="TextBox 4"/>
-          <p:cNvSpPr txBox="1"/>
-          <p:nvPr/>
-        </p:nvSpPr>
-        <p:spPr>
-          <a:xfrm>
-            <a:off x="822960" y="457200"/>
-            <a:ext cx="10058400" cy="365760"/>
-          </a:xfrm>
-          <a:prstGeom prst="rect">
-            <a:avLst/>
-          </a:prstGeom>
-          <a:noFill/>
-        </p:spPr>
-        <p:txBody>
-          <a:bodyPr wrap="square">
-            <a:spAutoFit/>
-          </a:bodyPr>
-          <a:lstStyle/>
-          <a:p>
-            <a:r>
-              <a:rPr sz="1300" b="1" i="0">
-                <a:solidFill>
-                  <a:srgbClr val="E8801A"/>
-                </a:solidFill>
-                <a:latin typeface="Montserrat"/>
-              </a:rPr>
-              <a:t>TIRO FORZADO · DISTANCIAS</a:t>
-            </a:r>
-          </a:p>
-        </p:txBody>
-      </p:sp>
-      <p:sp>
-        <p:nvSpPr>
-          <p:cNvPr id="6" name="TextBox 5"/>
-          <p:cNvSpPr txBox="1"/>
-          <p:nvPr/>
-        </p:nvSpPr>
-        <p:spPr>
-          <a:xfrm>
-            <a:off x="822960" y="868680"/>
-            <a:ext cx="10515600" cy="914400"/>
-          </a:xfrm>
-          <a:prstGeom prst="rect">
-            <a:avLst/>
-          </a:prstGeom>
-          <a:noFill/>
-        </p:spPr>
-        <p:txBody>
-          <a:bodyPr wrap="square">
-            <a:spAutoFit/>
-          </a:bodyPr>
-          <a:lstStyle/>
-          <a:p>
-            <a:r>
-              <a:rPr sz="2800" b="1" i="0">
-                <a:solidFill>
-                  <a:srgbClr val="1E2761"/>
-                </a:solidFill>
-                <a:latin typeface="Montserrat"/>
-              </a:rPr>
-              <a:t>Distancia a ventanas y orificios</a:t>
-            </a:r>
-          </a:p>
-        </p:txBody>
-      </p:sp>
-      <p:sp>
-        <p:nvSpPr>
-          <p:cNvPr id="7" name="Rounded Rectangle 6"/>
+          <p:cNvPr id="5" name="Rectangle 4"/>
           <p:cNvSpPr/>
           <p:nvPr/>
         </p:nvSpPr>
         <p:spPr>
           <a:xfrm>
-            <a:off x="868680" y="1627632"/>
-            <a:ext cx="2011680" cy="73152"/>
-          </a:xfrm>
-          <a:prstGeom prst="roundRect">
+            <a:off x="0" y="0"/>
+            <a:ext cx="12191695" cy="1143000"/>
+          </a:xfrm>
+          <a:prstGeom prst="rect">
             <a:avLst/>
           </a:prstGeom>
           <a:solidFill>
-            <a:srgbClr val="E8801A"/>
+            <a:srgbClr val="1E8E4B"/>
           </a:solidFill>
           <a:ln>
             <a:noFill/>
@@ -7140,14 +8417,14 @@
       </p:sp>
       <p:sp>
         <p:nvSpPr>
-          <p:cNvPr id="8" name="TextBox 7"/>
+          <p:cNvPr id="6" name="TextBox 5"/>
           <p:cNvSpPr txBox="1"/>
           <p:nvPr/>
         </p:nvSpPr>
         <p:spPr>
           <a:xfrm>
-            <a:off x="822960" y="1965960"/>
-            <a:ext cx="4983480" cy="4206240"/>
+            <a:off x="822960" y="274320"/>
+            <a:ext cx="10515600" cy="640080"/>
           </a:xfrm>
           <a:prstGeom prst="rect">
             <a:avLst/>
@@ -7160,102 +8437,72 @@
           </a:bodyPr>
           <a:lstStyle/>
           <a:p>
-            <a:pPr>
-              <a:spcAft>
-                <a:spcPts val="1100"/>
-              </a:spcAft>
-            </a:pPr>
-            <a:r>
-              <a:rPr sz="1600" b="1" i="0">
-                <a:solidFill>
-                  <a:srgbClr val="E8801A"/>
-                </a:solidFill>
-                <a:latin typeface="Montserrat"/>
-              </a:rPr>
-              <a:t>▸  </a:t>
-            </a:r>
-            <a:r>
-              <a:rPr sz="1600" b="0" i="0">
-                <a:solidFill>
-                  <a:srgbClr val="1B2330"/>
-                </a:solidFill>
-                <a:latin typeface="Montserrat"/>
-              </a:rPr>
-              <a:t>≥ 40 cm a orificios y ventanas</a:t>
-            </a:r>
-          </a:p>
-          <a:p>
-            <a:pPr>
-              <a:spcAft>
-                <a:spcPts val="1100"/>
-              </a:spcAft>
-            </a:pPr>
-            <a:r>
-              <a:rPr sz="1600" b="1" i="0">
-                <a:solidFill>
-                  <a:srgbClr val="E8801A"/>
-                </a:solidFill>
-                <a:latin typeface="Montserrat"/>
-              </a:rPr>
-              <a:t>▸  </a:t>
-            </a:r>
-            <a:r>
-              <a:rPr sz="1600" b="0" i="0">
-                <a:solidFill>
-                  <a:srgbClr val="1B2330"/>
-                </a:solidFill>
-                <a:latin typeface="Montserrat"/>
-              </a:rPr>
-              <a:t>Salvo si la salida es por encima</a:t>
-            </a:r>
-          </a:p>
-          <a:p>
-            <a:pPr>
-              <a:spcAft>
-                <a:spcPts val="1100"/>
-              </a:spcAft>
-            </a:pPr>
-            <a:r>
-              <a:rPr sz="1600" b="1" i="0">
-                <a:solidFill>
-                  <a:srgbClr val="E8801A"/>
-                </a:solidFill>
-                <a:latin typeface="Montserrat"/>
-              </a:rPr>
-              <a:t>▸  </a:t>
-            </a:r>
-            <a:r>
-              <a:rPr sz="1600" b="0" i="0">
-                <a:solidFill>
-                  <a:srgbClr val="1B2330"/>
-                </a:solidFill>
-                <a:latin typeface="Montserrat"/>
-              </a:rPr>
-              <a:t>Con deflector, nunca menos de 20 cm</a:t>
-            </a:r>
-          </a:p>
-        </p:txBody>
-      </p:sp>
-      <p:sp>
-        <p:nvSpPr>
-          <p:cNvPr id="9" name="imgph" descr="IMGQ:boiler flue near window wall"/>
+            <a:r>
+              <a:rPr sz="2400" b="1" i="0">
+                <a:solidFill>
+                  <a:srgbClr val="FFFFFF"/>
+                </a:solidFill>
+                <a:latin typeface="Montserrat"/>
+              </a:rPr>
+              <a:t>✔  RESPUESTA:  A</a:t>
+            </a:r>
+          </a:p>
+        </p:txBody>
+      </p:sp>
+      <p:sp>
+        <p:nvSpPr>
+          <p:cNvPr id="7" name="TextBox 6"/>
+          <p:cNvSpPr txBox="1"/>
+          <p:nvPr/>
+        </p:nvSpPr>
+        <p:spPr>
+          <a:xfrm>
+            <a:off x="822960" y="1417320"/>
+            <a:ext cx="10515600" cy="914400"/>
+          </a:xfrm>
+          <a:prstGeom prst="rect">
+            <a:avLst/>
+          </a:prstGeom>
+          <a:noFill/>
+        </p:spPr>
+        <p:txBody>
+          <a:bodyPr wrap="square">
+            <a:spAutoFit/>
+          </a:bodyPr>
+          <a:lstStyle/>
+          <a:p>
+            <a:r>
+              <a:rPr sz="1800" b="1" i="0">
+                <a:solidFill>
+                  <a:srgbClr val="64748B"/>
+                </a:solidFill>
+                <a:latin typeface="Montserrat"/>
+              </a:rPr>
+              <a:t>En una salida de tiro natural a fachada, ¿qué distancia se guarda respecto al muro que atraviesa?</a:t>
+            </a:r>
+          </a:p>
+        </p:txBody>
+      </p:sp>
+      <p:sp>
+        <p:nvSpPr>
+          <p:cNvPr id="8" name="Rounded Rectangle 7"/>
           <p:cNvSpPr/>
           <p:nvPr/>
         </p:nvSpPr>
         <p:spPr>
           <a:xfrm>
-            <a:off x="5806440" y="1051560"/>
-            <a:ext cx="5298947" cy="4629150"/>
+            <a:off x="822960" y="2514600"/>
+            <a:ext cx="10515600" cy="914400"/>
           </a:xfrm>
           <a:prstGeom prst="roundRect">
             <a:avLst/>
           </a:prstGeom>
           <a:solidFill>
-            <a:srgbClr val="F3F6FB"/>
+            <a:srgbClr val="E9F6EE"/>
           </a:solidFill>
           <a:ln w="12700">
             <a:solidFill>
-              <a:srgbClr val="C7D2E6"/>
+              <a:srgbClr val="1E8E4B"/>
             </a:solidFill>
           </a:ln>
           <a:effectLst/>
@@ -7284,14 +8531,14 @@
       </p:sp>
       <p:sp>
         <p:nvSpPr>
-          <p:cNvPr id="10" name="TextBox 9"/>
+          <p:cNvPr id="9" name="TextBox 8"/>
           <p:cNvSpPr txBox="1"/>
           <p:nvPr/>
         </p:nvSpPr>
         <p:spPr>
           <a:xfrm>
-            <a:off x="6080760" y="2726055"/>
-            <a:ext cx="4750307" cy="1280160"/>
+            <a:off x="1097280" y="2697480"/>
+            <a:ext cx="10058400" cy="640080"/>
           </a:xfrm>
           <a:prstGeom prst="rect">
             <a:avLst/>
@@ -7304,27 +8551,66 @@
           </a:bodyPr>
           <a:lstStyle/>
           <a:p>
-            <a:pPr algn="ctr"/>
-            <a:r>
-              <a:rPr sz="1400" b="1" i="0">
-                <a:solidFill>
-                  <a:srgbClr val="64748B"/>
-                </a:solidFill>
-                <a:latin typeface="Montserrat"/>
-              </a:rPr>
-              <a:t>IMAGEN REALISTA</a:t>
-            </a:r>
-          </a:p>
-          <a:p>
-            <a:pPr algn="ctr"/>
-            <a:r>
-              <a:rPr sz="1100" b="0" i="1">
-                <a:solidFill>
-                  <a:srgbClr val="64748B"/>
-                </a:solidFill>
-                <a:latin typeface="Montserrat"/>
-              </a:rPr>
-              <a:t>boiler flue near window wall</a:t>
+            <a:r>
+              <a:rPr sz="1800" b="1" i="0">
+                <a:solidFill>
+                  <a:srgbClr val="1E8E4B"/>
+                </a:solidFill>
+                <a:latin typeface="Montserrat"/>
+              </a:rPr>
+              <a:t>A.  </a:t>
+            </a:r>
+            <a:r>
+              <a:rPr sz="1800" b="1" i="0">
+                <a:solidFill>
+                  <a:srgbClr val="1E2761"/>
+                </a:solidFill>
+                <a:latin typeface="Montserrat"/>
+              </a:rPr>
+              <a:t>10 cm</a:t>
+            </a:r>
+          </a:p>
+        </p:txBody>
+      </p:sp>
+      <p:sp>
+        <p:nvSpPr>
+          <p:cNvPr id="10" name="TextBox 9"/>
+          <p:cNvSpPr txBox="1"/>
+          <p:nvPr/>
+        </p:nvSpPr>
+        <p:spPr>
+          <a:xfrm>
+            <a:off x="822960" y="3749039"/>
+            <a:ext cx="10515600" cy="2194560"/>
+          </a:xfrm>
+          <a:prstGeom prst="rect">
+            <a:avLst/>
+          </a:prstGeom>
+          <a:noFill/>
+        </p:spPr>
+        <p:txBody>
+          <a:bodyPr wrap="square">
+            <a:spAutoFit/>
+          </a:bodyPr>
+          <a:lstStyle/>
+          <a:p>
+            <a:r>
+              <a:rPr sz="1500" b="1" i="0">
+                <a:solidFill>
+                  <a:srgbClr val="E8801A"/>
+                </a:solidFill>
+                <a:latin typeface="Montserrat"/>
+              </a:rPr>
+              <a:t>Por qué:  </a:t>
+            </a:r>
+            <a:r>
+              <a:rPr sz="1500" b="0" i="0">
+                <a:solidFill>
+                  <a:srgbClr val="1B2330"/>
+                </a:solidFill>
+                <a:latin typeface="Montserrat"/>
+              </a:rPr>
+              <a:t>Casi todas las distancias del extremo son 40 cm, pero respecto al muro que atraviesa son 10 cm (y 20 cm a cualquier otro resalte).</a:t>
             </a:r>
           </a:p>
         </p:txBody>
@@ -7334,6 +8620,18 @@
   <p:clrMapOvr>
     <a:masterClrMapping/>
   </p:clrMapOvr>
+  <mc:AlternateContent xmlns:mc="http://schemas.openxmlformats.org/markup-compatibility/2006">
+    <mc:Choice xmlns:p14="http://schemas.microsoft.com/office/powerpoint/2010/main" Requires="p14">
+      <p:transition spd="med" p14:dur="700">
+        <p14:cube dir="r"/>
+      </p:transition>
+    </mc:Choice>
+    <mc:Fallback>
+      <p:transition spd="med">
+        <p:push dir="r"/>
+      </p:transition>
+    </mc:Fallback>
+  </mc:AlternateContent>
 </p:sld>
 </file>
 
@@ -7421,7 +8719,7 @@
                 </a:solidFill>
                 <a:latin typeface="Montserrat"/>
               </a:rPr>
-              <a:t>015 / 020</a:t>
+              <a:t>015 / 026</a:t>
             </a:r>
           </a:p>
         </p:txBody>
@@ -7489,7 +8787,7 @@
                 </a:solidFill>
                 <a:latin typeface="Montserrat"/>
               </a:rPr>
-              <a:t>DISTANCIAS GENERALES</a:t>
+              <a:t>AYUDA A LA EVACUACIÓN</a:t>
             </a:r>
           </a:p>
         </p:txBody>
@@ -7523,14 +8821,14 @@
                 </a:solidFill>
                 <a:latin typeface="Montserrat"/>
               </a:rPr>
-              <a:t>2,20 m sobre zona de personas</a:t>
-            </a:r>
-          </a:p>
-        </p:txBody>
-      </p:sp>
-      <p:sp>
-        <p:nvSpPr>
-          <p:cNvPr id="7" name="Rounded Rectangle 6"/>
+              <a:t>De tiro natural a forzado</a:t>
+            </a:r>
+          </a:p>
+        </p:txBody>
+      </p:sp>
+      <p:sp>
+        <p:nvSpPr>
+          <p:cNvPr id="7" name="Rectangle 6"/>
           <p:cNvSpPr/>
           <p:nvPr/>
         </p:nvSpPr>
@@ -7539,7 +8837,7 @@
             <a:off x="868680" y="1627632"/>
             <a:ext cx="2011680" cy="73152"/>
           </a:xfrm>
-          <a:prstGeom prst="roundRect">
+          <a:prstGeom prst="rect">
             <a:avLst/>
           </a:prstGeom>
           <a:solidFill>
@@ -7580,8 +8878,8 @@
         </p:nvSpPr>
         <p:spPr>
           <a:xfrm>
-            <a:off x="822960" y="1965960"/>
-            <a:ext cx="4983480" cy="4206240"/>
+            <a:off x="6355080" y="1965960"/>
+            <a:ext cx="5029200" cy="4206240"/>
           </a:xfrm>
           <a:prstGeom prst="rect">
             <a:avLst/>
@@ -7615,7 +8913,7 @@
                 </a:solidFill>
                 <a:latin typeface="Montserrat"/>
               </a:rPr>
-              <a:t>Eje a ≥ 2,20 m del suelo</a:t>
+              <a:t>Añadir extractor = cambiar de aparato</a:t>
             </a:r>
           </a:p>
           <a:p>
@@ -7640,7 +8938,7 @@
                 </a:solidFill>
                 <a:latin typeface="Montserrat"/>
               </a:rPr>
-              <a:t>Salvo salida a zona privada</a:t>
+              <a:t>Cumple las condiciones del tiro forzado</a:t>
             </a:r>
           </a:p>
           <a:p>
@@ -7665,21 +8963,21 @@
                 </a:solidFill>
                 <a:latin typeface="Montserrat"/>
               </a:rPr>
-              <a:t>Ventosa &lt; 4,2 kW protegida: exenta</a:t>
-            </a:r>
-          </a:p>
-        </p:txBody>
-      </p:sp>
-      <p:sp>
-        <p:nvSpPr>
-          <p:cNvPr id="9" name="imgph" descr="IMGQ:flue outlet above pedestrian passage"/>
+              <a:t>Se perdona la puntuación de la tabla</a:t>
+            </a:r>
+          </a:p>
+        </p:txBody>
+      </p:sp>
+      <p:sp>
+        <p:nvSpPr>
+          <p:cNvPr id="9" name="imgph" descr="IMGQ:flue fan extractor unit"/>
           <p:cNvSpPr/>
           <p:nvPr/>
         </p:nvSpPr>
         <p:spPr>
           <a:xfrm>
-            <a:off x="5806440" y="1051560"/>
-            <a:ext cx="5298947" cy="4629150"/>
+            <a:off x="822960" y="1965960"/>
+            <a:ext cx="5303520" cy="4572000"/>
           </a:xfrm>
           <a:prstGeom prst="roundRect">
             <a:avLst/>
@@ -7724,8 +9022,8 @@
         </p:nvSpPr>
         <p:spPr>
           <a:xfrm>
-            <a:off x="6080760" y="2726055"/>
-            <a:ext cx="4750307" cy="1280160"/>
+            <a:off x="1097280" y="3611880"/>
+            <a:ext cx="4754880" cy="1280160"/>
           </a:xfrm>
           <a:prstGeom prst="rect">
             <a:avLst/>
@@ -7746,7 +9044,7 @@
                 </a:solidFill>
                 <a:latin typeface="Montserrat"/>
               </a:rPr>
-              <a:t>IMAGEN REALISTA</a:t>
+              <a:t>IMAGEN</a:t>
             </a:r>
           </a:p>
           <a:p>
@@ -7758,7 +9056,7 @@
                 </a:solidFill>
                 <a:latin typeface="Montserrat"/>
               </a:rPr>
-              <a:t>flue outlet above pedestrian passage</a:t>
+              <a:t>flue fan extractor unit</a:t>
             </a:r>
           </a:p>
         </p:txBody>
@@ -7768,6 +9066,18 @@
   <p:clrMapOvr>
     <a:masterClrMapping/>
   </p:clrMapOvr>
+  <mc:AlternateContent xmlns:mc="http://schemas.openxmlformats.org/markup-compatibility/2006">
+    <mc:Choice xmlns:p14="http://schemas.microsoft.com/office/powerpoint/2010/main" Requires="p14">
+      <p:transition spd="med" p14:dur="700">
+        <p14:cube dir="l"/>
+      </p:transition>
+    </mc:Choice>
+    <mc:Fallback>
+      <p:transition spd="med">
+        <p:push dir="l"/>
+      </p:transition>
+    </mc:Fallback>
+  </mc:AlternateContent>
 </p:sld>
 </file>
 
@@ -7855,7 +9165,7 @@
                 </a:solidFill>
                 <a:latin typeface="Montserrat"/>
               </a:rPr>
-              <a:t>016 / 020</a:t>
+              <a:t>016 / 026</a:t>
             </a:r>
           </a:p>
         </p:txBody>
@@ -7923,7 +9233,7 @@
                 </a:solidFill>
                 <a:latin typeface="Montserrat"/>
               </a:rPr>
-              <a:t>DISTANCIAS GENERALES</a:t>
+              <a:t>TIRO FORZADO · CONDUCTOS</a:t>
             </a:r>
           </a:p>
         </p:txBody>
@@ -7957,14 +9267,14 @@
                 </a:solidFill>
                 <a:latin typeface="Montserrat"/>
               </a:rPr>
-              <a:t>Distancias de fachada, con y sin deflector</a:t>
-            </a:r>
-          </a:p>
-        </p:txBody>
-      </p:sp>
-      <p:sp>
-        <p:nvSpPr>
-          <p:cNvPr id="7" name="Rounded Rectangle 6"/>
+              <a:t>Tiro forzado: manda el fabricante</a:t>
+            </a:r>
+          </a:p>
+        </p:txBody>
+      </p:sp>
+      <p:sp>
+        <p:nvSpPr>
+          <p:cNvPr id="7" name="Rectangle 6"/>
           <p:cNvSpPr/>
           <p:nvPr/>
         </p:nvSpPr>
@@ -7973,7 +9283,7 @@
             <a:off x="868680" y="1627632"/>
             <a:ext cx="2011680" cy="73152"/>
           </a:xfrm>
-          <a:prstGeom prst="roundRect">
+          <a:prstGeom prst="rect">
             <a:avLst/>
           </a:prstGeom>
           <a:solidFill>
@@ -8015,7 +9325,7 @@
         <p:spPr>
           <a:xfrm>
             <a:off x="822960" y="1965960"/>
-            <a:ext cx="4983480" cy="4206240"/>
+            <a:ext cx="5029200" cy="4206240"/>
           </a:xfrm>
           <a:prstGeom prst="rect">
             <a:avLst/>
@@ -8049,7 +9359,7 @@
                 </a:solidFill>
                 <a:latin typeface="Montserrat"/>
               </a:rPr>
-              <a:t>Laterales: 30 cm / 1 m</a:t>
+              <a:t>Materiales y longitud según fabricante</a:t>
             </a:r>
           </a:p>
           <a:p>
@@ -8074,7 +9384,7 @@
                 </a:solidFill>
                 <a:latin typeface="Montserrat"/>
               </a:rPr>
-              <a:t>Frontales: 2 m / 3 m</a:t>
+              <a:t>Uniones estancas y rígidas</a:t>
             </a:r>
           </a:p>
           <a:p>
@@ -8099,21 +9409,21 @@
                 </a:solidFill>
                 <a:latin typeface="Montserrat"/>
               </a:rPr>
-              <a:t>Entre dos salidas: 60 cm (30 con deflector)</a:t>
-            </a:r>
-          </a:p>
-        </p:txBody>
-      </p:sp>
-      <p:sp>
-        <p:nvSpPr>
-          <p:cNvPr id="9" name="imgph" descr="IMGQ:two flue terminals on facade"/>
+              <a:t>Sin condensación: ligera pendiente descendente</a:t>
+            </a:r>
+          </a:p>
+        </p:txBody>
+      </p:sp>
+      <p:sp>
+        <p:nvSpPr>
+          <p:cNvPr id="9" name="imgph" descr="IMGQ:condensing boiler flue installation"/>
           <p:cNvSpPr/>
           <p:nvPr/>
         </p:nvSpPr>
         <p:spPr>
           <a:xfrm>
-            <a:off x="5806440" y="1051560"/>
-            <a:ext cx="5298947" cy="4629150"/>
+            <a:off x="6080760" y="1965960"/>
+            <a:ext cx="5303520" cy="4572000"/>
           </a:xfrm>
           <a:prstGeom prst="roundRect">
             <a:avLst/>
@@ -8158,8 +9468,8 @@
         </p:nvSpPr>
         <p:spPr>
           <a:xfrm>
-            <a:off x="6080760" y="2726055"/>
-            <a:ext cx="4750307" cy="1280160"/>
+            <a:off x="6355080" y="3611880"/>
+            <a:ext cx="4754880" cy="1280160"/>
           </a:xfrm>
           <a:prstGeom prst="rect">
             <a:avLst/>
@@ -8180,7 +9490,7 @@
                 </a:solidFill>
                 <a:latin typeface="Montserrat"/>
               </a:rPr>
-              <a:t>IMAGEN REALISTA</a:t>
+              <a:t>IMAGEN</a:t>
             </a:r>
           </a:p>
           <a:p>
@@ -8192,7 +9502,7 @@
                 </a:solidFill>
                 <a:latin typeface="Montserrat"/>
               </a:rPr>
-              <a:t>two flue terminals on facade</a:t>
+              <a:t>condensing boiler flue installation</a:t>
             </a:r>
           </a:p>
         </p:txBody>
@@ -8202,6 +9512,18 @@
   <p:clrMapOvr>
     <a:masterClrMapping/>
   </p:clrMapOvr>
+  <mc:AlternateContent xmlns:mc="http://schemas.openxmlformats.org/markup-compatibility/2006">
+    <mc:Choice xmlns:p14="http://schemas.microsoft.com/office/powerpoint/2010/main" Requires="p14">
+      <p:transition spd="med" p14:dur="700">
+        <p14:cube dir="r"/>
+      </p:transition>
+    </mc:Choice>
+    <mc:Fallback>
+      <p:transition spd="med">
+        <p:push dir="r"/>
+      </p:transition>
+    </mc:Fallback>
+  </mc:AlternateContent>
 </p:sld>
 </file>
 
@@ -8289,7 +9611,7 @@
                 </a:solidFill>
                 <a:latin typeface="Montserrat"/>
               </a:rPr>
-              <a:t>017 / 020</a:t>
+              <a:t>017 / 026</a:t>
             </a:r>
           </a:p>
         </p:txBody>
@@ -8357,7 +9679,7 @@
                 </a:solidFill>
                 <a:latin typeface="Montserrat"/>
               </a:rPr>
-              <a:t>REQUISITOS ADICIONALES</a:t>
+              <a:t>TIRO FORZADO · VENTOSA</a:t>
             </a:r>
           </a:p>
         </p:txBody>
@@ -8391,14 +9713,14 @@
                 </a:solidFill>
                 <a:latin typeface="Montserrat"/>
               </a:rPr>
-              <a:t>La lista de «no mezclar»</a:t>
-            </a:r>
-          </a:p>
-        </p:txBody>
-      </p:sp>
-      <p:sp>
-        <p:nvSpPr>
-          <p:cNvPr id="7" name="Rounded Rectangle 6"/>
+              <a:t>La ventosa: salida frontal y 10 cm</a:t>
+            </a:r>
+          </a:p>
+        </p:txBody>
+      </p:sp>
+      <p:sp>
+        <p:nvSpPr>
+          <p:cNvPr id="7" name="Rectangle 6"/>
           <p:cNvSpPr/>
           <p:nvPr/>
         </p:nvSpPr>
@@ -8407,7 +9729,7 @@
             <a:off x="868680" y="1627632"/>
             <a:ext cx="2011680" cy="73152"/>
           </a:xfrm>
-          <a:prstGeom prst="roundRect">
+          <a:prstGeom prst="rect">
             <a:avLst/>
           </a:prstGeom>
           <a:solidFill>
@@ -8448,8 +9770,8 @@
         </p:nvSpPr>
         <p:spPr>
           <a:xfrm>
-            <a:off x="822960" y="1965960"/>
-            <a:ext cx="4983480" cy="4206240"/>
+            <a:off x="6355080" y="1965960"/>
+            <a:ext cx="5029200" cy="4206240"/>
           </a:xfrm>
           <a:prstGeom prst="rect">
             <a:avLst/>
@@ -8483,7 +9805,7 @@
                 </a:solidFill>
                 <a:latin typeface="Montserrat"/>
               </a:rPr>
-              <a:t>Tiro natural con tiro forzado: no</a:t>
+              <a:t>Salida frontal tipo cañón</a:t>
             </a:r>
           </a:p>
           <a:p>
@@ -8508,7 +9830,7 @@
                 </a:solidFill>
                 <a:latin typeface="Montserrat"/>
               </a:rPr>
-              <a:t>Condensación con no condensación: no</a:t>
+              <a:t>Asoma máximo 10 cm de la fachada</a:t>
             </a:r>
           </a:p>
           <a:p>
@@ -8533,46 +9855,21 @@
                 </a:solidFill>
                 <a:latin typeface="Montserrat"/>
               </a:rPr>
-              <a:t>Extractores y campanas: no</a:t>
-            </a:r>
-          </a:p>
-          <a:p>
-            <a:pPr>
-              <a:spcAft>
-                <a:spcPts val="1100"/>
-              </a:spcAft>
-            </a:pPr>
-            <a:r>
-              <a:rPr sz="1600" b="1" i="0">
-                <a:solidFill>
-                  <a:srgbClr val="E8801A"/>
-                </a:solidFill>
-                <a:latin typeface="Montserrat"/>
-              </a:rPr>
-              <a:t>▸  </a:t>
-            </a:r>
-            <a:r>
-              <a:rPr sz="1600" b="0" i="0">
-                <a:solidFill>
-                  <a:srgbClr val="1B2330"/>
-                </a:solidFill>
-                <a:latin typeface="Montserrat"/>
-              </a:rPr>
-              <a:t>Gas con sólidos o líquidos: no</a:t>
-            </a:r>
-          </a:p>
-        </p:txBody>
-      </p:sp>
-      <p:sp>
-        <p:nvSpPr>
-          <p:cNvPr id="9" name="imgph" descr="IMGQ:multiple flue pipes shared chimney"/>
+              <a:t>Balcón techado: 30 cm de eje al techo</a:t>
+            </a:r>
+          </a:p>
+        </p:txBody>
+      </p:sp>
+      <p:sp>
+        <p:nvSpPr>
+          <p:cNvPr id="9" name="imgph" descr="IMGQ:balanced flue terminal exterior wall"/>
           <p:cNvSpPr/>
           <p:nvPr/>
         </p:nvSpPr>
         <p:spPr>
           <a:xfrm>
-            <a:off x="5806440" y="1051560"/>
-            <a:ext cx="5298947" cy="4629150"/>
+            <a:off x="822960" y="1965960"/>
+            <a:ext cx="5303520" cy="4572000"/>
           </a:xfrm>
           <a:prstGeom prst="roundRect">
             <a:avLst/>
@@ -8617,8 +9914,8 @@
         </p:nvSpPr>
         <p:spPr>
           <a:xfrm>
-            <a:off x="6080760" y="2726055"/>
-            <a:ext cx="4750307" cy="1280160"/>
+            <a:off x="1097280" y="3611880"/>
+            <a:ext cx="4754880" cy="1280160"/>
           </a:xfrm>
           <a:prstGeom prst="rect">
             <a:avLst/>
@@ -8639,7 +9936,7 @@
                 </a:solidFill>
                 <a:latin typeface="Montserrat"/>
               </a:rPr>
-              <a:t>IMAGEN REALISTA</a:t>
+              <a:t>IMAGEN</a:t>
             </a:r>
           </a:p>
           <a:p>
@@ -8651,7 +9948,7 @@
                 </a:solidFill>
                 <a:latin typeface="Montserrat"/>
               </a:rPr>
-              <a:t>multiple flue pipes shared chimney</a:t>
+              <a:t>balanced flue terminal exterior wall</a:t>
             </a:r>
           </a:p>
         </p:txBody>
@@ -8661,6 +9958,18 @@
   <p:clrMapOvr>
     <a:masterClrMapping/>
   </p:clrMapOvr>
+  <mc:AlternateContent xmlns:mc="http://schemas.openxmlformats.org/markup-compatibility/2006">
+    <mc:Choice xmlns:p14="http://schemas.microsoft.com/office/powerpoint/2010/main" Requires="p14">
+      <p:transition spd="med" p14:dur="700">
+        <p14:cube dir="l"/>
+      </p:transition>
+    </mc:Choice>
+    <mc:Fallback>
+      <p:transition spd="med">
+        <p:push dir="l"/>
+      </p:transition>
+    </mc:Fallback>
+  </mc:AlternateContent>
 </p:sld>
 </file>
 
@@ -8748,7 +10057,7 @@
                 </a:solidFill>
                 <a:latin typeface="Montserrat"/>
               </a:rPr>
-              <a:t>018 / 020</a:t>
+              <a:t>018 / 026</a:t>
             </a:r>
           </a:p>
         </p:txBody>
@@ -8816,7 +10125,7 @@
                 </a:solidFill>
                 <a:latin typeface="Montserrat"/>
               </a:rPr>
-              <a:t>REQUISITOS ADICIONALES</a:t>
+              <a:t>TIRO FORZADO · DISTANCIAS</a:t>
             </a:r>
           </a:p>
         </p:txBody>
@@ -8850,14 +10159,14 @@
                 </a:solidFill>
                 <a:latin typeface="Montserrat"/>
               </a:rPr>
-              <a:t>Detalles de conductos comunes</a:t>
-            </a:r>
-          </a:p>
-        </p:txBody>
-      </p:sp>
-      <p:sp>
-        <p:nvSpPr>
-          <p:cNvPr id="7" name="Rounded Rectangle 6"/>
+              <a:t>Distancia a ventanas y orificios</a:t>
+            </a:r>
+          </a:p>
+        </p:txBody>
+      </p:sp>
+      <p:sp>
+        <p:nvSpPr>
+          <p:cNvPr id="7" name="Rectangle 6"/>
           <p:cNvSpPr/>
           <p:nvPr/>
         </p:nvSpPr>
@@ -8866,7 +10175,7 @@
             <a:off x="868680" y="1627632"/>
             <a:ext cx="2011680" cy="73152"/>
           </a:xfrm>
-          <a:prstGeom prst="roundRect">
+          <a:prstGeom prst="rect">
             <a:avLst/>
           </a:prstGeom>
           <a:solidFill>
@@ -8908,7 +10217,7 @@
         <p:spPr>
           <a:xfrm>
             <a:off x="822960" y="1965960"/>
-            <a:ext cx="4983480" cy="4206240"/>
+            <a:ext cx="5029200" cy="4206240"/>
           </a:xfrm>
           <a:prstGeom prst="rect">
             <a:avLst/>
@@ -8942,7 +10251,7 @@
                 </a:solidFill>
                 <a:latin typeface="Montserrat"/>
               </a:rPr>
-              <a:t>15 cm entre generatrices al unir</a:t>
+              <a:t>≥ 40 cm a orificios y ventanas</a:t>
             </a:r>
           </a:p>
           <a:p>
@@ -8967,7 +10276,7 @@
                 </a:solidFill>
                 <a:latin typeface="Montserrat"/>
               </a:rPr>
-              <a:t>Paso por madera: 10 cm más de hueco</a:t>
+              <a:t>Salvo si la salida es por encima</a:t>
             </a:r>
           </a:p>
           <a:p>
@@ -8992,21 +10301,21 @@
                 </a:solidFill>
                 <a:latin typeface="Montserrat"/>
               </a:rPr>
-              <a:t>Regulación de tiro: nunca manual</a:t>
-            </a:r>
-          </a:p>
-        </p:txBody>
-      </p:sp>
-      <p:sp>
-        <p:nvSpPr>
-          <p:cNvPr id="9" name="imgph" descr="IMGQ:collective flue duct junction"/>
+              <a:t>Con deflector, nunca menos de 20 cm</a:t>
+            </a:r>
+          </a:p>
+        </p:txBody>
+      </p:sp>
+      <p:sp>
+        <p:nvSpPr>
+          <p:cNvPr id="9" name="imgph" descr="IMGQ:boiler flue near window wall"/>
           <p:cNvSpPr/>
           <p:nvPr/>
         </p:nvSpPr>
         <p:spPr>
           <a:xfrm>
-            <a:off x="5806440" y="1051560"/>
-            <a:ext cx="5298947" cy="4629150"/>
+            <a:off x="6080760" y="1965960"/>
+            <a:ext cx="5303520" cy="4572000"/>
           </a:xfrm>
           <a:prstGeom prst="roundRect">
             <a:avLst/>
@@ -9051,8 +10360,8 @@
         </p:nvSpPr>
         <p:spPr>
           <a:xfrm>
-            <a:off x="6080760" y="2726055"/>
-            <a:ext cx="4750307" cy="1280160"/>
+            <a:off x="6355080" y="3611880"/>
+            <a:ext cx="4754880" cy="1280160"/>
           </a:xfrm>
           <a:prstGeom prst="rect">
             <a:avLst/>
@@ -9073,7 +10382,7 @@
                 </a:solidFill>
                 <a:latin typeface="Montserrat"/>
               </a:rPr>
-              <a:t>IMAGEN REALISTA</a:t>
+              <a:t>IMAGEN</a:t>
             </a:r>
           </a:p>
           <a:p>
@@ -9085,7 +10394,7 @@
                 </a:solidFill>
                 <a:latin typeface="Montserrat"/>
               </a:rPr>
-              <a:t>collective flue duct junction</a:t>
+              <a:t>boiler flue near window wall</a:t>
             </a:r>
           </a:p>
         </p:txBody>
@@ -9095,6 +10404,18 @@
   <p:clrMapOvr>
     <a:masterClrMapping/>
   </p:clrMapOvr>
+  <mc:AlternateContent xmlns:mc="http://schemas.openxmlformats.org/markup-compatibility/2006">
+    <mc:Choice xmlns:p14="http://schemas.microsoft.com/office/powerpoint/2010/main" Requires="p14">
+      <p:transition spd="med" p14:dur="700">
+        <p14:cube dir="r"/>
+      </p:transition>
+    </mc:Choice>
+    <mc:Fallback>
+      <p:transition spd="med">
+        <p:push dir="r"/>
+      </p:transition>
+    </mc:Fallback>
+  </mc:AlternateContent>
 </p:sld>
 </file>
 
@@ -9182,7 +10503,7 @@
                 </a:solidFill>
                 <a:latin typeface="Montserrat"/>
               </a:rPr>
-              <a:t>019 / 020</a:t>
+              <a:t>019 / 026</a:t>
             </a:r>
           </a:p>
         </p:txBody>
@@ -9250,7 +10571,7 @@
                 </a:solidFill>
                 <a:latin typeface="Montserrat"/>
               </a:rPr>
-              <a:t>CHIMENEAS</a:t>
+              <a:t>DISTANCIAS GENERALES</a:t>
             </a:r>
           </a:p>
         </p:txBody>
@@ -9284,14 +10605,14 @@
                 </a:solidFill>
                 <a:latin typeface="Montserrat"/>
               </a:rPr>
-              <a:t>Cada material, su norma</a:t>
-            </a:r>
-          </a:p>
-        </p:txBody>
-      </p:sp>
-      <p:sp>
-        <p:nvSpPr>
-          <p:cNvPr id="7" name="Rounded Rectangle 6"/>
+              <a:t>2,20 m sobre zona de personas</a:t>
+            </a:r>
+          </a:p>
+        </p:txBody>
+      </p:sp>
+      <p:sp>
+        <p:nvSpPr>
+          <p:cNvPr id="7" name="Rectangle 6"/>
           <p:cNvSpPr/>
           <p:nvPr/>
         </p:nvSpPr>
@@ -9300,7 +10621,7 @@
             <a:off x="868680" y="1627632"/>
             <a:ext cx="2011680" cy="73152"/>
           </a:xfrm>
-          <a:prstGeom prst="roundRect">
+          <a:prstGeom prst="rect">
             <a:avLst/>
           </a:prstGeom>
           <a:solidFill>
@@ -9341,8 +10662,8 @@
         </p:nvSpPr>
         <p:spPr>
           <a:xfrm>
-            <a:off x="822960" y="1965960"/>
-            <a:ext cx="4983480" cy="4206240"/>
+            <a:off x="6355080" y="1965960"/>
+            <a:ext cx="5029200" cy="4206240"/>
           </a:xfrm>
           <a:prstGeom prst="rect">
             <a:avLst/>
@@ -9376,7 +10697,7 @@
                 </a:solidFill>
                 <a:latin typeface="Montserrat"/>
               </a:rPr>
-              <a:t>Metálica: UNE-EN 1856-1</a:t>
+              <a:t>Eje a ≥ 2,20 m del suelo</a:t>
             </a:r>
           </a:p>
           <a:p>
@@ -9401,7 +10722,7 @@
                 </a:solidFill>
                 <a:latin typeface="Montserrat"/>
               </a:rPr>
-              <a:t>No metálica: NTE-ISH-74</a:t>
+              <a:t>Salvo salida a zona privada</a:t>
             </a:r>
           </a:p>
           <a:p>
@@ -9426,21 +10747,21 @@
                 </a:solidFill>
                 <a:latin typeface="Montserrat"/>
               </a:rPr>
-              <a:t>Plástico: UNE-EN 14471</a:t>
-            </a:r>
-          </a:p>
-        </p:txBody>
-      </p:sp>
-      <p:sp>
-        <p:nvSpPr>
-          <p:cNvPr id="9" name="imgph" descr="IMGQ:rooftop chimney cap terminal"/>
+              <a:t>Ventosa &lt; 4,2 kW protegida: exenta</a:t>
+            </a:r>
+          </a:p>
+        </p:txBody>
+      </p:sp>
+      <p:sp>
+        <p:nvSpPr>
+          <p:cNvPr id="9" name="imgph" descr="IMGQ:flue outlet above pedestrian passage"/>
           <p:cNvSpPr/>
           <p:nvPr/>
         </p:nvSpPr>
         <p:spPr>
           <a:xfrm>
-            <a:off x="5806440" y="1051560"/>
-            <a:ext cx="5298947" cy="4629150"/>
+            <a:off x="822960" y="1965960"/>
+            <a:ext cx="5303520" cy="4572000"/>
           </a:xfrm>
           <a:prstGeom prst="roundRect">
             <a:avLst/>
@@ -9485,8 +10806,8 @@
         </p:nvSpPr>
         <p:spPr>
           <a:xfrm>
-            <a:off x="6080760" y="2726055"/>
-            <a:ext cx="4750307" cy="1280160"/>
+            <a:off x="1097280" y="3611880"/>
+            <a:ext cx="4754880" cy="1280160"/>
           </a:xfrm>
           <a:prstGeom prst="rect">
             <a:avLst/>
@@ -9507,7 +10828,7 @@
                 </a:solidFill>
                 <a:latin typeface="Montserrat"/>
               </a:rPr>
-              <a:t>IMAGEN REALISTA</a:t>
+              <a:t>IMAGEN</a:t>
             </a:r>
           </a:p>
           <a:p>
@@ -9519,7 +10840,7 @@
                 </a:solidFill>
                 <a:latin typeface="Montserrat"/>
               </a:rPr>
-              <a:t>rooftop chimney cap terminal</a:t>
+              <a:t>flue outlet above pedestrian passage</a:t>
             </a:r>
           </a:p>
         </p:txBody>
@@ -9529,6 +10850,18 @@
   <p:clrMapOvr>
     <a:masterClrMapping/>
   </p:clrMapOvr>
+  <mc:AlternateContent xmlns:mc="http://schemas.openxmlformats.org/markup-compatibility/2006">
+    <mc:Choice xmlns:p14="http://schemas.microsoft.com/office/powerpoint/2010/main" Requires="p14">
+      <p:transition spd="med" p14:dur="700">
+        <p14:cube dir="l"/>
+      </p:transition>
+    </mc:Choice>
+    <mc:Fallback>
+      <p:transition spd="med">
+        <p:push dir="l"/>
+      </p:transition>
+    </mc:Fallback>
+  </mc:AlternateContent>
 </p:sld>
 </file>
 
@@ -9616,7 +10949,7 @@
                 </a:solidFill>
                 <a:latin typeface="Montserrat"/>
               </a:rPr>
-              <a:t>002 / 020</a:t>
+              <a:t>002 / 026</a:t>
             </a:r>
           </a:p>
         </p:txBody>
@@ -9691,7 +11024,7 @@
       </p:sp>
       <p:sp>
         <p:nvSpPr>
-          <p:cNvPr id="6" name="Rounded Rectangle 5"/>
+          <p:cNvPr id="6" name="Rectangle 5"/>
           <p:cNvSpPr/>
           <p:nvPr/>
         </p:nvSpPr>
@@ -9700,7 +11033,7 @@
             <a:off x="868680" y="1234440"/>
             <a:ext cx="1463040" cy="73152"/>
           </a:xfrm>
-          <a:prstGeom prst="roundRect">
+          <a:prstGeom prst="rect">
             <a:avLst/>
           </a:prstGeom>
           <a:solidFill>
@@ -9781,14 +11114,58 @@
       </p:sp>
       <p:sp>
         <p:nvSpPr>
-          <p:cNvPr id="8" name="TextBox 7"/>
+          <p:cNvPr id="8" name="Rectangle 7"/>
+          <p:cNvSpPr/>
+          <p:nvPr/>
+        </p:nvSpPr>
+        <p:spPr>
+          <a:xfrm>
+            <a:off x="822960" y="2011680"/>
+            <a:ext cx="3017520" cy="128016"/>
+          </a:xfrm>
+          <a:prstGeom prst="rect">
+            <a:avLst/>
+          </a:prstGeom>
+          <a:solidFill>
+            <a:srgbClr val="E8801A"/>
+          </a:solidFill>
+          <a:ln>
+            <a:noFill/>
+          </a:ln>
+          <a:effectLst/>
+        </p:spPr>
+        <p:style>
+          <a:lnRef idx="1">
+            <a:schemeClr val="accent1"/>
+          </a:lnRef>
+          <a:fillRef idx="3">
+            <a:schemeClr val="accent1"/>
+          </a:fillRef>
+          <a:effectRef idx="2">
+            <a:schemeClr val="accent1"/>
+          </a:effectRef>
+          <a:fontRef idx="minor">
+            <a:schemeClr val="lt1"/>
+          </a:fontRef>
+        </p:style>
+        <p:txBody>
+          <a:bodyPr rtlCol="0" anchor="ctr"/>
+          <a:lstStyle/>
+          <a:p>
+            <a:pPr algn="ctr"/>
+          </a:p>
+        </p:txBody>
+      </p:sp>
+      <p:sp>
+        <p:nvSpPr>
+          <p:cNvPr id="9" name="TextBox 8"/>
           <p:cNvSpPr txBox="1"/>
           <p:nvPr/>
         </p:nvSpPr>
         <p:spPr>
           <a:xfrm>
-            <a:off x="822960" y="2331720"/>
-            <a:ext cx="3017520" cy="1463040"/>
+            <a:off x="822960" y="2377440"/>
+            <a:ext cx="3017520" cy="1371600"/>
           </a:xfrm>
           <a:prstGeom prst="rect">
             <a:avLst/>
@@ -9803,7 +11180,7 @@
           <a:p>
             <a:pPr algn="ctr"/>
             <a:r>
-              <a:rPr sz="6000" b="1" i="0">
+              <a:rPr sz="5800" b="1" i="0">
                 <a:solidFill>
                   <a:srgbClr val="1E2761"/>
                 </a:solidFill>
@@ -9816,13 +11193,13 @@
       </p:sp>
       <p:sp>
         <p:nvSpPr>
-          <p:cNvPr id="9" name="TextBox 8"/>
+          <p:cNvPr id="10" name="TextBox 9"/>
           <p:cNvSpPr txBox="1"/>
           <p:nvPr/>
         </p:nvSpPr>
         <p:spPr>
           <a:xfrm>
-            <a:off x="1051560" y="3611880"/>
+            <a:off x="1051560" y="3657600"/>
             <a:ext cx="2560320" cy="1005840"/>
           </a:xfrm>
           <a:prstGeom prst="rect">
@@ -9851,7 +11228,7 @@
       </p:sp>
       <p:sp>
         <p:nvSpPr>
-          <p:cNvPr id="10" name="Rounded Rectangle 9"/>
+          <p:cNvPr id="11" name="Rounded Rectangle 10"/>
           <p:cNvSpPr/>
           <p:nvPr/>
         </p:nvSpPr>
@@ -9897,14 +11274,58 @@
       </p:sp>
       <p:sp>
         <p:nvSpPr>
-          <p:cNvPr id="11" name="TextBox 10"/>
+          <p:cNvPr id="12" name="Rectangle 11"/>
+          <p:cNvSpPr/>
+          <p:nvPr/>
+        </p:nvSpPr>
+        <p:spPr>
+          <a:xfrm>
+            <a:off x="4617720" y="2011680"/>
+            <a:ext cx="3017520" cy="128016"/>
+          </a:xfrm>
+          <a:prstGeom prst="rect">
+            <a:avLst/>
+          </a:prstGeom>
+          <a:solidFill>
+            <a:srgbClr val="E8801A"/>
+          </a:solidFill>
+          <a:ln>
+            <a:noFill/>
+          </a:ln>
+          <a:effectLst/>
+        </p:spPr>
+        <p:style>
+          <a:lnRef idx="1">
+            <a:schemeClr val="accent1"/>
+          </a:lnRef>
+          <a:fillRef idx="3">
+            <a:schemeClr val="accent1"/>
+          </a:fillRef>
+          <a:effectRef idx="2">
+            <a:schemeClr val="accent1"/>
+          </a:effectRef>
+          <a:fontRef idx="minor">
+            <a:schemeClr val="lt1"/>
+          </a:fontRef>
+        </p:style>
+        <p:txBody>
+          <a:bodyPr rtlCol="0" anchor="ctr"/>
+          <a:lstStyle/>
+          <a:p>
+            <a:pPr algn="ctr"/>
+          </a:p>
+        </p:txBody>
+      </p:sp>
+      <p:sp>
+        <p:nvSpPr>
+          <p:cNvPr id="13" name="TextBox 12"/>
           <p:cNvSpPr txBox="1"/>
           <p:nvPr/>
         </p:nvSpPr>
         <p:spPr>
           <a:xfrm>
-            <a:off x="4617720" y="2331720"/>
-            <a:ext cx="3017520" cy="1463040"/>
+            <a:off x="4617720" y="2377440"/>
+            <a:ext cx="3017520" cy="1371600"/>
           </a:xfrm>
           <a:prstGeom prst="rect">
             <a:avLst/>
@@ -9919,7 +11340,7 @@
           <a:p>
             <a:pPr algn="ctr"/>
             <a:r>
-              <a:rPr sz="6000" b="1" i="0">
+              <a:rPr sz="5800" b="1" i="0">
                 <a:solidFill>
                   <a:srgbClr val="1E2761"/>
                 </a:solidFill>
@@ -9932,13 +11353,13 @@
       </p:sp>
       <p:sp>
         <p:nvSpPr>
-          <p:cNvPr id="12" name="TextBox 11"/>
+          <p:cNvPr id="14" name="TextBox 13"/>
           <p:cNvSpPr txBox="1"/>
           <p:nvPr/>
         </p:nvSpPr>
         <p:spPr>
           <a:xfrm>
-            <a:off x="4846320" y="3611880"/>
+            <a:off x="4846320" y="3657600"/>
             <a:ext cx="2560320" cy="1005840"/>
           </a:xfrm>
           <a:prstGeom prst="rect">
@@ -9967,7 +11388,7 @@
       </p:sp>
       <p:sp>
         <p:nvSpPr>
-          <p:cNvPr id="13" name="Rounded Rectangle 12"/>
+          <p:cNvPr id="15" name="Rounded Rectangle 14"/>
           <p:cNvSpPr/>
           <p:nvPr/>
         </p:nvSpPr>
@@ -10013,14 +11434,58 @@
       </p:sp>
       <p:sp>
         <p:nvSpPr>
-          <p:cNvPr id="14" name="TextBox 13"/>
+          <p:cNvPr id="16" name="Rectangle 15"/>
+          <p:cNvSpPr/>
+          <p:nvPr/>
+        </p:nvSpPr>
+        <p:spPr>
+          <a:xfrm>
+            <a:off x="8412480" y="2011680"/>
+            <a:ext cx="3017520" cy="128016"/>
+          </a:xfrm>
+          <a:prstGeom prst="rect">
+            <a:avLst/>
+          </a:prstGeom>
+          <a:solidFill>
+            <a:srgbClr val="E8801A"/>
+          </a:solidFill>
+          <a:ln>
+            <a:noFill/>
+          </a:ln>
+          <a:effectLst/>
+        </p:spPr>
+        <p:style>
+          <a:lnRef idx="1">
+            <a:schemeClr val="accent1"/>
+          </a:lnRef>
+          <a:fillRef idx="3">
+            <a:schemeClr val="accent1"/>
+          </a:fillRef>
+          <a:effectRef idx="2">
+            <a:schemeClr val="accent1"/>
+          </a:effectRef>
+          <a:fontRef idx="minor">
+            <a:schemeClr val="lt1"/>
+          </a:fontRef>
+        </p:style>
+        <p:txBody>
+          <a:bodyPr rtlCol="0" anchor="ctr"/>
+          <a:lstStyle/>
+          <a:p>
+            <a:pPr algn="ctr"/>
+          </a:p>
+        </p:txBody>
+      </p:sp>
+      <p:sp>
+        <p:nvSpPr>
+          <p:cNvPr id="17" name="TextBox 16"/>
           <p:cNvSpPr txBox="1"/>
           <p:nvPr/>
         </p:nvSpPr>
         <p:spPr>
           <a:xfrm>
-            <a:off x="8412480" y="2331720"/>
-            <a:ext cx="3017520" cy="1463040"/>
+            <a:off x="8412480" y="2377440"/>
+            <a:ext cx="3017520" cy="1371600"/>
           </a:xfrm>
           <a:prstGeom prst="rect">
             <a:avLst/>
@@ -10035,7 +11500,7 @@
           <a:p>
             <a:pPr algn="ctr"/>
             <a:r>
-              <a:rPr sz="6000" b="1" i="0">
+              <a:rPr sz="5800" b="1" i="0">
                 <a:solidFill>
                   <a:srgbClr val="1E2761"/>
                 </a:solidFill>
@@ -10048,13 +11513,13 @@
       </p:sp>
       <p:sp>
         <p:nvSpPr>
-          <p:cNvPr id="15" name="TextBox 14"/>
+          <p:cNvPr id="18" name="TextBox 17"/>
           <p:cNvSpPr txBox="1"/>
           <p:nvPr/>
         </p:nvSpPr>
         <p:spPr>
           <a:xfrm>
-            <a:off x="8641080" y="3611880"/>
+            <a:off x="8641080" y="3657600"/>
             <a:ext cx="2560320" cy="1005840"/>
           </a:xfrm>
           <a:prstGeom prst="rect">
@@ -10086,6 +11551,18 @@
   <p:clrMapOvr>
     <a:masterClrMapping/>
   </p:clrMapOvr>
+  <mc:AlternateContent xmlns:mc="http://schemas.openxmlformats.org/markup-compatibility/2006">
+    <mc:Choice xmlns:p14="http://schemas.microsoft.com/office/powerpoint/2010/main" Requires="p14">
+      <p:transition spd="med" p14:dur="700">
+        <p14:cube dir="r"/>
+      </p:transition>
+    </mc:Choice>
+    <mc:Fallback>
+      <p:transition spd="med">
+        <p:push dir="r"/>
+      </p:transition>
+    </mc:Fallback>
+  </mc:AlternateContent>
 </p:sld>
 </file>
 
@@ -10114,7 +11591,7 @@
             <a:avLst/>
           </a:prstGeom>
           <a:solidFill>
-            <a:srgbClr val="1E2761"/>
+            <a:srgbClr val="FFFFFF"/>
           </a:solidFill>
           <a:ln>
             <a:noFill/>
@@ -10151,8 +11628,8 @@
         </p:nvSpPr>
         <p:spPr>
           <a:xfrm>
-            <a:off x="822960" y="640080"/>
-            <a:ext cx="10515600" cy="457200"/>
+            <a:off x="10607040" y="320040"/>
+            <a:ext cx="1371600" cy="365760"/>
           </a:xfrm>
           <a:prstGeom prst="rect">
             <a:avLst/>
@@ -10165,30 +11642,133 @@
           </a:bodyPr>
           <a:lstStyle/>
           <a:p>
-            <a:r>
-              <a:rPr sz="1400" b="1" i="0">
-                <a:solidFill>
-                  <a:srgbClr val="F4A24C"/>
-                </a:solidFill>
-                <a:latin typeface="Montserrat"/>
-              </a:rPr>
-              <a:t>LO QUE YA DOMINAS</a:t>
-            </a:r>
-          </a:p>
-        </p:txBody>
-      </p:sp>
-      <p:sp>
-        <p:nvSpPr>
-          <p:cNvPr id="4" name="Rounded Rectangle 3"/>
+            <a:pPr algn="r"/>
+            <a:r>
+              <a:rPr sz="1000" b="1" i="0">
+                <a:solidFill>
+                  <a:srgbClr val="64748B"/>
+                </a:solidFill>
+                <a:latin typeface="Montserrat"/>
+              </a:rPr>
+              <a:t>020 / 026</a:t>
+            </a:r>
+          </a:p>
+        </p:txBody>
+      </p:sp>
+      <p:sp>
+        <p:nvSpPr>
+          <p:cNvPr id="4" name="TextBox 3"/>
+          <p:cNvSpPr txBox="1"/>
+          <p:nvPr/>
+        </p:nvSpPr>
+        <p:spPr>
+          <a:xfrm>
+            <a:off x="457200" y="6419088"/>
+            <a:ext cx="8229600" cy="365760"/>
+          </a:xfrm>
+          <a:prstGeom prst="rect">
+            <a:avLst/>
+          </a:prstGeom>
+          <a:noFill/>
+        </p:spPr>
+        <p:txBody>
+          <a:bodyPr wrap="square">
+            <a:spAutoFit/>
+          </a:bodyPr>
+          <a:lstStyle/>
+          <a:p>
+            <a:r>
+              <a:rPr sz="900" b="0" i="0">
+                <a:solidFill>
+                  <a:srgbClr val="64748B"/>
+                </a:solidFill>
+                <a:latin typeface="Montserrat"/>
+              </a:rPr>
+              <a:t>Curso Gas B · Tema 13 · UNE 60670-6</a:t>
+            </a:r>
+          </a:p>
+        </p:txBody>
+      </p:sp>
+      <p:sp>
+        <p:nvSpPr>
+          <p:cNvPr id="5" name="TextBox 4"/>
+          <p:cNvSpPr txBox="1"/>
+          <p:nvPr/>
+        </p:nvSpPr>
+        <p:spPr>
+          <a:xfrm>
+            <a:off x="822960" y="457200"/>
+            <a:ext cx="10058400" cy="365760"/>
+          </a:xfrm>
+          <a:prstGeom prst="rect">
+            <a:avLst/>
+          </a:prstGeom>
+          <a:noFill/>
+        </p:spPr>
+        <p:txBody>
+          <a:bodyPr wrap="square">
+            <a:spAutoFit/>
+          </a:bodyPr>
+          <a:lstStyle/>
+          <a:p>
+            <a:r>
+              <a:rPr sz="1300" b="1" i="0">
+                <a:solidFill>
+                  <a:srgbClr val="E8801A"/>
+                </a:solidFill>
+                <a:latin typeface="Montserrat"/>
+              </a:rPr>
+              <a:t>DISTANCIAS GENERALES</a:t>
+            </a:r>
+          </a:p>
+        </p:txBody>
+      </p:sp>
+      <p:sp>
+        <p:nvSpPr>
+          <p:cNvPr id="6" name="TextBox 5"/>
+          <p:cNvSpPr txBox="1"/>
+          <p:nvPr/>
+        </p:nvSpPr>
+        <p:spPr>
+          <a:xfrm>
+            <a:off x="822960" y="868680"/>
+            <a:ext cx="10515600" cy="914400"/>
+          </a:xfrm>
+          <a:prstGeom prst="rect">
+            <a:avLst/>
+          </a:prstGeom>
+          <a:noFill/>
+        </p:spPr>
+        <p:txBody>
+          <a:bodyPr wrap="square">
+            <a:spAutoFit/>
+          </a:bodyPr>
+          <a:lstStyle/>
+          <a:p>
+            <a:r>
+              <a:rPr sz="2800" b="1" i="0">
+                <a:solidFill>
+                  <a:srgbClr val="1E2761"/>
+                </a:solidFill>
+                <a:latin typeface="Montserrat"/>
+              </a:rPr>
+              <a:t>Distancias de fachada, con y sin deflector</a:t>
+            </a:r>
+          </a:p>
+        </p:txBody>
+      </p:sp>
+      <p:sp>
+        <p:nvSpPr>
+          <p:cNvPr id="7" name="Rectangle 6"/>
           <p:cNvSpPr/>
           <p:nvPr/>
         </p:nvSpPr>
         <p:spPr>
           <a:xfrm>
-            <a:off x="868680" y="1051560"/>
-            <a:ext cx="1463040" cy="82296"/>
-          </a:xfrm>
-          <a:prstGeom prst="roundRect">
+            <a:off x="868680" y="1627632"/>
+            <a:ext cx="2011680" cy="73152"/>
+          </a:xfrm>
+          <a:prstGeom prst="rect">
             <a:avLst/>
           </a:prstGeom>
           <a:solidFill>
@@ -10223,14 +11803,14 @@
       </p:sp>
       <p:sp>
         <p:nvSpPr>
-          <p:cNvPr id="5" name="TextBox 4"/>
+          <p:cNvPr id="8" name="TextBox 7"/>
           <p:cNvSpPr txBox="1"/>
           <p:nvPr/>
         </p:nvSpPr>
         <p:spPr>
           <a:xfrm>
-            <a:off x="822960" y="1234440"/>
-            <a:ext cx="10515600" cy="1097280"/>
+            <a:off x="822960" y="1965960"/>
+            <a:ext cx="5029200" cy="4206240"/>
           </a:xfrm>
           <a:prstGeom prst="rect">
             <a:avLst/>
@@ -10243,28 +11823,138 @@
           </a:bodyPr>
           <a:lstStyle/>
           <a:p>
-            <a:r>
-              <a:rPr sz="3400" b="1" i="0">
-                <a:solidFill>
-                  <a:srgbClr val="FFFFFF"/>
-                </a:solidFill>
-                <a:latin typeface="Montserrat"/>
-              </a:rPr>
-              <a:t>Ya sacas los humos de casa con seguridad</a:t>
-            </a:r>
-          </a:p>
-        </p:txBody>
-      </p:sp>
-      <p:sp>
-        <p:nvSpPr>
-          <p:cNvPr id="6" name="TextBox 5"/>
+            <a:pPr>
+              <a:spcAft>
+                <a:spcPts val="1100"/>
+              </a:spcAft>
+            </a:pPr>
+            <a:r>
+              <a:rPr sz="1600" b="1" i="0">
+                <a:solidFill>
+                  <a:srgbClr val="E8801A"/>
+                </a:solidFill>
+                <a:latin typeface="Montserrat"/>
+              </a:rPr>
+              <a:t>▸  </a:t>
+            </a:r>
+            <a:r>
+              <a:rPr sz="1600" b="0" i="0">
+                <a:solidFill>
+                  <a:srgbClr val="1B2330"/>
+                </a:solidFill>
+                <a:latin typeface="Montserrat"/>
+              </a:rPr>
+              <a:t>Laterales: 30 cm / 1 m</a:t>
+            </a:r>
+          </a:p>
+          <a:p>
+            <a:pPr>
+              <a:spcAft>
+                <a:spcPts val="1100"/>
+              </a:spcAft>
+            </a:pPr>
+            <a:r>
+              <a:rPr sz="1600" b="1" i="0">
+                <a:solidFill>
+                  <a:srgbClr val="E8801A"/>
+                </a:solidFill>
+                <a:latin typeface="Montserrat"/>
+              </a:rPr>
+              <a:t>▸  </a:t>
+            </a:r>
+            <a:r>
+              <a:rPr sz="1600" b="0" i="0">
+                <a:solidFill>
+                  <a:srgbClr val="1B2330"/>
+                </a:solidFill>
+                <a:latin typeface="Montserrat"/>
+              </a:rPr>
+              <a:t>Frontales: 2 m / 3 m</a:t>
+            </a:r>
+          </a:p>
+          <a:p>
+            <a:pPr>
+              <a:spcAft>
+                <a:spcPts val="1100"/>
+              </a:spcAft>
+            </a:pPr>
+            <a:r>
+              <a:rPr sz="1600" b="1" i="0">
+                <a:solidFill>
+                  <a:srgbClr val="E8801A"/>
+                </a:solidFill>
+                <a:latin typeface="Montserrat"/>
+              </a:rPr>
+              <a:t>▸  </a:t>
+            </a:r>
+            <a:r>
+              <a:rPr sz="1600" b="0" i="0">
+                <a:solidFill>
+                  <a:srgbClr val="1B2330"/>
+                </a:solidFill>
+                <a:latin typeface="Montserrat"/>
+              </a:rPr>
+              <a:t>Entre dos salidas: 60 cm (30 con deflector)</a:t>
+            </a:r>
+          </a:p>
+        </p:txBody>
+      </p:sp>
+      <p:sp>
+        <p:nvSpPr>
+          <p:cNvPr id="9" name="imgph" descr="IMGQ:two flue terminals on facade"/>
+          <p:cNvSpPr/>
+          <p:nvPr/>
+        </p:nvSpPr>
+        <p:spPr>
+          <a:xfrm>
+            <a:off x="6080760" y="1965960"/>
+            <a:ext cx="5303520" cy="4572000"/>
+          </a:xfrm>
+          <a:prstGeom prst="roundRect">
+            <a:avLst/>
+          </a:prstGeom>
+          <a:solidFill>
+            <a:srgbClr val="F3F6FB"/>
+          </a:solidFill>
+          <a:ln w="12700">
+            <a:solidFill>
+              <a:srgbClr val="C7D2E6"/>
+            </a:solidFill>
+          </a:ln>
+          <a:effectLst/>
+        </p:spPr>
+        <p:style>
+          <a:lnRef idx="1">
+            <a:schemeClr val="accent1"/>
+          </a:lnRef>
+          <a:fillRef idx="3">
+            <a:schemeClr val="accent1"/>
+          </a:fillRef>
+          <a:effectRef idx="2">
+            <a:schemeClr val="accent1"/>
+          </a:effectRef>
+          <a:fontRef idx="minor">
+            <a:schemeClr val="lt1"/>
+          </a:fontRef>
+        </p:style>
+        <p:txBody>
+          <a:bodyPr rtlCol="0" anchor="ctr"/>
+          <a:lstStyle/>
+          <a:p>
+            <a:pPr algn="ctr"/>
+          </a:p>
+        </p:txBody>
+      </p:sp>
+      <p:sp>
+        <p:nvSpPr>
+          <p:cNvPr id="10" name="TextBox 9"/>
           <p:cNvSpPr txBox="1"/>
           <p:nvPr/>
         </p:nvSpPr>
         <p:spPr>
           <a:xfrm>
-            <a:off x="822960" y="2606040"/>
-            <a:ext cx="10515600" cy="2743200"/>
+            <a:off x="6355080" y="3611880"/>
+            <a:ext cx="4754880" cy="1280160"/>
           </a:xfrm>
           <a:prstGeom prst="rect">
             <a:avLst/>
@@ -10277,119 +11967,254 @@
           </a:bodyPr>
           <a:lstStyle/>
           <a:p>
-            <a:pPr>
-              <a:spcAft>
-                <a:spcPts val="1200"/>
-              </a:spcAft>
-            </a:pPr>
-            <a:r>
-              <a:rPr sz="2000" b="1" i="0">
-                <a:solidFill>
-                  <a:srgbClr val="F4A24C"/>
-                </a:solidFill>
-                <a:latin typeface="Montserrat"/>
-              </a:rPr>
-              <a:t>✓  </a:t>
-            </a:r>
-            <a:r>
-              <a:rPr sz="1900" b="0" i="0">
-                <a:solidFill>
-                  <a:srgbClr val="FFFFFF"/>
-                </a:solidFill>
-                <a:latin typeface="Montserrat"/>
-              </a:rPr>
-              <a:t>Solo B y C evacúan; conducto liso, estanco y con orificio de 11 mm</a:t>
-            </a:r>
-          </a:p>
-          <a:p>
-            <a:pPr>
-              <a:spcAft>
-                <a:spcPts val="1200"/>
-              </a:spcAft>
-            </a:pPr>
-            <a:r>
-              <a:rPr sz="2000" b="1" i="0">
-                <a:solidFill>
-                  <a:srgbClr val="F4A24C"/>
-                </a:solidFill>
-                <a:latin typeface="Montserrat"/>
-              </a:rPr>
-              <a:t>✓  </a:t>
-            </a:r>
-            <a:r>
-              <a:rPr sz="1900" b="0" i="0">
-                <a:solidFill>
-                  <a:srgbClr val="FFFFFF"/>
-                </a:solidFill>
-                <a:latin typeface="Montserrat"/>
-              </a:rPr>
-              <a:t>Tiro natural: diámetro por tabla y puntuación ≥ +1</a:t>
-            </a:r>
-          </a:p>
-          <a:p>
-            <a:pPr>
-              <a:spcAft>
-                <a:spcPts val="1200"/>
-              </a:spcAft>
-            </a:pPr>
-            <a:r>
-              <a:rPr sz="2000" b="1" i="0">
-                <a:solidFill>
-                  <a:srgbClr val="F4A24C"/>
-                </a:solidFill>
-                <a:latin typeface="Montserrat"/>
-              </a:rPr>
-              <a:t>✓  </a:t>
-            </a:r>
-            <a:r>
-              <a:rPr sz="1900" b="0" i="0">
-                <a:solidFill>
-                  <a:srgbClr val="FFFFFF"/>
-                </a:solidFill>
-                <a:latin typeface="Montserrat"/>
-              </a:rPr>
-              <a:t>Ventosa: todo del fabricante y el 40 cm a ventanas</a:t>
-            </a:r>
-          </a:p>
-          <a:p>
-            <a:pPr>
-              <a:spcAft>
-                <a:spcPts val="1200"/>
-              </a:spcAft>
-            </a:pPr>
-            <a:r>
-              <a:rPr sz="2000" b="1" i="0">
-                <a:solidFill>
-                  <a:srgbClr val="F4A24C"/>
-                </a:solidFill>
-                <a:latin typeface="Montserrat"/>
-              </a:rPr>
-              <a:t>✓  </a:t>
-            </a:r>
-            <a:r>
-              <a:rPr sz="1900" b="0" i="0">
-                <a:solidFill>
-                  <a:srgbClr val="FFFFFF"/>
-                </a:solidFill>
-                <a:latin typeface="Montserrat"/>
-              </a:rPr>
-              <a:t>La lista de «no mezclar» en una misma chimenea</a:t>
-            </a:r>
-          </a:p>
-        </p:txBody>
-      </p:sp>
-      <p:sp>
-        <p:nvSpPr>
-          <p:cNvPr id="7" name="Rounded Rectangle 6"/>
+            <a:pPr algn="ctr"/>
+            <a:r>
+              <a:rPr sz="1400" b="1" i="0">
+                <a:solidFill>
+                  <a:srgbClr val="64748B"/>
+                </a:solidFill>
+                <a:latin typeface="Montserrat"/>
+              </a:rPr>
+              <a:t>IMAGEN</a:t>
+            </a:r>
+          </a:p>
+          <a:p>
+            <a:pPr algn="ctr"/>
+            <a:r>
+              <a:rPr sz="1100" b="0" i="1">
+                <a:solidFill>
+                  <a:srgbClr val="64748B"/>
+                </a:solidFill>
+                <a:latin typeface="Montserrat"/>
+              </a:rPr>
+              <a:t>two flue terminals on facade</a:t>
+            </a:r>
+          </a:p>
+        </p:txBody>
+      </p:sp>
+    </p:spTree>
+  </p:cSld>
+  <p:clrMapOvr>
+    <a:masterClrMapping/>
+  </p:clrMapOvr>
+  <mc:AlternateContent xmlns:mc="http://schemas.openxmlformats.org/markup-compatibility/2006">
+    <mc:Choice xmlns:p14="http://schemas.microsoft.com/office/powerpoint/2010/main" Requires="p14">
+      <p:transition spd="med" p14:dur="700">
+        <p14:cube dir="r"/>
+      </p:transition>
+    </mc:Choice>
+    <mc:Fallback>
+      <p:transition spd="med">
+        <p:push dir="r"/>
+      </p:transition>
+    </mc:Fallback>
+  </mc:AlternateContent>
+</p:sld>
+</file>
+
+<file path=ppt/slides/slide21.xml><?xml version="1.0" encoding="utf-8"?>
+<p:sld xmlns:a="http://schemas.openxmlformats.org/drawingml/2006/main" xmlns:p="http://schemas.openxmlformats.org/presentationml/2006/main" xmlns:r="http://schemas.openxmlformats.org/officeDocument/2006/relationships">
+  <p:cSld>
+    <p:spTree>
+      <p:nvGrpSpPr>
+        <p:cNvPr id="1" name=""/>
+        <p:cNvGrpSpPr/>
+        <p:nvPr/>
+      </p:nvGrpSpPr>
+      <p:grpSpPr/>
+      <p:sp>
+        <p:nvSpPr>
+          <p:cNvPr id="2" name="Rectangle 1"/>
           <p:cNvSpPr/>
           <p:nvPr/>
         </p:nvSpPr>
         <p:spPr>
           <a:xfrm>
-            <a:off x="822960" y="5532120"/>
-            <a:ext cx="10515600" cy="822960"/>
-          </a:xfrm>
-          <a:prstGeom prst="roundRect">
+            <a:off x="0" y="0"/>
+            <a:ext cx="12191695" cy="6858000"/>
+          </a:xfrm>
+          <a:prstGeom prst="rect">
+            <a:avLst/>
+          </a:prstGeom>
+          <a:solidFill>
+            <a:srgbClr val="FFFFFF"/>
+          </a:solidFill>
+          <a:ln>
+            <a:noFill/>
+          </a:ln>
+          <a:effectLst/>
+        </p:spPr>
+        <p:style>
+          <a:lnRef idx="1">
+            <a:schemeClr val="accent1"/>
+          </a:lnRef>
+          <a:fillRef idx="3">
+            <a:schemeClr val="accent1"/>
+          </a:fillRef>
+          <a:effectRef idx="2">
+            <a:schemeClr val="accent1"/>
+          </a:effectRef>
+          <a:fontRef idx="minor">
+            <a:schemeClr val="lt1"/>
+          </a:fontRef>
+        </p:style>
+        <p:txBody>
+          <a:bodyPr rtlCol="0" anchor="ctr"/>
+          <a:lstStyle/>
+          <a:p>
+            <a:pPr algn="ctr"/>
+          </a:p>
+        </p:txBody>
+      </p:sp>
+      <p:sp>
+        <p:nvSpPr>
+          <p:cNvPr id="3" name="TextBox 2"/>
+          <p:cNvSpPr txBox="1"/>
+          <p:nvPr/>
+        </p:nvSpPr>
+        <p:spPr>
+          <a:xfrm>
+            <a:off x="10607040" y="320040"/>
+            <a:ext cx="1371600" cy="365760"/>
+          </a:xfrm>
+          <a:prstGeom prst="rect">
+            <a:avLst/>
+          </a:prstGeom>
+          <a:noFill/>
+        </p:spPr>
+        <p:txBody>
+          <a:bodyPr wrap="square">
+            <a:spAutoFit/>
+          </a:bodyPr>
+          <a:lstStyle/>
+          <a:p>
+            <a:pPr algn="r"/>
+            <a:r>
+              <a:rPr sz="1000" b="1" i="0">
+                <a:solidFill>
+                  <a:srgbClr val="64748B"/>
+                </a:solidFill>
+                <a:latin typeface="Montserrat"/>
+              </a:rPr>
+              <a:t>021 / 026</a:t>
+            </a:r>
+          </a:p>
+        </p:txBody>
+      </p:sp>
+      <p:sp>
+        <p:nvSpPr>
+          <p:cNvPr id="4" name="TextBox 3"/>
+          <p:cNvSpPr txBox="1"/>
+          <p:nvPr/>
+        </p:nvSpPr>
+        <p:spPr>
+          <a:xfrm>
+            <a:off x="457200" y="6419088"/>
+            <a:ext cx="8229600" cy="365760"/>
+          </a:xfrm>
+          <a:prstGeom prst="rect">
+            <a:avLst/>
+          </a:prstGeom>
+          <a:noFill/>
+        </p:spPr>
+        <p:txBody>
+          <a:bodyPr wrap="square">
+            <a:spAutoFit/>
+          </a:bodyPr>
+          <a:lstStyle/>
+          <a:p>
+            <a:r>
+              <a:rPr sz="900" b="0" i="0">
+                <a:solidFill>
+                  <a:srgbClr val="64748B"/>
+                </a:solidFill>
+                <a:latin typeface="Montserrat"/>
+              </a:rPr>
+              <a:t>Curso Gas B · Tema 13 · UNE 60670-6</a:t>
+            </a:r>
+          </a:p>
+        </p:txBody>
+      </p:sp>
+      <p:sp>
+        <p:nvSpPr>
+          <p:cNvPr id="5" name="TextBox 4"/>
+          <p:cNvSpPr txBox="1"/>
+          <p:nvPr/>
+        </p:nvSpPr>
+        <p:spPr>
+          <a:xfrm>
+            <a:off x="822960" y="457200"/>
+            <a:ext cx="10058400" cy="365760"/>
+          </a:xfrm>
+          <a:prstGeom prst="rect">
+            <a:avLst/>
+          </a:prstGeom>
+          <a:noFill/>
+        </p:spPr>
+        <p:txBody>
+          <a:bodyPr wrap="square">
+            <a:spAutoFit/>
+          </a:bodyPr>
+          <a:lstStyle/>
+          <a:p>
+            <a:r>
+              <a:rPr sz="1300" b="1" i="0">
+                <a:solidFill>
+                  <a:srgbClr val="E8801A"/>
+                </a:solidFill>
+                <a:latin typeface="Montserrat"/>
+              </a:rPr>
+              <a:t>REQUISITOS ADICIONALES</a:t>
+            </a:r>
+          </a:p>
+        </p:txBody>
+      </p:sp>
+      <p:sp>
+        <p:nvSpPr>
+          <p:cNvPr id="6" name="TextBox 5"/>
+          <p:cNvSpPr txBox="1"/>
+          <p:nvPr/>
+        </p:nvSpPr>
+        <p:spPr>
+          <a:xfrm>
+            <a:off x="822960" y="868680"/>
+            <a:ext cx="10515600" cy="914400"/>
+          </a:xfrm>
+          <a:prstGeom prst="rect">
+            <a:avLst/>
+          </a:prstGeom>
+          <a:noFill/>
+        </p:spPr>
+        <p:txBody>
+          <a:bodyPr wrap="square">
+            <a:spAutoFit/>
+          </a:bodyPr>
+          <a:lstStyle/>
+          <a:p>
+            <a:r>
+              <a:rPr sz="2800" b="1" i="0">
+                <a:solidFill>
+                  <a:srgbClr val="1E2761"/>
+                </a:solidFill>
+                <a:latin typeface="Montserrat"/>
+              </a:rPr>
+              <a:t>La lista de «no mezclar»</a:t>
+            </a:r>
+          </a:p>
+        </p:txBody>
+      </p:sp>
+      <p:sp>
+        <p:nvSpPr>
+          <p:cNvPr id="7" name="Rectangle 6"/>
+          <p:cNvSpPr/>
+          <p:nvPr/>
+        </p:nvSpPr>
+        <p:spPr>
+          <a:xfrm>
+            <a:off x="868680" y="1627632"/>
+            <a:ext cx="2011680" cy="73152"/>
+          </a:xfrm>
+          <a:prstGeom prst="rect">
             <a:avLst/>
           </a:prstGeom>
           <a:solidFill>
@@ -10430,8 +12255,8 @@
         </p:nvSpPr>
         <p:spPr>
           <a:xfrm>
-            <a:off x="1051560" y="5623560"/>
-            <a:ext cx="10058400" cy="640080"/>
+            <a:off x="6355080" y="1965960"/>
+            <a:ext cx="5029200" cy="4206240"/>
           </a:xfrm>
           <a:prstGeom prst="rect">
             <a:avLst/>
@@ -10444,14 +12269,196 @@
           </a:bodyPr>
           <a:lstStyle/>
           <a:p>
-            <a:r>
-              <a:rPr sz="1500" b="1" i="1">
-                <a:solidFill>
-                  <a:srgbClr val="1E2761"/>
-                </a:solidFill>
-                <a:latin typeface="Montserrat"/>
-              </a:rPr>
-              <a:t>Una evacuación bien resuelta es lo que firma tu boletín y cierra el tema. ¡Enhorabuena!</a:t>
+            <a:pPr>
+              <a:spcAft>
+                <a:spcPts val="1100"/>
+              </a:spcAft>
+            </a:pPr>
+            <a:r>
+              <a:rPr sz="1600" b="1" i="0">
+                <a:solidFill>
+                  <a:srgbClr val="E8801A"/>
+                </a:solidFill>
+                <a:latin typeface="Montserrat"/>
+              </a:rPr>
+              <a:t>▸  </a:t>
+            </a:r>
+            <a:r>
+              <a:rPr sz="1600" b="0" i="0">
+                <a:solidFill>
+                  <a:srgbClr val="1B2330"/>
+                </a:solidFill>
+                <a:latin typeface="Montserrat"/>
+              </a:rPr>
+              <a:t>Tiro natural con tiro forzado: no</a:t>
+            </a:r>
+          </a:p>
+          <a:p>
+            <a:pPr>
+              <a:spcAft>
+                <a:spcPts val="1100"/>
+              </a:spcAft>
+            </a:pPr>
+            <a:r>
+              <a:rPr sz="1600" b="1" i="0">
+                <a:solidFill>
+                  <a:srgbClr val="E8801A"/>
+                </a:solidFill>
+                <a:latin typeface="Montserrat"/>
+              </a:rPr>
+              <a:t>▸  </a:t>
+            </a:r>
+            <a:r>
+              <a:rPr sz="1600" b="0" i="0">
+                <a:solidFill>
+                  <a:srgbClr val="1B2330"/>
+                </a:solidFill>
+                <a:latin typeface="Montserrat"/>
+              </a:rPr>
+              <a:t>Condensación con no condensación: no</a:t>
+            </a:r>
+          </a:p>
+          <a:p>
+            <a:pPr>
+              <a:spcAft>
+                <a:spcPts val="1100"/>
+              </a:spcAft>
+            </a:pPr>
+            <a:r>
+              <a:rPr sz="1600" b="1" i="0">
+                <a:solidFill>
+                  <a:srgbClr val="E8801A"/>
+                </a:solidFill>
+                <a:latin typeface="Montserrat"/>
+              </a:rPr>
+              <a:t>▸  </a:t>
+            </a:r>
+            <a:r>
+              <a:rPr sz="1600" b="0" i="0">
+                <a:solidFill>
+                  <a:srgbClr val="1B2330"/>
+                </a:solidFill>
+                <a:latin typeface="Montserrat"/>
+              </a:rPr>
+              <a:t>Extractores y campanas: no</a:t>
+            </a:r>
+          </a:p>
+          <a:p>
+            <a:pPr>
+              <a:spcAft>
+                <a:spcPts val="1100"/>
+              </a:spcAft>
+            </a:pPr>
+            <a:r>
+              <a:rPr sz="1600" b="1" i="0">
+                <a:solidFill>
+                  <a:srgbClr val="E8801A"/>
+                </a:solidFill>
+                <a:latin typeface="Montserrat"/>
+              </a:rPr>
+              <a:t>▸  </a:t>
+            </a:r>
+            <a:r>
+              <a:rPr sz="1600" b="0" i="0">
+                <a:solidFill>
+                  <a:srgbClr val="1B2330"/>
+                </a:solidFill>
+                <a:latin typeface="Montserrat"/>
+              </a:rPr>
+              <a:t>Gas con sólidos o líquidos: no</a:t>
+            </a:r>
+          </a:p>
+        </p:txBody>
+      </p:sp>
+      <p:sp>
+        <p:nvSpPr>
+          <p:cNvPr id="9" name="imgph" descr="IMGQ:multiple flue pipes shared chimney"/>
+          <p:cNvSpPr/>
+          <p:nvPr/>
+        </p:nvSpPr>
+        <p:spPr>
+          <a:xfrm>
+            <a:off x="822960" y="1965960"/>
+            <a:ext cx="5303520" cy="4572000"/>
+          </a:xfrm>
+          <a:prstGeom prst="roundRect">
+            <a:avLst/>
+          </a:prstGeom>
+          <a:solidFill>
+            <a:srgbClr val="F3F6FB"/>
+          </a:solidFill>
+          <a:ln w="12700">
+            <a:solidFill>
+              <a:srgbClr val="C7D2E6"/>
+            </a:solidFill>
+          </a:ln>
+          <a:effectLst/>
+        </p:spPr>
+        <p:style>
+          <a:lnRef idx="1">
+            <a:schemeClr val="accent1"/>
+          </a:lnRef>
+          <a:fillRef idx="3">
+            <a:schemeClr val="accent1"/>
+          </a:fillRef>
+          <a:effectRef idx="2">
+            <a:schemeClr val="accent1"/>
+          </a:effectRef>
+          <a:fontRef idx="minor">
+            <a:schemeClr val="lt1"/>
+          </a:fontRef>
+        </p:style>
+        <p:txBody>
+          <a:bodyPr rtlCol="0" anchor="ctr"/>
+          <a:lstStyle/>
+          <a:p>
+            <a:pPr algn="ctr"/>
+          </a:p>
+        </p:txBody>
+      </p:sp>
+      <p:sp>
+        <p:nvSpPr>
+          <p:cNvPr id="10" name="TextBox 9"/>
+          <p:cNvSpPr txBox="1"/>
+          <p:nvPr/>
+        </p:nvSpPr>
+        <p:spPr>
+          <a:xfrm>
+            <a:off x="1097280" y="3611880"/>
+            <a:ext cx="4754880" cy="1280160"/>
+          </a:xfrm>
+          <a:prstGeom prst="rect">
+            <a:avLst/>
+          </a:prstGeom>
+          <a:noFill/>
+        </p:spPr>
+        <p:txBody>
+          <a:bodyPr wrap="square">
+            <a:spAutoFit/>
+          </a:bodyPr>
+          <a:lstStyle/>
+          <a:p>
+            <a:pPr algn="ctr"/>
+            <a:r>
+              <a:rPr sz="1400" b="1" i="0">
+                <a:solidFill>
+                  <a:srgbClr val="64748B"/>
+                </a:solidFill>
+                <a:latin typeface="Montserrat"/>
+              </a:rPr>
+              <a:t>IMAGEN</a:t>
+            </a:r>
+          </a:p>
+          <a:p>
+            <a:pPr algn="ctr"/>
+            <a:r>
+              <a:rPr sz="1100" b="0" i="1">
+                <a:solidFill>
+                  <a:srgbClr val="64748B"/>
+                </a:solidFill>
+                <a:latin typeface="Montserrat"/>
+              </a:rPr>
+              <a:t>multiple flue pipes shared chimney</a:t>
             </a:r>
           </a:p>
         </p:txBody>
@@ -10461,6 +12468,2575 @@
   <p:clrMapOvr>
     <a:masterClrMapping/>
   </p:clrMapOvr>
+  <mc:AlternateContent xmlns:mc="http://schemas.openxmlformats.org/markup-compatibility/2006">
+    <mc:Choice xmlns:p14="http://schemas.microsoft.com/office/powerpoint/2010/main" Requires="p14">
+      <p:transition spd="med" p14:dur="700">
+        <p14:cube dir="l"/>
+      </p:transition>
+    </mc:Choice>
+    <mc:Fallback>
+      <p:transition spd="med">
+        <p:push dir="l"/>
+      </p:transition>
+    </mc:Fallback>
+  </mc:AlternateContent>
+</p:sld>
+</file>
+
+<file path=ppt/slides/slide22.xml><?xml version="1.0" encoding="utf-8"?>
+<p:sld xmlns:a="http://schemas.openxmlformats.org/drawingml/2006/main" xmlns:p="http://schemas.openxmlformats.org/presentationml/2006/main" xmlns:r="http://schemas.openxmlformats.org/officeDocument/2006/relationships">
+  <p:cSld>
+    <p:spTree>
+      <p:nvGrpSpPr>
+        <p:cNvPr id="1" name=""/>
+        <p:cNvGrpSpPr/>
+        <p:nvPr/>
+      </p:nvGrpSpPr>
+      <p:grpSpPr/>
+      <p:sp>
+        <p:nvSpPr>
+          <p:cNvPr id="2" name="Rectangle 1"/>
+          <p:cNvSpPr/>
+          <p:nvPr/>
+        </p:nvSpPr>
+        <p:spPr>
+          <a:xfrm>
+            <a:off x="0" y="0"/>
+            <a:ext cx="12191695" cy="6858000"/>
+          </a:xfrm>
+          <a:prstGeom prst="rect">
+            <a:avLst/>
+          </a:prstGeom>
+          <a:solidFill>
+            <a:srgbClr val="FFFFFF"/>
+          </a:solidFill>
+          <a:ln>
+            <a:noFill/>
+          </a:ln>
+          <a:effectLst/>
+        </p:spPr>
+        <p:style>
+          <a:lnRef idx="1">
+            <a:schemeClr val="accent1"/>
+          </a:lnRef>
+          <a:fillRef idx="3">
+            <a:schemeClr val="accent1"/>
+          </a:fillRef>
+          <a:effectRef idx="2">
+            <a:schemeClr val="accent1"/>
+          </a:effectRef>
+          <a:fontRef idx="minor">
+            <a:schemeClr val="lt1"/>
+          </a:fontRef>
+        </p:style>
+        <p:txBody>
+          <a:bodyPr rtlCol="0" anchor="ctr"/>
+          <a:lstStyle/>
+          <a:p>
+            <a:pPr algn="ctr"/>
+          </a:p>
+        </p:txBody>
+      </p:sp>
+      <p:sp>
+        <p:nvSpPr>
+          <p:cNvPr id="3" name="TextBox 2"/>
+          <p:cNvSpPr txBox="1"/>
+          <p:nvPr/>
+        </p:nvSpPr>
+        <p:spPr>
+          <a:xfrm>
+            <a:off x="10607040" y="320040"/>
+            <a:ext cx="1371600" cy="365760"/>
+          </a:xfrm>
+          <a:prstGeom prst="rect">
+            <a:avLst/>
+          </a:prstGeom>
+          <a:noFill/>
+        </p:spPr>
+        <p:txBody>
+          <a:bodyPr wrap="square">
+            <a:spAutoFit/>
+          </a:bodyPr>
+          <a:lstStyle/>
+          <a:p>
+            <a:pPr algn="r"/>
+            <a:r>
+              <a:rPr sz="1000" b="1" i="0">
+                <a:solidFill>
+                  <a:srgbClr val="64748B"/>
+                </a:solidFill>
+                <a:latin typeface="Montserrat"/>
+              </a:rPr>
+              <a:t>022 / 026</a:t>
+            </a:r>
+          </a:p>
+        </p:txBody>
+      </p:sp>
+      <p:sp>
+        <p:nvSpPr>
+          <p:cNvPr id="4" name="TextBox 3"/>
+          <p:cNvSpPr txBox="1"/>
+          <p:nvPr/>
+        </p:nvSpPr>
+        <p:spPr>
+          <a:xfrm>
+            <a:off x="457200" y="6419088"/>
+            <a:ext cx="8229600" cy="365760"/>
+          </a:xfrm>
+          <a:prstGeom prst="rect">
+            <a:avLst/>
+          </a:prstGeom>
+          <a:noFill/>
+        </p:spPr>
+        <p:txBody>
+          <a:bodyPr wrap="square">
+            <a:spAutoFit/>
+          </a:bodyPr>
+          <a:lstStyle/>
+          <a:p>
+            <a:r>
+              <a:rPr sz="900" b="0" i="0">
+                <a:solidFill>
+                  <a:srgbClr val="64748B"/>
+                </a:solidFill>
+                <a:latin typeface="Montserrat"/>
+              </a:rPr>
+              <a:t>Curso Gas B · Tema 13 · UNE 60670-6</a:t>
+            </a:r>
+          </a:p>
+        </p:txBody>
+      </p:sp>
+      <p:sp>
+        <p:nvSpPr>
+          <p:cNvPr id="5" name="Rectangle 4"/>
+          <p:cNvSpPr/>
+          <p:nvPr/>
+        </p:nvSpPr>
+        <p:spPr>
+          <a:xfrm>
+            <a:off x="0" y="0"/>
+            <a:ext cx="12191695" cy="1143000"/>
+          </a:xfrm>
+          <a:prstGeom prst="rect">
+            <a:avLst/>
+          </a:prstGeom>
+          <a:solidFill>
+            <a:srgbClr val="E8801A"/>
+          </a:solidFill>
+          <a:ln>
+            <a:noFill/>
+          </a:ln>
+          <a:effectLst/>
+        </p:spPr>
+        <p:style>
+          <a:lnRef idx="1">
+            <a:schemeClr val="accent1"/>
+          </a:lnRef>
+          <a:fillRef idx="3">
+            <a:schemeClr val="accent1"/>
+          </a:fillRef>
+          <a:effectRef idx="2">
+            <a:schemeClr val="accent1"/>
+          </a:effectRef>
+          <a:fontRef idx="minor">
+            <a:schemeClr val="lt1"/>
+          </a:fontRef>
+        </p:style>
+        <p:txBody>
+          <a:bodyPr rtlCol="0" anchor="ctr"/>
+          <a:lstStyle/>
+          <a:p>
+            <a:pPr algn="ctr"/>
+          </a:p>
+        </p:txBody>
+      </p:sp>
+      <p:sp>
+        <p:nvSpPr>
+          <p:cNvPr id="6" name="TextBox 5"/>
+          <p:cNvSpPr txBox="1"/>
+          <p:nvPr/>
+        </p:nvSpPr>
+        <p:spPr>
+          <a:xfrm>
+            <a:off x="822960" y="274320"/>
+            <a:ext cx="10515600" cy="640080"/>
+          </a:xfrm>
+          <a:prstGeom prst="rect">
+            <a:avLst/>
+          </a:prstGeom>
+          <a:noFill/>
+        </p:spPr>
+        <p:txBody>
+          <a:bodyPr wrap="square">
+            <a:spAutoFit/>
+          </a:bodyPr>
+          <a:lstStyle/>
+          <a:p>
+            <a:r>
+              <a:rPr sz="2400" b="1" i="0">
+                <a:solidFill>
+                  <a:srgbClr val="FFFFFF"/>
+                </a:solidFill>
+                <a:latin typeface="Montserrat"/>
+              </a:rPr>
+              <a:t>⚡  PREGUNTA RÁPIDA</a:t>
+            </a:r>
+          </a:p>
+        </p:txBody>
+      </p:sp>
+      <p:sp>
+        <p:nvSpPr>
+          <p:cNvPr id="7" name="TextBox 6"/>
+          <p:cNvSpPr txBox="1"/>
+          <p:nvPr/>
+        </p:nvSpPr>
+        <p:spPr>
+          <a:xfrm>
+            <a:off x="822960" y="1508760"/>
+            <a:ext cx="10515600" cy="1371600"/>
+          </a:xfrm>
+          <a:prstGeom prst="rect">
+            <a:avLst/>
+          </a:prstGeom>
+          <a:noFill/>
+        </p:spPr>
+        <p:txBody>
+          <a:bodyPr wrap="square">
+            <a:spAutoFit/>
+          </a:bodyPr>
+          <a:lstStyle/>
+          <a:p>
+            <a:r>
+              <a:rPr sz="2400" b="1" i="0">
+                <a:solidFill>
+                  <a:srgbClr val="1E2761"/>
+                </a:solidFill>
+                <a:latin typeface="Montserrat"/>
+              </a:rPr>
+              <a:t>¿Cuál de estas conexiones a una misma chimenea está permitida sin requisitos especiales?</a:t>
+            </a:r>
+          </a:p>
+        </p:txBody>
+      </p:sp>
+      <p:sp>
+        <p:nvSpPr>
+          <p:cNvPr id="8" name="Rounded Rectangle 7"/>
+          <p:cNvSpPr/>
+          <p:nvPr/>
+        </p:nvSpPr>
+        <p:spPr>
+          <a:xfrm>
+            <a:off x="822960" y="3291840"/>
+            <a:ext cx="4983480" cy="1143000"/>
+          </a:xfrm>
+          <a:prstGeom prst="roundRect">
+            <a:avLst/>
+          </a:prstGeom>
+          <a:solidFill>
+            <a:srgbClr val="F3F6FB"/>
+          </a:solidFill>
+          <a:ln w="12700">
+            <a:solidFill>
+              <a:srgbClr val="C7D2E6"/>
+            </a:solidFill>
+          </a:ln>
+          <a:effectLst/>
+        </p:spPr>
+        <p:style>
+          <a:lnRef idx="1">
+            <a:schemeClr val="accent1"/>
+          </a:lnRef>
+          <a:fillRef idx="3">
+            <a:schemeClr val="accent1"/>
+          </a:fillRef>
+          <a:effectRef idx="2">
+            <a:schemeClr val="accent1"/>
+          </a:effectRef>
+          <a:fontRef idx="minor">
+            <a:schemeClr val="lt1"/>
+          </a:fontRef>
+        </p:style>
+        <p:txBody>
+          <a:bodyPr rtlCol="0" anchor="ctr"/>
+          <a:lstStyle/>
+          <a:p>
+            <a:pPr algn="ctr"/>
+          </a:p>
+        </p:txBody>
+      </p:sp>
+      <p:sp>
+        <p:nvSpPr>
+          <p:cNvPr id="9" name="Rectangle 8"/>
+          <p:cNvSpPr/>
+          <p:nvPr/>
+        </p:nvSpPr>
+        <p:spPr>
+          <a:xfrm>
+            <a:off x="822960" y="3291840"/>
+            <a:ext cx="640080" cy="1143000"/>
+          </a:xfrm>
+          <a:prstGeom prst="rect">
+            <a:avLst/>
+          </a:prstGeom>
+          <a:solidFill>
+            <a:srgbClr val="1E2761"/>
+          </a:solidFill>
+          <a:ln>
+            <a:noFill/>
+          </a:ln>
+          <a:effectLst/>
+        </p:spPr>
+        <p:style>
+          <a:lnRef idx="1">
+            <a:schemeClr val="accent1"/>
+          </a:lnRef>
+          <a:fillRef idx="3">
+            <a:schemeClr val="accent1"/>
+          </a:fillRef>
+          <a:effectRef idx="2">
+            <a:schemeClr val="accent1"/>
+          </a:effectRef>
+          <a:fontRef idx="minor">
+            <a:schemeClr val="lt1"/>
+          </a:fontRef>
+        </p:style>
+        <p:txBody>
+          <a:bodyPr rtlCol="0" anchor="ctr"/>
+          <a:lstStyle/>
+          <a:p>
+            <a:pPr algn="ctr"/>
+          </a:p>
+        </p:txBody>
+      </p:sp>
+      <p:sp>
+        <p:nvSpPr>
+          <p:cNvPr id="10" name="TextBox 9"/>
+          <p:cNvSpPr txBox="1"/>
+          <p:nvPr/>
+        </p:nvSpPr>
+        <p:spPr>
+          <a:xfrm>
+            <a:off x="822960" y="3611880"/>
+            <a:ext cx="640080" cy="548640"/>
+          </a:xfrm>
+          <a:prstGeom prst="rect">
+            <a:avLst/>
+          </a:prstGeom>
+          <a:noFill/>
+        </p:spPr>
+        <p:txBody>
+          <a:bodyPr wrap="square">
+            <a:spAutoFit/>
+          </a:bodyPr>
+          <a:lstStyle/>
+          <a:p>
+            <a:pPr algn="ctr"/>
+            <a:r>
+              <a:rPr sz="2200" b="1" i="0">
+                <a:solidFill>
+                  <a:srgbClr val="FFFFFF"/>
+                </a:solidFill>
+                <a:latin typeface="Montserrat"/>
+              </a:rPr>
+              <a:t>A</a:t>
+            </a:r>
+          </a:p>
+        </p:txBody>
+      </p:sp>
+      <p:sp>
+        <p:nvSpPr>
+          <p:cNvPr id="11" name="TextBox 10"/>
+          <p:cNvSpPr txBox="1"/>
+          <p:nvPr/>
+        </p:nvSpPr>
+        <p:spPr>
+          <a:xfrm>
+            <a:off x="1600200" y="3474720"/>
+            <a:ext cx="4114800" cy="868680"/>
+          </a:xfrm>
+          <a:prstGeom prst="rect">
+            <a:avLst/>
+          </a:prstGeom>
+          <a:noFill/>
+        </p:spPr>
+        <p:txBody>
+          <a:bodyPr wrap="square">
+            <a:spAutoFit/>
+          </a:bodyPr>
+          <a:lstStyle/>
+          <a:p>
+            <a:r>
+              <a:rPr sz="1400" b="0" i="0">
+                <a:solidFill>
+                  <a:srgbClr val="1B2330"/>
+                </a:solidFill>
+                <a:latin typeface="Montserrat"/>
+              </a:rPr>
+              <a:t>Un aparato de tiro natural con otro de tiro forzado</a:t>
+            </a:r>
+          </a:p>
+        </p:txBody>
+      </p:sp>
+      <p:sp>
+        <p:nvSpPr>
+          <p:cNvPr id="12" name="Rounded Rectangle 11"/>
+          <p:cNvSpPr/>
+          <p:nvPr/>
+        </p:nvSpPr>
+        <p:spPr>
+          <a:xfrm>
+            <a:off x="6355080" y="3291840"/>
+            <a:ext cx="4983480" cy="1143000"/>
+          </a:xfrm>
+          <a:prstGeom prst="roundRect">
+            <a:avLst/>
+          </a:prstGeom>
+          <a:solidFill>
+            <a:srgbClr val="F3F6FB"/>
+          </a:solidFill>
+          <a:ln w="12700">
+            <a:solidFill>
+              <a:srgbClr val="C7D2E6"/>
+            </a:solidFill>
+          </a:ln>
+          <a:effectLst/>
+        </p:spPr>
+        <p:style>
+          <a:lnRef idx="1">
+            <a:schemeClr val="accent1"/>
+          </a:lnRef>
+          <a:fillRef idx="3">
+            <a:schemeClr val="accent1"/>
+          </a:fillRef>
+          <a:effectRef idx="2">
+            <a:schemeClr val="accent1"/>
+          </a:effectRef>
+          <a:fontRef idx="minor">
+            <a:schemeClr val="lt1"/>
+          </a:fontRef>
+        </p:style>
+        <p:txBody>
+          <a:bodyPr rtlCol="0" anchor="ctr"/>
+          <a:lstStyle/>
+          <a:p>
+            <a:pPr algn="ctr"/>
+          </a:p>
+        </p:txBody>
+      </p:sp>
+      <p:sp>
+        <p:nvSpPr>
+          <p:cNvPr id="13" name="Rectangle 12"/>
+          <p:cNvSpPr/>
+          <p:nvPr/>
+        </p:nvSpPr>
+        <p:spPr>
+          <a:xfrm>
+            <a:off x="6355080" y="3291840"/>
+            <a:ext cx="640080" cy="1143000"/>
+          </a:xfrm>
+          <a:prstGeom prst="rect">
+            <a:avLst/>
+          </a:prstGeom>
+          <a:solidFill>
+            <a:srgbClr val="1E2761"/>
+          </a:solidFill>
+          <a:ln>
+            <a:noFill/>
+          </a:ln>
+          <a:effectLst/>
+        </p:spPr>
+        <p:style>
+          <a:lnRef idx="1">
+            <a:schemeClr val="accent1"/>
+          </a:lnRef>
+          <a:fillRef idx="3">
+            <a:schemeClr val="accent1"/>
+          </a:fillRef>
+          <a:effectRef idx="2">
+            <a:schemeClr val="accent1"/>
+          </a:effectRef>
+          <a:fontRef idx="minor">
+            <a:schemeClr val="lt1"/>
+          </a:fontRef>
+        </p:style>
+        <p:txBody>
+          <a:bodyPr rtlCol="0" anchor="ctr"/>
+          <a:lstStyle/>
+          <a:p>
+            <a:pPr algn="ctr"/>
+          </a:p>
+        </p:txBody>
+      </p:sp>
+      <p:sp>
+        <p:nvSpPr>
+          <p:cNvPr id="14" name="TextBox 13"/>
+          <p:cNvSpPr txBox="1"/>
+          <p:nvPr/>
+        </p:nvSpPr>
+        <p:spPr>
+          <a:xfrm>
+            <a:off x="6355080" y="3611880"/>
+            <a:ext cx="640080" cy="548640"/>
+          </a:xfrm>
+          <a:prstGeom prst="rect">
+            <a:avLst/>
+          </a:prstGeom>
+          <a:noFill/>
+        </p:spPr>
+        <p:txBody>
+          <a:bodyPr wrap="square">
+            <a:spAutoFit/>
+          </a:bodyPr>
+          <a:lstStyle/>
+          <a:p>
+            <a:pPr algn="ctr"/>
+            <a:r>
+              <a:rPr sz="2200" b="1" i="0">
+                <a:solidFill>
+                  <a:srgbClr val="FFFFFF"/>
+                </a:solidFill>
+                <a:latin typeface="Montserrat"/>
+              </a:rPr>
+              <a:t>B</a:t>
+            </a:r>
+          </a:p>
+        </p:txBody>
+      </p:sp>
+      <p:sp>
+        <p:nvSpPr>
+          <p:cNvPr id="15" name="TextBox 14"/>
+          <p:cNvSpPr txBox="1"/>
+          <p:nvPr/>
+        </p:nvSpPr>
+        <p:spPr>
+          <a:xfrm>
+            <a:off x="7132320" y="3474720"/>
+            <a:ext cx="4114800" cy="868680"/>
+          </a:xfrm>
+          <a:prstGeom prst="rect">
+            <a:avLst/>
+          </a:prstGeom>
+          <a:noFill/>
+        </p:spPr>
+        <p:txBody>
+          <a:bodyPr wrap="square">
+            <a:spAutoFit/>
+          </a:bodyPr>
+          <a:lstStyle/>
+          <a:p>
+            <a:r>
+              <a:rPr sz="1400" b="0" i="0">
+                <a:solidFill>
+                  <a:srgbClr val="1B2330"/>
+                </a:solidFill>
+                <a:latin typeface="Montserrat"/>
+              </a:rPr>
+              <a:t>Una campana de cocina con extracción mecánica</a:t>
+            </a:r>
+          </a:p>
+        </p:txBody>
+      </p:sp>
+      <p:sp>
+        <p:nvSpPr>
+          <p:cNvPr id="16" name="Rounded Rectangle 15"/>
+          <p:cNvSpPr/>
+          <p:nvPr/>
+        </p:nvSpPr>
+        <p:spPr>
+          <a:xfrm>
+            <a:off x="822960" y="4617720"/>
+            <a:ext cx="4983480" cy="1143000"/>
+          </a:xfrm>
+          <a:prstGeom prst="roundRect">
+            <a:avLst/>
+          </a:prstGeom>
+          <a:solidFill>
+            <a:srgbClr val="F3F6FB"/>
+          </a:solidFill>
+          <a:ln w="12700">
+            <a:solidFill>
+              <a:srgbClr val="C7D2E6"/>
+            </a:solidFill>
+          </a:ln>
+          <a:effectLst/>
+        </p:spPr>
+        <p:style>
+          <a:lnRef idx="1">
+            <a:schemeClr val="accent1"/>
+          </a:lnRef>
+          <a:fillRef idx="3">
+            <a:schemeClr val="accent1"/>
+          </a:fillRef>
+          <a:effectRef idx="2">
+            <a:schemeClr val="accent1"/>
+          </a:effectRef>
+          <a:fontRef idx="minor">
+            <a:schemeClr val="lt1"/>
+          </a:fontRef>
+        </p:style>
+        <p:txBody>
+          <a:bodyPr rtlCol="0" anchor="ctr"/>
+          <a:lstStyle/>
+          <a:p>
+            <a:pPr algn="ctr"/>
+          </a:p>
+        </p:txBody>
+      </p:sp>
+      <p:sp>
+        <p:nvSpPr>
+          <p:cNvPr id="17" name="Rectangle 16"/>
+          <p:cNvSpPr/>
+          <p:nvPr/>
+        </p:nvSpPr>
+        <p:spPr>
+          <a:xfrm>
+            <a:off x="822960" y="4617720"/>
+            <a:ext cx="640080" cy="1143000"/>
+          </a:xfrm>
+          <a:prstGeom prst="rect">
+            <a:avLst/>
+          </a:prstGeom>
+          <a:solidFill>
+            <a:srgbClr val="1E2761"/>
+          </a:solidFill>
+          <a:ln>
+            <a:noFill/>
+          </a:ln>
+          <a:effectLst/>
+        </p:spPr>
+        <p:style>
+          <a:lnRef idx="1">
+            <a:schemeClr val="accent1"/>
+          </a:lnRef>
+          <a:fillRef idx="3">
+            <a:schemeClr val="accent1"/>
+          </a:fillRef>
+          <a:effectRef idx="2">
+            <a:schemeClr val="accent1"/>
+          </a:effectRef>
+          <a:fontRef idx="minor">
+            <a:schemeClr val="lt1"/>
+          </a:fontRef>
+        </p:style>
+        <p:txBody>
+          <a:bodyPr rtlCol="0" anchor="ctr"/>
+          <a:lstStyle/>
+          <a:p>
+            <a:pPr algn="ctr"/>
+          </a:p>
+        </p:txBody>
+      </p:sp>
+      <p:sp>
+        <p:nvSpPr>
+          <p:cNvPr id="18" name="TextBox 17"/>
+          <p:cNvSpPr txBox="1"/>
+          <p:nvPr/>
+        </p:nvSpPr>
+        <p:spPr>
+          <a:xfrm>
+            <a:off x="822960" y="4937760"/>
+            <a:ext cx="640080" cy="548640"/>
+          </a:xfrm>
+          <a:prstGeom prst="rect">
+            <a:avLst/>
+          </a:prstGeom>
+          <a:noFill/>
+        </p:spPr>
+        <p:txBody>
+          <a:bodyPr wrap="square">
+            <a:spAutoFit/>
+          </a:bodyPr>
+          <a:lstStyle/>
+          <a:p>
+            <a:pPr algn="ctr"/>
+            <a:r>
+              <a:rPr sz="2200" b="1" i="0">
+                <a:solidFill>
+                  <a:srgbClr val="FFFFFF"/>
+                </a:solidFill>
+                <a:latin typeface="Montserrat"/>
+              </a:rPr>
+              <a:t>C</a:t>
+            </a:r>
+          </a:p>
+        </p:txBody>
+      </p:sp>
+      <p:sp>
+        <p:nvSpPr>
+          <p:cNvPr id="19" name="TextBox 18"/>
+          <p:cNvSpPr txBox="1"/>
+          <p:nvPr/>
+        </p:nvSpPr>
+        <p:spPr>
+          <a:xfrm>
+            <a:off x="1600200" y="4800600"/>
+            <a:ext cx="4114800" cy="868680"/>
+          </a:xfrm>
+          <a:prstGeom prst="rect">
+            <a:avLst/>
+          </a:prstGeom>
+          <a:noFill/>
+        </p:spPr>
+        <p:txBody>
+          <a:bodyPr wrap="square">
+            <a:spAutoFit/>
+          </a:bodyPr>
+          <a:lstStyle/>
+          <a:p>
+            <a:r>
+              <a:rPr sz="1400" b="0" i="0">
+                <a:solidFill>
+                  <a:srgbClr val="1B2330"/>
+                </a:solidFill>
+                <a:latin typeface="Montserrat"/>
+              </a:rPr>
+              <a:t>Dos aparatos de no condensación compatibles</a:t>
+            </a:r>
+          </a:p>
+        </p:txBody>
+      </p:sp>
+      <p:sp>
+        <p:nvSpPr>
+          <p:cNvPr id="20" name="Rounded Rectangle 19"/>
+          <p:cNvSpPr/>
+          <p:nvPr/>
+        </p:nvSpPr>
+        <p:spPr>
+          <a:xfrm>
+            <a:off x="6355080" y="4617720"/>
+            <a:ext cx="4983480" cy="1143000"/>
+          </a:xfrm>
+          <a:prstGeom prst="roundRect">
+            <a:avLst/>
+          </a:prstGeom>
+          <a:solidFill>
+            <a:srgbClr val="F3F6FB"/>
+          </a:solidFill>
+          <a:ln w="12700">
+            <a:solidFill>
+              <a:srgbClr val="C7D2E6"/>
+            </a:solidFill>
+          </a:ln>
+          <a:effectLst/>
+        </p:spPr>
+        <p:style>
+          <a:lnRef idx="1">
+            <a:schemeClr val="accent1"/>
+          </a:lnRef>
+          <a:fillRef idx="3">
+            <a:schemeClr val="accent1"/>
+          </a:fillRef>
+          <a:effectRef idx="2">
+            <a:schemeClr val="accent1"/>
+          </a:effectRef>
+          <a:fontRef idx="minor">
+            <a:schemeClr val="lt1"/>
+          </a:fontRef>
+        </p:style>
+        <p:txBody>
+          <a:bodyPr rtlCol="0" anchor="ctr"/>
+          <a:lstStyle/>
+          <a:p>
+            <a:pPr algn="ctr"/>
+          </a:p>
+        </p:txBody>
+      </p:sp>
+      <p:sp>
+        <p:nvSpPr>
+          <p:cNvPr id="21" name="Rectangle 20"/>
+          <p:cNvSpPr/>
+          <p:nvPr/>
+        </p:nvSpPr>
+        <p:spPr>
+          <a:xfrm>
+            <a:off x="6355080" y="4617720"/>
+            <a:ext cx="640080" cy="1143000"/>
+          </a:xfrm>
+          <a:prstGeom prst="rect">
+            <a:avLst/>
+          </a:prstGeom>
+          <a:solidFill>
+            <a:srgbClr val="1E2761"/>
+          </a:solidFill>
+          <a:ln>
+            <a:noFill/>
+          </a:ln>
+          <a:effectLst/>
+        </p:spPr>
+        <p:style>
+          <a:lnRef idx="1">
+            <a:schemeClr val="accent1"/>
+          </a:lnRef>
+          <a:fillRef idx="3">
+            <a:schemeClr val="accent1"/>
+          </a:fillRef>
+          <a:effectRef idx="2">
+            <a:schemeClr val="accent1"/>
+          </a:effectRef>
+          <a:fontRef idx="minor">
+            <a:schemeClr val="lt1"/>
+          </a:fontRef>
+        </p:style>
+        <p:txBody>
+          <a:bodyPr rtlCol="0" anchor="ctr"/>
+          <a:lstStyle/>
+          <a:p>
+            <a:pPr algn="ctr"/>
+          </a:p>
+        </p:txBody>
+      </p:sp>
+      <p:sp>
+        <p:nvSpPr>
+          <p:cNvPr id="22" name="TextBox 21"/>
+          <p:cNvSpPr txBox="1"/>
+          <p:nvPr/>
+        </p:nvSpPr>
+        <p:spPr>
+          <a:xfrm>
+            <a:off x="6355080" y="4937760"/>
+            <a:ext cx="640080" cy="548640"/>
+          </a:xfrm>
+          <a:prstGeom prst="rect">
+            <a:avLst/>
+          </a:prstGeom>
+          <a:noFill/>
+        </p:spPr>
+        <p:txBody>
+          <a:bodyPr wrap="square">
+            <a:spAutoFit/>
+          </a:bodyPr>
+          <a:lstStyle/>
+          <a:p>
+            <a:pPr algn="ctr"/>
+            <a:r>
+              <a:rPr sz="2200" b="1" i="0">
+                <a:solidFill>
+                  <a:srgbClr val="FFFFFF"/>
+                </a:solidFill>
+                <a:latin typeface="Montserrat"/>
+              </a:rPr>
+              <a:t>D</a:t>
+            </a:r>
+          </a:p>
+        </p:txBody>
+      </p:sp>
+      <p:sp>
+        <p:nvSpPr>
+          <p:cNvPr id="23" name="TextBox 22"/>
+          <p:cNvSpPr txBox="1"/>
+          <p:nvPr/>
+        </p:nvSpPr>
+        <p:spPr>
+          <a:xfrm>
+            <a:off x="7132320" y="4800600"/>
+            <a:ext cx="4114800" cy="868680"/>
+          </a:xfrm>
+          <a:prstGeom prst="rect">
+            <a:avLst/>
+          </a:prstGeom>
+          <a:noFill/>
+        </p:spPr>
+        <p:txBody>
+          <a:bodyPr wrap="square">
+            <a:spAutoFit/>
+          </a:bodyPr>
+          <a:lstStyle/>
+          <a:p>
+            <a:r>
+              <a:rPr sz="1400" b="0" i="0">
+                <a:solidFill>
+                  <a:srgbClr val="1B2330"/>
+                </a:solidFill>
+                <a:latin typeface="Montserrat"/>
+              </a:rPr>
+              <a:t>Un aparato de gas con una caldera de gasóleo</a:t>
+            </a:r>
+          </a:p>
+        </p:txBody>
+      </p:sp>
+    </p:spTree>
+  </p:cSld>
+  <p:clrMapOvr>
+    <a:masterClrMapping/>
+  </p:clrMapOvr>
+  <mc:AlternateContent xmlns:mc="http://schemas.openxmlformats.org/markup-compatibility/2006">
+    <mc:Choice xmlns:p14="http://schemas.microsoft.com/office/powerpoint/2010/main" Requires="p14">
+      <p:transition spd="med" p14:dur="700">
+        <p14:cube dir="r"/>
+      </p:transition>
+    </mc:Choice>
+    <mc:Fallback>
+      <p:transition spd="med">
+        <p:push dir="r"/>
+      </p:transition>
+    </mc:Fallback>
+  </mc:AlternateContent>
+</p:sld>
+</file>
+
+<file path=ppt/slides/slide23.xml><?xml version="1.0" encoding="utf-8"?>
+<p:sld xmlns:a="http://schemas.openxmlformats.org/drawingml/2006/main" xmlns:p="http://schemas.openxmlformats.org/presentationml/2006/main" xmlns:r="http://schemas.openxmlformats.org/officeDocument/2006/relationships">
+  <p:cSld>
+    <p:spTree>
+      <p:nvGrpSpPr>
+        <p:cNvPr id="1" name=""/>
+        <p:cNvGrpSpPr/>
+        <p:nvPr/>
+      </p:nvGrpSpPr>
+      <p:grpSpPr/>
+      <p:sp>
+        <p:nvSpPr>
+          <p:cNvPr id="2" name="Rectangle 1"/>
+          <p:cNvSpPr/>
+          <p:nvPr/>
+        </p:nvSpPr>
+        <p:spPr>
+          <a:xfrm>
+            <a:off x="0" y="0"/>
+            <a:ext cx="12191695" cy="6858000"/>
+          </a:xfrm>
+          <a:prstGeom prst="rect">
+            <a:avLst/>
+          </a:prstGeom>
+          <a:solidFill>
+            <a:srgbClr val="FFFFFF"/>
+          </a:solidFill>
+          <a:ln>
+            <a:noFill/>
+          </a:ln>
+          <a:effectLst/>
+        </p:spPr>
+        <p:style>
+          <a:lnRef idx="1">
+            <a:schemeClr val="accent1"/>
+          </a:lnRef>
+          <a:fillRef idx="3">
+            <a:schemeClr val="accent1"/>
+          </a:fillRef>
+          <a:effectRef idx="2">
+            <a:schemeClr val="accent1"/>
+          </a:effectRef>
+          <a:fontRef idx="minor">
+            <a:schemeClr val="lt1"/>
+          </a:fontRef>
+        </p:style>
+        <p:txBody>
+          <a:bodyPr rtlCol="0" anchor="ctr"/>
+          <a:lstStyle/>
+          <a:p>
+            <a:pPr algn="ctr"/>
+          </a:p>
+        </p:txBody>
+      </p:sp>
+      <p:sp>
+        <p:nvSpPr>
+          <p:cNvPr id="3" name="TextBox 2"/>
+          <p:cNvSpPr txBox="1"/>
+          <p:nvPr/>
+        </p:nvSpPr>
+        <p:spPr>
+          <a:xfrm>
+            <a:off x="10607040" y="320040"/>
+            <a:ext cx="1371600" cy="365760"/>
+          </a:xfrm>
+          <a:prstGeom prst="rect">
+            <a:avLst/>
+          </a:prstGeom>
+          <a:noFill/>
+        </p:spPr>
+        <p:txBody>
+          <a:bodyPr wrap="square">
+            <a:spAutoFit/>
+          </a:bodyPr>
+          <a:lstStyle/>
+          <a:p>
+            <a:pPr algn="r"/>
+            <a:r>
+              <a:rPr sz="1000" b="1" i="0">
+                <a:solidFill>
+                  <a:srgbClr val="64748B"/>
+                </a:solidFill>
+                <a:latin typeface="Montserrat"/>
+              </a:rPr>
+              <a:t>023 / 026</a:t>
+            </a:r>
+          </a:p>
+        </p:txBody>
+      </p:sp>
+      <p:sp>
+        <p:nvSpPr>
+          <p:cNvPr id="4" name="TextBox 3"/>
+          <p:cNvSpPr txBox="1"/>
+          <p:nvPr/>
+        </p:nvSpPr>
+        <p:spPr>
+          <a:xfrm>
+            <a:off x="457200" y="6419088"/>
+            <a:ext cx="8229600" cy="365760"/>
+          </a:xfrm>
+          <a:prstGeom prst="rect">
+            <a:avLst/>
+          </a:prstGeom>
+          <a:noFill/>
+        </p:spPr>
+        <p:txBody>
+          <a:bodyPr wrap="square">
+            <a:spAutoFit/>
+          </a:bodyPr>
+          <a:lstStyle/>
+          <a:p>
+            <a:r>
+              <a:rPr sz="900" b="0" i="0">
+                <a:solidFill>
+                  <a:srgbClr val="64748B"/>
+                </a:solidFill>
+                <a:latin typeface="Montserrat"/>
+              </a:rPr>
+              <a:t>Curso Gas B · Tema 13 · UNE 60670-6</a:t>
+            </a:r>
+          </a:p>
+        </p:txBody>
+      </p:sp>
+      <p:sp>
+        <p:nvSpPr>
+          <p:cNvPr id="5" name="Rectangle 4"/>
+          <p:cNvSpPr/>
+          <p:nvPr/>
+        </p:nvSpPr>
+        <p:spPr>
+          <a:xfrm>
+            <a:off x="0" y="0"/>
+            <a:ext cx="12191695" cy="1143000"/>
+          </a:xfrm>
+          <a:prstGeom prst="rect">
+            <a:avLst/>
+          </a:prstGeom>
+          <a:solidFill>
+            <a:srgbClr val="1E8E4B"/>
+          </a:solidFill>
+          <a:ln>
+            <a:noFill/>
+          </a:ln>
+          <a:effectLst/>
+        </p:spPr>
+        <p:style>
+          <a:lnRef idx="1">
+            <a:schemeClr val="accent1"/>
+          </a:lnRef>
+          <a:fillRef idx="3">
+            <a:schemeClr val="accent1"/>
+          </a:fillRef>
+          <a:effectRef idx="2">
+            <a:schemeClr val="accent1"/>
+          </a:effectRef>
+          <a:fontRef idx="minor">
+            <a:schemeClr val="lt1"/>
+          </a:fontRef>
+        </p:style>
+        <p:txBody>
+          <a:bodyPr rtlCol="0" anchor="ctr"/>
+          <a:lstStyle/>
+          <a:p>
+            <a:pPr algn="ctr"/>
+          </a:p>
+        </p:txBody>
+      </p:sp>
+      <p:sp>
+        <p:nvSpPr>
+          <p:cNvPr id="6" name="TextBox 5"/>
+          <p:cNvSpPr txBox="1"/>
+          <p:nvPr/>
+        </p:nvSpPr>
+        <p:spPr>
+          <a:xfrm>
+            <a:off x="822960" y="274320"/>
+            <a:ext cx="10515600" cy="640080"/>
+          </a:xfrm>
+          <a:prstGeom prst="rect">
+            <a:avLst/>
+          </a:prstGeom>
+          <a:noFill/>
+        </p:spPr>
+        <p:txBody>
+          <a:bodyPr wrap="square">
+            <a:spAutoFit/>
+          </a:bodyPr>
+          <a:lstStyle/>
+          <a:p>
+            <a:r>
+              <a:rPr sz="2400" b="1" i="0">
+                <a:solidFill>
+                  <a:srgbClr val="FFFFFF"/>
+                </a:solidFill>
+                <a:latin typeface="Montserrat"/>
+              </a:rPr>
+              <a:t>✔  RESPUESTA:  C</a:t>
+            </a:r>
+          </a:p>
+        </p:txBody>
+      </p:sp>
+      <p:sp>
+        <p:nvSpPr>
+          <p:cNvPr id="7" name="TextBox 6"/>
+          <p:cNvSpPr txBox="1"/>
+          <p:nvPr/>
+        </p:nvSpPr>
+        <p:spPr>
+          <a:xfrm>
+            <a:off x="822960" y="1417320"/>
+            <a:ext cx="10515600" cy="914400"/>
+          </a:xfrm>
+          <a:prstGeom prst="rect">
+            <a:avLst/>
+          </a:prstGeom>
+          <a:noFill/>
+        </p:spPr>
+        <p:txBody>
+          <a:bodyPr wrap="square">
+            <a:spAutoFit/>
+          </a:bodyPr>
+          <a:lstStyle/>
+          <a:p>
+            <a:r>
+              <a:rPr sz="1800" b="1" i="0">
+                <a:solidFill>
+                  <a:srgbClr val="64748B"/>
+                </a:solidFill>
+                <a:latin typeface="Montserrat"/>
+              </a:rPr>
+              <a:t>¿Cuál de estas conexiones a una misma chimenea está permitida sin requisitos especiales?</a:t>
+            </a:r>
+          </a:p>
+        </p:txBody>
+      </p:sp>
+      <p:sp>
+        <p:nvSpPr>
+          <p:cNvPr id="8" name="Rounded Rectangle 7"/>
+          <p:cNvSpPr/>
+          <p:nvPr/>
+        </p:nvSpPr>
+        <p:spPr>
+          <a:xfrm>
+            <a:off x="822960" y="2514600"/>
+            <a:ext cx="10515600" cy="914400"/>
+          </a:xfrm>
+          <a:prstGeom prst="roundRect">
+            <a:avLst/>
+          </a:prstGeom>
+          <a:solidFill>
+            <a:srgbClr val="E9F6EE"/>
+          </a:solidFill>
+          <a:ln w="12700">
+            <a:solidFill>
+              <a:srgbClr val="1E8E4B"/>
+            </a:solidFill>
+          </a:ln>
+          <a:effectLst/>
+        </p:spPr>
+        <p:style>
+          <a:lnRef idx="1">
+            <a:schemeClr val="accent1"/>
+          </a:lnRef>
+          <a:fillRef idx="3">
+            <a:schemeClr val="accent1"/>
+          </a:fillRef>
+          <a:effectRef idx="2">
+            <a:schemeClr val="accent1"/>
+          </a:effectRef>
+          <a:fontRef idx="minor">
+            <a:schemeClr val="lt1"/>
+          </a:fontRef>
+        </p:style>
+        <p:txBody>
+          <a:bodyPr rtlCol="0" anchor="ctr"/>
+          <a:lstStyle/>
+          <a:p>
+            <a:pPr algn="ctr"/>
+          </a:p>
+        </p:txBody>
+      </p:sp>
+      <p:sp>
+        <p:nvSpPr>
+          <p:cNvPr id="9" name="TextBox 8"/>
+          <p:cNvSpPr txBox="1"/>
+          <p:nvPr/>
+        </p:nvSpPr>
+        <p:spPr>
+          <a:xfrm>
+            <a:off x="1097280" y="2697480"/>
+            <a:ext cx="10058400" cy="640080"/>
+          </a:xfrm>
+          <a:prstGeom prst="rect">
+            <a:avLst/>
+          </a:prstGeom>
+          <a:noFill/>
+        </p:spPr>
+        <p:txBody>
+          <a:bodyPr wrap="square">
+            <a:spAutoFit/>
+          </a:bodyPr>
+          <a:lstStyle/>
+          <a:p>
+            <a:r>
+              <a:rPr sz="1800" b="1" i="0">
+                <a:solidFill>
+                  <a:srgbClr val="1E8E4B"/>
+                </a:solidFill>
+                <a:latin typeface="Montserrat"/>
+              </a:rPr>
+              <a:t>C.  </a:t>
+            </a:r>
+            <a:r>
+              <a:rPr sz="1800" b="1" i="0">
+                <a:solidFill>
+                  <a:srgbClr val="1E2761"/>
+                </a:solidFill>
+                <a:latin typeface="Montserrat"/>
+              </a:rPr>
+              <a:t>Dos aparatos de no condensación compatibles</a:t>
+            </a:r>
+          </a:p>
+        </p:txBody>
+      </p:sp>
+      <p:sp>
+        <p:nvSpPr>
+          <p:cNvPr id="10" name="TextBox 9"/>
+          <p:cNvSpPr txBox="1"/>
+          <p:nvPr/>
+        </p:nvSpPr>
+        <p:spPr>
+          <a:xfrm>
+            <a:off x="822960" y="3749039"/>
+            <a:ext cx="10515600" cy="2194560"/>
+          </a:xfrm>
+          <a:prstGeom prst="rect">
+            <a:avLst/>
+          </a:prstGeom>
+          <a:noFill/>
+        </p:spPr>
+        <p:txBody>
+          <a:bodyPr wrap="square">
+            <a:spAutoFit/>
+          </a:bodyPr>
+          <a:lstStyle/>
+          <a:p>
+            <a:r>
+              <a:rPr sz="1500" b="1" i="0">
+                <a:solidFill>
+                  <a:srgbClr val="E8801A"/>
+                </a:solidFill>
+                <a:latin typeface="Montserrat"/>
+              </a:rPr>
+              <a:t>Por qué:  </a:t>
+            </a:r>
+            <a:r>
+              <a:rPr sz="1500" b="0" i="0">
+                <a:solidFill>
+                  <a:srgbClr val="1B2330"/>
+                </a:solidFill>
+                <a:latin typeface="Montserrat"/>
+              </a:rPr>
+              <a:t>No se mezclan tiro natural con forzado, ni condensación con no condensación, ni extractores o campanas, ni gas con líquidos o sólidos. Dos aparatos de no condensación compatibles sí pueden compartir chimenea.</a:t>
+            </a:r>
+          </a:p>
+        </p:txBody>
+      </p:sp>
+    </p:spTree>
+  </p:cSld>
+  <p:clrMapOvr>
+    <a:masterClrMapping/>
+  </p:clrMapOvr>
+  <mc:AlternateContent xmlns:mc="http://schemas.openxmlformats.org/markup-compatibility/2006">
+    <mc:Choice xmlns:p14="http://schemas.microsoft.com/office/powerpoint/2010/main" Requires="p14">
+      <p:transition spd="med" p14:dur="700">
+        <p14:cube dir="l"/>
+      </p:transition>
+    </mc:Choice>
+    <mc:Fallback>
+      <p:transition spd="med">
+        <p:push dir="l"/>
+      </p:transition>
+    </mc:Fallback>
+  </mc:AlternateContent>
+</p:sld>
+</file>
+
+<file path=ppt/slides/slide24.xml><?xml version="1.0" encoding="utf-8"?>
+<p:sld xmlns:a="http://schemas.openxmlformats.org/drawingml/2006/main" xmlns:p="http://schemas.openxmlformats.org/presentationml/2006/main" xmlns:r="http://schemas.openxmlformats.org/officeDocument/2006/relationships">
+  <p:cSld>
+    <p:spTree>
+      <p:nvGrpSpPr>
+        <p:cNvPr id="1" name=""/>
+        <p:cNvGrpSpPr/>
+        <p:nvPr/>
+      </p:nvGrpSpPr>
+      <p:grpSpPr/>
+      <p:sp>
+        <p:nvSpPr>
+          <p:cNvPr id="2" name="Rectangle 1"/>
+          <p:cNvSpPr/>
+          <p:nvPr/>
+        </p:nvSpPr>
+        <p:spPr>
+          <a:xfrm>
+            <a:off x="0" y="0"/>
+            <a:ext cx="12191695" cy="6858000"/>
+          </a:xfrm>
+          <a:prstGeom prst="rect">
+            <a:avLst/>
+          </a:prstGeom>
+          <a:solidFill>
+            <a:srgbClr val="FFFFFF"/>
+          </a:solidFill>
+          <a:ln>
+            <a:noFill/>
+          </a:ln>
+          <a:effectLst/>
+        </p:spPr>
+        <p:style>
+          <a:lnRef idx="1">
+            <a:schemeClr val="accent1"/>
+          </a:lnRef>
+          <a:fillRef idx="3">
+            <a:schemeClr val="accent1"/>
+          </a:fillRef>
+          <a:effectRef idx="2">
+            <a:schemeClr val="accent1"/>
+          </a:effectRef>
+          <a:fontRef idx="minor">
+            <a:schemeClr val="lt1"/>
+          </a:fontRef>
+        </p:style>
+        <p:txBody>
+          <a:bodyPr rtlCol="0" anchor="ctr"/>
+          <a:lstStyle/>
+          <a:p>
+            <a:pPr algn="ctr"/>
+          </a:p>
+        </p:txBody>
+      </p:sp>
+      <p:sp>
+        <p:nvSpPr>
+          <p:cNvPr id="3" name="TextBox 2"/>
+          <p:cNvSpPr txBox="1"/>
+          <p:nvPr/>
+        </p:nvSpPr>
+        <p:spPr>
+          <a:xfrm>
+            <a:off x="10607040" y="320040"/>
+            <a:ext cx="1371600" cy="365760"/>
+          </a:xfrm>
+          <a:prstGeom prst="rect">
+            <a:avLst/>
+          </a:prstGeom>
+          <a:noFill/>
+        </p:spPr>
+        <p:txBody>
+          <a:bodyPr wrap="square">
+            <a:spAutoFit/>
+          </a:bodyPr>
+          <a:lstStyle/>
+          <a:p>
+            <a:pPr algn="r"/>
+            <a:r>
+              <a:rPr sz="1000" b="1" i="0">
+                <a:solidFill>
+                  <a:srgbClr val="64748B"/>
+                </a:solidFill>
+                <a:latin typeface="Montserrat"/>
+              </a:rPr>
+              <a:t>024 / 026</a:t>
+            </a:r>
+          </a:p>
+        </p:txBody>
+      </p:sp>
+      <p:sp>
+        <p:nvSpPr>
+          <p:cNvPr id="4" name="TextBox 3"/>
+          <p:cNvSpPr txBox="1"/>
+          <p:nvPr/>
+        </p:nvSpPr>
+        <p:spPr>
+          <a:xfrm>
+            <a:off x="457200" y="6419088"/>
+            <a:ext cx="8229600" cy="365760"/>
+          </a:xfrm>
+          <a:prstGeom prst="rect">
+            <a:avLst/>
+          </a:prstGeom>
+          <a:noFill/>
+        </p:spPr>
+        <p:txBody>
+          <a:bodyPr wrap="square">
+            <a:spAutoFit/>
+          </a:bodyPr>
+          <a:lstStyle/>
+          <a:p>
+            <a:r>
+              <a:rPr sz="900" b="0" i="0">
+                <a:solidFill>
+                  <a:srgbClr val="64748B"/>
+                </a:solidFill>
+                <a:latin typeface="Montserrat"/>
+              </a:rPr>
+              <a:t>Curso Gas B · Tema 13 · UNE 60670-6</a:t>
+            </a:r>
+          </a:p>
+        </p:txBody>
+      </p:sp>
+      <p:sp>
+        <p:nvSpPr>
+          <p:cNvPr id="5" name="TextBox 4"/>
+          <p:cNvSpPr txBox="1"/>
+          <p:nvPr/>
+        </p:nvSpPr>
+        <p:spPr>
+          <a:xfrm>
+            <a:off x="822960" y="457200"/>
+            <a:ext cx="10058400" cy="365760"/>
+          </a:xfrm>
+          <a:prstGeom prst="rect">
+            <a:avLst/>
+          </a:prstGeom>
+          <a:noFill/>
+        </p:spPr>
+        <p:txBody>
+          <a:bodyPr wrap="square">
+            <a:spAutoFit/>
+          </a:bodyPr>
+          <a:lstStyle/>
+          <a:p>
+            <a:r>
+              <a:rPr sz="1300" b="1" i="0">
+                <a:solidFill>
+                  <a:srgbClr val="E8801A"/>
+                </a:solidFill>
+                <a:latin typeface="Montserrat"/>
+              </a:rPr>
+              <a:t>REQUISITOS ADICIONALES</a:t>
+            </a:r>
+          </a:p>
+        </p:txBody>
+      </p:sp>
+      <p:sp>
+        <p:nvSpPr>
+          <p:cNvPr id="6" name="TextBox 5"/>
+          <p:cNvSpPr txBox="1"/>
+          <p:nvPr/>
+        </p:nvSpPr>
+        <p:spPr>
+          <a:xfrm>
+            <a:off x="822960" y="868680"/>
+            <a:ext cx="10515600" cy="914400"/>
+          </a:xfrm>
+          <a:prstGeom prst="rect">
+            <a:avLst/>
+          </a:prstGeom>
+          <a:noFill/>
+        </p:spPr>
+        <p:txBody>
+          <a:bodyPr wrap="square">
+            <a:spAutoFit/>
+          </a:bodyPr>
+          <a:lstStyle/>
+          <a:p>
+            <a:r>
+              <a:rPr sz="2800" b="1" i="0">
+                <a:solidFill>
+                  <a:srgbClr val="1E2761"/>
+                </a:solidFill>
+                <a:latin typeface="Montserrat"/>
+              </a:rPr>
+              <a:t>Detalles de conductos comunes</a:t>
+            </a:r>
+          </a:p>
+        </p:txBody>
+      </p:sp>
+      <p:sp>
+        <p:nvSpPr>
+          <p:cNvPr id="7" name="Rectangle 6"/>
+          <p:cNvSpPr/>
+          <p:nvPr/>
+        </p:nvSpPr>
+        <p:spPr>
+          <a:xfrm>
+            <a:off x="868680" y="1627632"/>
+            <a:ext cx="2011680" cy="73152"/>
+          </a:xfrm>
+          <a:prstGeom prst="rect">
+            <a:avLst/>
+          </a:prstGeom>
+          <a:solidFill>
+            <a:srgbClr val="E8801A"/>
+          </a:solidFill>
+          <a:ln>
+            <a:noFill/>
+          </a:ln>
+          <a:effectLst/>
+        </p:spPr>
+        <p:style>
+          <a:lnRef idx="1">
+            <a:schemeClr val="accent1"/>
+          </a:lnRef>
+          <a:fillRef idx="3">
+            <a:schemeClr val="accent1"/>
+          </a:fillRef>
+          <a:effectRef idx="2">
+            <a:schemeClr val="accent1"/>
+          </a:effectRef>
+          <a:fontRef idx="minor">
+            <a:schemeClr val="lt1"/>
+          </a:fontRef>
+        </p:style>
+        <p:txBody>
+          <a:bodyPr rtlCol="0" anchor="ctr"/>
+          <a:lstStyle/>
+          <a:p>
+            <a:pPr algn="ctr"/>
+          </a:p>
+        </p:txBody>
+      </p:sp>
+      <p:sp>
+        <p:nvSpPr>
+          <p:cNvPr id="8" name="TextBox 7"/>
+          <p:cNvSpPr txBox="1"/>
+          <p:nvPr/>
+        </p:nvSpPr>
+        <p:spPr>
+          <a:xfrm>
+            <a:off x="822960" y="1965960"/>
+            <a:ext cx="5029200" cy="4206240"/>
+          </a:xfrm>
+          <a:prstGeom prst="rect">
+            <a:avLst/>
+          </a:prstGeom>
+          <a:noFill/>
+        </p:spPr>
+        <p:txBody>
+          <a:bodyPr wrap="square">
+            <a:spAutoFit/>
+          </a:bodyPr>
+          <a:lstStyle/>
+          <a:p>
+            <a:pPr>
+              <a:spcAft>
+                <a:spcPts val="1100"/>
+              </a:spcAft>
+            </a:pPr>
+            <a:r>
+              <a:rPr sz="1600" b="1" i="0">
+                <a:solidFill>
+                  <a:srgbClr val="E8801A"/>
+                </a:solidFill>
+                <a:latin typeface="Montserrat"/>
+              </a:rPr>
+              <a:t>▸  </a:t>
+            </a:r>
+            <a:r>
+              <a:rPr sz="1600" b="0" i="0">
+                <a:solidFill>
+                  <a:srgbClr val="1B2330"/>
+                </a:solidFill>
+                <a:latin typeface="Montserrat"/>
+              </a:rPr>
+              <a:t>15 cm entre generatrices al unir</a:t>
+            </a:r>
+          </a:p>
+          <a:p>
+            <a:pPr>
+              <a:spcAft>
+                <a:spcPts val="1100"/>
+              </a:spcAft>
+            </a:pPr>
+            <a:r>
+              <a:rPr sz="1600" b="1" i="0">
+                <a:solidFill>
+                  <a:srgbClr val="E8801A"/>
+                </a:solidFill>
+                <a:latin typeface="Montserrat"/>
+              </a:rPr>
+              <a:t>▸  </a:t>
+            </a:r>
+            <a:r>
+              <a:rPr sz="1600" b="0" i="0">
+                <a:solidFill>
+                  <a:srgbClr val="1B2330"/>
+                </a:solidFill>
+                <a:latin typeface="Montserrat"/>
+              </a:rPr>
+              <a:t>Paso por madera: 10 cm más de hueco</a:t>
+            </a:r>
+          </a:p>
+          <a:p>
+            <a:pPr>
+              <a:spcAft>
+                <a:spcPts val="1100"/>
+              </a:spcAft>
+            </a:pPr>
+            <a:r>
+              <a:rPr sz="1600" b="1" i="0">
+                <a:solidFill>
+                  <a:srgbClr val="E8801A"/>
+                </a:solidFill>
+                <a:latin typeface="Montserrat"/>
+              </a:rPr>
+              <a:t>▸  </a:t>
+            </a:r>
+            <a:r>
+              <a:rPr sz="1600" b="0" i="0">
+                <a:solidFill>
+                  <a:srgbClr val="1B2330"/>
+                </a:solidFill>
+                <a:latin typeface="Montserrat"/>
+              </a:rPr>
+              <a:t>Regulación de tiro: nunca manual</a:t>
+            </a:r>
+          </a:p>
+        </p:txBody>
+      </p:sp>
+      <p:sp>
+        <p:nvSpPr>
+          <p:cNvPr id="9" name="imgph" descr="IMGQ:collective flue duct junction"/>
+          <p:cNvSpPr/>
+          <p:nvPr/>
+        </p:nvSpPr>
+        <p:spPr>
+          <a:xfrm>
+            <a:off x="6080760" y="1965960"/>
+            <a:ext cx="5303520" cy="4572000"/>
+          </a:xfrm>
+          <a:prstGeom prst="roundRect">
+            <a:avLst/>
+          </a:prstGeom>
+          <a:solidFill>
+            <a:srgbClr val="F3F6FB"/>
+          </a:solidFill>
+          <a:ln w="12700">
+            <a:solidFill>
+              <a:srgbClr val="C7D2E6"/>
+            </a:solidFill>
+          </a:ln>
+          <a:effectLst/>
+        </p:spPr>
+        <p:style>
+          <a:lnRef idx="1">
+            <a:schemeClr val="accent1"/>
+          </a:lnRef>
+          <a:fillRef idx="3">
+            <a:schemeClr val="accent1"/>
+          </a:fillRef>
+          <a:effectRef idx="2">
+            <a:schemeClr val="accent1"/>
+          </a:effectRef>
+          <a:fontRef idx="minor">
+            <a:schemeClr val="lt1"/>
+          </a:fontRef>
+        </p:style>
+        <p:txBody>
+          <a:bodyPr rtlCol="0" anchor="ctr"/>
+          <a:lstStyle/>
+          <a:p>
+            <a:pPr algn="ctr"/>
+          </a:p>
+        </p:txBody>
+      </p:sp>
+      <p:sp>
+        <p:nvSpPr>
+          <p:cNvPr id="10" name="TextBox 9"/>
+          <p:cNvSpPr txBox="1"/>
+          <p:nvPr/>
+        </p:nvSpPr>
+        <p:spPr>
+          <a:xfrm>
+            <a:off x="6355080" y="3611880"/>
+            <a:ext cx="4754880" cy="1280160"/>
+          </a:xfrm>
+          <a:prstGeom prst="rect">
+            <a:avLst/>
+          </a:prstGeom>
+          <a:noFill/>
+        </p:spPr>
+        <p:txBody>
+          <a:bodyPr wrap="square">
+            <a:spAutoFit/>
+          </a:bodyPr>
+          <a:lstStyle/>
+          <a:p>
+            <a:pPr algn="ctr"/>
+            <a:r>
+              <a:rPr sz="1400" b="1" i="0">
+                <a:solidFill>
+                  <a:srgbClr val="64748B"/>
+                </a:solidFill>
+                <a:latin typeface="Montserrat"/>
+              </a:rPr>
+              <a:t>IMAGEN</a:t>
+            </a:r>
+          </a:p>
+          <a:p>
+            <a:pPr algn="ctr"/>
+            <a:r>
+              <a:rPr sz="1100" b="0" i="1">
+                <a:solidFill>
+                  <a:srgbClr val="64748B"/>
+                </a:solidFill>
+                <a:latin typeface="Montserrat"/>
+              </a:rPr>
+              <a:t>collective flue duct junction</a:t>
+            </a:r>
+          </a:p>
+        </p:txBody>
+      </p:sp>
+    </p:spTree>
+  </p:cSld>
+  <p:clrMapOvr>
+    <a:masterClrMapping/>
+  </p:clrMapOvr>
+  <mc:AlternateContent xmlns:mc="http://schemas.openxmlformats.org/markup-compatibility/2006">
+    <mc:Choice xmlns:p14="http://schemas.microsoft.com/office/powerpoint/2010/main" Requires="p14">
+      <p:transition spd="med" p14:dur="700">
+        <p14:cube dir="r"/>
+      </p:transition>
+    </mc:Choice>
+    <mc:Fallback>
+      <p:transition spd="med">
+        <p:push dir="r"/>
+      </p:transition>
+    </mc:Fallback>
+  </mc:AlternateContent>
+</p:sld>
+</file>
+
+<file path=ppt/slides/slide25.xml><?xml version="1.0" encoding="utf-8"?>
+<p:sld xmlns:a="http://schemas.openxmlformats.org/drawingml/2006/main" xmlns:p="http://schemas.openxmlformats.org/presentationml/2006/main" xmlns:r="http://schemas.openxmlformats.org/officeDocument/2006/relationships">
+  <p:cSld>
+    <p:spTree>
+      <p:nvGrpSpPr>
+        <p:cNvPr id="1" name=""/>
+        <p:cNvGrpSpPr/>
+        <p:nvPr/>
+      </p:nvGrpSpPr>
+      <p:grpSpPr/>
+      <p:sp>
+        <p:nvSpPr>
+          <p:cNvPr id="2" name="Rectangle 1"/>
+          <p:cNvSpPr/>
+          <p:nvPr/>
+        </p:nvSpPr>
+        <p:spPr>
+          <a:xfrm>
+            <a:off x="0" y="0"/>
+            <a:ext cx="12191695" cy="6858000"/>
+          </a:xfrm>
+          <a:prstGeom prst="rect">
+            <a:avLst/>
+          </a:prstGeom>
+          <a:solidFill>
+            <a:srgbClr val="FFFFFF"/>
+          </a:solidFill>
+          <a:ln>
+            <a:noFill/>
+          </a:ln>
+          <a:effectLst/>
+        </p:spPr>
+        <p:style>
+          <a:lnRef idx="1">
+            <a:schemeClr val="accent1"/>
+          </a:lnRef>
+          <a:fillRef idx="3">
+            <a:schemeClr val="accent1"/>
+          </a:fillRef>
+          <a:effectRef idx="2">
+            <a:schemeClr val="accent1"/>
+          </a:effectRef>
+          <a:fontRef idx="minor">
+            <a:schemeClr val="lt1"/>
+          </a:fontRef>
+        </p:style>
+        <p:txBody>
+          <a:bodyPr rtlCol="0" anchor="ctr"/>
+          <a:lstStyle/>
+          <a:p>
+            <a:pPr algn="ctr"/>
+          </a:p>
+        </p:txBody>
+      </p:sp>
+      <p:sp>
+        <p:nvSpPr>
+          <p:cNvPr id="3" name="TextBox 2"/>
+          <p:cNvSpPr txBox="1"/>
+          <p:nvPr/>
+        </p:nvSpPr>
+        <p:spPr>
+          <a:xfrm>
+            <a:off x="10607040" y="320040"/>
+            <a:ext cx="1371600" cy="365760"/>
+          </a:xfrm>
+          <a:prstGeom prst="rect">
+            <a:avLst/>
+          </a:prstGeom>
+          <a:noFill/>
+        </p:spPr>
+        <p:txBody>
+          <a:bodyPr wrap="square">
+            <a:spAutoFit/>
+          </a:bodyPr>
+          <a:lstStyle/>
+          <a:p>
+            <a:pPr algn="r"/>
+            <a:r>
+              <a:rPr sz="1000" b="1" i="0">
+                <a:solidFill>
+                  <a:srgbClr val="64748B"/>
+                </a:solidFill>
+                <a:latin typeface="Montserrat"/>
+              </a:rPr>
+              <a:t>025 / 026</a:t>
+            </a:r>
+          </a:p>
+        </p:txBody>
+      </p:sp>
+      <p:sp>
+        <p:nvSpPr>
+          <p:cNvPr id="4" name="TextBox 3"/>
+          <p:cNvSpPr txBox="1"/>
+          <p:nvPr/>
+        </p:nvSpPr>
+        <p:spPr>
+          <a:xfrm>
+            <a:off x="457200" y="6419088"/>
+            <a:ext cx="8229600" cy="365760"/>
+          </a:xfrm>
+          <a:prstGeom prst="rect">
+            <a:avLst/>
+          </a:prstGeom>
+          <a:noFill/>
+        </p:spPr>
+        <p:txBody>
+          <a:bodyPr wrap="square">
+            <a:spAutoFit/>
+          </a:bodyPr>
+          <a:lstStyle/>
+          <a:p>
+            <a:r>
+              <a:rPr sz="900" b="0" i="0">
+                <a:solidFill>
+                  <a:srgbClr val="64748B"/>
+                </a:solidFill>
+                <a:latin typeface="Montserrat"/>
+              </a:rPr>
+              <a:t>Curso Gas B · Tema 13 · UNE 60670-6</a:t>
+            </a:r>
+          </a:p>
+        </p:txBody>
+      </p:sp>
+      <p:sp>
+        <p:nvSpPr>
+          <p:cNvPr id="5" name="TextBox 4"/>
+          <p:cNvSpPr txBox="1"/>
+          <p:nvPr/>
+        </p:nvSpPr>
+        <p:spPr>
+          <a:xfrm>
+            <a:off x="822960" y="457200"/>
+            <a:ext cx="10058400" cy="365760"/>
+          </a:xfrm>
+          <a:prstGeom prst="rect">
+            <a:avLst/>
+          </a:prstGeom>
+          <a:noFill/>
+        </p:spPr>
+        <p:txBody>
+          <a:bodyPr wrap="square">
+            <a:spAutoFit/>
+          </a:bodyPr>
+          <a:lstStyle/>
+          <a:p>
+            <a:r>
+              <a:rPr sz="1300" b="1" i="0">
+                <a:solidFill>
+                  <a:srgbClr val="E8801A"/>
+                </a:solidFill>
+                <a:latin typeface="Montserrat"/>
+              </a:rPr>
+              <a:t>CHIMENEAS</a:t>
+            </a:r>
+          </a:p>
+        </p:txBody>
+      </p:sp>
+      <p:sp>
+        <p:nvSpPr>
+          <p:cNvPr id="6" name="TextBox 5"/>
+          <p:cNvSpPr txBox="1"/>
+          <p:nvPr/>
+        </p:nvSpPr>
+        <p:spPr>
+          <a:xfrm>
+            <a:off x="822960" y="868680"/>
+            <a:ext cx="10515600" cy="914400"/>
+          </a:xfrm>
+          <a:prstGeom prst="rect">
+            <a:avLst/>
+          </a:prstGeom>
+          <a:noFill/>
+        </p:spPr>
+        <p:txBody>
+          <a:bodyPr wrap="square">
+            <a:spAutoFit/>
+          </a:bodyPr>
+          <a:lstStyle/>
+          <a:p>
+            <a:r>
+              <a:rPr sz="2800" b="1" i="0">
+                <a:solidFill>
+                  <a:srgbClr val="1E2761"/>
+                </a:solidFill>
+                <a:latin typeface="Montserrat"/>
+              </a:rPr>
+              <a:t>Cada material, su norma</a:t>
+            </a:r>
+          </a:p>
+        </p:txBody>
+      </p:sp>
+      <p:sp>
+        <p:nvSpPr>
+          <p:cNvPr id="7" name="Rectangle 6"/>
+          <p:cNvSpPr/>
+          <p:nvPr/>
+        </p:nvSpPr>
+        <p:spPr>
+          <a:xfrm>
+            <a:off x="868680" y="1627632"/>
+            <a:ext cx="2011680" cy="73152"/>
+          </a:xfrm>
+          <a:prstGeom prst="rect">
+            <a:avLst/>
+          </a:prstGeom>
+          <a:solidFill>
+            <a:srgbClr val="E8801A"/>
+          </a:solidFill>
+          <a:ln>
+            <a:noFill/>
+          </a:ln>
+          <a:effectLst/>
+        </p:spPr>
+        <p:style>
+          <a:lnRef idx="1">
+            <a:schemeClr val="accent1"/>
+          </a:lnRef>
+          <a:fillRef idx="3">
+            <a:schemeClr val="accent1"/>
+          </a:fillRef>
+          <a:effectRef idx="2">
+            <a:schemeClr val="accent1"/>
+          </a:effectRef>
+          <a:fontRef idx="minor">
+            <a:schemeClr val="lt1"/>
+          </a:fontRef>
+        </p:style>
+        <p:txBody>
+          <a:bodyPr rtlCol="0" anchor="ctr"/>
+          <a:lstStyle/>
+          <a:p>
+            <a:pPr algn="ctr"/>
+          </a:p>
+        </p:txBody>
+      </p:sp>
+      <p:sp>
+        <p:nvSpPr>
+          <p:cNvPr id="8" name="TextBox 7"/>
+          <p:cNvSpPr txBox="1"/>
+          <p:nvPr/>
+        </p:nvSpPr>
+        <p:spPr>
+          <a:xfrm>
+            <a:off x="6355080" y="1965960"/>
+            <a:ext cx="5029200" cy="4206240"/>
+          </a:xfrm>
+          <a:prstGeom prst="rect">
+            <a:avLst/>
+          </a:prstGeom>
+          <a:noFill/>
+        </p:spPr>
+        <p:txBody>
+          <a:bodyPr wrap="square">
+            <a:spAutoFit/>
+          </a:bodyPr>
+          <a:lstStyle/>
+          <a:p>
+            <a:pPr>
+              <a:spcAft>
+                <a:spcPts val="1100"/>
+              </a:spcAft>
+            </a:pPr>
+            <a:r>
+              <a:rPr sz="1600" b="1" i="0">
+                <a:solidFill>
+                  <a:srgbClr val="E8801A"/>
+                </a:solidFill>
+                <a:latin typeface="Montserrat"/>
+              </a:rPr>
+              <a:t>▸  </a:t>
+            </a:r>
+            <a:r>
+              <a:rPr sz="1600" b="0" i="0">
+                <a:solidFill>
+                  <a:srgbClr val="1B2330"/>
+                </a:solidFill>
+                <a:latin typeface="Montserrat"/>
+              </a:rPr>
+              <a:t>Metálica: UNE-EN 1856-1</a:t>
+            </a:r>
+          </a:p>
+          <a:p>
+            <a:pPr>
+              <a:spcAft>
+                <a:spcPts val="1100"/>
+              </a:spcAft>
+            </a:pPr>
+            <a:r>
+              <a:rPr sz="1600" b="1" i="0">
+                <a:solidFill>
+                  <a:srgbClr val="E8801A"/>
+                </a:solidFill>
+                <a:latin typeface="Montserrat"/>
+              </a:rPr>
+              <a:t>▸  </a:t>
+            </a:r>
+            <a:r>
+              <a:rPr sz="1600" b="0" i="0">
+                <a:solidFill>
+                  <a:srgbClr val="1B2330"/>
+                </a:solidFill>
+                <a:latin typeface="Montserrat"/>
+              </a:rPr>
+              <a:t>No metálica: NTE-ISH-74</a:t>
+            </a:r>
+          </a:p>
+          <a:p>
+            <a:pPr>
+              <a:spcAft>
+                <a:spcPts val="1100"/>
+              </a:spcAft>
+            </a:pPr>
+            <a:r>
+              <a:rPr sz="1600" b="1" i="0">
+                <a:solidFill>
+                  <a:srgbClr val="E8801A"/>
+                </a:solidFill>
+                <a:latin typeface="Montserrat"/>
+              </a:rPr>
+              <a:t>▸  </a:t>
+            </a:r>
+            <a:r>
+              <a:rPr sz="1600" b="0" i="0">
+                <a:solidFill>
+                  <a:srgbClr val="1B2330"/>
+                </a:solidFill>
+                <a:latin typeface="Montserrat"/>
+              </a:rPr>
+              <a:t>Plástico: UNE-EN 14471</a:t>
+            </a:r>
+          </a:p>
+        </p:txBody>
+      </p:sp>
+      <p:sp>
+        <p:nvSpPr>
+          <p:cNvPr id="9" name="imgph" descr="IMGQ:rooftop chimney cap terminal"/>
+          <p:cNvSpPr/>
+          <p:nvPr/>
+        </p:nvSpPr>
+        <p:spPr>
+          <a:xfrm>
+            <a:off x="822960" y="1965960"/>
+            <a:ext cx="5303520" cy="4572000"/>
+          </a:xfrm>
+          <a:prstGeom prst="roundRect">
+            <a:avLst/>
+          </a:prstGeom>
+          <a:solidFill>
+            <a:srgbClr val="F3F6FB"/>
+          </a:solidFill>
+          <a:ln w="12700">
+            <a:solidFill>
+              <a:srgbClr val="C7D2E6"/>
+            </a:solidFill>
+          </a:ln>
+          <a:effectLst/>
+        </p:spPr>
+        <p:style>
+          <a:lnRef idx="1">
+            <a:schemeClr val="accent1"/>
+          </a:lnRef>
+          <a:fillRef idx="3">
+            <a:schemeClr val="accent1"/>
+          </a:fillRef>
+          <a:effectRef idx="2">
+            <a:schemeClr val="accent1"/>
+          </a:effectRef>
+          <a:fontRef idx="minor">
+            <a:schemeClr val="lt1"/>
+          </a:fontRef>
+        </p:style>
+        <p:txBody>
+          <a:bodyPr rtlCol="0" anchor="ctr"/>
+          <a:lstStyle/>
+          <a:p>
+            <a:pPr algn="ctr"/>
+          </a:p>
+        </p:txBody>
+      </p:sp>
+      <p:sp>
+        <p:nvSpPr>
+          <p:cNvPr id="10" name="TextBox 9"/>
+          <p:cNvSpPr txBox="1"/>
+          <p:nvPr/>
+        </p:nvSpPr>
+        <p:spPr>
+          <a:xfrm>
+            <a:off x="1097280" y="3611880"/>
+            <a:ext cx="4754880" cy="1280160"/>
+          </a:xfrm>
+          <a:prstGeom prst="rect">
+            <a:avLst/>
+          </a:prstGeom>
+          <a:noFill/>
+        </p:spPr>
+        <p:txBody>
+          <a:bodyPr wrap="square">
+            <a:spAutoFit/>
+          </a:bodyPr>
+          <a:lstStyle/>
+          <a:p>
+            <a:pPr algn="ctr"/>
+            <a:r>
+              <a:rPr sz="1400" b="1" i="0">
+                <a:solidFill>
+                  <a:srgbClr val="64748B"/>
+                </a:solidFill>
+                <a:latin typeface="Montserrat"/>
+              </a:rPr>
+              <a:t>IMAGEN</a:t>
+            </a:r>
+          </a:p>
+          <a:p>
+            <a:pPr algn="ctr"/>
+            <a:r>
+              <a:rPr sz="1100" b="0" i="1">
+                <a:solidFill>
+                  <a:srgbClr val="64748B"/>
+                </a:solidFill>
+                <a:latin typeface="Montserrat"/>
+              </a:rPr>
+              <a:t>rooftop chimney cap terminal</a:t>
+            </a:r>
+          </a:p>
+        </p:txBody>
+      </p:sp>
+    </p:spTree>
+  </p:cSld>
+  <p:clrMapOvr>
+    <a:masterClrMapping/>
+  </p:clrMapOvr>
+  <mc:AlternateContent xmlns:mc="http://schemas.openxmlformats.org/markup-compatibility/2006">
+    <mc:Choice xmlns:p14="http://schemas.microsoft.com/office/powerpoint/2010/main" Requires="p14">
+      <p:transition spd="med" p14:dur="700">
+        <p14:cube dir="l"/>
+      </p:transition>
+    </mc:Choice>
+    <mc:Fallback>
+      <p:transition spd="med">
+        <p:push dir="l"/>
+      </p:transition>
+    </mc:Fallback>
+  </mc:AlternateContent>
+</p:sld>
+</file>
+
+<file path=ppt/slides/slide26.xml><?xml version="1.0" encoding="utf-8"?>
+<p:sld xmlns:a="http://schemas.openxmlformats.org/drawingml/2006/main" xmlns:p="http://schemas.openxmlformats.org/presentationml/2006/main" xmlns:r="http://schemas.openxmlformats.org/officeDocument/2006/relationships">
+  <p:cSld>
+    <p:spTree>
+      <p:nvGrpSpPr>
+        <p:cNvPr id="1" name=""/>
+        <p:cNvGrpSpPr/>
+        <p:nvPr/>
+      </p:nvGrpSpPr>
+      <p:grpSpPr/>
+      <p:sp>
+        <p:nvSpPr>
+          <p:cNvPr id="2" name="Rectangle 1"/>
+          <p:cNvSpPr/>
+          <p:nvPr/>
+        </p:nvSpPr>
+        <p:spPr>
+          <a:xfrm>
+            <a:off x="0" y="0"/>
+            <a:ext cx="12191695" cy="6858000"/>
+          </a:xfrm>
+          <a:prstGeom prst="rect">
+            <a:avLst/>
+          </a:prstGeom>
+          <a:solidFill>
+            <a:srgbClr val="1E2761"/>
+          </a:solidFill>
+          <a:ln>
+            <a:noFill/>
+          </a:ln>
+          <a:effectLst/>
+        </p:spPr>
+        <p:style>
+          <a:lnRef idx="1">
+            <a:schemeClr val="accent1"/>
+          </a:lnRef>
+          <a:fillRef idx="3">
+            <a:schemeClr val="accent1"/>
+          </a:fillRef>
+          <a:effectRef idx="2">
+            <a:schemeClr val="accent1"/>
+          </a:effectRef>
+          <a:fontRef idx="minor">
+            <a:schemeClr val="lt1"/>
+          </a:fontRef>
+        </p:style>
+        <p:txBody>
+          <a:bodyPr rtlCol="0" anchor="ctr"/>
+          <a:lstStyle/>
+          <a:p>
+            <a:pPr algn="ctr"/>
+          </a:p>
+        </p:txBody>
+      </p:sp>
+      <p:sp>
+        <p:nvSpPr>
+          <p:cNvPr id="3" name="TextBox 2"/>
+          <p:cNvSpPr txBox="1"/>
+          <p:nvPr/>
+        </p:nvSpPr>
+        <p:spPr>
+          <a:xfrm>
+            <a:off x="822960" y="640080"/>
+            <a:ext cx="10515600" cy="457200"/>
+          </a:xfrm>
+          <a:prstGeom prst="rect">
+            <a:avLst/>
+          </a:prstGeom>
+          <a:noFill/>
+        </p:spPr>
+        <p:txBody>
+          <a:bodyPr wrap="square">
+            <a:spAutoFit/>
+          </a:bodyPr>
+          <a:lstStyle/>
+          <a:p>
+            <a:r>
+              <a:rPr sz="1400" b="1" i="0">
+                <a:solidFill>
+                  <a:srgbClr val="F4A24C"/>
+                </a:solidFill>
+                <a:latin typeface="Montserrat"/>
+              </a:rPr>
+              <a:t>LO QUE YA DOMINAS</a:t>
+            </a:r>
+          </a:p>
+        </p:txBody>
+      </p:sp>
+      <p:sp>
+        <p:nvSpPr>
+          <p:cNvPr id="4" name="Rectangle 3"/>
+          <p:cNvSpPr/>
+          <p:nvPr/>
+        </p:nvSpPr>
+        <p:spPr>
+          <a:xfrm>
+            <a:off x="868680" y="1051560"/>
+            <a:ext cx="1463040" cy="82296"/>
+          </a:xfrm>
+          <a:prstGeom prst="rect">
+            <a:avLst/>
+          </a:prstGeom>
+          <a:solidFill>
+            <a:srgbClr val="E8801A"/>
+          </a:solidFill>
+          <a:ln>
+            <a:noFill/>
+          </a:ln>
+          <a:effectLst/>
+        </p:spPr>
+        <p:style>
+          <a:lnRef idx="1">
+            <a:schemeClr val="accent1"/>
+          </a:lnRef>
+          <a:fillRef idx="3">
+            <a:schemeClr val="accent1"/>
+          </a:fillRef>
+          <a:effectRef idx="2">
+            <a:schemeClr val="accent1"/>
+          </a:effectRef>
+          <a:fontRef idx="minor">
+            <a:schemeClr val="lt1"/>
+          </a:fontRef>
+        </p:style>
+        <p:txBody>
+          <a:bodyPr rtlCol="0" anchor="ctr"/>
+          <a:lstStyle/>
+          <a:p>
+            <a:pPr algn="ctr"/>
+          </a:p>
+        </p:txBody>
+      </p:sp>
+      <p:sp>
+        <p:nvSpPr>
+          <p:cNvPr id="5" name="TextBox 4"/>
+          <p:cNvSpPr txBox="1"/>
+          <p:nvPr/>
+        </p:nvSpPr>
+        <p:spPr>
+          <a:xfrm>
+            <a:off x="822960" y="1234440"/>
+            <a:ext cx="10515600" cy="1097280"/>
+          </a:xfrm>
+          <a:prstGeom prst="rect">
+            <a:avLst/>
+          </a:prstGeom>
+          <a:noFill/>
+        </p:spPr>
+        <p:txBody>
+          <a:bodyPr wrap="square">
+            <a:spAutoFit/>
+          </a:bodyPr>
+          <a:lstStyle/>
+          <a:p>
+            <a:r>
+              <a:rPr sz="3400" b="1" i="0">
+                <a:solidFill>
+                  <a:srgbClr val="FFFFFF"/>
+                </a:solidFill>
+                <a:latin typeface="Montserrat"/>
+              </a:rPr>
+              <a:t>Ya sacas los humos de casa con seguridad</a:t>
+            </a:r>
+          </a:p>
+        </p:txBody>
+      </p:sp>
+      <p:sp>
+        <p:nvSpPr>
+          <p:cNvPr id="6" name="TextBox 5"/>
+          <p:cNvSpPr txBox="1"/>
+          <p:nvPr/>
+        </p:nvSpPr>
+        <p:spPr>
+          <a:xfrm>
+            <a:off x="822960" y="2606040"/>
+            <a:ext cx="10515600" cy="2743200"/>
+          </a:xfrm>
+          <a:prstGeom prst="rect">
+            <a:avLst/>
+          </a:prstGeom>
+          <a:noFill/>
+        </p:spPr>
+        <p:txBody>
+          <a:bodyPr wrap="square">
+            <a:spAutoFit/>
+          </a:bodyPr>
+          <a:lstStyle/>
+          <a:p>
+            <a:pPr>
+              <a:spcAft>
+                <a:spcPts val="1200"/>
+              </a:spcAft>
+            </a:pPr>
+            <a:r>
+              <a:rPr sz="2000" b="1" i="0">
+                <a:solidFill>
+                  <a:srgbClr val="F4A24C"/>
+                </a:solidFill>
+                <a:latin typeface="Montserrat"/>
+              </a:rPr>
+              <a:t>✓  </a:t>
+            </a:r>
+            <a:r>
+              <a:rPr sz="1900" b="0" i="0">
+                <a:solidFill>
+                  <a:srgbClr val="FFFFFF"/>
+                </a:solidFill>
+                <a:latin typeface="Montserrat"/>
+              </a:rPr>
+              <a:t>Solo B y C evacúan; conducto liso, estanco y con orificio de 11 mm</a:t>
+            </a:r>
+          </a:p>
+          <a:p>
+            <a:pPr>
+              <a:spcAft>
+                <a:spcPts val="1200"/>
+              </a:spcAft>
+            </a:pPr>
+            <a:r>
+              <a:rPr sz="2000" b="1" i="0">
+                <a:solidFill>
+                  <a:srgbClr val="F4A24C"/>
+                </a:solidFill>
+                <a:latin typeface="Montserrat"/>
+              </a:rPr>
+              <a:t>✓  </a:t>
+            </a:r>
+            <a:r>
+              <a:rPr sz="1900" b="0" i="0">
+                <a:solidFill>
+                  <a:srgbClr val="FFFFFF"/>
+                </a:solidFill>
+                <a:latin typeface="Montserrat"/>
+              </a:rPr>
+              <a:t>Tiro natural: diámetro por tabla y puntuación ≥ +1</a:t>
+            </a:r>
+          </a:p>
+          <a:p>
+            <a:pPr>
+              <a:spcAft>
+                <a:spcPts val="1200"/>
+              </a:spcAft>
+            </a:pPr>
+            <a:r>
+              <a:rPr sz="2000" b="1" i="0">
+                <a:solidFill>
+                  <a:srgbClr val="F4A24C"/>
+                </a:solidFill>
+                <a:latin typeface="Montserrat"/>
+              </a:rPr>
+              <a:t>✓  </a:t>
+            </a:r>
+            <a:r>
+              <a:rPr sz="1900" b="0" i="0">
+                <a:solidFill>
+                  <a:srgbClr val="FFFFFF"/>
+                </a:solidFill>
+                <a:latin typeface="Montserrat"/>
+              </a:rPr>
+              <a:t>Ventosa: todo del fabricante y el 40 cm a ventanas</a:t>
+            </a:r>
+          </a:p>
+          <a:p>
+            <a:pPr>
+              <a:spcAft>
+                <a:spcPts val="1200"/>
+              </a:spcAft>
+            </a:pPr>
+            <a:r>
+              <a:rPr sz="2000" b="1" i="0">
+                <a:solidFill>
+                  <a:srgbClr val="F4A24C"/>
+                </a:solidFill>
+                <a:latin typeface="Montserrat"/>
+              </a:rPr>
+              <a:t>✓  </a:t>
+            </a:r>
+            <a:r>
+              <a:rPr sz="1900" b="0" i="0">
+                <a:solidFill>
+                  <a:srgbClr val="FFFFFF"/>
+                </a:solidFill>
+                <a:latin typeface="Montserrat"/>
+              </a:rPr>
+              <a:t>La lista de «no mezclar» en una misma chimenea</a:t>
+            </a:r>
+          </a:p>
+        </p:txBody>
+      </p:sp>
+      <p:sp>
+        <p:nvSpPr>
+          <p:cNvPr id="7" name="Rounded Rectangle 6"/>
+          <p:cNvSpPr/>
+          <p:nvPr/>
+        </p:nvSpPr>
+        <p:spPr>
+          <a:xfrm>
+            <a:off x="822960" y="5532120"/>
+            <a:ext cx="10515600" cy="822960"/>
+          </a:xfrm>
+          <a:prstGeom prst="roundRect">
+            <a:avLst/>
+          </a:prstGeom>
+          <a:solidFill>
+            <a:srgbClr val="E8801A"/>
+          </a:solidFill>
+          <a:ln>
+            <a:noFill/>
+          </a:ln>
+          <a:effectLst/>
+        </p:spPr>
+        <p:style>
+          <a:lnRef idx="1">
+            <a:schemeClr val="accent1"/>
+          </a:lnRef>
+          <a:fillRef idx="3">
+            <a:schemeClr val="accent1"/>
+          </a:fillRef>
+          <a:effectRef idx="2">
+            <a:schemeClr val="accent1"/>
+          </a:effectRef>
+          <a:fontRef idx="minor">
+            <a:schemeClr val="lt1"/>
+          </a:fontRef>
+        </p:style>
+        <p:txBody>
+          <a:bodyPr rtlCol="0" anchor="ctr"/>
+          <a:lstStyle/>
+          <a:p>
+            <a:pPr algn="ctr"/>
+          </a:p>
+        </p:txBody>
+      </p:sp>
+      <p:sp>
+        <p:nvSpPr>
+          <p:cNvPr id="8" name="TextBox 7"/>
+          <p:cNvSpPr txBox="1"/>
+          <p:nvPr/>
+        </p:nvSpPr>
+        <p:spPr>
+          <a:xfrm>
+            <a:off x="1051560" y="5623560"/>
+            <a:ext cx="10058400" cy="640080"/>
+          </a:xfrm>
+          <a:prstGeom prst="rect">
+            <a:avLst/>
+          </a:prstGeom>
+          <a:noFill/>
+        </p:spPr>
+        <p:txBody>
+          <a:bodyPr wrap="square">
+            <a:spAutoFit/>
+          </a:bodyPr>
+          <a:lstStyle/>
+          <a:p>
+            <a:r>
+              <a:rPr sz="1500" b="1" i="1">
+                <a:solidFill>
+                  <a:srgbClr val="1E2761"/>
+                </a:solidFill>
+                <a:latin typeface="Montserrat"/>
+              </a:rPr>
+              <a:t>Una evacuación bien resuelta es lo que firma tu boletín y cierra el tema. ¡Enhorabuena!</a:t>
+            </a:r>
+          </a:p>
+        </p:txBody>
+      </p:sp>
+    </p:spTree>
+  </p:cSld>
+  <p:clrMapOvr>
+    <a:masterClrMapping/>
+  </p:clrMapOvr>
+  <mc:AlternateContent xmlns:mc="http://schemas.openxmlformats.org/markup-compatibility/2006">
+    <mc:Choice xmlns:p14="http://schemas.microsoft.com/office/powerpoint/2010/main" Requires="p14">
+      <p:transition spd="med" p14:dur="700">
+        <p14:cube dir="r"/>
+      </p:transition>
+    </mc:Choice>
+    <mc:Fallback>
+      <p:transition spd="med">
+        <p:push dir="r"/>
+      </p:transition>
+    </mc:Fallback>
+  </mc:AlternateContent>
 </p:sld>
 </file>
 
@@ -10548,7 +15124,7 @@
                 </a:solidFill>
                 <a:latin typeface="Montserrat"/>
               </a:rPr>
-              <a:t>003 / 020</a:t>
+              <a:t>003 / 026</a:t>
             </a:r>
           </a:p>
         </p:txBody>
@@ -10657,7 +15233,7 @@
       </p:sp>
       <p:sp>
         <p:nvSpPr>
-          <p:cNvPr id="7" name="Rounded Rectangle 6"/>
+          <p:cNvPr id="7" name="Rectangle 6"/>
           <p:cNvSpPr/>
           <p:nvPr/>
         </p:nvSpPr>
@@ -10666,7 +15242,7 @@
             <a:off x="868680" y="1673352"/>
             <a:ext cx="2011680" cy="73152"/>
           </a:xfrm>
-          <a:prstGeom prst="roundRect">
+          <a:prstGeom prst="rect">
             <a:avLst/>
           </a:prstGeom>
           <a:solidFill>
@@ -10902,6 +15478,18 @@
   <p:clrMapOvr>
     <a:masterClrMapping/>
   </p:clrMapOvr>
+  <mc:AlternateContent xmlns:mc="http://schemas.openxmlformats.org/markup-compatibility/2006">
+    <mc:Choice xmlns:p14="http://schemas.microsoft.com/office/powerpoint/2010/main" Requires="p14">
+      <p:transition spd="med" p14:dur="700">
+        <p14:cube dir="l"/>
+      </p:transition>
+    </mc:Choice>
+    <mc:Fallback>
+      <p:transition spd="med">
+        <p:push dir="l"/>
+      </p:transition>
+    </mc:Fallback>
+  </mc:AlternateContent>
 </p:sld>
 </file>
 
@@ -10989,7 +15577,7 @@
                 </a:solidFill>
                 <a:latin typeface="Montserrat"/>
               </a:rPr>
-              <a:t>004 / 020</a:t>
+              <a:t>004 / 026</a:t>
             </a:r>
           </a:p>
         </p:txBody>
@@ -11098,7 +15686,7 @@
       </p:sp>
       <p:sp>
         <p:nvSpPr>
-          <p:cNvPr id="7" name="Rounded Rectangle 6"/>
+          <p:cNvPr id="7" name="Rectangle 6"/>
           <p:cNvSpPr/>
           <p:nvPr/>
         </p:nvSpPr>
@@ -11107,7 +15695,7 @@
             <a:off x="868680" y="1627632"/>
             <a:ext cx="2011680" cy="73152"/>
           </a:xfrm>
-          <a:prstGeom prst="roundRect">
+          <a:prstGeom prst="rect">
             <a:avLst/>
           </a:prstGeom>
           <a:solidFill>
@@ -11149,7 +15737,7 @@
         <p:spPr>
           <a:xfrm>
             <a:off x="822960" y="1965960"/>
-            <a:ext cx="4983480" cy="4206240"/>
+            <a:ext cx="5029200" cy="4206240"/>
           </a:xfrm>
           <a:prstGeom prst="rect">
             <a:avLst/>
@@ -11246,8 +15834,8 @@
         </p:nvSpPr>
         <p:spPr>
           <a:xfrm>
-            <a:off x="5806440" y="1051560"/>
-            <a:ext cx="5298947" cy="4629150"/>
+            <a:off x="6080760" y="1965960"/>
+            <a:ext cx="5303520" cy="4572000"/>
           </a:xfrm>
           <a:prstGeom prst="roundRect">
             <a:avLst/>
@@ -11292,8 +15880,8 @@
         </p:nvSpPr>
         <p:spPr>
           <a:xfrm>
-            <a:off x="6080760" y="2726055"/>
-            <a:ext cx="4750307" cy="1280160"/>
+            <a:off x="6355080" y="3611880"/>
+            <a:ext cx="4754880" cy="1280160"/>
           </a:xfrm>
           <a:prstGeom prst="rect">
             <a:avLst/>
@@ -11314,7 +15902,7 @@
                 </a:solidFill>
                 <a:latin typeface="Montserrat"/>
               </a:rPr>
-              <a:t>IMAGEN REALISTA</a:t>
+              <a:t>IMAGEN</a:t>
             </a:r>
           </a:p>
           <a:p>
@@ -11336,6 +15924,18 @@
   <p:clrMapOvr>
     <a:masterClrMapping/>
   </p:clrMapOvr>
+  <mc:AlternateContent xmlns:mc="http://schemas.openxmlformats.org/markup-compatibility/2006">
+    <mc:Choice xmlns:p14="http://schemas.microsoft.com/office/powerpoint/2010/main" Requires="p14">
+      <p:transition spd="med" p14:dur="700">
+        <p14:cube dir="r"/>
+      </p:transition>
+    </mc:Choice>
+    <mc:Fallback>
+      <p:transition spd="med">
+        <p:push dir="r"/>
+      </p:transition>
+    </mc:Fallback>
+  </mc:AlternateContent>
 </p:sld>
 </file>
 
@@ -11423,7 +16023,7 @@
                 </a:solidFill>
                 <a:latin typeface="Montserrat"/>
               </a:rPr>
-              <a:t>005 / 020</a:t>
+              <a:t>005 / 026</a:t>
             </a:r>
           </a:p>
         </p:txBody>
@@ -11532,7 +16132,7 @@
       </p:sp>
       <p:sp>
         <p:nvSpPr>
-          <p:cNvPr id="7" name="Rounded Rectangle 6"/>
+          <p:cNvPr id="7" name="Rectangle 6"/>
           <p:cNvSpPr/>
           <p:nvPr/>
         </p:nvSpPr>
@@ -11541,7 +16141,7 @@
             <a:off x="868680" y="1627632"/>
             <a:ext cx="2011680" cy="73152"/>
           </a:xfrm>
-          <a:prstGeom prst="roundRect">
+          <a:prstGeom prst="rect">
             <a:avLst/>
           </a:prstGeom>
           <a:solidFill>
@@ -11582,8 +16182,8 @@
         </p:nvSpPr>
         <p:spPr>
           <a:xfrm>
-            <a:off x="822960" y="1965960"/>
-            <a:ext cx="4983480" cy="4206240"/>
+            <a:off x="6355080" y="1965960"/>
+            <a:ext cx="5029200" cy="4206240"/>
           </a:xfrm>
           <a:prstGeom prst="rect">
             <a:avLst/>
@@ -11680,8 +16280,8 @@
         </p:nvSpPr>
         <p:spPr>
           <a:xfrm>
-            <a:off x="5806440" y="1051560"/>
-            <a:ext cx="5298947" cy="4629150"/>
+            <a:off x="822960" y="1965960"/>
+            <a:ext cx="5303520" cy="4572000"/>
           </a:xfrm>
           <a:prstGeom prst="roundRect">
             <a:avLst/>
@@ -11726,8 +16326,8 @@
         </p:nvSpPr>
         <p:spPr>
           <a:xfrm>
-            <a:off x="6080760" y="2726055"/>
-            <a:ext cx="4750307" cy="1280160"/>
+            <a:off x="1097280" y="3611880"/>
+            <a:ext cx="4754880" cy="1280160"/>
           </a:xfrm>
           <a:prstGeom prst="rect">
             <a:avLst/>
@@ -11748,7 +16348,7 @@
                 </a:solidFill>
                 <a:latin typeface="Montserrat"/>
               </a:rPr>
-              <a:t>IMAGEN REALISTA</a:t>
+              <a:t>IMAGEN</a:t>
             </a:r>
           </a:p>
           <a:p>
@@ -11770,6 +16370,18 @@
   <p:clrMapOvr>
     <a:masterClrMapping/>
   </p:clrMapOvr>
+  <mc:AlternateContent xmlns:mc="http://schemas.openxmlformats.org/markup-compatibility/2006">
+    <mc:Choice xmlns:p14="http://schemas.microsoft.com/office/powerpoint/2010/main" Requires="p14">
+      <p:transition spd="med" p14:dur="700">
+        <p14:cube dir="l"/>
+      </p:transition>
+    </mc:Choice>
+    <mc:Fallback>
+      <p:transition spd="med">
+        <p:push dir="l"/>
+      </p:transition>
+    </mc:Fallback>
+  </mc:AlternateContent>
 </p:sld>
 </file>
 
@@ -11857,7 +16469,7 @@
                 </a:solidFill>
                 <a:latin typeface="Montserrat"/>
               </a:rPr>
-              <a:t>006 / 020</a:t>
+              <a:t>006 / 026</a:t>
             </a:r>
           </a:p>
         </p:txBody>
@@ -11966,7 +16578,7 @@
       </p:sp>
       <p:sp>
         <p:nvSpPr>
-          <p:cNvPr id="7" name="Rounded Rectangle 6"/>
+          <p:cNvPr id="7" name="Rectangle 6"/>
           <p:cNvSpPr/>
           <p:nvPr/>
         </p:nvSpPr>
@@ -11975,7 +16587,7 @@
             <a:off x="868680" y="1627632"/>
             <a:ext cx="2011680" cy="73152"/>
           </a:xfrm>
-          <a:prstGeom prst="roundRect">
+          <a:prstGeom prst="rect">
             <a:avLst/>
           </a:prstGeom>
           <a:solidFill>
@@ -12017,7 +16629,7 @@
         <p:spPr>
           <a:xfrm>
             <a:off x="822960" y="1965960"/>
-            <a:ext cx="4983480" cy="4206240"/>
+            <a:ext cx="5029200" cy="4206240"/>
           </a:xfrm>
           <a:prstGeom prst="rect">
             <a:avLst/>
@@ -12114,8 +16726,8 @@
         </p:nvSpPr>
         <p:spPr>
           <a:xfrm>
-            <a:off x="5806440" y="1051560"/>
-            <a:ext cx="5298947" cy="4629150"/>
+            <a:off x="6080760" y="1965960"/>
+            <a:ext cx="5303520" cy="4572000"/>
           </a:xfrm>
           <a:prstGeom prst="roundRect">
             <a:avLst/>
@@ -12160,8 +16772,8 @@
         </p:nvSpPr>
         <p:spPr>
           <a:xfrm>
-            <a:off x="6080760" y="2726055"/>
-            <a:ext cx="4750307" cy="1280160"/>
+            <a:off x="6355080" y="3611880"/>
+            <a:ext cx="4754880" cy="1280160"/>
           </a:xfrm>
           <a:prstGeom prst="rect">
             <a:avLst/>
@@ -12182,7 +16794,7 @@
                 </a:solidFill>
                 <a:latin typeface="Montserrat"/>
               </a:rPr>
-              <a:t>IMAGEN REALISTA</a:t>
+              <a:t>IMAGEN</a:t>
             </a:r>
           </a:p>
           <a:p>
@@ -12204,6 +16816,18 @@
   <p:clrMapOvr>
     <a:masterClrMapping/>
   </p:clrMapOvr>
+  <mc:AlternateContent xmlns:mc="http://schemas.openxmlformats.org/markup-compatibility/2006">
+    <mc:Choice xmlns:p14="http://schemas.microsoft.com/office/powerpoint/2010/main" Requires="p14">
+      <p:transition spd="med" p14:dur="700">
+        <p14:cube dir="r"/>
+      </p:transition>
+    </mc:Choice>
+    <mc:Fallback>
+      <p:transition spd="med">
+        <p:push dir="r"/>
+      </p:transition>
+    </mc:Fallback>
+  </mc:AlternateContent>
 </p:sld>
 </file>
 
@@ -12291,7 +16915,7 @@
                 </a:solidFill>
                 <a:latin typeface="Montserrat"/>
               </a:rPr>
-              <a:t>007 / 020</a:t>
+              <a:t>007 / 026</a:t>
             </a:r>
           </a:p>
         </p:txBody>
@@ -12400,7 +17024,7 @@
       </p:sp>
       <p:sp>
         <p:nvSpPr>
-          <p:cNvPr id="7" name="Rounded Rectangle 6"/>
+          <p:cNvPr id="7" name="Rectangle 6"/>
           <p:cNvSpPr/>
           <p:nvPr/>
         </p:nvSpPr>
@@ -12409,7 +17033,7 @@
             <a:off x="868680" y="1627632"/>
             <a:ext cx="2011680" cy="73152"/>
           </a:xfrm>
-          <a:prstGeom prst="roundRect">
+          <a:prstGeom prst="rect">
             <a:avLst/>
           </a:prstGeom>
           <a:solidFill>
@@ -12450,8 +17074,8 @@
         </p:nvSpPr>
         <p:spPr>
           <a:xfrm>
-            <a:off x="822960" y="1965960"/>
-            <a:ext cx="4983480" cy="4206240"/>
+            <a:off x="6355080" y="1965960"/>
+            <a:ext cx="5029200" cy="4206240"/>
           </a:xfrm>
           <a:prstGeom prst="rect">
             <a:avLst/>
@@ -12548,8 +17172,8 @@
         </p:nvSpPr>
         <p:spPr>
           <a:xfrm>
-            <a:off x="5806440" y="1051560"/>
-            <a:ext cx="5298947" cy="4629150"/>
+            <a:off x="822960" y="1965960"/>
+            <a:ext cx="5303520" cy="4572000"/>
           </a:xfrm>
           <a:prstGeom prst="roundRect">
             <a:avLst/>
@@ -12594,8 +17218,8 @@
         </p:nvSpPr>
         <p:spPr>
           <a:xfrm>
-            <a:off x="6080760" y="2726055"/>
-            <a:ext cx="4750307" cy="1280160"/>
+            <a:off x="1097280" y="3611880"/>
+            <a:ext cx="4754880" cy="1280160"/>
           </a:xfrm>
           <a:prstGeom prst="rect">
             <a:avLst/>
@@ -12616,7 +17240,7 @@
                 </a:solidFill>
                 <a:latin typeface="Montserrat"/>
               </a:rPr>
-              <a:t>IMAGEN REALISTA</a:t>
+              <a:t>IMAGEN</a:t>
             </a:r>
           </a:p>
           <a:p>
@@ -12638,6 +17262,18 @@
   <p:clrMapOvr>
     <a:masterClrMapping/>
   </p:clrMapOvr>
+  <mc:AlternateContent xmlns:mc="http://schemas.openxmlformats.org/markup-compatibility/2006">
+    <mc:Choice xmlns:p14="http://schemas.microsoft.com/office/powerpoint/2010/main" Requires="p14">
+      <p:transition spd="med" p14:dur="700">
+        <p14:cube dir="l"/>
+      </p:transition>
+    </mc:Choice>
+    <mc:Fallback>
+      <p:transition spd="med">
+        <p:push dir="l"/>
+      </p:transition>
+    </mc:Fallback>
+  </mc:AlternateContent>
 </p:sld>
 </file>
 
@@ -12725,7 +17361,7 @@
                 </a:solidFill>
                 <a:latin typeface="Montserrat"/>
               </a:rPr>
-              <a:t>008 / 020</a:t>
+              <a:t>008 / 026</a:t>
             </a:r>
           </a:p>
         </p:txBody>
@@ -12834,7 +17470,7 @@
       </p:sp>
       <p:sp>
         <p:nvSpPr>
-          <p:cNvPr id="7" name="Rounded Rectangle 6"/>
+          <p:cNvPr id="7" name="Rectangle 6"/>
           <p:cNvSpPr/>
           <p:nvPr/>
         </p:nvSpPr>
@@ -12843,7 +17479,7 @@
             <a:off x="868680" y="1627632"/>
             <a:ext cx="2011680" cy="73152"/>
           </a:xfrm>
-          <a:prstGeom prst="roundRect">
+          <a:prstGeom prst="rect">
             <a:avLst/>
           </a:prstGeom>
           <a:solidFill>
@@ -12885,7 +17521,7 @@
         <p:spPr>
           <a:xfrm>
             <a:off x="822960" y="1965960"/>
-            <a:ext cx="4983480" cy="4206240"/>
+            <a:ext cx="5029200" cy="4206240"/>
           </a:xfrm>
           <a:prstGeom prst="rect">
             <a:avLst/>
@@ -12982,8 +17618,8 @@
         </p:nvSpPr>
         <p:spPr>
           <a:xfrm>
-            <a:off x="5806440" y="1051560"/>
-            <a:ext cx="5298947" cy="4629150"/>
+            <a:off x="6080760" y="1965960"/>
+            <a:ext cx="5303520" cy="4572000"/>
           </a:xfrm>
           <a:prstGeom prst="roundRect">
             <a:avLst/>
@@ -13028,8 +17664,8 @@
         </p:nvSpPr>
         <p:spPr>
           <a:xfrm>
-            <a:off x="6080760" y="2726055"/>
-            <a:ext cx="4750307" cy="1280160"/>
+            <a:off x="6355080" y="3611880"/>
+            <a:ext cx="4754880" cy="1280160"/>
           </a:xfrm>
           <a:prstGeom prst="rect">
             <a:avLst/>
@@ -13050,7 +17686,7 @@
                 </a:solidFill>
                 <a:latin typeface="Montserrat"/>
               </a:rPr>
-              <a:t>IMAGEN REALISTA</a:t>
+              <a:t>IMAGEN</a:t>
             </a:r>
           </a:p>
           <a:p>
@@ -13072,6 +17708,18 @@
   <p:clrMapOvr>
     <a:masterClrMapping/>
   </p:clrMapOvr>
+  <mc:AlternateContent xmlns:mc="http://schemas.openxmlformats.org/markup-compatibility/2006">
+    <mc:Choice xmlns:p14="http://schemas.microsoft.com/office/powerpoint/2010/main" Requires="p14">
+      <p:transition spd="med" p14:dur="700">
+        <p14:cube dir="r"/>
+      </p:transition>
+    </mc:Choice>
+    <mc:Fallback>
+      <p:transition spd="med">
+        <p:push dir="r"/>
+      </p:transition>
+    </mc:Fallback>
+  </mc:AlternateContent>
 </p:sld>
 </file>
 
@@ -13159,7 +17807,7 @@
                 </a:solidFill>
                 <a:latin typeface="Montserrat"/>
               </a:rPr>
-              <a:t>009 / 020</a:t>
+              <a:t>009 / 026</a:t>
             </a:r>
           </a:p>
         </p:txBody>
@@ -13206,7 +17854,7 @@
         </p:nvSpPr>
         <p:spPr>
           <a:xfrm>
-            <a:off x="822960" y="457200"/>
+            <a:off x="822960" y="411480"/>
             <a:ext cx="10058400" cy="365760"/>
           </a:xfrm>
           <a:prstGeom prst="rect">
@@ -13227,7 +17875,7 @@
                 </a:solidFill>
                 <a:latin typeface="Montserrat"/>
               </a:rPr>
-              <a:t>TIRO NATURAL · PUNTUACIÓN</a:t>
+              <a:t>TIRO NATURAL · SALIDA DIRECTA</a:t>
             </a:r>
           </a:p>
         </p:txBody>
@@ -13240,8 +17888,8 @@
         </p:nvSpPr>
         <p:spPr>
           <a:xfrm>
-            <a:off x="822960" y="868680"/>
-            <a:ext cx="10515600" cy="914400"/>
+            <a:off x="822960" y="777240"/>
+            <a:ext cx="10515600" cy="822960"/>
           </a:xfrm>
           <a:prstGeom prst="rect">
             <a:avLst/>
@@ -13255,29 +17903,29 @@
           <a:lstStyle/>
           <a:p>
             <a:r>
-              <a:rPr sz="2800" b="1" i="0">
+              <a:rPr sz="2600" b="1" i="0">
                 <a:solidFill>
                   <a:srgbClr val="1E2761"/>
                 </a:solidFill>
                 <a:latin typeface="Montserrat"/>
               </a:rPr>
-              <a:t>La puntuación del conducto (tabla 4)</a:t>
-            </a:r>
-          </a:p>
-        </p:txBody>
-      </p:sp>
-      <p:sp>
-        <p:nvSpPr>
-          <p:cNvPr id="7" name="Rounded Rectangle 6"/>
+              <a:t>Diámetros mínimos del conducto (tabla 3)</a:t>
+            </a:r>
+          </a:p>
+        </p:txBody>
+      </p:sp>
+      <p:sp>
+        <p:nvSpPr>
+          <p:cNvPr id="7" name="Rectangle 6"/>
           <p:cNvSpPr/>
           <p:nvPr/>
         </p:nvSpPr>
         <p:spPr>
           <a:xfrm>
-            <a:off x="868680" y="1627632"/>
+            <a:off x="868680" y="1481328"/>
             <a:ext cx="2011680" cy="73152"/>
           </a:xfrm>
-          <a:prstGeom prst="roundRect">
+          <a:prstGeom prst="rect">
             <a:avLst/>
           </a:prstGeom>
           <a:solidFill>
@@ -13310,114 +17958,519 @@
           </a:p>
         </p:txBody>
       </p:sp>
-      <p:sp>
-        <p:nvSpPr>
-          <p:cNvPr id="8" name="TextBox 7"/>
-          <p:cNvSpPr txBox="1"/>
-          <p:nvPr/>
-        </p:nvSpPr>
-        <p:spPr>
-          <a:xfrm>
-            <a:off x="822960" y="1965960"/>
-            <a:ext cx="4983480" cy="4206240"/>
-          </a:xfrm>
-          <a:prstGeom prst="rect">
-            <a:avLst/>
-          </a:prstGeom>
-          <a:noFill/>
-        </p:spPr>
-        <p:txBody>
-          <a:bodyPr wrap="square">
-            <a:spAutoFit/>
-          </a:bodyPr>
-          <a:lstStyle/>
-          <a:p>
-            <a:pPr>
-              <a:spcAft>
-                <a:spcPts val="1100"/>
-              </a:spcAft>
-            </a:pPr>
-            <a:r>
-              <a:rPr sz="1600" b="1" i="0">
-                <a:solidFill>
-                  <a:srgbClr val="E8801A"/>
-                </a:solidFill>
-                <a:latin typeface="Montserrat"/>
-              </a:rPr>
-              <a:t>▸  </a:t>
-            </a:r>
-            <a:r>
-              <a:rPr sz="1600" b="0" i="0">
-                <a:solidFill>
-                  <a:srgbClr val="1B2330"/>
-                </a:solidFill>
-                <a:latin typeface="Montserrat"/>
-              </a:rPr>
-              <a:t>Subir suma: +0,1 por cada cm</a:t>
-            </a:r>
-          </a:p>
-          <a:p>
-            <a:pPr>
-              <a:spcAft>
-                <a:spcPts val="1100"/>
-              </a:spcAft>
-            </a:pPr>
-            <a:r>
-              <a:rPr sz="1600" b="1" i="0">
-                <a:solidFill>
-                  <a:srgbClr val="E8801A"/>
-                </a:solidFill>
-                <a:latin typeface="Montserrat"/>
-              </a:rPr>
-              <a:t>▸  </a:t>
-            </a:r>
-            <a:r>
-              <a:rPr sz="1600" b="0" i="0">
-                <a:solidFill>
-                  <a:srgbClr val="1B2330"/>
-                </a:solidFill>
-                <a:latin typeface="Montserrat"/>
-              </a:rPr>
-              <a:t>Codos y tramos horizontales restan</a:t>
-            </a:r>
-          </a:p>
-          <a:p>
-            <a:pPr>
-              <a:spcAft>
-                <a:spcPts val="1100"/>
-              </a:spcAft>
-            </a:pPr>
-            <a:r>
-              <a:rPr sz="1600" b="1" i="0">
-                <a:solidFill>
-                  <a:srgbClr val="E8801A"/>
-                </a:solidFill>
-                <a:latin typeface="Montserrat"/>
-              </a:rPr>
-              <a:t>▸  </a:t>
-            </a:r>
-            <a:r>
-              <a:rPr sz="1600" b="0" i="0">
-                <a:solidFill>
-                  <a:srgbClr val="1B2330"/>
-                </a:solidFill>
-                <a:latin typeface="Montserrat"/>
-              </a:rPr>
-              <a:t>Hay que acabar en ≥ +1</a:t>
-            </a:r>
-          </a:p>
-        </p:txBody>
-      </p:sp>
-      <p:sp>
-        <p:nvSpPr>
-          <p:cNvPr id="9" name="imgph" descr="IMGQ:chimney flue diagram vertical rise"/>
+      <p:graphicFrame>
+        <p:nvGraphicFramePr>
+          <p:cNvPr id="8" name="Table 7"/>
+          <p:cNvGraphicFramePr>
+            <a:graphicFrameLocks noGrp="1"/>
+          </p:cNvGraphicFramePr>
+          <p:nvPr/>
+        </p:nvGraphicFramePr>
+        <p:xfrm>
+          <a:off x="548640" y="1783080"/>
+          <a:ext cx="11091672" cy="4023360"/>
+        </p:xfrm>
+        <a:graphic>
+          <a:graphicData uri="http://schemas.openxmlformats.org/drawingml/2006/table">
+            <a:tbl>
+              <a:tblPr firstRow="1" bandRow="1">
+                <a:tableStyleId>{5C22544A-7EE6-4342-B048-85BDC9FD1C3A}</a:tableStyleId>
+              </a:tblPr>
+              <a:tblGrid>
+                <a:gridCol w="3697224"/>
+                <a:gridCol w="3697224"/>
+                <a:gridCol w="3697224"/>
+              </a:tblGrid>
+              <a:tr h="574765">
+                <a:tc>
+                  <a:txBody>
+                    <a:bodyPr/>
+                    <a:lstStyle/>
+                    <a:p>
+                      <a:r>
+                        <a:rPr sz="1200" b="1" i="0">
+                          <a:solidFill>
+                            <a:srgbClr val="FFFFFF"/>
+                          </a:solidFill>
+                          <a:latin typeface="Montserrat"/>
+                        </a:rPr>
+                        <a:t>Consumo nominal Qₙ (kW)</a:t>
+                      </a:r>
+                    </a:p>
+                  </a:txBody>
+                  <a:tcPr>
+                    <a:solidFill>
+                      <a:srgbClr val="1E2761"/>
+                    </a:solidFill>
+                  </a:tcPr>
+                </a:tc>
+                <a:tc>
+                  <a:txBody>
+                    <a:bodyPr/>
+                    <a:lstStyle/>
+                    <a:p>
+                      <a:r>
+                        <a:rPr sz="1200" b="1" i="0">
+                          <a:solidFill>
+                            <a:srgbClr val="FFFFFF"/>
+                          </a:solidFill>
+                          <a:latin typeface="Montserrat"/>
+                        </a:rPr>
+                        <a:t>Diámetro interior mínimo (mm)</a:t>
+                      </a:r>
+                    </a:p>
+                  </a:txBody>
+                  <a:tcPr>
+                    <a:solidFill>
+                      <a:srgbClr val="1E2761"/>
+                    </a:solidFill>
+                  </a:tcPr>
+                </a:tc>
+                <a:tc>
+                  <a:txBody>
+                    <a:bodyPr/>
+                    <a:lstStyle/>
+                    <a:p>
+                      <a:r>
+                        <a:rPr sz="1200" b="1" i="0">
+                          <a:solidFill>
+                            <a:srgbClr val="FFFFFF"/>
+                          </a:solidFill>
+                          <a:latin typeface="Montserrat"/>
+                        </a:rPr>
+                        <a:t>Puntuación mínima (tabla 4)</a:t>
+                      </a:r>
+                    </a:p>
+                  </a:txBody>
+                  <a:tcPr>
+                    <a:solidFill>
+                      <a:srgbClr val="1E2761"/>
+                    </a:solidFill>
+                  </a:tcPr>
+                </a:tc>
+              </a:tr>
+              <a:tr h="574765">
+                <a:tc>
+                  <a:txBody>
+                    <a:bodyPr/>
+                    <a:lstStyle/>
+                    <a:p>
+                      <a:r>
+                        <a:rPr sz="1200" b="0" i="0">
+                          <a:solidFill>
+                            <a:srgbClr val="1B2330"/>
+                          </a:solidFill>
+                          <a:latin typeface="Montserrat"/>
+                        </a:rPr>
+                        <a:t>Qₙ ≤ 11,5</a:t>
+                      </a:r>
+                    </a:p>
+                  </a:txBody>
+                  <a:tcPr>
+                    <a:solidFill>
+                      <a:srgbClr val="F6F8FC"/>
+                    </a:solidFill>
+                  </a:tcPr>
+                </a:tc>
+                <a:tc>
+                  <a:txBody>
+                    <a:bodyPr/>
+                    <a:lstStyle/>
+                    <a:p>
+                      <a:r>
+                        <a:rPr sz="1200" b="0" i="0">
+                          <a:solidFill>
+                            <a:srgbClr val="1B2330"/>
+                          </a:solidFill>
+                          <a:latin typeface="Montserrat"/>
+                        </a:rPr>
+                        <a:t>90</a:t>
+                      </a:r>
+                    </a:p>
+                  </a:txBody>
+                  <a:tcPr>
+                    <a:solidFill>
+                      <a:srgbClr val="F6F8FC"/>
+                    </a:solidFill>
+                  </a:tcPr>
+                </a:tc>
+                <a:tc>
+                  <a:txBody>
+                    <a:bodyPr/>
+                    <a:lstStyle/>
+                    <a:p>
+                      <a:r>
+                        <a:rPr sz="1200" b="0" i="0">
+                          <a:solidFill>
+                            <a:srgbClr val="1B2330"/>
+                          </a:solidFill>
+                          <a:latin typeface="Montserrat"/>
+                        </a:rPr>
+                        <a:t>+ 1</a:t>
+                      </a:r>
+                    </a:p>
+                  </a:txBody>
+                  <a:tcPr>
+                    <a:solidFill>
+                      <a:srgbClr val="F6F8FC"/>
+                    </a:solidFill>
+                  </a:tcPr>
+                </a:tc>
+              </a:tr>
+              <a:tr h="574765">
+                <a:tc>
+                  <a:txBody>
+                    <a:bodyPr/>
+                    <a:lstStyle/>
+                    <a:p>
+                      <a:r>
+                        <a:rPr sz="1200" b="0" i="0">
+                          <a:solidFill>
+                            <a:srgbClr val="1B2330"/>
+                          </a:solidFill>
+                          <a:latin typeface="Montserrat"/>
+                        </a:rPr>
+                        <a:t>11,5 &lt; Qₙ ≤ 23,0</a:t>
+                      </a:r>
+                    </a:p>
+                  </a:txBody>
+                  <a:tcPr>
+                    <a:solidFill>
+                      <a:srgbClr val="FFFFFF"/>
+                    </a:solidFill>
+                  </a:tcPr>
+                </a:tc>
+                <a:tc>
+                  <a:txBody>
+                    <a:bodyPr/>
+                    <a:lstStyle/>
+                    <a:p>
+                      <a:r>
+                        <a:rPr sz="1200" b="0" i="0">
+                          <a:solidFill>
+                            <a:srgbClr val="1B2330"/>
+                          </a:solidFill>
+                          <a:latin typeface="Montserrat"/>
+                        </a:rPr>
+                        <a:t>110</a:t>
+                      </a:r>
+                    </a:p>
+                  </a:txBody>
+                  <a:tcPr>
+                    <a:solidFill>
+                      <a:srgbClr val="FFFFFF"/>
+                    </a:solidFill>
+                  </a:tcPr>
+                </a:tc>
+                <a:tc>
+                  <a:txBody>
+                    <a:bodyPr/>
+                    <a:lstStyle/>
+                    <a:p>
+                      <a:r>
+                        <a:rPr sz="1200" b="0" i="0">
+                          <a:solidFill>
+                            <a:srgbClr val="1B2330"/>
+                          </a:solidFill>
+                          <a:latin typeface="Montserrat"/>
+                        </a:rPr>
+                        <a:t>+ 1</a:t>
+                      </a:r>
+                    </a:p>
+                  </a:txBody>
+                  <a:tcPr>
+                    <a:solidFill>
+                      <a:srgbClr val="FFFFFF"/>
+                    </a:solidFill>
+                  </a:tcPr>
+                </a:tc>
+              </a:tr>
+              <a:tr h="574765">
+                <a:tc>
+                  <a:txBody>
+                    <a:bodyPr/>
+                    <a:lstStyle/>
+                    <a:p>
+                      <a:r>
+                        <a:rPr sz="1200" b="0" i="0">
+                          <a:solidFill>
+                            <a:srgbClr val="1B2330"/>
+                          </a:solidFill>
+                          <a:latin typeface="Montserrat"/>
+                        </a:rPr>
+                        <a:t>23,0 &lt; Qₙ ≤ 30,7</a:t>
+                      </a:r>
+                    </a:p>
+                  </a:txBody>
+                  <a:tcPr>
+                    <a:solidFill>
+                      <a:srgbClr val="F6F8FC"/>
+                    </a:solidFill>
+                  </a:tcPr>
+                </a:tc>
+                <a:tc>
+                  <a:txBody>
+                    <a:bodyPr/>
+                    <a:lstStyle/>
+                    <a:p>
+                      <a:r>
+                        <a:rPr sz="1200" b="0" i="0">
+                          <a:solidFill>
+                            <a:srgbClr val="1B2330"/>
+                          </a:solidFill>
+                          <a:latin typeface="Montserrat"/>
+                        </a:rPr>
+                        <a:t>125</a:t>
+                      </a:r>
+                    </a:p>
+                  </a:txBody>
+                  <a:tcPr>
+                    <a:solidFill>
+                      <a:srgbClr val="F6F8FC"/>
+                    </a:solidFill>
+                  </a:tcPr>
+                </a:tc>
+                <a:tc>
+                  <a:txBody>
+                    <a:bodyPr/>
+                    <a:lstStyle/>
+                    <a:p>
+                      <a:r>
+                        <a:rPr sz="1200" b="0" i="0">
+                          <a:solidFill>
+                            <a:srgbClr val="1B2330"/>
+                          </a:solidFill>
+                          <a:latin typeface="Montserrat"/>
+                        </a:rPr>
+                        <a:t>+ 1</a:t>
+                      </a:r>
+                    </a:p>
+                  </a:txBody>
+                  <a:tcPr>
+                    <a:solidFill>
+                      <a:srgbClr val="F6F8FC"/>
+                    </a:solidFill>
+                  </a:tcPr>
+                </a:tc>
+              </a:tr>
+              <a:tr h="574765">
+                <a:tc>
+                  <a:txBody>
+                    <a:bodyPr/>
+                    <a:lstStyle/>
+                    <a:p>
+                      <a:r>
+                        <a:rPr sz="1200" b="0" i="0">
+                          <a:solidFill>
+                            <a:srgbClr val="1B2330"/>
+                          </a:solidFill>
+                          <a:latin typeface="Montserrat"/>
+                        </a:rPr>
+                        <a:t>30,7 &lt; Qₙ ≤ 39,0</a:t>
+                      </a:r>
+                    </a:p>
+                  </a:txBody>
+                  <a:tcPr>
+                    <a:solidFill>
+                      <a:srgbClr val="FFFFFF"/>
+                    </a:solidFill>
+                  </a:tcPr>
+                </a:tc>
+                <a:tc>
+                  <a:txBody>
+                    <a:bodyPr/>
+                    <a:lstStyle/>
+                    <a:p>
+                      <a:r>
+                        <a:rPr sz="1200" b="0" i="0">
+                          <a:solidFill>
+                            <a:srgbClr val="1B2330"/>
+                          </a:solidFill>
+                          <a:latin typeface="Montserrat"/>
+                        </a:rPr>
+                        <a:t>139</a:t>
+                      </a:r>
+                    </a:p>
+                  </a:txBody>
+                  <a:tcPr>
+                    <a:solidFill>
+                      <a:srgbClr val="FFFFFF"/>
+                    </a:solidFill>
+                  </a:tcPr>
+                </a:tc>
+                <a:tc>
+                  <a:txBody>
+                    <a:bodyPr/>
+                    <a:lstStyle/>
+                    <a:p>
+                      <a:r>
+                        <a:rPr sz="1200" b="0" i="0">
+                          <a:solidFill>
+                            <a:srgbClr val="1B2330"/>
+                          </a:solidFill>
+                          <a:latin typeface="Montserrat"/>
+                        </a:rPr>
+                        <a:t>+ 1</a:t>
+                      </a:r>
+                    </a:p>
+                  </a:txBody>
+                  <a:tcPr>
+                    <a:solidFill>
+                      <a:srgbClr val="FFFFFF"/>
+                    </a:solidFill>
+                  </a:tcPr>
+                </a:tc>
+              </a:tr>
+              <a:tr h="574765">
+                <a:tc>
+                  <a:txBody>
+                    <a:bodyPr/>
+                    <a:lstStyle/>
+                    <a:p>
+                      <a:r>
+                        <a:rPr sz="1200" b="0" i="0">
+                          <a:solidFill>
+                            <a:srgbClr val="1B2330"/>
+                          </a:solidFill>
+                          <a:latin typeface="Montserrat"/>
+                        </a:rPr>
+                        <a:t>39,0 &lt; Qₙ ≤ 45,0</a:t>
+                      </a:r>
+                    </a:p>
+                  </a:txBody>
+                  <a:tcPr>
+                    <a:solidFill>
+                      <a:srgbClr val="F6F8FC"/>
+                    </a:solidFill>
+                  </a:tcPr>
+                </a:tc>
+                <a:tc>
+                  <a:txBody>
+                    <a:bodyPr/>
+                    <a:lstStyle/>
+                    <a:p>
+                      <a:r>
+                        <a:rPr sz="1200" b="0" i="0">
+                          <a:solidFill>
+                            <a:srgbClr val="1B2330"/>
+                          </a:solidFill>
+                          <a:latin typeface="Montserrat"/>
+                        </a:rPr>
+                        <a:t>150</a:t>
+                      </a:r>
+                    </a:p>
+                  </a:txBody>
+                  <a:tcPr>
+                    <a:solidFill>
+                      <a:srgbClr val="F6F8FC"/>
+                    </a:solidFill>
+                  </a:tcPr>
+                </a:tc>
+                <a:tc>
+                  <a:txBody>
+                    <a:bodyPr/>
+                    <a:lstStyle/>
+                    <a:p>
+                      <a:r>
+                        <a:rPr sz="1200" b="0" i="0">
+                          <a:solidFill>
+                            <a:srgbClr val="1B2330"/>
+                          </a:solidFill>
+                          <a:latin typeface="Montserrat"/>
+                        </a:rPr>
+                        <a:t>+ 1</a:t>
+                      </a:r>
+                    </a:p>
+                  </a:txBody>
+                  <a:tcPr>
+                    <a:solidFill>
+                      <a:srgbClr val="F6F8FC"/>
+                    </a:solidFill>
+                  </a:tcPr>
+                </a:tc>
+              </a:tr>
+              <a:tr h="574770">
+                <a:tc>
+                  <a:txBody>
+                    <a:bodyPr/>
+                    <a:lstStyle/>
+                    <a:p>
+                      <a:r>
+                        <a:rPr sz="1200" b="0" i="0">
+                          <a:solidFill>
+                            <a:srgbClr val="1B2330"/>
+                          </a:solidFill>
+                          <a:latin typeface="Montserrat"/>
+                        </a:rPr>
+                        <a:t>Qₙ &gt; 45,0</a:t>
+                      </a:r>
+                    </a:p>
+                  </a:txBody>
+                  <a:tcPr>
+                    <a:solidFill>
+                      <a:srgbClr val="FFFFFF"/>
+                    </a:solidFill>
+                  </a:tcPr>
+                </a:tc>
+                <a:tc>
+                  <a:txBody>
+                    <a:bodyPr/>
+                    <a:lstStyle/>
+                    <a:p>
+                      <a:r>
+                        <a:rPr sz="1200" b="0" i="0">
+                          <a:solidFill>
+                            <a:srgbClr val="1B2330"/>
+                          </a:solidFill>
+                          <a:latin typeface="Montserrat"/>
+                        </a:rPr>
+                        <a:t>175</a:t>
+                      </a:r>
+                    </a:p>
+                  </a:txBody>
+                  <a:tcPr>
+                    <a:solidFill>
+                      <a:srgbClr val="FFFFFF"/>
+                    </a:solidFill>
+                  </a:tcPr>
+                </a:tc>
+                <a:tc>
+                  <a:txBody>
+                    <a:bodyPr/>
+                    <a:lstStyle/>
+                    <a:p>
+                      <a:r>
+                        <a:rPr sz="1200" b="0" i="0">
+                          <a:solidFill>
+                            <a:srgbClr val="1B2330"/>
+                          </a:solidFill>
+                          <a:latin typeface="Montserrat"/>
+                        </a:rPr>
+                        <a:t>+ 1</a:t>
+                      </a:r>
+                    </a:p>
+                  </a:txBody>
+                  <a:tcPr>
+                    <a:solidFill>
+                      <a:srgbClr val="FFFFFF"/>
+                    </a:solidFill>
+                  </a:tcPr>
+                </a:tc>
+              </a:tr>
+            </a:tbl>
+          </a:graphicData>
+        </a:graphic>
+      </p:graphicFrame>
+      <p:sp>
+        <p:nvSpPr>
+          <p:cNvPr id="9" name="Rounded Rectangle 8"/>
           <p:cNvSpPr/>
           <p:nvPr/>
         </p:nvSpPr>
         <p:spPr>
           <a:xfrm>
-            <a:off x="5806440" y="1051560"/>
-            <a:ext cx="5298947" cy="4629150"/>
+            <a:off x="548640" y="5943600"/>
+            <a:ext cx="11091672" cy="384048"/>
           </a:xfrm>
           <a:prstGeom prst="roundRect">
             <a:avLst/>
@@ -13427,7 +18480,7 @@
           </a:solidFill>
           <a:ln w="12700">
             <a:solidFill>
-              <a:srgbClr val="C7D2E6"/>
+              <a:srgbClr val="D7DEEA"/>
             </a:solidFill>
           </a:ln>
           <a:effectLst/>
@@ -13462,8 +18515,8 @@
         </p:nvSpPr>
         <p:spPr>
           <a:xfrm>
-            <a:off x="6080760" y="2726055"/>
-            <a:ext cx="4750307" cy="1280160"/>
+            <a:off x="731520" y="5961888"/>
+            <a:ext cx="10789920" cy="365760"/>
           </a:xfrm>
           <a:prstGeom prst="rect">
             <a:avLst/>
@@ -13476,27 +18529,23 @@
           </a:bodyPr>
           <a:lstStyle/>
           <a:p>
-            <a:pPr algn="ctr"/>
-            <a:r>
-              <a:rPr sz="1400" b="1" i="0">
-                <a:solidFill>
-                  <a:srgbClr val="64748B"/>
-                </a:solidFill>
-                <a:latin typeface="Montserrat"/>
-              </a:rPr>
-              <a:t>IMAGEN REALISTA</a:t>
-            </a:r>
-          </a:p>
-          <a:p>
-            <a:pPr algn="ctr"/>
-            <a:r>
-              <a:rPr sz="1100" b="0" i="1">
-                <a:solidFill>
-                  <a:srgbClr val="64748B"/>
-                </a:solidFill>
-                <a:latin typeface="Montserrat"/>
-              </a:rPr>
-              <a:t>chimney flue diagram vertical rise</a:t>
+            <a:r>
+              <a:rPr sz="1100" b="1" i="0">
+                <a:solidFill>
+                  <a:srgbClr val="E8801A"/>
+                </a:solidFill>
+                <a:latin typeface="Montserrat"/>
+              </a:rPr>
+              <a:t>Qué significa:  </a:t>
+            </a:r>
+            <a:r>
+              <a:rPr sz="1100" b="0" i="0">
+                <a:solidFill>
+                  <a:srgbClr val="1B2330"/>
+                </a:solidFill>
+                <a:latin typeface="Montserrat"/>
+              </a:rPr>
+              <a:t>A más kilovatios, más humos y más diámetro. Nunca por debajo de la tabla ni con reducciones; la puntuación final, siempre ≥ +1.</a:t>
             </a:r>
           </a:p>
         </p:txBody>
@@ -13506,6 +18555,18 @@
   <p:clrMapOvr>
     <a:masterClrMapping/>
   </p:clrMapOvr>
+  <mc:AlternateContent xmlns:mc="http://schemas.openxmlformats.org/markup-compatibility/2006">
+    <mc:Choice xmlns:p14="http://schemas.microsoft.com/office/powerpoint/2010/main" Requires="p14">
+      <p:transition spd="med" p14:dur="700">
+        <p14:cube dir="l"/>
+      </p:transition>
+    </mc:Choice>
+    <mc:Fallback>
+      <p:transition spd="med">
+        <p:push dir="l"/>
+      </p:transition>
+    </mc:Fallback>
+  </mc:AlternateContent>
 </p:sld>
 </file>
 

--- a/Curso Gas B/13 - UNE 60670 - Ventilacion y evacuacion de humos/13 - UNE 60670 - Ventilacion y evacuacion de humos - Vídeo 3.pptx
+++ b/Curso Gas B/13 - UNE 60670 - Ventilacion y evacuacion de humos/13 - UNE 60670 - Ventilacion y evacuacion de humos - Vídeo 3.pptx
@@ -682,7 +682,7 @@
           </a:p>
           <a:p>
             <a:r>
-              <a:t>N2: Con la tabla cuatro, que es un juego de sumar y restar. Ganar altura suma: cero coma uno puntos por cada centímetro que sube el conducto, porque la altura es lo que empuja los humos hacia arriba. A partir de ahí, casi todo resta. Un codo cerrado, de más de cuarenta y cinco grados, que pase de vertical a horizontal, quita dos puntos; los codos suaves, de hasta cuarenta y cinco grados, restan menos, un punto o unas décimas. Cada metro de tramo recto resta medio punto, y el deflector del extremo, tres décimas. Sumas todo y el resultado tiene que dar al menos más uno. Ejemplo de obra: un conducto vertical y corto suma altura y apenas resta, aprueba de sobra; uno muy tumbado y con codos suspende, y eso en la práctica es revoco. La regla: sube mucho y dobla poco.</a:t>
+              <a:t>N2: Presta atención a esta tabla, la tabla cuatro; es la lista de singularidades del conducto, cada una con los puntos que suma o resta, y funciona como un juego de sumar y restar. Va así. Lo único que suma es ganar altura: cero coma uno puntos por cada centímetro que sube el conducto, porque la altura es lo que empuja los humos hacia arriba. A partir de ahí, casi todo resta. Un codo cerrado, de más de cuarenta y cinco grados, que pase de vertical a horizontal, resta dos puntos. Un codo suave, de hasta cuarenta y cinco grados ascendente, resta uno. Los codos que van de horizontal a vertical restan solo tres décimas, y los suaves ascendentes una décima. Cada metro de tramo recto resta medio punto. Y el deflector del extremo, en tipo B, resta tres décimas. Sumas todo y el resultado tiene que quedar en al menos más uno. Ejemplo de obra: un conducto vertical y corto suma altura y apenas resta, aprueba de sobra; uno muy tumbado y lleno de codos suspende, y eso en la práctica es revoco. La regla: sube mucho y dobla poco.</a:t>
             </a:r>
           </a:p>
         </p:txBody>
@@ -827,12 +827,12 @@
           <a:lstStyle/>
           <a:p>
             <a:r>
-              <a:t>N1: Chuleta de distancias del extremo. ¿Cuánto al muro que el tubo atraviesa?</a:t>
-            </a:r>
-          </a:p>
-          <a:p>
-            <a:r>
-              <a:t>N2: Recuerda que casi todo es cuarenta, pero hay dos excepciones. Esta es una de ellas, la más pequeña.</a:t>
+              <a:t>N1: Chuleta de distancias del extremo. Escucha: en una salida de tiro natural a fachada, ¿qué distancia se guarda respecto al muro que atraviesa? Y las cuatro opciones. Opción A: diez centímetros. Opción B: veinte centímetros. Opción C: cuarenta centímetros. Opción D: dos metros veinte.</a:t>
+            </a:r>
+          </a:p>
+          <a:p>
+            <a:r>
+              <a:t>N2: Piénsalo un momento. Pista: casi todas las distancias son cuarenta, pero hay dos excepciones, y esta es la más pequeña.</a:t>
             </a:r>
           </a:p>
         </p:txBody>
@@ -902,12 +902,17 @@
           <a:lstStyle/>
           <a:p>
             <a:r>
-              <a:t>N1: ¿Por qué diez?</a:t>
-            </a:r>
-          </a:p>
-          <a:p>
-            <a:r>
-              <a:t>N2: Porque la regla mnemotécnica es «casi todo cuarenta, dos excepciones». Cuarenta centímetros a aberturas permanentes, a ventanas o puertas de otro local, a paredes laterales y a cornisas y aleros. Las dos que se salen: diez centímetros al muro que el tubo atraviesa, y veinte centímetros a cualquier otro resalte. Y aparte, dos metros veinte al suelo exterior. El truco: memoriza las dos excepciones, diez y veinte, y todo lo demás es cuarenta.</a:t>
+              <a:t>N2: La respuesta correcta es la opción A: diez centímetros. La regla mnemotécnica es «casi todo cuarenta, dos excepciones». Cuarenta centímetros a aberturas permanentes, a ventanas o puertas de otro local, a paredes laterales y a cornisas y aleros. Las dos que se salen: diez centímetros al muro que el tubo atraviesa, y veinte centímetros a cualquier otro resalte. Y aparte, dos metros veinte al suelo exterior.</a:t>
+            </a:r>
+          </a:p>
+          <a:p>
+            <a:r>
+              <a:t>N1: ¿El truco?</a:t>
+            </a:r>
+          </a:p>
+          <a:p>
+            <a:r>
+              <a:t>N2: Memoriza solo las dos excepciones, diez y veinte; todo lo demás es cuarenta.</a:t>
             </a:r>
           </a:p>
         </p:txBody>
@@ -1577,12 +1582,12 @@
           <a:lstStyle/>
           <a:p>
             <a:r>
-              <a:t>N1: La lista de «no mezclar». De estas cuatro, ¿cuál sí se permite sin líos?</a:t>
-            </a:r>
-          </a:p>
-          <a:p>
-            <a:r>
-              <a:t>N2: Tres son prohibiciones que caen siempre. Busca la que no rompe ninguna regla.</a:t>
+              <a:t>N1: La lista de «no mezclar». Escucha la pregunta: ¿cuál de estas conexiones a una misma chimenea está permitida sin requisitos especiales? Y las cuatro opciones. Opción A: un aparato de tiro natural con otro de tiro forzado. Opción B: una campana de cocina con extracción mecánica. Opción C: dos aparatos de no condensación compatibles. Opción D: un aparato de gas con una caldera de gasóleo.</a:t>
+            </a:r>
+          </a:p>
+          <a:p>
+            <a:r>
+              <a:t>N2: Tómate un momento. Pista: tres de ellas son prohibiciones que caen siempre; busca la única que no rompe ninguna regla.</a:t>
             </a:r>
           </a:p>
         </p:txBody>
@@ -1652,12 +1657,17 @@
           <a:lstStyle/>
           <a:p>
             <a:r>
-              <a:t>N1: ¿Por qué esa?</a:t>
-            </a:r>
-          </a:p>
-          <a:p>
-            <a:r>
-              <a:t>N2: Porque las otras tres son prohibiciones de la norma: no se juntan tiro natural y tiro forzado en el mismo tubo vertical, porque el ventilador de uno revoca al otro; no se conecta una campana o un extractor a la chimenea del aparato, porque chuparía los humos; y no se mezcla el gas con gasóleo o carbón. En cambio, dos aparatos de no condensación compatibles sí pueden compartir chimenea. El truco: si en la opción aparece «tiro forzado con natural», «campana o extractor», «condensación con no condensación» o «gasóleo», es que no se puede.</a:t>
+              <a:t>N2: La respuesta correcta es la opción C: dos aparatos de no condensación compatibles; esos sí pueden compartir chimenea. Las otras tres son prohibiciones de la norma: no se juntan tiro natural y tiro forzado en el mismo tubo vertical, porque el ventilador de uno revoca al otro; no se conecta una campana ni un extractor a la chimenea del aparato, porque chuparían los humos; y no se mezcla el gas con gasóleo o carbón.</a:t>
+            </a:r>
+          </a:p>
+          <a:p>
+            <a:r>
+              <a:t>N1: ¿El truco?</a:t>
+            </a:r>
+          </a:p>
+          <a:p>
+            <a:r>
+              <a:t>N2: Si en la opción aparece «tiro forzado con natural», «campana o extractor», «condensación con no condensación» o «gasóleo», es que no se puede.</a:t>
             </a:r>
           </a:p>
         </p:txBody>
@@ -2408,7 +2418,7 @@
           </a:p>
           <a:p>
             <a:r>
-              <a:t>N2: Lo da la tabla tres, según la potencia del aparato: a más kilovatios, más humos, y por tanto más diámetro. Para los pequeños, hasta once coma cinco kilovatios, noventa milímetros. Y va subiendo por escalones: ciento diez hasta veintitrés kilovatios, ciento veinticinco hasta treinta coma siete, ciento treinta y nueve hasta treinta y nueve, ciento cincuenta hasta cuarenta y cinco, y ciento setenta y cinco para los más potentes, por encima de cuarenta y cinco kilovatios. La regla de obra: el diámetro nunca por debajo del de la tabla y nunca con reducciones, porque estrechar el tubo ahoga la salida y el aparato revoca. Además, sea cual sea el escalón, la puntuación del conducto tiene que dar al menos más uno.</a:t>
+              <a:t>N2: Presta atención a esta tabla, la tabla tres; relaciona el consumo del aparato con el diámetro interior mínimo del conducto, y la idea es que a más kilovatios, más humos y más diámetro. Te la leo fila a fila. Hasta once coma cinco kilovatios, noventa milímetros. De once coma cinco a veintitrés kilovatios, ciento diez milímetros. De veintitrés a treinta coma siete, ciento veinticinco. De treinta coma siete a treinta y nueve, ciento treinta y nueve. De treinta y nueve a cuarenta y cinco, ciento cincuenta. Y por encima de cuarenta y cinco kilovatios, ciento setenta y cinco milímetros. En todas las filas, además, la puntuación del conducto tiene que dar al menos más uno. La regla de obra: el diámetro nunca por debajo del de la tabla y nunca con reducciones, porque estrechar el tubo ahoga la salida y el aparato revoca.</a:t>
             </a:r>
           </a:p>
         </p:txBody>
